--- a/outputs/submission/DOEF_Competition_Presentation.pptx
+++ b/outputs/submission/DOEF_Competition_Presentation.pptx
@@ -3208,7 +3208,7 @@
                 <a:ea typeface="Arial"/>
                 <a:cs typeface="Arial"/>
               </a:rPr>
-              <a:t>DOEF</a:t>
+              <a:t>智能云储</a:t>
             </a:r>
             <a:endParaRPr sz="4900"/>
           </a:p>
@@ -3251,7 +3251,7 @@
               <a:buNone/>
             </a:pPr>
             <a:r>
-              <a:rPr sz="3400" b="1">
+              <a:rPr sz="2600" b="1">
                 <a:solidFill>
                   <a:srgbClr val="F8FBFF"/>
                 </a:solidFill>
@@ -3259,7 +3259,7 @@
                 <a:ea typeface="Microsoft YaHei"/>
                 <a:cs typeface="Microsoft YaHei"/>
               </a:rPr>
-              <a:t>让负荷预测服务于</a:t>
+              <a:t>基于决策导向预测融合的</a:t>
             </a:r>
             <a:endParaRPr sz="3400"/>
           </a:p>
@@ -3271,7 +3271,7 @@
               <a:buNone/>
             </a:pPr>
             <a:r>
-              <a:rPr sz="3400" b="1">
+              <a:rPr sz="2600" b="1">
                 <a:solidFill>
                   <a:srgbClr val="F8FBFF"/>
                 </a:solidFill>
@@ -3279,7 +3279,7 @@
                 <a:ea typeface="Microsoft YaHei"/>
                 <a:cs typeface="Microsoft YaHei"/>
               </a:rPr>
-              <a:t>储能削峰决策</a:t>
+              <a:t>建筑储能削峰优化系统</a:t>
             </a:r>
             <a:endParaRPr sz="3400"/>
           </a:p>
@@ -4465,7 +4465,7 @@
                 <a:ea typeface="Microsoft YaHei"/>
                 <a:cs typeface="Microsoft YaHei"/>
               </a:rPr>
-              <a:t>智储云控 · DOEF | 8 栋办公建筑仿真实验</a:t>
+              <a:t>智能云储 · DOEF | 8 栋办公建筑仿真实验</a:t>
             </a:r>
             <a:endParaRPr sz="750"/>
           </a:p>
@@ -5883,7 +5883,7 @@
                 <a:ea typeface="Microsoft YaHei"/>
                 <a:cs typeface="Microsoft YaHei"/>
               </a:rPr>
-              <a:t>智储云控 · DOEF | 8 栋办公建筑仿真实验</a:t>
+              <a:t>智能云储 · DOEF | 8 栋办公建筑仿真实验</a:t>
             </a:r>
             <a:endParaRPr sz="750"/>
           </a:p>
@@ -6307,7 +6307,7 @@
                 <a:ea typeface="Microsoft YaHei"/>
                 <a:cs typeface="Microsoft YaHei"/>
               </a:rPr>
-              <a:t>智储云控 · DOEF | 8 栋办公建筑仿真实验</a:t>
+              <a:t>智能云储 · DOEF | 8 栋办公建筑仿真实验</a:t>
             </a:r>
             <a:endParaRPr sz="750"/>
           </a:p>
@@ -7332,7 +7332,7 @@
                 <a:ea typeface="Microsoft YaHei"/>
                 <a:cs typeface="Microsoft YaHei"/>
               </a:rPr>
-              <a:t>智储云控 · DOEF | 8 栋办公建筑仿真实验</a:t>
+              <a:t>智能云储 · DOEF | 8 栋办公建筑仿真实验</a:t>
             </a:r>
             <a:endParaRPr sz="750"/>
           </a:p>
@@ -9446,7 +9446,7 @@
                 <a:ea typeface="Microsoft YaHei"/>
                 <a:cs typeface="Microsoft YaHei"/>
               </a:rPr>
-              <a:t>智储云控 · DOEF | 补充实验与方法说明</a:t>
+              <a:t>智能云储 · DOEF | 补充实验与方法说明</a:t>
             </a:r>
             <a:endParaRPr sz="750"/>
           </a:p>
@@ -10351,7 +10351,7 @@
                 <a:ea typeface="Microsoft YaHei"/>
                 <a:cs typeface="Microsoft YaHei"/>
               </a:rPr>
-              <a:t>智储云控 · DOEF | 补充实验与方法说明</a:t>
+              <a:t>智能云储 · DOEF | 补充实验与方法说明</a:t>
             </a:r>
             <a:endParaRPr sz="750"/>
           </a:p>
@@ -13702,7 +13702,7 @@
                 <a:ea typeface="Microsoft YaHei"/>
                 <a:cs typeface="Microsoft YaHei"/>
               </a:rPr>
-              <a:t>智储云控 · DOEF | 补充实验与方法说明</a:t>
+              <a:t>智能云储 · DOEF | 补充实验与方法说明</a:t>
             </a:r>
             <a:endParaRPr sz="750"/>
           </a:p>
@@ -15322,7 +15322,7 @@
                 <a:ea typeface="Microsoft YaHei"/>
                 <a:cs typeface="Microsoft YaHei"/>
               </a:rPr>
-              <a:t>智储云控 · DOEF | 补充实验与方法说明</a:t>
+              <a:t>智能云储 · DOEF | 补充实验与方法说明</a:t>
             </a:r>
             <a:endParaRPr sz="750"/>
           </a:p>
@@ -19410,7 +19410,7 @@
                 <a:ea typeface="Microsoft YaHei"/>
                 <a:cs typeface="Microsoft YaHei"/>
               </a:rPr>
-              <a:t>智储云控 · DOEF | 补充实验与方法说明</a:t>
+              <a:t>智能云储 · DOEF | 补充实验与方法说明</a:t>
             </a:r>
             <a:endParaRPr sz="750"/>
           </a:p>
@@ -22330,7 +22330,7 @@
                 <a:ea typeface="Microsoft YaHei"/>
                 <a:cs typeface="Microsoft YaHei"/>
               </a:rPr>
-              <a:t>智储云控 · DOEF | 补充实验与方法说明</a:t>
+              <a:t>智能云储 · DOEF | 补充实验与方法说明</a:t>
             </a:r>
             <a:endParaRPr sz="750"/>
           </a:p>
@@ -23270,7 +23270,7 @@
                 <a:ea typeface="Microsoft YaHei"/>
                 <a:cs typeface="Microsoft YaHei"/>
               </a:rPr>
-              <a:t>智储云控 · DOEF | 补充实验与方法说明</a:t>
+              <a:t>智能云储 · DOEF | 补充实验与方法说明</a:t>
             </a:r>
             <a:endParaRPr sz="750"/>
           </a:p>
@@ -24174,7 +24174,7 @@
                 <a:ea typeface="Microsoft YaHei"/>
                 <a:cs typeface="Microsoft YaHei"/>
               </a:rPr>
-              <a:t>智储云控 · DOEF | 8 栋办公建筑仿真实验</a:t>
+              <a:t>智能云储 · DOEF | 8 栋办公建筑仿真实验</a:t>
             </a:r>
             <a:endParaRPr sz="750"/>
           </a:p>
@@ -26907,7 +26907,7 @@
                 <a:ea typeface="Microsoft YaHei"/>
                 <a:cs typeface="Microsoft YaHei"/>
               </a:rPr>
-              <a:t>智储云控 · DOEF | 补充实验与方法说明</a:t>
+              <a:t>智能云储 · DOEF | 补充实验与方法说明</a:t>
             </a:r>
             <a:endParaRPr sz="750"/>
           </a:p>
@@ -28108,7 +28108,7 @@
                 <a:ea typeface="Microsoft YaHei"/>
                 <a:cs typeface="Microsoft YaHei"/>
               </a:rPr>
-              <a:t>智储云控 · DOEF | 补充实验与方法说明</a:t>
+              <a:t>智能云储 · DOEF | 补充实验与方法说明</a:t>
             </a:r>
             <a:endParaRPr sz="750"/>
           </a:p>
@@ -29202,7 +29202,7 @@
                 <a:ea typeface="Microsoft YaHei"/>
                 <a:cs typeface="Microsoft YaHei"/>
               </a:rPr>
-              <a:t>智储云控 · DOEF | 补充实验与方法说明</a:t>
+              <a:t>智能云储 · DOEF | 补充实验与方法说明</a:t>
             </a:r>
             <a:endParaRPr sz="750"/>
           </a:p>
@@ -30366,7 +30366,7 @@
                 <a:ea typeface="Microsoft YaHei"/>
                 <a:cs typeface="Microsoft YaHei"/>
               </a:rPr>
-              <a:t>智储云控 · DOEF | 补充实验与方法说明</a:t>
+              <a:t>智能云储 · DOEF | 补充实验与方法说明</a:t>
             </a:r>
             <a:endParaRPr sz="750"/>
           </a:p>
@@ -31004,7 +31004,7 @@
                 <a:ea typeface="Microsoft YaHei"/>
                 <a:cs typeface="Microsoft YaHei"/>
               </a:rPr>
-              <a:t>智储云控 · DOEF | 8 栋办公建筑仿真实验</a:t>
+              <a:t>智能云储 · DOEF | 8 栋办公建筑仿真实验</a:t>
             </a:r>
             <a:endParaRPr sz="750"/>
           </a:p>
@@ -32406,7 +32406,7 @@
                 <a:ea typeface="Microsoft YaHei"/>
                 <a:cs typeface="Microsoft YaHei"/>
               </a:rPr>
-              <a:t>智储云控 · DOEF | 8 栋办公建筑仿真实验</a:t>
+              <a:t>智能云储 · DOEF | 8 栋办公建筑仿真实验</a:t>
             </a:r>
             <a:endParaRPr sz="750"/>
           </a:p>
@@ -32830,7 +32830,7 @@
                 <a:ea typeface="Microsoft YaHei"/>
                 <a:cs typeface="Microsoft YaHei"/>
               </a:rPr>
-              <a:t>智储云控 · DOEF | 8 栋办公建筑仿真实验</a:t>
+              <a:t>智能云储 · DOEF | 8 栋办公建筑仿真实验</a:t>
             </a:r>
             <a:endParaRPr sz="750"/>
           </a:p>
@@ -33658,7 +33658,7 @@
                 <a:ea typeface="Microsoft YaHei"/>
                 <a:cs typeface="Microsoft YaHei"/>
               </a:rPr>
-              <a:t>智储云控 · DOEF | 8 栋办公建筑仿真实验</a:t>
+              <a:t>智能云储 · DOEF | 8 栋办公建筑仿真实验</a:t>
             </a:r>
             <a:endParaRPr sz="750"/>
           </a:p>
@@ -34688,7 +34688,7 @@
                 <a:ea typeface="Microsoft YaHei"/>
                 <a:cs typeface="Microsoft YaHei"/>
               </a:rPr>
-              <a:t>智储云控 · DOEF | 8 栋办公建筑仿真实验</a:t>
+              <a:t>智能云储 · DOEF | 8 栋办公建筑仿真实验</a:t>
             </a:r>
             <a:endParaRPr sz="750"/>
           </a:p>
@@ -35546,7 +35546,7 @@
                 <a:ea typeface="Microsoft YaHei"/>
                 <a:cs typeface="Microsoft YaHei"/>
               </a:rPr>
-              <a:t>智储云控 · DOEF | 8 栋办公建筑仿真实验</a:t>
+              <a:t>智能云储 · DOEF | 8 栋办公建筑仿真实验</a:t>
             </a:r>
             <a:endParaRPr sz="750"/>
           </a:p>
@@ -36442,7 +36442,7 @@
                 <a:ea typeface="Microsoft YaHei"/>
                 <a:cs typeface="Microsoft YaHei"/>
               </a:rPr>
-              <a:t>智储云控 · DOEF | 8 栋办公建筑仿真实验</a:t>
+              <a:t>智能云储 · DOEF | 8 栋办公建筑仿真实验</a:t>
             </a:r>
             <a:endParaRPr sz="750"/>
           </a:p>

--- a/outputs/submission/DOEF_Competition_Presentation.pptx
+++ b/outputs/submission/DOEF_Competition_Presentation.pptx
@@ -2,35 +2,35 @@
 <file path=ppt/presentation.xml><?xml version="1.0" encoding="utf-8"?>
 <p:presentation xmlns:p="http://schemas.openxmlformats.org/presentationml/2006/main">
   <p:sldMasterIdLst>
-    <p:sldMasterId xmlns:r="http://schemas.openxmlformats.org/officeDocument/2006/relationships" id="2147483648" r:id="Rf4c344cd44c7458f"/>
+    <p:sldMasterId xmlns:r="http://schemas.openxmlformats.org/officeDocument/2006/relationships" id="2147483648" r:id="Rc7e63a78bc8a4e95"/>
   </p:sldMasterIdLst>
   <p:notesMasterIdLst>
-    <p:notesMasterId xmlns:r="http://schemas.openxmlformats.org/officeDocument/2006/relationships" r:id="Rf2d213ae26b14883"/>
+    <p:notesMasterId xmlns:r="http://schemas.openxmlformats.org/officeDocument/2006/relationships" r:id="R407f35f6417c463a"/>
   </p:notesMasterIdLst>
   <p:sldIdLst>
-    <p:sldId xmlns:r="http://schemas.openxmlformats.org/officeDocument/2006/relationships" id="256" r:id="Re1be27c12e634091"/>
-    <p:sldId xmlns:r="http://schemas.openxmlformats.org/officeDocument/2006/relationships" id="257" r:id="R67caaec7a9164004"/>
-    <p:sldId xmlns:r="http://schemas.openxmlformats.org/officeDocument/2006/relationships" id="258" r:id="R9f1cf8e7080e47f0"/>
-    <p:sldId xmlns:r="http://schemas.openxmlformats.org/officeDocument/2006/relationships" id="259" r:id="R5b95b668867b4858"/>
-    <p:sldId xmlns:r="http://schemas.openxmlformats.org/officeDocument/2006/relationships" id="260" r:id="Rd2038bf26a214bfc"/>
-    <p:sldId xmlns:r="http://schemas.openxmlformats.org/officeDocument/2006/relationships" id="261" r:id="Re797665c90754a2b"/>
-    <p:sldId xmlns:r="http://schemas.openxmlformats.org/officeDocument/2006/relationships" id="262" r:id="R4d4aeb2e3ff74973"/>
-    <p:sldId xmlns:r="http://schemas.openxmlformats.org/officeDocument/2006/relationships" id="263" r:id="Rb69fba13045b4710"/>
-    <p:sldId xmlns:r="http://schemas.openxmlformats.org/officeDocument/2006/relationships" id="264" r:id="Re9eed2f8c87946c2"/>
-    <p:sldId xmlns:r="http://schemas.openxmlformats.org/officeDocument/2006/relationships" id="265" r:id="Rf2a3ec76627f42c2"/>
-    <p:sldId xmlns:r="http://schemas.openxmlformats.org/officeDocument/2006/relationships" id="266" r:id="Rffc2094caf1a450c"/>
-    <p:sldId xmlns:r="http://schemas.openxmlformats.org/officeDocument/2006/relationships" id="267" r:id="R6b4167f7a2b54876"/>
-    <p:sldId xmlns:r="http://schemas.openxmlformats.org/officeDocument/2006/relationships" id="268" r:id="R597dccff7cb649c9"/>
-    <p:sldId xmlns:r="http://schemas.openxmlformats.org/officeDocument/2006/relationships" id="269" r:id="R5ea4ba56b1f448ec"/>
-    <p:sldId xmlns:r="http://schemas.openxmlformats.org/officeDocument/2006/relationships" id="270" r:id="R82c338465b4c4273"/>
-    <p:sldId xmlns:r="http://schemas.openxmlformats.org/officeDocument/2006/relationships" id="271" r:id="R1340e550f3584260"/>
-    <p:sldId xmlns:r="http://schemas.openxmlformats.org/officeDocument/2006/relationships" id="272" r:id="R9ec239e49a824c33"/>
-    <p:sldId xmlns:r="http://schemas.openxmlformats.org/officeDocument/2006/relationships" id="273" r:id="Ra5a20ae427c94f9e"/>
-    <p:sldId xmlns:r="http://schemas.openxmlformats.org/officeDocument/2006/relationships" id="274" r:id="R386adf8540f34277"/>
-    <p:sldId xmlns:r="http://schemas.openxmlformats.org/officeDocument/2006/relationships" id="275" r:id="R852c736ced704ceb"/>
-    <p:sldId xmlns:r="http://schemas.openxmlformats.org/officeDocument/2006/relationships" id="276" r:id="R4cee036417f54b49"/>
-    <p:sldId xmlns:r="http://schemas.openxmlformats.org/officeDocument/2006/relationships" id="277" r:id="Rd3f956c34b0a459e"/>
-    <p:sldId xmlns:r="http://schemas.openxmlformats.org/officeDocument/2006/relationships" id="278" r:id="Rcd4c1ef4f9c84d6a"/>
+    <p:sldId xmlns:r="http://schemas.openxmlformats.org/officeDocument/2006/relationships" id="256" r:id="R14f2ac8a15fd461a"/>
+    <p:sldId xmlns:r="http://schemas.openxmlformats.org/officeDocument/2006/relationships" id="257" r:id="R3b424372b2c84681"/>
+    <p:sldId xmlns:r="http://schemas.openxmlformats.org/officeDocument/2006/relationships" id="258" r:id="R726e58d906894aaa"/>
+    <p:sldId xmlns:r="http://schemas.openxmlformats.org/officeDocument/2006/relationships" id="259" r:id="Rbedf812733654419"/>
+    <p:sldId xmlns:r="http://schemas.openxmlformats.org/officeDocument/2006/relationships" id="260" r:id="Re186736ad9b54980"/>
+    <p:sldId xmlns:r="http://schemas.openxmlformats.org/officeDocument/2006/relationships" id="261" r:id="Rb1fdbd4d442c4b74"/>
+    <p:sldId xmlns:r="http://schemas.openxmlformats.org/officeDocument/2006/relationships" id="262" r:id="R6e8c0cfbd6f940e9"/>
+    <p:sldId xmlns:r="http://schemas.openxmlformats.org/officeDocument/2006/relationships" id="263" r:id="R203138c446df4baa"/>
+    <p:sldId xmlns:r="http://schemas.openxmlformats.org/officeDocument/2006/relationships" id="264" r:id="R7d816892e39e4e0e"/>
+    <p:sldId xmlns:r="http://schemas.openxmlformats.org/officeDocument/2006/relationships" id="265" r:id="R1484d64e0975424d"/>
+    <p:sldId xmlns:r="http://schemas.openxmlformats.org/officeDocument/2006/relationships" id="266" r:id="R89c19964e1ed42fd"/>
+    <p:sldId xmlns:r="http://schemas.openxmlformats.org/officeDocument/2006/relationships" id="267" r:id="Rb59b0e4123b3453e"/>
+    <p:sldId xmlns:r="http://schemas.openxmlformats.org/officeDocument/2006/relationships" id="268" r:id="Rd0778e341afb42c4"/>
+    <p:sldId xmlns:r="http://schemas.openxmlformats.org/officeDocument/2006/relationships" id="269" r:id="Rdfc138c20fc64c71"/>
+    <p:sldId xmlns:r="http://schemas.openxmlformats.org/officeDocument/2006/relationships" id="270" r:id="Re878cc053db9448a"/>
+    <p:sldId xmlns:r="http://schemas.openxmlformats.org/officeDocument/2006/relationships" id="271" r:id="R652525d5ec88429b"/>
+    <p:sldId xmlns:r="http://schemas.openxmlformats.org/officeDocument/2006/relationships" id="272" r:id="Rd8bdf987d9f24674"/>
+    <p:sldId xmlns:r="http://schemas.openxmlformats.org/officeDocument/2006/relationships" id="273" r:id="Recc7001e3e9b40b8"/>
+    <p:sldId xmlns:r="http://schemas.openxmlformats.org/officeDocument/2006/relationships" id="274" r:id="R8e4b616665b24906"/>
+    <p:sldId xmlns:r="http://schemas.openxmlformats.org/officeDocument/2006/relationships" id="275" r:id="R3c185500ac6840a0"/>
+    <p:sldId xmlns:r="http://schemas.openxmlformats.org/officeDocument/2006/relationships" id="276" r:id="R583184d7c36348bb"/>
+    <p:sldId xmlns:r="http://schemas.openxmlformats.org/officeDocument/2006/relationships" id="277" r:id="R0e6b0163e2f74592"/>
+    <p:sldId xmlns:r="http://schemas.openxmlformats.org/officeDocument/2006/relationships" id="278" r:id="Rf9ba274a248442b9"/>
   </p:sldIdLst>
   <p:sldSz cx="12192000" cy="6858000"/>
   <p:notesSz cx="6858000" cy="9144000"/>
@@ -575,7 +575,7 @@
           <a:lstStyle xmlns:a="http://schemas.openxmlformats.org/drawingml/2006/main"/>
           <a:p xmlns:a="http://schemas.openxmlformats.org/drawingml/2006/main">
             <a:r>
-              <a:t>把方法翻译成工程工作流：第二天怎么从历史数据走到调度。明确“repeatable workflow ≠ field deployment”，不声称工业实时验证。下一页提炼创新。</a:t>
+              <a:t>当前原型是离线仿真决策支持系统。算法与调度程序已完成离线计算，GUI读取保存的实验结果。演示从开始八建筑巡演，到核对当前建筑参数、观察每日峰值与削峰结果，最后进入八建筑综合比较。播放按钮不重新预测或求解，也不下发控制命令。新增建筑需重新处理数据并独立验证。来源：gui/index.html；gui/app.js；gui/server.py。</a:t>
             </a:r>
             <a:endParaRPr/>
           </a:p>
@@ -717,7 +717,7 @@
           <a:lstStyle xmlns:a="http://schemas.openxmlformats.org/drawingml/2006/main"/>
           <a:p xmlns:a="http://schemas.openxmlformats.org/drawingml/2006/main">
             <a:r>
-              <a:t>只收束，不引入新结果。最后一句：对储能削峰这样的下游任务，评价预测模型时应同时看预测误差和它支持的工程决策。停在这里，进入评委提问。</a:t>
+              <a:t>面向楼宇能源管理与储能评估人员，当前提供离线方案比较。下一阶段先完成数据和时间语义核对，再做只读影子运行，随后开展人工审批试运行，验收通过后才考虑受控自动运行。现场读取实际SOC，并接收功率、告警和执行回执；异常时按设备方案回退并允许人工接管。协议适配、硬件联调及跨季节验证均待实施。3.61%是固定八建筑平均归一化决策后悔值相对改善，不是现场收益承诺。来源：docs/ENGINEERING_INTEGRATION.md；reports/submission/technical_report.md第9节。</a:t>
             </a:r>
             <a:endParaRPr/>
           </a:p>
@@ -1640,7 +1640,7 @@
           <a:lstStyle xmlns:a="http://schemas.openxmlformats.org/drawingml/2006/main"/>
           <a:p xmlns:a="http://schemas.openxmlformats.org/drawingml/2006/main">
             <a:r>
-              <a:t>让 AI 与电气评委建立共同心智模型：历史负荷→次日预测→受约束电池调度→真实削峰结果。概念图不是实验结果。过渡：既然下游目标不同，模型选择标准也要重新对齐。</a:t>
+              <a:t>假设明天下午办公楼会出现用电高峰，而电池容量有限，电池应该几点放电？如果预测把峰值判断得过早，电池就可能在真正峰值到来前耗尽。图中智能电表提供历史负荷，DOEF形成预测，优化器生成充放电计划，未来由储能设备执行，再评价建筑电网侧峰值。实际负荷和设备回执构成评价反馈。当前完成的是离线仿真，电表、EMS及PCS/BMS尚未接入；图中现场环节均为目标设计。当前预测是逐小时提前24小时，再按目标日组装；真实日前服务需要独立验证统一截止时间与发布时间。来源：src/features/load_features.py；src/battery；reports/submission/technical_report.md第1、9节。</a:t>
             </a:r>
             <a:endParaRPr/>
           </a:p>
@@ -2143,7 +2143,7 @@
           <p:cNvPr id="2" name="Shape 0">
             <a:extLst xmlns:a="http://schemas.openxmlformats.org/drawingml/2006/main">
               <a:ext uri="{FF2B5EF4-FFF2-40B4-BE49-F238E27FC236}">
-                <a16:creationId xmlns:a16="http://schemas.microsoft.com/office/drawing/2014/main" id="{4FB9D9EA-864C-4A99-928A-18725741C249}"/>
+                <a16:creationId xmlns:a16="http://schemas.microsoft.com/office/drawing/2014/main" id="{BA540B39-5907-481D-98B2-D1AC53FEDF44}"/>
               </a:ext>
             </a:extLst>
           </p:cNvPr>
@@ -2176,7 +2176,7 @@
           <p:cNvPr id="25" name="Slide Number Placeholder 0">
             <a:extLst xmlns:a="http://schemas.openxmlformats.org/drawingml/2006/main">
               <a:ext uri="{FF2B5EF4-FFF2-40B4-BE49-F238E27FC236}">
-                <a16:creationId xmlns:a16="http://schemas.microsoft.com/office/drawing/2014/main" id="{7B79E5F1-DDDF-4A89-A457-8B728CB80EDE}"/>
+                <a16:creationId xmlns:a16="http://schemas.microsoft.com/office/drawing/2014/main" id="{90EF1822-077D-46D6-9D5F-7569A4CACFF5}"/>
               </a:ext>
             </a:extLst>
           </p:cNvPr>
@@ -2252,7 +2252,7 @@
           <p:cNvPr id="2" name="Shape 0">
             <a:extLst xmlns:a="http://schemas.openxmlformats.org/drawingml/2006/main">
               <a:ext uri="{FF2B5EF4-FFF2-40B4-BE49-F238E27FC236}">
-                <a16:creationId xmlns:a16="http://schemas.microsoft.com/office/drawing/2014/main" id="{3B36E461-7D0D-44AA-BFD7-53C470C05F94}"/>
+                <a16:creationId xmlns:a16="http://schemas.microsoft.com/office/drawing/2014/main" id="{C948727A-F3AC-4057-95C6-92848AE62D4E}"/>
               </a:ext>
             </a:extLst>
           </p:cNvPr>
@@ -2285,7 +2285,7 @@
           <p:cNvPr id="25" name="Slide Number Placeholder 0">
             <a:extLst xmlns:a="http://schemas.openxmlformats.org/drawingml/2006/main">
               <a:ext uri="{FF2B5EF4-FFF2-40B4-BE49-F238E27FC236}">
-                <a16:creationId xmlns:a16="http://schemas.microsoft.com/office/drawing/2014/main" id="{23A53074-E402-41B6-BC61-CDAFAA5F2CC5}"/>
+                <a16:creationId xmlns:a16="http://schemas.microsoft.com/office/drawing/2014/main" id="{7866D630-2BC0-4A1C-ACB6-CA34947EE344}"/>
               </a:ext>
             </a:extLst>
           </p:cNvPr>
@@ -2361,7 +2361,7 @@
           <p:cNvPr id="2" name="Shape 0">
             <a:extLst xmlns:a="http://schemas.openxmlformats.org/drawingml/2006/main">
               <a:ext uri="{FF2B5EF4-FFF2-40B4-BE49-F238E27FC236}">
-                <a16:creationId xmlns:a16="http://schemas.microsoft.com/office/drawing/2014/main" id="{3EEAC747-D4C3-4947-B821-DDB7DBC9022E}"/>
+                <a16:creationId xmlns:a16="http://schemas.microsoft.com/office/drawing/2014/main" id="{787AD01A-BB50-4E16-81A8-A4C2A4DE7B2B}"/>
               </a:ext>
             </a:extLst>
           </p:cNvPr>
@@ -2394,7 +2394,7 @@
           <p:cNvPr id="25" name="Slide Number Placeholder 0">
             <a:extLst xmlns:a="http://schemas.openxmlformats.org/drawingml/2006/main">
               <a:ext uri="{FF2B5EF4-FFF2-40B4-BE49-F238E27FC236}">
-                <a16:creationId xmlns:a16="http://schemas.microsoft.com/office/drawing/2014/main" id="{D5658803-58B6-4FA6-9C03-1C39F4EADCEB}"/>
+                <a16:creationId xmlns:a16="http://schemas.microsoft.com/office/drawing/2014/main" id="{3A045B2B-FA82-40D7-B298-8B58DE5E222C}"/>
               </a:ext>
             </a:extLst>
           </p:cNvPr>
@@ -2463,7 +2463,7 @@
           <p:cNvPr id="25" name="Slide Number Placeholder 0">
             <a:extLst xmlns:a="http://schemas.openxmlformats.org/drawingml/2006/main">
               <a:ext uri="{FF2B5EF4-FFF2-40B4-BE49-F238E27FC236}">
-                <a16:creationId xmlns:a16="http://schemas.microsoft.com/office/drawing/2014/main" id="{6E12EE18-BE5C-4370-9786-C518151AD811}"/>
+                <a16:creationId xmlns:a16="http://schemas.microsoft.com/office/drawing/2014/main" id="{1BA15602-B7E9-43F8-A61A-5B2C8DD5B602}"/>
               </a:ext>
             </a:extLst>
           </p:cNvPr>
@@ -2514,10 +2514,10 @@
   </p:cSld>
   <p:clrMap bg1="lt1" tx1="dk1" bg2="lt2" tx2="dk2" accent1="accent1" accent2="accent2" accent3="accent3" accent4="accent4" accent5="accent5" accent6="accent6" hlink="hlink" folHlink="folHlink"/>
   <p:sldLayoutIdLst>
-    <p:sldLayoutId xmlns:r="http://schemas.openxmlformats.org/officeDocument/2006/relationships" id="2147483649" r:id="R4453ca66cb6a4e3f"/>
-    <p:sldLayoutId xmlns:r="http://schemas.openxmlformats.org/officeDocument/2006/relationships" id="2147483650" r:id="Ra46b45107feb4f0e"/>
-    <p:sldLayoutId xmlns:r="http://schemas.openxmlformats.org/officeDocument/2006/relationships" id="2147483651" r:id="R33a44b799ab64223"/>
-    <p:sldLayoutId xmlns:r="http://schemas.openxmlformats.org/officeDocument/2006/relationships" id="2147483652" r:id="Rbf91f47ac6704f73"/>
+    <p:sldLayoutId xmlns:r="http://schemas.openxmlformats.org/officeDocument/2006/relationships" id="2147483649" r:id="R0955b2c0ed20472f"/>
+    <p:sldLayoutId xmlns:r="http://schemas.openxmlformats.org/officeDocument/2006/relationships" id="2147483650" r:id="R1a5f686417354d1d"/>
+    <p:sldLayoutId xmlns:r="http://schemas.openxmlformats.org/officeDocument/2006/relationships" id="2147483651" r:id="R50c49f3e2710416b"/>
+    <p:sldLayoutId xmlns:r="http://schemas.openxmlformats.org/officeDocument/2006/relationships" id="2147483652" r:id="Reb2d6104a2704fb6"/>
   </p:sldLayoutIdLst>
   <p:hf sldNum="0" hdr="0" ftr="0" dt="0"/>
   <p:txStyles>
@@ -3081,7 +3081,7 @@
           <p:cNvPr id="2" name="Text 0">
             <a:extLst xmlns:a="http://schemas.openxmlformats.org/drawingml/2006/main">
               <a:ext uri="{FF2B5EF4-FFF2-40B4-BE49-F238E27FC236}">
-                <a16:creationId xmlns:a16="http://schemas.microsoft.com/office/drawing/2014/main" id="{5A6EFD40-8E70-49B2-ABB0-726D9CB405A3}"/>
+                <a16:creationId xmlns:a16="http://schemas.microsoft.com/office/drawing/2014/main" id="{DE00A512-1F0E-43E9-87D0-932FE50C0355}"/>
               </a:ext>
             </a:extLst>
           </p:cNvPr>
@@ -3127,7 +3127,7 @@
           <p:cNvPr id="3" name="Text 1">
             <a:extLst xmlns:a="http://schemas.openxmlformats.org/drawingml/2006/main">
               <a:ext uri="{FF2B5EF4-FFF2-40B4-BE49-F238E27FC236}">
-                <a16:creationId xmlns:a16="http://schemas.microsoft.com/office/drawing/2014/main" id="{F691058F-CEF3-4D67-B455-1B64ADE59445}"/>
+                <a16:creationId xmlns:a16="http://schemas.microsoft.com/office/drawing/2014/main" id="{D433CFA7-206F-4525-A933-C82DBF258B6E}"/>
               </a:ext>
             </a:extLst>
           </p:cNvPr>
@@ -3173,7 +3173,7 @@
           <p:cNvPr id="4" name="Text 2">
             <a:extLst xmlns:a="http://schemas.openxmlformats.org/drawingml/2006/main">
               <a:ext uri="{FF2B5EF4-FFF2-40B4-BE49-F238E27FC236}">
-                <a16:creationId xmlns:a16="http://schemas.microsoft.com/office/drawing/2014/main" id="{0A03F2CC-D0AC-4664-B8CC-254976B5AEA4}"/>
+                <a16:creationId xmlns:a16="http://schemas.microsoft.com/office/drawing/2014/main" id="{01095A9C-C6BD-4577-98D2-954B181E58E8}"/>
               </a:ext>
             </a:extLst>
           </p:cNvPr>
@@ -3208,7 +3208,7 @@
                 <a:ea typeface="Arial"/>
                 <a:cs typeface="Arial"/>
               </a:rPr>
-              <a:t>智能云储</a:t>
+              <a:t>智储云控</a:t>
             </a:r>
             <a:endParaRPr sz="4900"/>
           </a:p>
@@ -3219,7 +3219,7 @@
           <p:cNvPr id="5" name="Text 3">
             <a:extLst xmlns:a="http://schemas.openxmlformats.org/drawingml/2006/main">
               <a:ext uri="{FF2B5EF4-FFF2-40B4-BE49-F238E27FC236}">
-                <a16:creationId xmlns:a16="http://schemas.microsoft.com/office/drawing/2014/main" id="{9E6AF5CE-CCED-4FCB-A9F1-6BDB1FE6390B}"/>
+                <a16:creationId xmlns:a16="http://schemas.microsoft.com/office/drawing/2014/main" id="{13FD044C-111E-4015-BB51-81D140E2EB26}"/>
               </a:ext>
             </a:extLst>
           </p:cNvPr>
@@ -3290,7 +3290,7 @@
           <p:cNvPr id="6" name="Text 4">
             <a:extLst xmlns:a="http://schemas.openxmlformats.org/drawingml/2006/main">
               <a:ext uri="{FF2B5EF4-FFF2-40B4-BE49-F238E27FC236}">
-                <a16:creationId xmlns:a16="http://schemas.microsoft.com/office/drawing/2014/main" id="{EBB4F8A1-9747-48C2-B066-DEE5BE61532F}"/>
+                <a16:creationId xmlns:a16="http://schemas.microsoft.com/office/drawing/2014/main" id="{EE9014C7-4A8C-469B-93BE-18E965CA12AD}"/>
               </a:ext>
             </a:extLst>
           </p:cNvPr>
@@ -3336,7 +3336,7 @@
           <p:cNvPr id="7" name="Shape 5">
             <a:extLst xmlns:a="http://schemas.openxmlformats.org/drawingml/2006/main">
               <a:ext uri="{FF2B5EF4-FFF2-40B4-BE49-F238E27FC236}">
-                <a16:creationId xmlns:a16="http://schemas.microsoft.com/office/drawing/2014/main" id="{55D26B53-E085-455A-8DE9-87F3F58A6169}"/>
+                <a16:creationId xmlns:a16="http://schemas.microsoft.com/office/drawing/2014/main" id="{3C392DB2-6E08-4C80-ADB6-04F52E0BA6BC}"/>
               </a:ext>
             </a:extLst>
           </p:cNvPr>
@@ -3373,7 +3373,7 @@
           <p:cNvPr id="8" name="Shape 6">
             <a:extLst xmlns:a="http://schemas.openxmlformats.org/drawingml/2006/main">
               <a:ext uri="{FF2B5EF4-FFF2-40B4-BE49-F238E27FC236}">
-                <a16:creationId xmlns:a16="http://schemas.microsoft.com/office/drawing/2014/main" id="{AE563D24-B827-4C1C-8F71-DFC915C5C7D8}"/>
+                <a16:creationId xmlns:a16="http://schemas.microsoft.com/office/drawing/2014/main" id="{42476323-09F9-498E-B012-3FC98C9C16E0}"/>
               </a:ext>
             </a:extLst>
           </p:cNvPr>
@@ -3408,7 +3408,7 @@
           <p:cNvPr id="9" name="Text 7">
             <a:extLst xmlns:a="http://schemas.openxmlformats.org/drawingml/2006/main">
               <a:ext uri="{FF2B5EF4-FFF2-40B4-BE49-F238E27FC236}">
-                <a16:creationId xmlns:a16="http://schemas.microsoft.com/office/drawing/2014/main" id="{73366387-D910-465E-AA2D-B442F5475E30}"/>
+                <a16:creationId xmlns:a16="http://schemas.microsoft.com/office/drawing/2014/main" id="{E7C9179C-E44F-42FE-BABB-0039EB60D89B}"/>
               </a:ext>
             </a:extLst>
           </p:cNvPr>
@@ -3454,7 +3454,7 @@
           <p:cNvPr id="10" name="Text 8">
             <a:extLst xmlns:a="http://schemas.openxmlformats.org/drawingml/2006/main">
               <a:ext uri="{FF2B5EF4-FFF2-40B4-BE49-F238E27FC236}">
-                <a16:creationId xmlns:a16="http://schemas.microsoft.com/office/drawing/2014/main" id="{C4C4511B-2E24-48F8-83F1-CF81E2BD503B}"/>
+                <a16:creationId xmlns:a16="http://schemas.microsoft.com/office/drawing/2014/main" id="{E9B50FE5-39FA-4F51-A855-F9E890C13B7B}"/>
               </a:ext>
             </a:extLst>
           </p:cNvPr>
@@ -3500,7 +3500,7 @@
           <p:cNvPr id="11" name="Shape 9">
             <a:extLst xmlns:a="http://schemas.openxmlformats.org/drawingml/2006/main">
               <a:ext uri="{FF2B5EF4-FFF2-40B4-BE49-F238E27FC236}">
-                <a16:creationId xmlns:a16="http://schemas.microsoft.com/office/drawing/2014/main" id="{2B86E36C-841A-4D77-A604-396374311238}"/>
+                <a16:creationId xmlns:a16="http://schemas.microsoft.com/office/drawing/2014/main" id="{B1936689-7E28-4F6F-BF0B-92EC46E6D7D4}"/>
               </a:ext>
             </a:extLst>
           </p:cNvPr>
@@ -3535,7 +3535,7 @@
           <p:cNvPr id="12" name="Text 10">
             <a:extLst xmlns:a="http://schemas.openxmlformats.org/drawingml/2006/main">
               <a:ext uri="{FF2B5EF4-FFF2-40B4-BE49-F238E27FC236}">
-                <a16:creationId xmlns:a16="http://schemas.microsoft.com/office/drawing/2014/main" id="{861774F6-592A-4646-8A04-02011650A324}"/>
+                <a16:creationId xmlns:a16="http://schemas.microsoft.com/office/drawing/2014/main" id="{98883E63-213B-4236-AFE6-92091BE0C6DC}"/>
               </a:ext>
             </a:extLst>
           </p:cNvPr>
@@ -3581,7 +3581,7 @@
           <p:cNvPr id="13" name="Text 11">
             <a:extLst xmlns:a="http://schemas.openxmlformats.org/drawingml/2006/main">
               <a:ext uri="{FF2B5EF4-FFF2-40B4-BE49-F238E27FC236}">
-                <a16:creationId xmlns:a16="http://schemas.microsoft.com/office/drawing/2014/main" id="{863BF3E9-5E0A-4F65-9892-E9BF94E31734}"/>
+                <a16:creationId xmlns:a16="http://schemas.microsoft.com/office/drawing/2014/main" id="{E2AD05A6-CFC4-4889-B8AA-196052D0579D}"/>
               </a:ext>
             </a:extLst>
           </p:cNvPr>
@@ -3627,7 +3627,7 @@
           <p:cNvPr id="14" name="Shape 12">
             <a:extLst xmlns:a="http://schemas.openxmlformats.org/drawingml/2006/main">
               <a:ext uri="{FF2B5EF4-FFF2-40B4-BE49-F238E27FC236}">
-                <a16:creationId xmlns:a16="http://schemas.microsoft.com/office/drawing/2014/main" id="{2569FAD6-5478-4E1A-9A28-4B3B068E4124}"/>
+                <a16:creationId xmlns:a16="http://schemas.microsoft.com/office/drawing/2014/main" id="{2BCEACC5-F235-4CFF-BF42-CCA2F669D8B8}"/>
               </a:ext>
             </a:extLst>
           </p:cNvPr>
@@ -3662,7 +3662,7 @@
           <p:cNvPr id="15" name="Text 13">
             <a:extLst xmlns:a="http://schemas.openxmlformats.org/drawingml/2006/main">
               <a:ext uri="{FF2B5EF4-FFF2-40B4-BE49-F238E27FC236}">
-                <a16:creationId xmlns:a16="http://schemas.microsoft.com/office/drawing/2014/main" id="{B69EA7FD-446F-471E-8DBA-46D28E43D419}"/>
+                <a16:creationId xmlns:a16="http://schemas.microsoft.com/office/drawing/2014/main" id="{11AAAE32-3F45-4168-A73B-1E5E268C3EA8}"/>
               </a:ext>
             </a:extLst>
           </p:cNvPr>
@@ -3708,7 +3708,7 @@
           <p:cNvPr id="16" name="Text 14">
             <a:extLst xmlns:a="http://schemas.openxmlformats.org/drawingml/2006/main">
               <a:ext uri="{FF2B5EF4-FFF2-40B4-BE49-F238E27FC236}">
-                <a16:creationId xmlns:a16="http://schemas.microsoft.com/office/drawing/2014/main" id="{6711D891-C089-4F9C-A9AC-32CC0EF29527}"/>
+                <a16:creationId xmlns:a16="http://schemas.microsoft.com/office/drawing/2014/main" id="{370FCACF-FFA2-4F68-BA36-2D86D2BF5C3A}"/>
               </a:ext>
             </a:extLst>
           </p:cNvPr>
@@ -3754,7 +3754,7 @@
           <p:cNvPr id="17" name="Shape 15">
             <a:extLst xmlns:a="http://schemas.openxmlformats.org/drawingml/2006/main">
               <a:ext uri="{FF2B5EF4-FFF2-40B4-BE49-F238E27FC236}">
-                <a16:creationId xmlns:a16="http://schemas.microsoft.com/office/drawing/2014/main" id="{42EA64E8-8DDC-46D1-A12C-5E90772C065E}"/>
+                <a16:creationId xmlns:a16="http://schemas.microsoft.com/office/drawing/2014/main" id="{7C1814BA-0112-4B65-BB95-83449244F1B0}"/>
               </a:ext>
             </a:extLst>
           </p:cNvPr>
@@ -3787,7 +3787,7 @@
           <p:cNvPr id="18" name="Shape 16">
             <a:extLst xmlns:a="http://schemas.openxmlformats.org/drawingml/2006/main">
               <a:ext uri="{FF2B5EF4-FFF2-40B4-BE49-F238E27FC236}">
-                <a16:creationId xmlns:a16="http://schemas.microsoft.com/office/drawing/2014/main" id="{C1CBD242-999E-47C0-92D1-9AAC414FFE31}"/>
+                <a16:creationId xmlns:a16="http://schemas.microsoft.com/office/drawing/2014/main" id="{D27E932A-3732-4F9C-88B4-994ADB38D5AB}"/>
               </a:ext>
             </a:extLst>
           </p:cNvPr>
@@ -3820,7 +3820,7 @@
           <p:cNvPr id="19" name="Shape 17">
             <a:extLst xmlns:a="http://schemas.openxmlformats.org/drawingml/2006/main">
               <a:ext uri="{FF2B5EF4-FFF2-40B4-BE49-F238E27FC236}">
-                <a16:creationId xmlns:a16="http://schemas.microsoft.com/office/drawing/2014/main" id="{3DF9D45D-17BA-4349-A54E-1F7B23C9A835}"/>
+                <a16:creationId xmlns:a16="http://schemas.microsoft.com/office/drawing/2014/main" id="{62789F15-C5DC-4F7E-ADD2-FC715BD4A23A}"/>
               </a:ext>
             </a:extLst>
           </p:cNvPr>
@@ -3853,7 +3853,7 @@
           <p:cNvPr id="20" name="Shape 18">
             <a:extLst xmlns:a="http://schemas.openxmlformats.org/drawingml/2006/main">
               <a:ext uri="{FF2B5EF4-FFF2-40B4-BE49-F238E27FC236}">
-                <a16:creationId xmlns:a16="http://schemas.microsoft.com/office/drawing/2014/main" id="{F93283F8-DF2E-4CB6-8092-8B1D3A88BAA8}"/>
+                <a16:creationId xmlns:a16="http://schemas.microsoft.com/office/drawing/2014/main" id="{A7BA70A4-E38B-45FF-A902-7D9610468BB0}"/>
               </a:ext>
             </a:extLst>
           </p:cNvPr>
@@ -3886,7 +3886,7 @@
           <p:cNvPr id="21" name="Shape 19">
             <a:extLst xmlns:a="http://schemas.openxmlformats.org/drawingml/2006/main">
               <a:ext uri="{FF2B5EF4-FFF2-40B4-BE49-F238E27FC236}">
-                <a16:creationId xmlns:a16="http://schemas.microsoft.com/office/drawing/2014/main" id="{7BE64B93-9C8B-476B-99B0-6C8E5993ADF9}"/>
+                <a16:creationId xmlns:a16="http://schemas.microsoft.com/office/drawing/2014/main" id="{AA79E401-E889-411D-A086-9794F22F4714}"/>
               </a:ext>
             </a:extLst>
           </p:cNvPr>
@@ -3919,7 +3919,7 @@
           <p:cNvPr id="22" name="Shape 20">
             <a:extLst xmlns:a="http://schemas.openxmlformats.org/drawingml/2006/main">
               <a:ext uri="{FF2B5EF4-FFF2-40B4-BE49-F238E27FC236}">
-                <a16:creationId xmlns:a16="http://schemas.microsoft.com/office/drawing/2014/main" id="{8D287D7F-0B6B-49DD-BF6C-535491C100B2}"/>
+                <a16:creationId xmlns:a16="http://schemas.microsoft.com/office/drawing/2014/main" id="{5070E66B-F87F-4531-AF54-E9E695311010}"/>
               </a:ext>
             </a:extLst>
           </p:cNvPr>
@@ -3952,7 +3952,7 @@
           <p:cNvPr id="23" name="Shape 21">
             <a:extLst xmlns:a="http://schemas.openxmlformats.org/drawingml/2006/main">
               <a:ext uri="{FF2B5EF4-FFF2-40B4-BE49-F238E27FC236}">
-                <a16:creationId xmlns:a16="http://schemas.microsoft.com/office/drawing/2014/main" id="{0365B8B7-EEC2-47F8-B101-52528F1E5256}"/>
+                <a16:creationId xmlns:a16="http://schemas.microsoft.com/office/drawing/2014/main" id="{2AC7574A-81AB-4286-8128-F1991205CD52}"/>
               </a:ext>
             </a:extLst>
           </p:cNvPr>
@@ -3985,7 +3985,7 @@
           <p:cNvPr id="24" name="Shape 22">
             <a:extLst xmlns:a="http://schemas.openxmlformats.org/drawingml/2006/main">
               <a:ext uri="{FF2B5EF4-FFF2-40B4-BE49-F238E27FC236}">
-                <a16:creationId xmlns:a16="http://schemas.microsoft.com/office/drawing/2014/main" id="{03090268-9705-42FB-AD38-217F6E6A8CAC}"/>
+                <a16:creationId xmlns:a16="http://schemas.microsoft.com/office/drawing/2014/main" id="{4E3ABF21-17A3-4D5B-BBB4-282AAAB9856B}"/>
               </a:ext>
             </a:extLst>
           </p:cNvPr>
@@ -4018,7 +4018,7 @@
           <p:cNvPr id="25" name="Shape 23">
             <a:extLst xmlns:a="http://schemas.openxmlformats.org/drawingml/2006/main">
               <a:ext uri="{FF2B5EF4-FFF2-40B4-BE49-F238E27FC236}">
-                <a16:creationId xmlns:a16="http://schemas.microsoft.com/office/drawing/2014/main" id="{34A16D02-E3E3-4527-A88B-EA400601D69B}"/>
+                <a16:creationId xmlns:a16="http://schemas.microsoft.com/office/drawing/2014/main" id="{D1FCE62B-2F6D-4027-8E5C-C8C8D8D23EDC}"/>
               </a:ext>
             </a:extLst>
           </p:cNvPr>
@@ -4051,7 +4051,7 @@
           <p:cNvPr id="26" name="Shape 24">
             <a:extLst xmlns:a="http://schemas.openxmlformats.org/drawingml/2006/main">
               <a:ext uri="{FF2B5EF4-FFF2-40B4-BE49-F238E27FC236}">
-                <a16:creationId xmlns:a16="http://schemas.microsoft.com/office/drawing/2014/main" id="{2F6B6E3B-16D9-4F62-9ACF-F1D4B1E1BD36}"/>
+                <a16:creationId xmlns:a16="http://schemas.microsoft.com/office/drawing/2014/main" id="{43E476F7-609F-4819-91C8-06BEB872A27D}"/>
               </a:ext>
             </a:extLst>
           </p:cNvPr>
@@ -4084,7 +4084,7 @@
           <p:cNvPr id="27" name="Shape 25">
             <a:extLst xmlns:a="http://schemas.openxmlformats.org/drawingml/2006/main">
               <a:ext uri="{FF2B5EF4-FFF2-40B4-BE49-F238E27FC236}">
-                <a16:creationId xmlns:a16="http://schemas.microsoft.com/office/drawing/2014/main" id="{83E9BF65-2C76-48C5-AEC0-624060796BC4}"/>
+                <a16:creationId xmlns:a16="http://schemas.microsoft.com/office/drawing/2014/main" id="{266A7105-1ADC-4B84-A20A-794F40C8005E}"/>
               </a:ext>
             </a:extLst>
           </p:cNvPr>
@@ -4117,7 +4117,7 @@
           <p:cNvPr id="28" name="Shape 26">
             <a:extLst xmlns:a="http://schemas.openxmlformats.org/drawingml/2006/main">
               <a:ext uri="{FF2B5EF4-FFF2-40B4-BE49-F238E27FC236}">
-                <a16:creationId xmlns:a16="http://schemas.microsoft.com/office/drawing/2014/main" id="{0C7F379F-090A-46E9-9A52-383C5C3DB230}"/>
+                <a16:creationId xmlns:a16="http://schemas.microsoft.com/office/drawing/2014/main" id="{3D3103DD-24B9-409C-A32F-3D4374883897}"/>
               </a:ext>
             </a:extLst>
           </p:cNvPr>
@@ -4150,7 +4150,7 @@
           <p:cNvPr id="29" name="Shape 27">
             <a:extLst xmlns:a="http://schemas.openxmlformats.org/drawingml/2006/main">
               <a:ext uri="{FF2B5EF4-FFF2-40B4-BE49-F238E27FC236}">
-                <a16:creationId xmlns:a16="http://schemas.microsoft.com/office/drawing/2014/main" id="{CD41E140-5D88-4D1B-A245-D60DDDC4FC19}"/>
+                <a16:creationId xmlns:a16="http://schemas.microsoft.com/office/drawing/2014/main" id="{15A3605F-494D-4D8D-B4AD-3087AEEA6920}"/>
               </a:ext>
             </a:extLst>
           </p:cNvPr>
@@ -4183,7 +4183,7 @@
           <p:cNvPr id="30" name="Shape 28">
             <a:extLst xmlns:a="http://schemas.openxmlformats.org/drawingml/2006/main">
               <a:ext uri="{FF2B5EF4-FFF2-40B4-BE49-F238E27FC236}">
-                <a16:creationId xmlns:a16="http://schemas.microsoft.com/office/drawing/2014/main" id="{9C543DD4-D3F0-4EDA-92F7-CC03310EE063}"/>
+                <a16:creationId xmlns:a16="http://schemas.microsoft.com/office/drawing/2014/main" id="{87C7D056-FFB2-4734-AB27-43501B5A01E1}"/>
               </a:ext>
             </a:extLst>
           </p:cNvPr>
@@ -4216,7 +4216,7 @@
           <p:cNvPr id="31" name="Shape 29">
             <a:extLst xmlns:a="http://schemas.openxmlformats.org/drawingml/2006/main">
               <a:ext uri="{FF2B5EF4-FFF2-40B4-BE49-F238E27FC236}">
-                <a16:creationId xmlns:a16="http://schemas.microsoft.com/office/drawing/2014/main" id="{ED1EBBCE-CDB7-4730-AC21-975A148599FD}"/>
+                <a16:creationId xmlns:a16="http://schemas.microsoft.com/office/drawing/2014/main" id="{9B088919-50C8-43B1-9B7C-A41DD46BED3F}"/>
               </a:ext>
             </a:extLst>
           </p:cNvPr>
@@ -4249,7 +4249,7 @@
           <p:cNvPr id="32" name="Shape 30">
             <a:extLst xmlns:a="http://schemas.openxmlformats.org/drawingml/2006/main">
               <a:ext uri="{FF2B5EF4-FFF2-40B4-BE49-F238E27FC236}">
-                <a16:creationId xmlns:a16="http://schemas.microsoft.com/office/drawing/2014/main" id="{2E686F9B-55A5-4232-BFC8-A8BA57C27F4F}"/>
+                <a16:creationId xmlns:a16="http://schemas.microsoft.com/office/drawing/2014/main" id="{6F81D96B-E9C7-4D41-88A7-369512506064}"/>
               </a:ext>
             </a:extLst>
           </p:cNvPr>
@@ -4286,7 +4286,7 @@
           <p:cNvPr id="33" name="Text 31">
             <a:extLst xmlns:a="http://schemas.openxmlformats.org/drawingml/2006/main">
               <a:ext uri="{FF2B5EF4-FFF2-40B4-BE49-F238E27FC236}">
-                <a16:creationId xmlns:a16="http://schemas.microsoft.com/office/drawing/2014/main" id="{10F7A890-1BF4-4416-8891-02CAD29EB42D}"/>
+                <a16:creationId xmlns:a16="http://schemas.microsoft.com/office/drawing/2014/main" id="{5B7B179D-A856-4AE5-962A-5F6D37136AEA}"/>
               </a:ext>
             </a:extLst>
           </p:cNvPr>
@@ -4334,7 +4334,7 @@
           <p:cNvPr id="34" name="Text 32">
             <a:extLst xmlns:a="http://schemas.openxmlformats.org/drawingml/2006/main">
               <a:ext uri="{FF2B5EF4-FFF2-40B4-BE49-F238E27FC236}">
-                <a16:creationId xmlns:a16="http://schemas.microsoft.com/office/drawing/2014/main" id="{B1F5F3A2-016F-4B04-9F1D-699B376378DD}"/>
+                <a16:creationId xmlns:a16="http://schemas.microsoft.com/office/drawing/2014/main" id="{5C91C8AA-3233-4ADC-8BBB-18A5D7CF51FC}"/>
               </a:ext>
             </a:extLst>
           </p:cNvPr>
@@ -4382,7 +4382,7 @@
           <p:cNvPr id="35" name="Text 33">
             <a:extLst xmlns:a="http://schemas.openxmlformats.org/drawingml/2006/main">
               <a:ext uri="{FF2B5EF4-FFF2-40B4-BE49-F238E27FC236}">
-                <a16:creationId xmlns:a16="http://schemas.microsoft.com/office/drawing/2014/main" id="{CD6C8E8E-40EA-4C6E-9885-88EC7D5CF148}"/>
+                <a16:creationId xmlns:a16="http://schemas.microsoft.com/office/drawing/2014/main" id="{BBCE7FFA-3345-4083-8872-EAB8A78AB5C2}"/>
               </a:ext>
             </a:extLst>
           </p:cNvPr>
@@ -4428,7 +4428,7 @@
           <p:cNvPr id="36" name="Text 34">
             <a:extLst xmlns:a="http://schemas.openxmlformats.org/drawingml/2006/main">
               <a:ext uri="{FF2B5EF4-FFF2-40B4-BE49-F238E27FC236}">
-                <a16:creationId xmlns:a16="http://schemas.microsoft.com/office/drawing/2014/main" id="{69ECE448-F616-43AD-BB4E-850F84E72109}"/>
+                <a16:creationId xmlns:a16="http://schemas.microsoft.com/office/drawing/2014/main" id="{C2523EED-7F12-414D-A67D-E3877BA52CE9}"/>
               </a:ext>
             </a:extLst>
           </p:cNvPr>
@@ -4476,7 +4476,7 @@
           <p:cNvPr id="37" name="Slide Number Placeholder 0">
             <a:extLst xmlns:a="http://schemas.openxmlformats.org/drawingml/2006/main">
               <a:ext uri="{FF2B5EF4-FFF2-40B4-BE49-F238E27FC236}">
-                <a16:creationId xmlns:a16="http://schemas.microsoft.com/office/drawing/2014/main" id="{0B00BD13-E810-448E-B36D-8355B232E45C}"/>
+                <a16:creationId xmlns:a16="http://schemas.microsoft.com/office/drawing/2014/main" id="{53AFD922-7D87-4AFF-94DC-812888BCFCEF}"/>
               </a:ext>
             </a:extLst>
           </p:cNvPr>
@@ -4526,7 +4526,7 @@
     </p:spTree>
     <p:extLst>
       <p:ext uri="{BB962C8B-B14F-4D97-AF65-F5344CB8AC3E}">
-        <p14:creationId xmlns:p14="http://schemas.microsoft.com/office/powerpoint/2010/main" val="1742747360"/>
+        <p14:creationId xmlns:p14="http://schemas.microsoft.com/office/powerpoint/2010/main" val="896075504"/>
       </p:ext>
     </p:extLst>
   </p:cSld>
@@ -4550,7 +4550,7 @@
           <p:cNvPr id="2" name="Text 0">
             <a:extLst xmlns:a="http://schemas.openxmlformats.org/drawingml/2006/main">
               <a:ext uri="{FF2B5EF4-FFF2-40B4-BE49-F238E27FC236}">
-                <a16:creationId xmlns:a16="http://schemas.microsoft.com/office/drawing/2014/main" id="{0F4F48C5-092C-4F12-993F-79233F6CC0E6}"/>
+                <a16:creationId xmlns:a16="http://schemas.microsoft.com/office/drawing/2014/main" id="{54477A53-4D1D-4B6B-861A-7B0871B4ADEE}"/>
               </a:ext>
             </a:extLst>
           </p:cNvPr>
@@ -4596,7 +4596,7 @@
           <p:cNvPr id="3" name="Text 1">
             <a:extLst xmlns:a="http://schemas.openxmlformats.org/drawingml/2006/main">
               <a:ext uri="{FF2B5EF4-FFF2-40B4-BE49-F238E27FC236}">
-                <a16:creationId xmlns:a16="http://schemas.microsoft.com/office/drawing/2014/main" id="{3C3A8D53-74A1-4AC3-9D51-F3D590D89C34}"/>
+                <a16:creationId xmlns:a16="http://schemas.microsoft.com/office/drawing/2014/main" id="{558B4104-0259-4552-9EBC-0C150ECDA5CB}"/>
               </a:ext>
             </a:extLst>
           </p:cNvPr>
@@ -4642,7 +4642,7 @@
           <p:cNvPr id="4" name="Text 2">
             <a:extLst xmlns:a="http://schemas.openxmlformats.org/drawingml/2006/main">
               <a:ext uri="{FF2B5EF4-FFF2-40B4-BE49-F238E27FC236}">
-                <a16:creationId xmlns:a16="http://schemas.microsoft.com/office/drawing/2014/main" id="{8A218BCF-6623-4BBA-9AA1-56ED1CD007A2}"/>
+                <a16:creationId xmlns:a16="http://schemas.microsoft.com/office/drawing/2014/main" id="{7DE48656-23F9-43B9-B4C2-62BC2612FC54}"/>
               </a:ext>
             </a:extLst>
           </p:cNvPr>
@@ -4679,7 +4679,7 @@
                 <a:ea typeface="Microsoft YaHei"/>
                 <a:cs typeface="Microsoft YaHei"/>
               </a:rPr>
-              <a:t>预测与储能调度的仿真流程</a:t>
+              <a:t>当前原型：离线仿真决策支持系统</a:t>
             </a:r>
             <a:endParaRPr sz="2500"/>
           </a:p>
@@ -4690,7 +4690,7 @@
           <p:cNvPr id="5" name="Text 3">
             <a:extLst xmlns:a="http://schemas.openxmlformats.org/drawingml/2006/main">
               <a:ext uri="{FF2B5EF4-FFF2-40B4-BE49-F238E27FC236}">
-                <a16:creationId xmlns:a16="http://schemas.microsoft.com/office/drawing/2014/main" id="{43F24EF1-E202-4095-B8B8-66C137BE0995}"/>
+                <a16:creationId xmlns:a16="http://schemas.microsoft.com/office/drawing/2014/main" id="{882B69C9-1D1C-4A18-8785-85C66ADACB9D}"/>
               </a:ext>
             </a:extLst>
           </p:cNvPr>
@@ -4738,7 +4738,7 @@
           <p:cNvPr id="6" name="Shape 4">
             <a:extLst xmlns:a="http://schemas.openxmlformats.org/drawingml/2006/main">
               <a:ext uri="{FF2B5EF4-FFF2-40B4-BE49-F238E27FC236}">
-                <a16:creationId xmlns:a16="http://schemas.microsoft.com/office/drawing/2014/main" id="{6E83CBF8-330A-4CBE-B3BA-FF861856C8EE}"/>
+                <a16:creationId xmlns:a16="http://schemas.microsoft.com/office/drawing/2014/main" id="{C2361F76-0A30-49ED-AE79-A9A45E4E5866}"/>
               </a:ext>
             </a:extLst>
           </p:cNvPr>
@@ -4773,7 +4773,7 @@
           <p:cNvPr id="7" name="Text 5">
             <a:extLst xmlns:a="http://schemas.openxmlformats.org/drawingml/2006/main">
               <a:ext uri="{FF2B5EF4-FFF2-40B4-BE49-F238E27FC236}">
-                <a16:creationId xmlns:a16="http://schemas.microsoft.com/office/drawing/2014/main" id="{917318F5-7FF5-4026-B6E5-07362DAA1DC6}"/>
+                <a16:creationId xmlns:a16="http://schemas.microsoft.com/office/drawing/2014/main" id="{C38A10FF-6CCD-4A05-941C-7BBD837FF8F4}"/>
               </a:ext>
             </a:extLst>
           </p:cNvPr>
@@ -4819,7 +4819,7 @@
           <p:cNvPr id="8" name="Text 6">
             <a:extLst xmlns:a="http://schemas.openxmlformats.org/drawingml/2006/main">
               <a:ext uri="{FF2B5EF4-FFF2-40B4-BE49-F238E27FC236}">
-                <a16:creationId xmlns:a16="http://schemas.microsoft.com/office/drawing/2014/main" id="{67548406-D4ED-422C-A5FF-32C44C7E9B25}"/>
+                <a16:creationId xmlns:a16="http://schemas.microsoft.com/office/drawing/2014/main" id="{AFE589F6-1D4B-41B8-A7DE-AF822AECFB2B}"/>
               </a:ext>
             </a:extLst>
           </p:cNvPr>
@@ -4867,7 +4867,7 @@
           <p:cNvPr id="9" name="Text 7">
             <a:extLst xmlns:a="http://schemas.openxmlformats.org/drawingml/2006/main">
               <a:ext uri="{FF2B5EF4-FFF2-40B4-BE49-F238E27FC236}">
-                <a16:creationId xmlns:a16="http://schemas.microsoft.com/office/drawing/2014/main" id="{C012064A-DE2B-4025-A166-BC04B43DD8E9}"/>
+                <a16:creationId xmlns:a16="http://schemas.microsoft.com/office/drawing/2014/main" id="{9E9DE625-AA50-40AE-9A92-C5CD7CF2C5CB}"/>
               </a:ext>
             </a:extLst>
           </p:cNvPr>
@@ -4915,7 +4915,7 @@
           <p:cNvPr id="10" name="Shape 8">
             <a:extLst xmlns:a="http://schemas.openxmlformats.org/drawingml/2006/main">
               <a:ext uri="{FF2B5EF4-FFF2-40B4-BE49-F238E27FC236}">
-                <a16:creationId xmlns:a16="http://schemas.microsoft.com/office/drawing/2014/main" id="{E546207D-3DFD-4E51-A3E0-101811D21CF4}"/>
+                <a16:creationId xmlns:a16="http://schemas.microsoft.com/office/drawing/2014/main" id="{E11ADB7F-4C22-473C-94ED-7DC0AFE662E6}"/>
               </a:ext>
             </a:extLst>
           </p:cNvPr>
@@ -4948,7 +4948,7 @@
           <p:cNvPr id="11" name="Shape 9">
             <a:extLst xmlns:a="http://schemas.openxmlformats.org/drawingml/2006/main">
               <a:ext uri="{FF2B5EF4-FFF2-40B4-BE49-F238E27FC236}">
-                <a16:creationId xmlns:a16="http://schemas.microsoft.com/office/drawing/2014/main" id="{1E418BD3-5996-4421-9A62-74B80D75EF0B}"/>
+                <a16:creationId xmlns:a16="http://schemas.microsoft.com/office/drawing/2014/main" id="{D074EAD2-0D11-4868-AFB1-44BD8FA5C3FE}"/>
               </a:ext>
             </a:extLst>
           </p:cNvPr>
@@ -4983,7 +4983,7 @@
           <p:cNvPr id="12" name="Text 10">
             <a:extLst xmlns:a="http://schemas.openxmlformats.org/drawingml/2006/main">
               <a:ext uri="{FF2B5EF4-FFF2-40B4-BE49-F238E27FC236}">
-                <a16:creationId xmlns:a16="http://schemas.microsoft.com/office/drawing/2014/main" id="{91984710-6B52-49AA-880A-0CAF0F616829}"/>
+                <a16:creationId xmlns:a16="http://schemas.microsoft.com/office/drawing/2014/main" id="{DB0FD37B-62F8-46B7-BE8A-2745FA3474B4}"/>
               </a:ext>
             </a:extLst>
           </p:cNvPr>
@@ -5029,7 +5029,7 @@
           <p:cNvPr id="13" name="Text 11">
             <a:extLst xmlns:a="http://schemas.openxmlformats.org/drawingml/2006/main">
               <a:ext uri="{FF2B5EF4-FFF2-40B4-BE49-F238E27FC236}">
-                <a16:creationId xmlns:a16="http://schemas.microsoft.com/office/drawing/2014/main" id="{B8A900D2-376D-4500-BE5B-EED5379B249B}"/>
+                <a16:creationId xmlns:a16="http://schemas.microsoft.com/office/drawing/2014/main" id="{2C81E22B-9DF8-4E5B-9124-6BF223C53808}"/>
               </a:ext>
             </a:extLst>
           </p:cNvPr>
@@ -5077,7 +5077,7 @@
           <p:cNvPr id="14" name="Text 12">
             <a:extLst xmlns:a="http://schemas.openxmlformats.org/drawingml/2006/main">
               <a:ext uri="{FF2B5EF4-FFF2-40B4-BE49-F238E27FC236}">
-                <a16:creationId xmlns:a16="http://schemas.microsoft.com/office/drawing/2014/main" id="{7E07C219-BE13-42A3-B53D-773DCAFE25C5}"/>
+                <a16:creationId xmlns:a16="http://schemas.microsoft.com/office/drawing/2014/main" id="{47695F14-CEA8-43E7-BE76-FB56EC0771F5}"/>
               </a:ext>
             </a:extLst>
           </p:cNvPr>
@@ -5125,7 +5125,7 @@
           <p:cNvPr id="15" name="Shape 13">
             <a:extLst xmlns:a="http://schemas.openxmlformats.org/drawingml/2006/main">
               <a:ext uri="{FF2B5EF4-FFF2-40B4-BE49-F238E27FC236}">
-                <a16:creationId xmlns:a16="http://schemas.microsoft.com/office/drawing/2014/main" id="{EFD543C0-0664-4DDD-B968-845DF30144C1}"/>
+                <a16:creationId xmlns:a16="http://schemas.microsoft.com/office/drawing/2014/main" id="{8890F5CF-4B2F-42EB-91E0-4A4B709DFBB7}"/>
               </a:ext>
             </a:extLst>
           </p:cNvPr>
@@ -5158,7 +5158,7 @@
           <p:cNvPr id="16" name="Shape 14">
             <a:extLst xmlns:a="http://schemas.openxmlformats.org/drawingml/2006/main">
               <a:ext uri="{FF2B5EF4-FFF2-40B4-BE49-F238E27FC236}">
-                <a16:creationId xmlns:a16="http://schemas.microsoft.com/office/drawing/2014/main" id="{A6DA7CEC-D5C4-4B3F-AE51-E8A7CE475A3A}"/>
+                <a16:creationId xmlns:a16="http://schemas.microsoft.com/office/drawing/2014/main" id="{790412DA-495B-4C44-A382-A4B7BF7BDB07}"/>
               </a:ext>
             </a:extLst>
           </p:cNvPr>
@@ -5193,7 +5193,7 @@
           <p:cNvPr id="17" name="Text 15">
             <a:extLst xmlns:a="http://schemas.openxmlformats.org/drawingml/2006/main">
               <a:ext uri="{FF2B5EF4-FFF2-40B4-BE49-F238E27FC236}">
-                <a16:creationId xmlns:a16="http://schemas.microsoft.com/office/drawing/2014/main" id="{B2563491-9BA5-4E03-B119-0399CC93EBDB}"/>
+                <a16:creationId xmlns:a16="http://schemas.microsoft.com/office/drawing/2014/main" id="{3CC8758E-AFC7-4445-BDF1-0FA062C0EE28}"/>
               </a:ext>
             </a:extLst>
           </p:cNvPr>
@@ -5239,7 +5239,7 @@
           <p:cNvPr id="18" name="Text 16">
             <a:extLst xmlns:a="http://schemas.openxmlformats.org/drawingml/2006/main">
               <a:ext uri="{FF2B5EF4-FFF2-40B4-BE49-F238E27FC236}">
-                <a16:creationId xmlns:a16="http://schemas.microsoft.com/office/drawing/2014/main" id="{DE640E88-D82B-4D9E-8300-9BC445F0FCAD}"/>
+                <a16:creationId xmlns:a16="http://schemas.microsoft.com/office/drawing/2014/main" id="{93FDE950-F244-4BE4-BC93-0B1576FA2BC6}"/>
               </a:ext>
             </a:extLst>
           </p:cNvPr>
@@ -5287,7 +5287,7 @@
           <p:cNvPr id="19" name="Text 17">
             <a:extLst xmlns:a="http://schemas.openxmlformats.org/drawingml/2006/main">
               <a:ext uri="{FF2B5EF4-FFF2-40B4-BE49-F238E27FC236}">
-                <a16:creationId xmlns:a16="http://schemas.microsoft.com/office/drawing/2014/main" id="{4245E311-FDE9-41F2-A509-C77741C5EE30}"/>
+                <a16:creationId xmlns:a16="http://schemas.microsoft.com/office/drawing/2014/main" id="{C8C86A34-9402-4E81-BD2D-B595B1A40091}"/>
               </a:ext>
             </a:extLst>
           </p:cNvPr>
@@ -5335,7 +5335,7 @@
           <p:cNvPr id="20" name="Shape 18">
             <a:extLst xmlns:a="http://schemas.openxmlformats.org/drawingml/2006/main">
               <a:ext uri="{FF2B5EF4-FFF2-40B4-BE49-F238E27FC236}">
-                <a16:creationId xmlns:a16="http://schemas.microsoft.com/office/drawing/2014/main" id="{680C27C7-5817-4218-B97F-F76AE0683CA3}"/>
+                <a16:creationId xmlns:a16="http://schemas.microsoft.com/office/drawing/2014/main" id="{D097027E-5B92-4B85-A49D-26A402758B7C}"/>
               </a:ext>
             </a:extLst>
           </p:cNvPr>
@@ -5368,7 +5368,7 @@
           <p:cNvPr id="21" name="Shape 19">
             <a:extLst xmlns:a="http://schemas.openxmlformats.org/drawingml/2006/main">
               <a:ext uri="{FF2B5EF4-FFF2-40B4-BE49-F238E27FC236}">
-                <a16:creationId xmlns:a16="http://schemas.microsoft.com/office/drawing/2014/main" id="{C94F7DE4-A7F9-4905-99A3-E75BDD07E541}"/>
+                <a16:creationId xmlns:a16="http://schemas.microsoft.com/office/drawing/2014/main" id="{665906ED-3254-4614-B9C1-768C1B4F7EC9}"/>
               </a:ext>
             </a:extLst>
           </p:cNvPr>
@@ -5403,7 +5403,7 @@
           <p:cNvPr id="22" name="Text 20">
             <a:extLst xmlns:a="http://schemas.openxmlformats.org/drawingml/2006/main">
               <a:ext uri="{FF2B5EF4-FFF2-40B4-BE49-F238E27FC236}">
-                <a16:creationId xmlns:a16="http://schemas.microsoft.com/office/drawing/2014/main" id="{9D557BFA-3057-4354-9855-76F177B747CB}"/>
+                <a16:creationId xmlns:a16="http://schemas.microsoft.com/office/drawing/2014/main" id="{C89614FE-A506-4A7D-A2AF-072D9A6EE216}"/>
               </a:ext>
             </a:extLst>
           </p:cNvPr>
@@ -5449,7 +5449,7 @@
           <p:cNvPr id="23" name="Text 21">
             <a:extLst xmlns:a="http://schemas.openxmlformats.org/drawingml/2006/main">
               <a:ext uri="{FF2B5EF4-FFF2-40B4-BE49-F238E27FC236}">
-                <a16:creationId xmlns:a16="http://schemas.microsoft.com/office/drawing/2014/main" id="{5C390371-3207-4080-9B00-00E5BA27A5BD}"/>
+                <a16:creationId xmlns:a16="http://schemas.microsoft.com/office/drawing/2014/main" id="{BAB3CB85-F6CF-46F1-9D61-FA3F9873C06B}"/>
               </a:ext>
             </a:extLst>
           </p:cNvPr>
@@ -5497,7 +5497,7 @@
           <p:cNvPr id="24" name="Text 22">
             <a:extLst xmlns:a="http://schemas.openxmlformats.org/drawingml/2006/main">
               <a:ext uri="{FF2B5EF4-FFF2-40B4-BE49-F238E27FC236}">
-                <a16:creationId xmlns:a16="http://schemas.microsoft.com/office/drawing/2014/main" id="{38273A1A-CBCA-47B5-81C0-52BC3EF08347}"/>
+                <a16:creationId xmlns:a16="http://schemas.microsoft.com/office/drawing/2014/main" id="{DE5F588F-FFCF-40F0-B164-A30F7B052277}"/>
               </a:ext>
             </a:extLst>
           </p:cNvPr>
@@ -5545,7 +5545,7 @@
           <p:cNvPr id="25" name="Shape 23">
             <a:extLst xmlns:a="http://schemas.openxmlformats.org/drawingml/2006/main">
               <a:ext uri="{FF2B5EF4-FFF2-40B4-BE49-F238E27FC236}">
-                <a16:creationId xmlns:a16="http://schemas.microsoft.com/office/drawing/2014/main" id="{36044F6B-330C-4C9D-B6EA-D4AEE4864CD7}"/>
+                <a16:creationId xmlns:a16="http://schemas.microsoft.com/office/drawing/2014/main" id="{E506AFDF-F7A5-44CB-BB2F-A27EA20416E0}"/>
               </a:ext>
             </a:extLst>
           </p:cNvPr>
@@ -5582,7 +5582,7 @@
           <p:cNvPr id="26" name="Text 24">
             <a:extLst xmlns:a="http://schemas.openxmlformats.org/drawingml/2006/main">
               <a:ext uri="{FF2B5EF4-FFF2-40B4-BE49-F238E27FC236}">
-                <a16:creationId xmlns:a16="http://schemas.microsoft.com/office/drawing/2014/main" id="{AC195823-9745-4A04-884A-85199A6A4AF4}"/>
+                <a16:creationId xmlns:a16="http://schemas.microsoft.com/office/drawing/2014/main" id="{E5702811-2AA7-45E2-8631-AE15619B501A}"/>
               </a:ext>
             </a:extLst>
           </p:cNvPr>
@@ -5630,7 +5630,7 @@
           <p:cNvPr id="27" name="Shape 25">
             <a:extLst xmlns:a="http://schemas.openxmlformats.org/drawingml/2006/main">
               <a:ext uri="{FF2B5EF4-FFF2-40B4-BE49-F238E27FC236}">
-                <a16:creationId xmlns:a16="http://schemas.microsoft.com/office/drawing/2014/main" id="{1741056B-200D-4E01-9FF3-FE5DD5FA764C}"/>
+                <a16:creationId xmlns:a16="http://schemas.microsoft.com/office/drawing/2014/main" id="{EA7CA09A-DEF1-4DAD-BEC1-98930DE85DFE}"/>
               </a:ext>
             </a:extLst>
           </p:cNvPr>
@@ -5667,7 +5667,7 @@
           <p:cNvPr id="28" name="Text 26">
             <a:extLst xmlns:a="http://schemas.openxmlformats.org/drawingml/2006/main">
               <a:ext uri="{FF2B5EF4-FFF2-40B4-BE49-F238E27FC236}">
-                <a16:creationId xmlns:a16="http://schemas.microsoft.com/office/drawing/2014/main" id="{B394DB93-4B6B-4053-BE99-A0F5E50EA6F2}"/>
+                <a16:creationId xmlns:a16="http://schemas.microsoft.com/office/drawing/2014/main" id="{F46DC605-E843-417B-B3FB-4548AFDDC52B}"/>
               </a:ext>
             </a:extLst>
           </p:cNvPr>
@@ -5715,7 +5715,7 @@
           <p:cNvPr id="29" name="Shape 27">
             <a:extLst xmlns:a="http://schemas.openxmlformats.org/drawingml/2006/main">
               <a:ext uri="{FF2B5EF4-FFF2-40B4-BE49-F238E27FC236}">
-                <a16:creationId xmlns:a16="http://schemas.microsoft.com/office/drawing/2014/main" id="{8BEB635E-F1AD-4690-8E3A-B83957696BE0}"/>
+                <a16:creationId xmlns:a16="http://schemas.microsoft.com/office/drawing/2014/main" id="{D9C25429-F29C-4792-9207-463FBAC7CDD5}"/>
               </a:ext>
             </a:extLst>
           </p:cNvPr>
@@ -5752,7 +5752,7 @@
           <p:cNvPr id="30" name="Text 28">
             <a:extLst xmlns:a="http://schemas.openxmlformats.org/drawingml/2006/main">
               <a:ext uri="{FF2B5EF4-FFF2-40B4-BE49-F238E27FC236}">
-                <a16:creationId xmlns:a16="http://schemas.microsoft.com/office/drawing/2014/main" id="{02CD3331-2886-4705-9B83-950D913F97E8}"/>
+                <a16:creationId xmlns:a16="http://schemas.microsoft.com/office/drawing/2014/main" id="{E43C6561-914D-4777-8839-3FD6E5584892}"/>
               </a:ext>
             </a:extLst>
           </p:cNvPr>
@@ -5800,7 +5800,7 @@
           <p:cNvPr id="31" name="Text 29">
             <a:extLst xmlns:a="http://schemas.openxmlformats.org/drawingml/2006/main">
               <a:ext uri="{FF2B5EF4-FFF2-40B4-BE49-F238E27FC236}">
-                <a16:creationId xmlns:a16="http://schemas.microsoft.com/office/drawing/2014/main" id="{47D2784E-BBA4-4276-9B1D-DB29AC1D907E}"/>
+                <a16:creationId xmlns:a16="http://schemas.microsoft.com/office/drawing/2014/main" id="{13D2EAF7-5568-4445-9015-1F7F877FE40B}"/>
               </a:ext>
             </a:extLst>
           </p:cNvPr>
@@ -5835,7 +5835,7 @@
                 <a:ea typeface="Microsoft YaHei"/>
                 <a:cs typeface="Microsoft YaHei"/>
               </a:rPr>
-              <a:t>已实现负荷预测、约束调度和实际峰值评价的仿真流程。</a:t>
+              <a:t>GUI：建筑巡演 → 核对电池配置 → 查看削峰结果 → 八建筑比较</a:t>
             </a:r>
             <a:endParaRPr sz="1200"/>
           </a:p>
@@ -5846,7 +5846,7 @@
           <p:cNvPr id="32" name="Text 30">
             <a:extLst xmlns:a="http://schemas.openxmlformats.org/drawingml/2006/main">
               <a:ext uri="{FF2B5EF4-FFF2-40B4-BE49-F238E27FC236}">
-                <a16:creationId xmlns:a16="http://schemas.microsoft.com/office/drawing/2014/main" id="{533F96AE-929C-41FA-AFE9-2FFAB005EC02}"/>
+                <a16:creationId xmlns:a16="http://schemas.microsoft.com/office/drawing/2014/main" id="{3DBE566A-F2C0-4801-9B3D-8D963372569A}"/>
               </a:ext>
             </a:extLst>
           </p:cNvPr>
@@ -5883,7 +5883,7 @@
                 <a:ea typeface="Microsoft YaHei"/>
                 <a:cs typeface="Microsoft YaHei"/>
               </a:rPr>
-              <a:t>智能云储 · DOEF | 8 栋办公建筑仿真实验</a:t>
+              <a:t>智储云控 · DOEF | 8 栋办公建筑仿真实验</a:t>
             </a:r>
             <a:endParaRPr sz="750"/>
           </a:p>
@@ -5894,7 +5894,7 @@
           <p:cNvPr id="33" name="Slide Number Placeholder 0">
             <a:extLst xmlns:a="http://schemas.openxmlformats.org/drawingml/2006/main">
               <a:ext uri="{FF2B5EF4-FFF2-40B4-BE49-F238E27FC236}">
-                <a16:creationId xmlns:a16="http://schemas.microsoft.com/office/drawing/2014/main" id="{DC0E4356-4F3A-4853-9433-E3D7411BD7A3}"/>
+                <a16:creationId xmlns:a16="http://schemas.microsoft.com/office/drawing/2014/main" id="{E845D69C-AA19-49ED-A2D8-A437D10EE627}"/>
               </a:ext>
             </a:extLst>
           </p:cNvPr>
@@ -5944,7 +5944,7 @@
     </p:spTree>
     <p:extLst>
       <p:ext uri="{BB962C8B-B14F-4D97-AF65-F5344CB8AC3E}">
-        <p14:creationId xmlns:p14="http://schemas.microsoft.com/office/powerpoint/2010/main" val="93703399"/>
+        <p14:creationId xmlns:p14="http://schemas.microsoft.com/office/powerpoint/2010/main" val="750388448"/>
       </p:ext>
     </p:extLst>
   </p:cSld>
@@ -5968,7 +5968,7 @@
           <p:cNvPr id="2" name="Text 0">
             <a:extLst xmlns:a="http://schemas.openxmlformats.org/drawingml/2006/main">
               <a:ext uri="{FF2B5EF4-FFF2-40B4-BE49-F238E27FC236}">
-                <a16:creationId xmlns:a16="http://schemas.microsoft.com/office/drawing/2014/main" id="{9A546100-C7AD-4C15-8672-B9E2A467D297}"/>
+                <a16:creationId xmlns:a16="http://schemas.microsoft.com/office/drawing/2014/main" id="{BA733A76-09F0-470E-9C7D-D6AD7C3A67E2}"/>
               </a:ext>
             </a:extLst>
           </p:cNvPr>
@@ -6014,7 +6014,7 @@
           <p:cNvPr id="3" name="Text 1">
             <a:extLst xmlns:a="http://schemas.openxmlformats.org/drawingml/2006/main">
               <a:ext uri="{FF2B5EF4-FFF2-40B4-BE49-F238E27FC236}">
-                <a16:creationId xmlns:a16="http://schemas.microsoft.com/office/drawing/2014/main" id="{D0B838DD-F29F-4853-8790-BCC130C55009}"/>
+                <a16:creationId xmlns:a16="http://schemas.microsoft.com/office/drawing/2014/main" id="{1820B17E-63A9-4FFC-98B6-B886D23AD4E0}"/>
               </a:ext>
             </a:extLst>
           </p:cNvPr>
@@ -6060,7 +6060,7 @@
           <p:cNvPr id="4" name="Text 2">
             <a:extLst xmlns:a="http://schemas.openxmlformats.org/drawingml/2006/main">
               <a:ext uri="{FF2B5EF4-FFF2-40B4-BE49-F238E27FC236}">
-                <a16:creationId xmlns:a16="http://schemas.microsoft.com/office/drawing/2014/main" id="{3C9A105E-A41A-4099-9C7C-B4815E59CBF0}"/>
+                <a16:creationId xmlns:a16="http://schemas.microsoft.com/office/drawing/2014/main" id="{180BD991-B0C7-440F-922B-643588F988BD}"/>
               </a:ext>
             </a:extLst>
           </p:cNvPr>
@@ -6108,7 +6108,7 @@
           <p:cNvPr id="5" name="Text 3">
             <a:extLst xmlns:a="http://schemas.openxmlformats.org/drawingml/2006/main">
               <a:ext uri="{FF2B5EF4-FFF2-40B4-BE49-F238E27FC236}">
-                <a16:creationId xmlns:a16="http://schemas.microsoft.com/office/drawing/2014/main" id="{C5FA2FD1-2BF7-4B9D-A77A-895EE594B66B}"/>
+                <a16:creationId xmlns:a16="http://schemas.microsoft.com/office/drawing/2014/main" id="{6FF1D034-0A55-4304-8414-2DE3C51B6381}"/>
               </a:ext>
             </a:extLst>
           </p:cNvPr>
@@ -6156,7 +6156,7 @@
           <p:cNvPr id="6" name="Shape 4">
             <a:extLst xmlns:a="http://schemas.openxmlformats.org/drawingml/2006/main">
               <a:ext uri="{FF2B5EF4-FFF2-40B4-BE49-F238E27FC236}">
-                <a16:creationId xmlns:a16="http://schemas.microsoft.com/office/drawing/2014/main" id="{1BC2B0E3-6664-4BB1-B4FE-78700C377594}"/>
+                <a16:creationId xmlns:a16="http://schemas.microsoft.com/office/drawing/2014/main" id="{02DEFFC6-90CE-4DB7-8C05-E2E077A3AF85}"/>
               </a:ext>
             </a:extLst>
           </p:cNvPr>
@@ -6202,7 +6202,7 @@
           <p:nvPr/>
         </p:nvPicPr>
         <p:blipFill>
-          <a:blip xmlns:r="http://schemas.openxmlformats.org/officeDocument/2006/relationships" xmlns:a="http://schemas.openxmlformats.org/drawingml/2006/main" r:embed="R1ef62882d57b40cf"/>
+          <a:blip xmlns:r="http://schemas.openxmlformats.org/officeDocument/2006/relationships" xmlns:a="http://schemas.openxmlformats.org/drawingml/2006/main" r:embed="R0fe5cf5469f34f97"/>
           <a:stretch xmlns:a="http://schemas.openxmlformats.org/drawingml/2006/main">
             <a:fillRect l="0" t="0" r="0" b="0"/>
           </a:stretch>
@@ -6222,7 +6222,7 @@
           <p:cNvPr id="8" name="Text 5">
             <a:extLst xmlns:a="http://schemas.openxmlformats.org/drawingml/2006/main">
               <a:ext uri="{FF2B5EF4-FFF2-40B4-BE49-F238E27FC236}">
-                <a16:creationId xmlns:a16="http://schemas.microsoft.com/office/drawing/2014/main" id="{DFF0AB07-4EA0-40A3-897D-1D2EBF006A08}"/>
+                <a16:creationId xmlns:a16="http://schemas.microsoft.com/office/drawing/2014/main" id="{3477942F-2504-4B69-B95C-0087969A1608}"/>
               </a:ext>
             </a:extLst>
           </p:cNvPr>
@@ -6270,7 +6270,7 @@
           <p:cNvPr id="9" name="Text 6">
             <a:extLst xmlns:a="http://schemas.openxmlformats.org/drawingml/2006/main">
               <a:ext uri="{FF2B5EF4-FFF2-40B4-BE49-F238E27FC236}">
-                <a16:creationId xmlns:a16="http://schemas.microsoft.com/office/drawing/2014/main" id="{374BA642-F3F7-4313-ABA7-321D1E35E9E1}"/>
+                <a16:creationId xmlns:a16="http://schemas.microsoft.com/office/drawing/2014/main" id="{93D35B1B-FF7E-439D-8B07-6A2A3070D447}"/>
               </a:ext>
             </a:extLst>
           </p:cNvPr>
@@ -6307,7 +6307,7 @@
                 <a:ea typeface="Microsoft YaHei"/>
                 <a:cs typeface="Microsoft YaHei"/>
               </a:rPr>
-              <a:t>智能云储 · DOEF | 8 栋办公建筑仿真实验</a:t>
+              <a:t>智储云控 · DOEF | 8 栋办公建筑仿真实验</a:t>
             </a:r>
             <a:endParaRPr sz="750"/>
           </a:p>
@@ -6318,7 +6318,7 @@
           <p:cNvPr id="25" name="Slide Number Placeholder 0">
             <a:extLst xmlns:a="http://schemas.openxmlformats.org/drawingml/2006/main">
               <a:ext uri="{FF2B5EF4-FFF2-40B4-BE49-F238E27FC236}">
-                <a16:creationId xmlns:a16="http://schemas.microsoft.com/office/drawing/2014/main" id="{0EE14BE9-28A3-4FFA-8C07-E30EFBA7689F}"/>
+                <a16:creationId xmlns:a16="http://schemas.microsoft.com/office/drawing/2014/main" id="{9F8DB38A-1BC4-4A5F-B38D-39B9381D17FE}"/>
               </a:ext>
             </a:extLst>
           </p:cNvPr>
@@ -6368,7 +6368,7 @@
     </p:spTree>
     <p:extLst>
       <p:ext uri="{BB962C8B-B14F-4D97-AF65-F5344CB8AC3E}">
-        <p14:creationId xmlns:p14="http://schemas.microsoft.com/office/powerpoint/2010/main" val="203009582"/>
+        <p14:creationId xmlns:p14="http://schemas.microsoft.com/office/powerpoint/2010/main" val="2036036046"/>
       </p:ext>
     </p:extLst>
   </p:cSld>
@@ -6392,7 +6392,7 @@
           <p:cNvPr id="2" name="Text 0">
             <a:extLst xmlns:a="http://schemas.openxmlformats.org/drawingml/2006/main">
               <a:ext uri="{FF2B5EF4-FFF2-40B4-BE49-F238E27FC236}">
-                <a16:creationId xmlns:a16="http://schemas.microsoft.com/office/drawing/2014/main" id="{B4E64017-7851-40F0-8326-4C9DC846D9A0}"/>
+                <a16:creationId xmlns:a16="http://schemas.microsoft.com/office/drawing/2014/main" id="{08E08584-612D-42ED-A610-19D6C8B51446}"/>
               </a:ext>
             </a:extLst>
           </p:cNvPr>
@@ -6438,7 +6438,7 @@
           <p:cNvPr id="3" name="Text 1">
             <a:extLst xmlns:a="http://schemas.openxmlformats.org/drawingml/2006/main">
               <a:ext uri="{FF2B5EF4-FFF2-40B4-BE49-F238E27FC236}">
-                <a16:creationId xmlns:a16="http://schemas.microsoft.com/office/drawing/2014/main" id="{5991A8DC-6FB3-4293-BCDF-99D4112C7DC2}"/>
+                <a16:creationId xmlns:a16="http://schemas.microsoft.com/office/drawing/2014/main" id="{6C3C405F-750E-4DAE-82DD-12AF59120C71}"/>
               </a:ext>
             </a:extLst>
           </p:cNvPr>
@@ -6473,7 +6473,7 @@
                 <a:ea typeface="Arial"/>
                 <a:cs typeface="Arial"/>
               </a:rPr>
-              <a:t>结论</a:t>
+              <a:t>应用前景与结论</a:t>
             </a:r>
             <a:endParaRPr sz="830"/>
           </a:p>
@@ -6484,7 +6484,7 @@
           <p:cNvPr id="4" name="Text 2">
             <a:extLst xmlns:a="http://schemas.openxmlformats.org/drawingml/2006/main">
               <a:ext uri="{FF2B5EF4-FFF2-40B4-BE49-F238E27FC236}">
-                <a16:creationId xmlns:a16="http://schemas.microsoft.com/office/drawing/2014/main" id="{987EEDE0-3BFA-411F-8A36-5D091C64BE44}"/>
+                <a16:creationId xmlns:a16="http://schemas.microsoft.com/office/drawing/2014/main" id="{972B219C-8CD5-4DDD-ABC9-757645791F5F}"/>
               </a:ext>
             </a:extLst>
           </p:cNvPr>
@@ -6521,7 +6521,7 @@
                 <a:ea typeface="Microsoft YaHei"/>
                 <a:cs typeface="Microsoft YaHei"/>
               </a:rPr>
-              <a:t>面向储能削峰的</a:t>
+              <a:t>建筑储能削峰的</a:t>
             </a:r>
             <a:endParaRPr sz="3400"/>
           </a:p>
@@ -6538,7 +6538,7 @@
                 <a:ea typeface="Microsoft YaHei"/>
                 <a:cs typeface="Microsoft YaHei"/>
               </a:rPr>
-              <a:t>负荷预测组合选择</a:t>
+              <a:t>方案评估与试点路径</a:t>
             </a:r>
             <a:endParaRPr sz="3400"/>
           </a:p>
@@ -6549,7 +6549,7 @@
           <p:cNvPr id="5" name="Text 3">
             <a:extLst xmlns:a="http://schemas.openxmlformats.org/drawingml/2006/main">
               <a:ext uri="{FF2B5EF4-FFF2-40B4-BE49-F238E27FC236}">
-                <a16:creationId xmlns:a16="http://schemas.microsoft.com/office/drawing/2014/main" id="{181F6632-1A10-4FAB-B9EC-1542F98712BC}"/>
+                <a16:creationId xmlns:a16="http://schemas.microsoft.com/office/drawing/2014/main" id="{2006A687-5C4A-48F5-84C1-B8B28C048D7B}"/>
               </a:ext>
             </a:extLst>
           </p:cNvPr>
@@ -6584,7 +6584,7 @@
                 <a:ea typeface="Arial"/>
                 <a:cs typeface="Arial"/>
               </a:rPr>
-              <a:t>用于建筑储能削峰</a:t>
+              <a:t>用于楼宇能源管理与储能方案评估</a:t>
             </a:r>
             <a:endParaRPr sz="1000"/>
           </a:p>
@@ -6595,7 +6595,7 @@
           <p:cNvPr id="6" name="Shape 4">
             <a:extLst xmlns:a="http://schemas.openxmlformats.org/drawingml/2006/main">
               <a:ext uri="{FF2B5EF4-FFF2-40B4-BE49-F238E27FC236}">
-                <a16:creationId xmlns:a16="http://schemas.microsoft.com/office/drawing/2014/main" id="{D107AF68-476C-481E-B00A-A692ED40CF38}"/>
+                <a16:creationId xmlns:a16="http://schemas.microsoft.com/office/drawing/2014/main" id="{96644BBB-6BB8-4385-AA13-974F69434B19}"/>
               </a:ext>
             </a:extLst>
           </p:cNvPr>
@@ -6630,7 +6630,7 @@
           <p:cNvPr id="7" name="Text 5">
             <a:extLst xmlns:a="http://schemas.openxmlformats.org/drawingml/2006/main">
               <a:ext uri="{FF2B5EF4-FFF2-40B4-BE49-F238E27FC236}">
-                <a16:creationId xmlns:a16="http://schemas.microsoft.com/office/drawing/2014/main" id="{B55CB7F8-DA32-40C3-BCB9-5DBD2D290F49}"/>
+                <a16:creationId xmlns:a16="http://schemas.microsoft.com/office/drawing/2014/main" id="{1C190856-F4F0-4986-BFCB-4BD68FA098E1}"/>
               </a:ext>
             </a:extLst>
           </p:cNvPr>
@@ -6676,7 +6676,7 @@
           <p:cNvPr id="8" name="Text 6">
             <a:extLst xmlns:a="http://schemas.openxmlformats.org/drawingml/2006/main">
               <a:ext uri="{FF2B5EF4-FFF2-40B4-BE49-F238E27FC236}">
-                <a16:creationId xmlns:a16="http://schemas.microsoft.com/office/drawing/2014/main" id="{B9FD69AA-FDC7-4DD9-81C3-1BC5C54A0B55}"/>
+                <a16:creationId xmlns:a16="http://schemas.microsoft.com/office/drawing/2014/main" id="{86CB8A67-D1BC-4A5A-9D30-F364CBB367B4}"/>
               </a:ext>
             </a:extLst>
           </p:cNvPr>
@@ -6711,7 +6711,7 @@
                 <a:ea typeface="Microsoft YaHei"/>
                 <a:cs typeface="Microsoft YaHei"/>
               </a:rPr>
-              <a:t>预测误差 ≠ 决策价值</a:t>
+              <a:t>使用对象</a:t>
             </a:r>
             <a:endParaRPr sz="1450"/>
           </a:p>
@@ -6722,7 +6722,7 @@
           <p:cNvPr id="9" name="Text 7">
             <a:extLst xmlns:a="http://schemas.openxmlformats.org/drawingml/2006/main">
               <a:ext uri="{FF2B5EF4-FFF2-40B4-BE49-F238E27FC236}">
-                <a16:creationId xmlns:a16="http://schemas.microsoft.com/office/drawing/2014/main" id="{0F5CD48D-2FE5-42CA-9339-461C87742B3D}"/>
+                <a16:creationId xmlns:a16="http://schemas.microsoft.com/office/drawing/2014/main" id="{77B8C937-9200-43C6-AF06-048A7810D1AD}"/>
               </a:ext>
             </a:extLst>
           </p:cNvPr>
@@ -6757,7 +6757,7 @@
                 <a:ea typeface="Microsoft YaHei"/>
                 <a:cs typeface="Microsoft YaHei"/>
               </a:rPr>
-              <a:t>RMSE 与后悔值评价不同方面</a:t>
+              <a:t>楼宇能源管理与储能评估人员</a:t>
             </a:r>
             <a:endParaRPr sz="1050"/>
           </a:p>
@@ -6768,7 +6768,7 @@
           <p:cNvPr id="10" name="Shape 8">
             <a:extLst xmlns:a="http://schemas.openxmlformats.org/drawingml/2006/main">
               <a:ext uri="{FF2B5EF4-FFF2-40B4-BE49-F238E27FC236}">
-                <a16:creationId xmlns:a16="http://schemas.microsoft.com/office/drawing/2014/main" id="{7A237640-D7C1-4B74-B354-7432C78F4F98}"/>
+                <a16:creationId xmlns:a16="http://schemas.microsoft.com/office/drawing/2014/main" id="{B0FFBBB3-59FF-49F2-8537-745FFDCD1F48}"/>
               </a:ext>
             </a:extLst>
           </p:cNvPr>
@@ -6803,7 +6803,7 @@
           <p:cNvPr id="11" name="Text 9">
             <a:extLst xmlns:a="http://schemas.openxmlformats.org/drawingml/2006/main">
               <a:ext uri="{FF2B5EF4-FFF2-40B4-BE49-F238E27FC236}">
-                <a16:creationId xmlns:a16="http://schemas.microsoft.com/office/drawing/2014/main" id="{BB21971B-BC8A-4531-B7CF-17CFBADD10CE}"/>
+                <a16:creationId xmlns:a16="http://schemas.microsoft.com/office/drawing/2014/main" id="{B6E3BAF4-CFF6-4BD4-852C-0A04BAF57DFB}"/>
               </a:ext>
             </a:extLst>
           </p:cNvPr>
@@ -6849,7 +6849,7 @@
           <p:cNvPr id="12" name="Text 10">
             <a:extLst xmlns:a="http://schemas.openxmlformats.org/drawingml/2006/main">
               <a:ext uri="{FF2B5EF4-FFF2-40B4-BE49-F238E27FC236}">
-                <a16:creationId xmlns:a16="http://schemas.microsoft.com/office/drawing/2014/main" id="{E33454D0-123F-490F-ADF3-C0A28B1D1EF0}"/>
+                <a16:creationId xmlns:a16="http://schemas.microsoft.com/office/drawing/2014/main" id="{EAC670AE-ACD0-4F87-8155-D632DEDCBD97}"/>
               </a:ext>
             </a:extLst>
           </p:cNvPr>
@@ -6884,7 +6884,7 @@
                 <a:ea typeface="Microsoft YaHei"/>
                 <a:cs typeface="Microsoft YaHei"/>
               </a:rPr>
-              <a:t>验证集选择权重</a:t>
+              <a:t>使用流程</a:t>
             </a:r>
             <a:endParaRPr sz="1450"/>
           </a:p>
@@ -6895,7 +6895,7 @@
           <p:cNvPr id="13" name="Text 11">
             <a:extLst xmlns:a="http://schemas.openxmlformats.org/drawingml/2006/main">
               <a:ext uri="{FF2B5EF4-FFF2-40B4-BE49-F238E27FC236}">
-                <a16:creationId xmlns:a16="http://schemas.microsoft.com/office/drawing/2014/main" id="{4CB1DB74-F6F9-4B2C-BFE3-97C9739F5959}"/>
+                <a16:creationId xmlns:a16="http://schemas.microsoft.com/office/drawing/2014/main" id="{68183CE4-7631-4288-A707-BE0903FCBF06}"/>
               </a:ext>
             </a:extLst>
           </p:cNvPr>
@@ -6930,7 +6930,7 @@
                 <a:ea typeface="Microsoft YaHei"/>
                 <a:cs typeface="Microsoft YaHei"/>
               </a:rPr>
-              <a:t>按决策后悔值确定 wᵦ</a:t>
+              <a:t>巡演建筑 → 查看参数与削峰效果</a:t>
             </a:r>
             <a:endParaRPr sz="1050"/>
           </a:p>
@@ -6941,7 +6941,7 @@
           <p:cNvPr id="14" name="Shape 12">
             <a:extLst xmlns:a="http://schemas.openxmlformats.org/drawingml/2006/main">
               <a:ext uri="{FF2B5EF4-FFF2-40B4-BE49-F238E27FC236}">
-                <a16:creationId xmlns:a16="http://schemas.microsoft.com/office/drawing/2014/main" id="{C32F0FFF-0533-4F11-A1E0-B2DFEBB02E37}"/>
+                <a16:creationId xmlns:a16="http://schemas.microsoft.com/office/drawing/2014/main" id="{4B168329-C1C0-4264-8EF2-446032BAB0B5}"/>
               </a:ext>
             </a:extLst>
           </p:cNvPr>
@@ -6976,7 +6976,7 @@
           <p:cNvPr id="15" name="Text 13">
             <a:extLst xmlns:a="http://schemas.openxmlformats.org/drawingml/2006/main">
               <a:ext uri="{FF2B5EF4-FFF2-40B4-BE49-F238E27FC236}">
-                <a16:creationId xmlns:a16="http://schemas.microsoft.com/office/drawing/2014/main" id="{8F806EA8-0EED-4F88-8B91-57518079A95A}"/>
+                <a16:creationId xmlns:a16="http://schemas.microsoft.com/office/drawing/2014/main" id="{74C37C8A-1DB6-408E-A52E-4664FED9F1C3}"/>
               </a:ext>
             </a:extLst>
           </p:cNvPr>
@@ -7022,7 +7022,7 @@
           <p:cNvPr id="16" name="Text 14">
             <a:extLst xmlns:a="http://schemas.openxmlformats.org/drawingml/2006/main">
               <a:ext uri="{FF2B5EF4-FFF2-40B4-BE49-F238E27FC236}">
-                <a16:creationId xmlns:a16="http://schemas.microsoft.com/office/drawing/2014/main" id="{97DAA48B-CEB8-41EB-B921-D10F2322B65E}"/>
+                <a16:creationId xmlns:a16="http://schemas.microsoft.com/office/drawing/2014/main" id="{EFD200BE-4F70-45B3-9CC3-82338B8C796C}"/>
               </a:ext>
             </a:extLst>
           </p:cNvPr>
@@ -7057,7 +7057,7 @@
                 <a:ea typeface="Microsoft YaHei"/>
                 <a:cs typeface="Microsoft YaHei"/>
               </a:rPr>
-              <a:t>测试集评价效果</a:t>
+              <a:t>试点条件</a:t>
             </a:r>
             <a:endParaRPr sz="1450"/>
           </a:p>
@@ -7068,7 +7068,7 @@
           <p:cNvPr id="17" name="Text 15">
             <a:extLst xmlns:a="http://schemas.openxmlformats.org/drawingml/2006/main">
               <a:ext uri="{FF2B5EF4-FFF2-40B4-BE49-F238E27FC236}">
-                <a16:creationId xmlns:a16="http://schemas.microsoft.com/office/drawing/2014/main" id="{8A8B69C6-1D26-483C-BF38-116DA2C53165}"/>
+                <a16:creationId xmlns:a16="http://schemas.microsoft.com/office/drawing/2014/main" id="{BA27A45C-CADB-4FB1-B7F0-B9BA53DF7DA0}"/>
               </a:ext>
             </a:extLst>
           </p:cNvPr>
@@ -7103,7 +7103,7 @@
                 <a:ea typeface="Microsoft YaHei"/>
                 <a:cs typeface="Microsoft YaHei"/>
               </a:rPr>
-              <a:t>8 栋建筑分别训练与评价</a:t>
+              <a:t>影子运行 → 人工审批 → 受控执行</a:t>
             </a:r>
             <a:endParaRPr sz="1050"/>
           </a:p>
@@ -7114,7 +7114,7 @@
           <p:cNvPr id="18" name="Text 16">
             <a:extLst xmlns:a="http://schemas.openxmlformats.org/drawingml/2006/main">
               <a:ext uri="{FF2B5EF4-FFF2-40B4-BE49-F238E27FC236}">
-                <a16:creationId xmlns:a16="http://schemas.microsoft.com/office/drawing/2014/main" id="{29B56992-FC7F-478C-A460-21C99051E0C5}"/>
+                <a16:creationId xmlns:a16="http://schemas.microsoft.com/office/drawing/2014/main" id="{997DA8DE-56F1-4700-BFB0-C1E47396292B}"/>
               </a:ext>
             </a:extLst>
           </p:cNvPr>
@@ -7151,7 +7151,7 @@
                 <a:ea typeface="Microsoft YaHei"/>
                 <a:cs typeface="Microsoft YaHei"/>
               </a:rPr>
-              <a:t>用验证集调度表现选择负荷预测组合，在本次八建筑实验中取得改善。</a:t>
+              <a:t>当前支持离线方案比较；跨季节与现场试点验证后，再评估电费和寿命收益。</a:t>
             </a:r>
             <a:endParaRPr sz="1700"/>
           </a:p>
@@ -7162,7 +7162,7 @@
           <p:cNvPr id="19" name="Shape 17">
             <a:extLst xmlns:a="http://schemas.openxmlformats.org/drawingml/2006/main">
               <a:ext uri="{FF2B5EF4-FFF2-40B4-BE49-F238E27FC236}">
-                <a16:creationId xmlns:a16="http://schemas.microsoft.com/office/drawing/2014/main" id="{4BA26B87-5B29-40BF-BA94-20A85F833522}"/>
+                <a16:creationId xmlns:a16="http://schemas.microsoft.com/office/drawing/2014/main" id="{250C59A1-ABB4-4719-96B8-0C555815A79B}"/>
               </a:ext>
             </a:extLst>
           </p:cNvPr>
@@ -7199,7 +7199,7 @@
           <p:cNvPr id="20" name="Text 18">
             <a:extLst xmlns:a="http://schemas.openxmlformats.org/drawingml/2006/main">
               <a:ext uri="{FF2B5EF4-FFF2-40B4-BE49-F238E27FC236}">
-                <a16:creationId xmlns:a16="http://schemas.microsoft.com/office/drawing/2014/main" id="{CE18BEA2-3D7D-48BA-A9DB-CE5335E45999}"/>
+                <a16:creationId xmlns:a16="http://schemas.microsoft.com/office/drawing/2014/main" id="{9A27A261-D81B-4718-811F-394E386EE89A}"/>
               </a:ext>
             </a:extLst>
           </p:cNvPr>
@@ -7236,7 +7236,7 @@
                 <a:ea typeface="Microsoft YaHei"/>
                 <a:cs typeface="Microsoft YaHei"/>
               </a:rPr>
-              <a:t>DOEF v1.0 · 八建筑仿真验证</a:t>
+              <a:t>DOEF v1.0 · 离线决策支持原型</a:t>
             </a:r>
             <a:endParaRPr sz="880"/>
           </a:p>
@@ -7247,7 +7247,7 @@
           <p:cNvPr id="21" name="Text 19">
             <a:extLst xmlns:a="http://schemas.openxmlformats.org/drawingml/2006/main">
               <a:ext uri="{FF2B5EF4-FFF2-40B4-BE49-F238E27FC236}">
-                <a16:creationId xmlns:a16="http://schemas.microsoft.com/office/drawing/2014/main" id="{EF150D6C-8438-4693-995B-8084A775A870}"/>
+                <a16:creationId xmlns:a16="http://schemas.microsoft.com/office/drawing/2014/main" id="{7DBCEDC3-B3B6-4AA3-8938-DFDE35AE8D60}"/>
               </a:ext>
             </a:extLst>
           </p:cNvPr>
@@ -7284,7 +7284,7 @@
                 <a:ea typeface="Microsoft YaHei"/>
                 <a:cs typeface="Microsoft YaHei"/>
               </a:rPr>
-              <a:t>8 栋办公建筑 · 单一测试月 · 24 h 超前预测 · 离线仿真</a:t>
+              <a:t>8 栋办公建筑 · 单一测试月 · 尚无成本、碳减排或现场部署结论</a:t>
             </a:r>
             <a:endParaRPr sz="970"/>
           </a:p>
@@ -7295,7 +7295,7 @@
           <p:cNvPr id="22" name="Text 20">
             <a:extLst xmlns:a="http://schemas.openxmlformats.org/drawingml/2006/main">
               <a:ext uri="{FF2B5EF4-FFF2-40B4-BE49-F238E27FC236}">
-                <a16:creationId xmlns:a16="http://schemas.microsoft.com/office/drawing/2014/main" id="{539205A4-7F73-485C-A543-0BB39826DC62}"/>
+                <a16:creationId xmlns:a16="http://schemas.microsoft.com/office/drawing/2014/main" id="{4BF3506E-C0E0-41D8-B262-386AC7290175}"/>
               </a:ext>
             </a:extLst>
           </p:cNvPr>
@@ -7332,7 +7332,7 @@
                 <a:ea typeface="Microsoft YaHei"/>
                 <a:cs typeface="Microsoft YaHei"/>
               </a:rPr>
-              <a:t>智能云储 · DOEF | 8 栋办公建筑仿真实验</a:t>
+              <a:t>智储云控 · DOEF | 8 栋办公建筑仿真实验</a:t>
             </a:r>
             <a:endParaRPr sz="750"/>
           </a:p>
@@ -7343,7 +7343,7 @@
           <p:cNvPr id="25" name="Slide Number Placeholder 0">
             <a:extLst xmlns:a="http://schemas.openxmlformats.org/drawingml/2006/main">
               <a:ext uri="{FF2B5EF4-FFF2-40B4-BE49-F238E27FC236}">
-                <a16:creationId xmlns:a16="http://schemas.microsoft.com/office/drawing/2014/main" id="{AABCE5D3-FB78-4B23-A837-B5E914B863D0}"/>
+                <a16:creationId xmlns:a16="http://schemas.microsoft.com/office/drawing/2014/main" id="{64978B75-B5D5-447E-8C7A-A51CB47FA398}"/>
               </a:ext>
             </a:extLst>
           </p:cNvPr>
@@ -7393,7 +7393,7 @@
     </p:spTree>
     <p:extLst>
       <p:ext uri="{BB962C8B-B14F-4D97-AF65-F5344CB8AC3E}">
-        <p14:creationId xmlns:p14="http://schemas.microsoft.com/office/powerpoint/2010/main" val="1851155"/>
+        <p14:creationId xmlns:p14="http://schemas.microsoft.com/office/powerpoint/2010/main" val="1583827478"/>
       </p:ext>
     </p:extLst>
   </p:cSld>
@@ -7417,7 +7417,7 @@
           <p:cNvPr id="2" name="Text 0">
             <a:extLst xmlns:a="http://schemas.openxmlformats.org/drawingml/2006/main">
               <a:ext uri="{FF2B5EF4-FFF2-40B4-BE49-F238E27FC236}">
-                <a16:creationId xmlns:a16="http://schemas.microsoft.com/office/drawing/2014/main" id="{987028A1-135A-474E-91D1-1E456DBDAA45}"/>
+                <a16:creationId xmlns:a16="http://schemas.microsoft.com/office/drawing/2014/main" id="{71944069-FF14-444B-B343-DDD3F3CCDF9F}"/>
               </a:ext>
             </a:extLst>
           </p:cNvPr>
@@ -7463,7 +7463,7 @@
           <p:cNvPr id="3" name="Text 1">
             <a:extLst xmlns:a="http://schemas.openxmlformats.org/drawingml/2006/main">
               <a:ext uri="{FF2B5EF4-FFF2-40B4-BE49-F238E27FC236}">
-                <a16:creationId xmlns:a16="http://schemas.microsoft.com/office/drawing/2014/main" id="{4595581E-F4B5-4F05-B517-627BC84BE104}"/>
+                <a16:creationId xmlns:a16="http://schemas.microsoft.com/office/drawing/2014/main" id="{53133F31-C63D-404B-8895-93859A878FD9}"/>
               </a:ext>
             </a:extLst>
           </p:cNvPr>
@@ -7509,7 +7509,7 @@
           <p:cNvPr id="4" name="Shape 2">
             <a:extLst xmlns:a="http://schemas.openxmlformats.org/drawingml/2006/main">
               <a:ext uri="{FF2B5EF4-FFF2-40B4-BE49-F238E27FC236}">
-                <a16:creationId xmlns:a16="http://schemas.microsoft.com/office/drawing/2014/main" id="{C967872A-2891-43D2-A2FB-8FCCDDA5B7E1}"/>
+                <a16:creationId xmlns:a16="http://schemas.microsoft.com/office/drawing/2014/main" id="{5A8B139F-9A74-4799-A4D2-8E184F0341A1}"/>
               </a:ext>
             </a:extLst>
           </p:cNvPr>
@@ -7546,7 +7546,7 @@
           <p:cNvPr id="5" name="Text 3">
             <a:extLst xmlns:a="http://schemas.openxmlformats.org/drawingml/2006/main">
               <a:ext uri="{FF2B5EF4-FFF2-40B4-BE49-F238E27FC236}">
-                <a16:creationId xmlns:a16="http://schemas.microsoft.com/office/drawing/2014/main" id="{14443C45-93CE-4797-91BB-70DC82C8DDFE}"/>
+                <a16:creationId xmlns:a16="http://schemas.microsoft.com/office/drawing/2014/main" id="{5627E92E-6629-4C50-8B7E-552B720B0DCD}"/>
               </a:ext>
             </a:extLst>
           </p:cNvPr>
@@ -7594,7 +7594,7 @@
           <p:cNvPr id="6" name="Text 4">
             <a:extLst xmlns:a="http://schemas.openxmlformats.org/drawingml/2006/main">
               <a:ext uri="{FF2B5EF4-FFF2-40B4-BE49-F238E27FC236}">
-                <a16:creationId xmlns:a16="http://schemas.microsoft.com/office/drawing/2014/main" id="{715A1E08-CB2D-4D80-B309-89FB814B6682}"/>
+                <a16:creationId xmlns:a16="http://schemas.microsoft.com/office/drawing/2014/main" id="{0CF14DB4-ACBA-4229-A6CD-61DBEAD567E2}"/>
               </a:ext>
             </a:extLst>
           </p:cNvPr>
@@ -7642,7 +7642,7 @@
           <p:cNvPr id="7" name="Text 5">
             <a:extLst xmlns:a="http://schemas.openxmlformats.org/drawingml/2006/main">
               <a:ext uri="{FF2B5EF4-FFF2-40B4-BE49-F238E27FC236}">
-                <a16:creationId xmlns:a16="http://schemas.microsoft.com/office/drawing/2014/main" id="{C475BE68-80B7-45F1-8F52-B07741F94B51}"/>
+                <a16:creationId xmlns:a16="http://schemas.microsoft.com/office/drawing/2014/main" id="{A5FB3294-7969-4B5A-A153-403EF48E204F}"/>
               </a:ext>
             </a:extLst>
           </p:cNvPr>
@@ -7690,7 +7690,7 @@
           <p:cNvPr id="8" name="Shape 6">
             <a:extLst xmlns:a="http://schemas.openxmlformats.org/drawingml/2006/main">
               <a:ext uri="{FF2B5EF4-FFF2-40B4-BE49-F238E27FC236}">
-                <a16:creationId xmlns:a16="http://schemas.microsoft.com/office/drawing/2014/main" id="{AD995E35-3202-486C-8EAC-656C6A22682F}"/>
+                <a16:creationId xmlns:a16="http://schemas.microsoft.com/office/drawing/2014/main" id="{B0B47835-F33C-49D6-A5ED-7FFDB244A488}"/>
               </a:ext>
             </a:extLst>
           </p:cNvPr>
@@ -7732,7 +7732,7 @@
           <p:cNvPr id="9" name="Text 7">
             <a:extLst xmlns:a="http://schemas.openxmlformats.org/drawingml/2006/main">
               <a:ext uri="{FF2B5EF4-FFF2-40B4-BE49-F238E27FC236}">
-                <a16:creationId xmlns:a16="http://schemas.microsoft.com/office/drawing/2014/main" id="{8AE85950-47BD-45AA-9318-870B625B056F}"/>
+                <a16:creationId xmlns:a16="http://schemas.microsoft.com/office/drawing/2014/main" id="{ADD38270-E3BF-402B-B854-010984CF78FD}"/>
               </a:ext>
             </a:extLst>
           </p:cNvPr>
@@ -7778,7 +7778,7 @@
           <p:cNvPr id="10" name="Text 8">
             <a:extLst xmlns:a="http://schemas.openxmlformats.org/drawingml/2006/main">
               <a:ext uri="{FF2B5EF4-FFF2-40B4-BE49-F238E27FC236}">
-                <a16:creationId xmlns:a16="http://schemas.microsoft.com/office/drawing/2014/main" id="{D9A25123-9822-4C7D-8236-97BB0F022647}"/>
+                <a16:creationId xmlns:a16="http://schemas.microsoft.com/office/drawing/2014/main" id="{5F6FB1BF-106C-46E5-B6AA-052BB07A19AD}"/>
               </a:ext>
             </a:extLst>
           </p:cNvPr>
@@ -7824,7 +7824,7 @@
           <p:cNvPr id="11" name="Shape 9">
             <a:extLst xmlns:a="http://schemas.openxmlformats.org/drawingml/2006/main">
               <a:ext uri="{FF2B5EF4-FFF2-40B4-BE49-F238E27FC236}">
-                <a16:creationId xmlns:a16="http://schemas.microsoft.com/office/drawing/2014/main" id="{E67DD927-BEA0-4DC9-A0B3-E2E2737F93A9}"/>
+                <a16:creationId xmlns:a16="http://schemas.microsoft.com/office/drawing/2014/main" id="{B8EAB3C0-E34B-4D12-8119-80405898C170}"/>
               </a:ext>
             </a:extLst>
           </p:cNvPr>
@@ -7857,7 +7857,7 @@
           <p:cNvPr id="12" name="Shape 10">
             <a:extLst xmlns:a="http://schemas.openxmlformats.org/drawingml/2006/main">
               <a:ext uri="{FF2B5EF4-FFF2-40B4-BE49-F238E27FC236}">
-                <a16:creationId xmlns:a16="http://schemas.microsoft.com/office/drawing/2014/main" id="{D12D3AA8-5B2C-4E66-8F35-95E6D8D6DE9F}"/>
+                <a16:creationId xmlns:a16="http://schemas.microsoft.com/office/drawing/2014/main" id="{E1115612-225A-4D48-854E-5874CE2FF9CF}"/>
               </a:ext>
             </a:extLst>
           </p:cNvPr>
@@ -7899,7 +7899,7 @@
           <p:cNvPr id="13" name="Text 11">
             <a:extLst xmlns:a="http://schemas.openxmlformats.org/drawingml/2006/main">
               <a:ext uri="{FF2B5EF4-FFF2-40B4-BE49-F238E27FC236}">
-                <a16:creationId xmlns:a16="http://schemas.microsoft.com/office/drawing/2014/main" id="{7A30ECD6-CB33-4DB2-9E8C-C2A169798885}"/>
+                <a16:creationId xmlns:a16="http://schemas.microsoft.com/office/drawing/2014/main" id="{DC306E57-5D67-4681-AAF8-D496EC17A134}"/>
               </a:ext>
             </a:extLst>
           </p:cNvPr>
@@ -7945,7 +7945,7 @@
           <p:cNvPr id="14" name="Text 12">
             <a:extLst xmlns:a="http://schemas.openxmlformats.org/drawingml/2006/main">
               <a:ext uri="{FF2B5EF4-FFF2-40B4-BE49-F238E27FC236}">
-                <a16:creationId xmlns:a16="http://schemas.microsoft.com/office/drawing/2014/main" id="{DFC1980F-CFF8-4F00-84AD-8A0D778BA104}"/>
+                <a16:creationId xmlns:a16="http://schemas.microsoft.com/office/drawing/2014/main" id="{C264DEFA-30AE-4A07-82C1-7DD111D24A1D}"/>
               </a:ext>
             </a:extLst>
           </p:cNvPr>
@@ -7991,7 +7991,7 @@
           <p:cNvPr id="15" name="Shape 13">
             <a:extLst xmlns:a="http://schemas.openxmlformats.org/drawingml/2006/main">
               <a:ext uri="{FF2B5EF4-FFF2-40B4-BE49-F238E27FC236}">
-                <a16:creationId xmlns:a16="http://schemas.microsoft.com/office/drawing/2014/main" id="{13121206-190A-40DC-927C-87C2F152D41B}"/>
+                <a16:creationId xmlns:a16="http://schemas.microsoft.com/office/drawing/2014/main" id="{7BD95288-6EB6-4DC0-AF52-3720334D1B8E}"/>
               </a:ext>
             </a:extLst>
           </p:cNvPr>
@@ -8024,7 +8024,7 @@
           <p:cNvPr id="16" name="Shape 14">
             <a:extLst xmlns:a="http://schemas.openxmlformats.org/drawingml/2006/main">
               <a:ext uri="{FF2B5EF4-FFF2-40B4-BE49-F238E27FC236}">
-                <a16:creationId xmlns:a16="http://schemas.microsoft.com/office/drawing/2014/main" id="{AECC0A36-CD37-4182-A969-CE6F5669D233}"/>
+                <a16:creationId xmlns:a16="http://schemas.microsoft.com/office/drawing/2014/main" id="{D2216CF4-CD3A-4B63-8F78-3DA39800C3A7}"/>
               </a:ext>
             </a:extLst>
           </p:cNvPr>
@@ -8066,7 +8066,7 @@
           <p:cNvPr id="17" name="Text 15">
             <a:extLst xmlns:a="http://schemas.openxmlformats.org/drawingml/2006/main">
               <a:ext uri="{FF2B5EF4-FFF2-40B4-BE49-F238E27FC236}">
-                <a16:creationId xmlns:a16="http://schemas.microsoft.com/office/drawing/2014/main" id="{7131B2CF-40E0-4A1F-BFF4-56AF6B6992C2}"/>
+                <a16:creationId xmlns:a16="http://schemas.microsoft.com/office/drawing/2014/main" id="{942D04F5-26EF-415A-81A4-8DAC274C9706}"/>
               </a:ext>
             </a:extLst>
           </p:cNvPr>
@@ -8112,7 +8112,7 @@
           <p:cNvPr id="18" name="Text 16">
             <a:extLst xmlns:a="http://schemas.openxmlformats.org/drawingml/2006/main">
               <a:ext uri="{FF2B5EF4-FFF2-40B4-BE49-F238E27FC236}">
-                <a16:creationId xmlns:a16="http://schemas.microsoft.com/office/drawing/2014/main" id="{FA073C43-DF4D-4112-8341-09CE4CF52E28}"/>
+                <a16:creationId xmlns:a16="http://schemas.microsoft.com/office/drawing/2014/main" id="{24F0993B-4B79-4D8E-9920-2A708477304A}"/>
               </a:ext>
             </a:extLst>
           </p:cNvPr>
@@ -8158,7 +8158,7 @@
           <p:cNvPr id="19" name="Shape 17">
             <a:extLst xmlns:a="http://schemas.openxmlformats.org/drawingml/2006/main">
               <a:ext uri="{FF2B5EF4-FFF2-40B4-BE49-F238E27FC236}">
-                <a16:creationId xmlns:a16="http://schemas.microsoft.com/office/drawing/2014/main" id="{1F6CE807-438E-4C1D-8A5D-24387F675EAD}"/>
+                <a16:creationId xmlns:a16="http://schemas.microsoft.com/office/drawing/2014/main" id="{6F8EEFBC-B5F2-4EDE-A63F-A48A07F2AF5E}"/>
               </a:ext>
             </a:extLst>
           </p:cNvPr>
@@ -8191,7 +8191,7 @@
           <p:cNvPr id="20" name="Shape 18">
             <a:extLst xmlns:a="http://schemas.openxmlformats.org/drawingml/2006/main">
               <a:ext uri="{FF2B5EF4-FFF2-40B4-BE49-F238E27FC236}">
-                <a16:creationId xmlns:a16="http://schemas.microsoft.com/office/drawing/2014/main" id="{3B4D0E33-D8B0-4377-911A-5C7BF3748018}"/>
+                <a16:creationId xmlns:a16="http://schemas.microsoft.com/office/drawing/2014/main" id="{DE5CAD6A-438A-4D69-9256-45590FDBB256}"/>
               </a:ext>
             </a:extLst>
           </p:cNvPr>
@@ -8233,7 +8233,7 @@
           <p:cNvPr id="21" name="Text 19">
             <a:extLst xmlns:a="http://schemas.openxmlformats.org/drawingml/2006/main">
               <a:ext uri="{FF2B5EF4-FFF2-40B4-BE49-F238E27FC236}">
-                <a16:creationId xmlns:a16="http://schemas.microsoft.com/office/drawing/2014/main" id="{E542E514-487C-46E5-B196-D5335C8080C4}"/>
+                <a16:creationId xmlns:a16="http://schemas.microsoft.com/office/drawing/2014/main" id="{5C84A4EE-E7D2-4CD0-A6EB-9DEA351455CE}"/>
               </a:ext>
             </a:extLst>
           </p:cNvPr>
@@ -8279,7 +8279,7 @@
           <p:cNvPr id="22" name="Text 20">
             <a:extLst xmlns:a="http://schemas.openxmlformats.org/drawingml/2006/main">
               <a:ext uri="{FF2B5EF4-FFF2-40B4-BE49-F238E27FC236}">
-                <a16:creationId xmlns:a16="http://schemas.microsoft.com/office/drawing/2014/main" id="{561ADD99-97E4-4952-A94A-D0B33F3D233D}"/>
+                <a16:creationId xmlns:a16="http://schemas.microsoft.com/office/drawing/2014/main" id="{B5736BD3-48AE-412A-94B6-1334082BC50B}"/>
               </a:ext>
             </a:extLst>
           </p:cNvPr>
@@ -8325,7 +8325,7 @@
           <p:cNvPr id="23" name="Shape 21">
             <a:extLst xmlns:a="http://schemas.openxmlformats.org/drawingml/2006/main">
               <a:ext uri="{FF2B5EF4-FFF2-40B4-BE49-F238E27FC236}">
-                <a16:creationId xmlns:a16="http://schemas.microsoft.com/office/drawing/2014/main" id="{EBFF59E7-25E9-4258-95DE-F707E0F00794}"/>
+                <a16:creationId xmlns:a16="http://schemas.microsoft.com/office/drawing/2014/main" id="{1F805D43-ABE7-4920-ADCE-85085588A6CC}"/>
               </a:ext>
             </a:extLst>
           </p:cNvPr>
@@ -8367,7 +8367,7 @@
           <p:cNvPr id="24" name="Text 22">
             <a:extLst xmlns:a="http://schemas.openxmlformats.org/drawingml/2006/main">
               <a:ext uri="{FF2B5EF4-FFF2-40B4-BE49-F238E27FC236}">
-                <a16:creationId xmlns:a16="http://schemas.microsoft.com/office/drawing/2014/main" id="{63745C65-22F4-4CD0-B1CC-E6F103800A2D}"/>
+                <a16:creationId xmlns:a16="http://schemas.microsoft.com/office/drawing/2014/main" id="{CC2B3B03-A76B-4E36-8B0E-64854AC481D8}"/>
               </a:ext>
             </a:extLst>
           </p:cNvPr>
@@ -8413,7 +8413,7 @@
           <p:cNvPr id="25" name="Text 23">
             <a:extLst xmlns:a="http://schemas.openxmlformats.org/drawingml/2006/main">
               <a:ext uri="{FF2B5EF4-FFF2-40B4-BE49-F238E27FC236}">
-                <a16:creationId xmlns:a16="http://schemas.microsoft.com/office/drawing/2014/main" id="{95071F7B-8AFE-4BFE-B090-DF5E22D44D87}"/>
+                <a16:creationId xmlns:a16="http://schemas.microsoft.com/office/drawing/2014/main" id="{C9AC5795-DB78-47EA-80F2-80DE3E86F1D2}"/>
               </a:ext>
             </a:extLst>
           </p:cNvPr>
@@ -8459,7 +8459,7 @@
           <p:cNvPr id="26" name="Text 24">
             <a:extLst xmlns:a="http://schemas.openxmlformats.org/drawingml/2006/main">
               <a:ext uri="{FF2B5EF4-FFF2-40B4-BE49-F238E27FC236}">
-                <a16:creationId xmlns:a16="http://schemas.microsoft.com/office/drawing/2014/main" id="{AFEA3783-3B5F-404A-B835-615390698FCE}"/>
+                <a16:creationId xmlns:a16="http://schemas.microsoft.com/office/drawing/2014/main" id="{4513D08B-F37F-4929-8C74-9224E5BC89E3}"/>
               </a:ext>
             </a:extLst>
           </p:cNvPr>
@@ -8505,7 +8505,7 @@
           <p:cNvPr id="27" name="Text 25">
             <a:extLst xmlns:a="http://schemas.openxmlformats.org/drawingml/2006/main">
               <a:ext uri="{FF2B5EF4-FFF2-40B4-BE49-F238E27FC236}">
-                <a16:creationId xmlns:a16="http://schemas.microsoft.com/office/drawing/2014/main" id="{AD9F3471-0BEF-4877-B312-462E7E8CBB65}"/>
+                <a16:creationId xmlns:a16="http://schemas.microsoft.com/office/drawing/2014/main" id="{EABF22B1-958B-43DC-8EA5-55BDCE717E9F}"/>
               </a:ext>
             </a:extLst>
           </p:cNvPr>
@@ -8551,7 +8551,7 @@
           <p:cNvPr id="28" name="Text 26">
             <a:extLst xmlns:a="http://schemas.openxmlformats.org/drawingml/2006/main">
               <a:ext uri="{FF2B5EF4-FFF2-40B4-BE49-F238E27FC236}">
-                <a16:creationId xmlns:a16="http://schemas.microsoft.com/office/drawing/2014/main" id="{E283FD4B-8E13-4154-829C-4CD6A1C77BA9}"/>
+                <a16:creationId xmlns:a16="http://schemas.microsoft.com/office/drawing/2014/main" id="{2DE5CEAD-33BB-477D-BC12-5C1AE8881026}"/>
               </a:ext>
             </a:extLst>
           </p:cNvPr>
@@ -8597,7 +8597,7 @@
           <p:cNvPr id="29" name="Text 27">
             <a:extLst xmlns:a="http://schemas.openxmlformats.org/drawingml/2006/main">
               <a:ext uri="{FF2B5EF4-FFF2-40B4-BE49-F238E27FC236}">
-                <a16:creationId xmlns:a16="http://schemas.microsoft.com/office/drawing/2014/main" id="{B5912931-DA1C-4C1F-ADEE-7E1EAEF8F1BB}"/>
+                <a16:creationId xmlns:a16="http://schemas.microsoft.com/office/drawing/2014/main" id="{BB36B5F8-AE4F-4D8D-BBFE-C0EB738761F9}"/>
               </a:ext>
             </a:extLst>
           </p:cNvPr>
@@ -8643,7 +8643,7 @@
           <p:cNvPr id="30" name="Text 28">
             <a:extLst xmlns:a="http://schemas.openxmlformats.org/drawingml/2006/main">
               <a:ext uri="{FF2B5EF4-FFF2-40B4-BE49-F238E27FC236}">
-                <a16:creationId xmlns:a16="http://schemas.microsoft.com/office/drawing/2014/main" id="{42CEFE79-3233-4AC0-BFDC-2A99029B709D}"/>
+                <a16:creationId xmlns:a16="http://schemas.microsoft.com/office/drawing/2014/main" id="{B4C81135-C14D-4636-B73C-1B5B67597608}"/>
               </a:ext>
             </a:extLst>
           </p:cNvPr>
@@ -8689,7 +8689,7 @@
           <p:cNvPr id="31" name="Text 29">
             <a:extLst xmlns:a="http://schemas.openxmlformats.org/drawingml/2006/main">
               <a:ext uri="{FF2B5EF4-FFF2-40B4-BE49-F238E27FC236}">
-                <a16:creationId xmlns:a16="http://schemas.microsoft.com/office/drawing/2014/main" id="{40679BD8-B906-4AB9-9DB2-D9A2A4E7BB8E}"/>
+                <a16:creationId xmlns:a16="http://schemas.microsoft.com/office/drawing/2014/main" id="{89E55E48-B647-4CA7-9722-5AE91D235D9A}"/>
               </a:ext>
             </a:extLst>
           </p:cNvPr>
@@ -8735,7 +8735,7 @@
           <p:cNvPr id="32" name="Text 30">
             <a:extLst xmlns:a="http://schemas.openxmlformats.org/drawingml/2006/main">
               <a:ext uri="{FF2B5EF4-FFF2-40B4-BE49-F238E27FC236}">
-                <a16:creationId xmlns:a16="http://schemas.microsoft.com/office/drawing/2014/main" id="{DD179DA3-A611-470E-A57A-6F1790D6063C}"/>
+                <a16:creationId xmlns:a16="http://schemas.microsoft.com/office/drawing/2014/main" id="{E6766931-7324-4FE6-B212-2B8E4BAC4E8F}"/>
               </a:ext>
             </a:extLst>
           </p:cNvPr>
@@ -8781,7 +8781,7 @@
           <p:cNvPr id="33" name="Shape 31">
             <a:extLst xmlns:a="http://schemas.openxmlformats.org/drawingml/2006/main">
               <a:ext uri="{FF2B5EF4-FFF2-40B4-BE49-F238E27FC236}">
-                <a16:creationId xmlns:a16="http://schemas.microsoft.com/office/drawing/2014/main" id="{7351C5D5-D903-46E9-BFF1-52DCADB3403D}"/>
+                <a16:creationId xmlns:a16="http://schemas.microsoft.com/office/drawing/2014/main" id="{CD4493C9-0D62-44E2-8FC9-9F978237B888}"/>
               </a:ext>
             </a:extLst>
           </p:cNvPr>
@@ -8816,7 +8816,7 @@
           <p:cNvPr id="34" name="Text 32">
             <a:extLst xmlns:a="http://schemas.openxmlformats.org/drawingml/2006/main">
               <a:ext uri="{FF2B5EF4-FFF2-40B4-BE49-F238E27FC236}">
-                <a16:creationId xmlns:a16="http://schemas.microsoft.com/office/drawing/2014/main" id="{959BAF08-747F-4016-8907-21BBFB23A612}"/>
+                <a16:creationId xmlns:a16="http://schemas.microsoft.com/office/drawing/2014/main" id="{65BD79AC-EA2B-4AF3-9315-B6AE8C765056}"/>
               </a:ext>
             </a:extLst>
           </p:cNvPr>
@@ -8862,7 +8862,7 @@
           <p:cNvPr id="35" name="Text 33">
             <a:extLst xmlns:a="http://schemas.openxmlformats.org/drawingml/2006/main">
               <a:ext uri="{FF2B5EF4-FFF2-40B4-BE49-F238E27FC236}">
-                <a16:creationId xmlns:a16="http://schemas.microsoft.com/office/drawing/2014/main" id="{5E5673D6-7082-49EB-A22E-EFF7F790BEDC}"/>
+                <a16:creationId xmlns:a16="http://schemas.microsoft.com/office/drawing/2014/main" id="{E54B1E1A-667A-41D4-B595-291D357F12A2}"/>
               </a:ext>
             </a:extLst>
           </p:cNvPr>
@@ -8908,7 +8908,7 @@
           <p:cNvPr id="36" name="Text 34">
             <a:extLst xmlns:a="http://schemas.openxmlformats.org/drawingml/2006/main">
               <a:ext uri="{FF2B5EF4-FFF2-40B4-BE49-F238E27FC236}">
-                <a16:creationId xmlns:a16="http://schemas.microsoft.com/office/drawing/2014/main" id="{7E328BDE-D3B1-43A8-A306-1972269927FE}"/>
+                <a16:creationId xmlns:a16="http://schemas.microsoft.com/office/drawing/2014/main" id="{1F6D8149-6005-44B8-8C0F-DB3D1073EC42}"/>
               </a:ext>
             </a:extLst>
           </p:cNvPr>
@@ -8954,7 +8954,7 @@
           <p:cNvPr id="37" name="Text 35">
             <a:extLst xmlns:a="http://schemas.openxmlformats.org/drawingml/2006/main">
               <a:ext uri="{FF2B5EF4-FFF2-40B4-BE49-F238E27FC236}">
-                <a16:creationId xmlns:a16="http://schemas.microsoft.com/office/drawing/2014/main" id="{B819B054-0E3A-446A-A58A-2599433C42C4}"/>
+                <a16:creationId xmlns:a16="http://schemas.microsoft.com/office/drawing/2014/main" id="{C87E8957-B533-43F4-86A3-85D45B41960A}"/>
               </a:ext>
             </a:extLst>
           </p:cNvPr>
@@ -9000,7 +9000,7 @@
           <p:cNvPr id="38" name="Text 36">
             <a:extLst xmlns:a="http://schemas.openxmlformats.org/drawingml/2006/main">
               <a:ext uri="{FF2B5EF4-FFF2-40B4-BE49-F238E27FC236}">
-                <a16:creationId xmlns:a16="http://schemas.microsoft.com/office/drawing/2014/main" id="{C2015F7D-AC41-4767-BFB6-2F0278BFB7A1}"/>
+                <a16:creationId xmlns:a16="http://schemas.microsoft.com/office/drawing/2014/main" id="{3B79419B-B84D-428A-908F-F1DA35CDA5B9}"/>
               </a:ext>
             </a:extLst>
           </p:cNvPr>
@@ -9046,7 +9046,7 @@
           <p:cNvPr id="39" name="Text 37">
             <a:extLst xmlns:a="http://schemas.openxmlformats.org/drawingml/2006/main">
               <a:ext uri="{FF2B5EF4-FFF2-40B4-BE49-F238E27FC236}">
-                <a16:creationId xmlns:a16="http://schemas.microsoft.com/office/drawing/2014/main" id="{90F42516-862C-4F88-86C0-8A77525B4C24}"/>
+                <a16:creationId xmlns:a16="http://schemas.microsoft.com/office/drawing/2014/main" id="{AEE21659-169A-4E1C-B6F3-03E13B01275A}"/>
               </a:ext>
             </a:extLst>
           </p:cNvPr>
@@ -9092,7 +9092,7 @@
           <p:cNvPr id="40" name="Text 38">
             <a:extLst xmlns:a="http://schemas.openxmlformats.org/drawingml/2006/main">
               <a:ext uri="{FF2B5EF4-FFF2-40B4-BE49-F238E27FC236}">
-                <a16:creationId xmlns:a16="http://schemas.microsoft.com/office/drawing/2014/main" id="{EDDC4661-0CDC-4C1B-8FD1-907EAAC7BA29}"/>
+                <a16:creationId xmlns:a16="http://schemas.microsoft.com/office/drawing/2014/main" id="{94ECE0C4-C19C-49FE-812C-4C64E01B4887}"/>
               </a:ext>
             </a:extLst>
           </p:cNvPr>
@@ -9138,7 +9138,7 @@
           <p:cNvPr id="41" name="Text 39">
             <a:extLst xmlns:a="http://schemas.openxmlformats.org/drawingml/2006/main">
               <a:ext uri="{FF2B5EF4-FFF2-40B4-BE49-F238E27FC236}">
-                <a16:creationId xmlns:a16="http://schemas.microsoft.com/office/drawing/2014/main" id="{9EFD94F3-BC66-4D0C-97A2-487969D99476}"/>
+                <a16:creationId xmlns:a16="http://schemas.microsoft.com/office/drawing/2014/main" id="{88056A6D-1FED-444D-98B9-F4D5E2B25A54}"/>
               </a:ext>
             </a:extLst>
           </p:cNvPr>
@@ -9184,7 +9184,7 @@
           <p:cNvPr id="42" name="Text 40">
             <a:extLst xmlns:a="http://schemas.openxmlformats.org/drawingml/2006/main">
               <a:ext uri="{FF2B5EF4-FFF2-40B4-BE49-F238E27FC236}">
-                <a16:creationId xmlns:a16="http://schemas.microsoft.com/office/drawing/2014/main" id="{C9EA380A-E0B4-43AF-A9A1-0E07936CA073}"/>
+                <a16:creationId xmlns:a16="http://schemas.microsoft.com/office/drawing/2014/main" id="{608DC003-4DC2-4134-8F22-090B468C655B}"/>
               </a:ext>
             </a:extLst>
           </p:cNvPr>
@@ -9230,7 +9230,7 @@
           <p:cNvPr id="43" name="Text 41">
             <a:extLst xmlns:a="http://schemas.openxmlformats.org/drawingml/2006/main">
               <a:ext uri="{FF2B5EF4-FFF2-40B4-BE49-F238E27FC236}">
-                <a16:creationId xmlns:a16="http://schemas.microsoft.com/office/drawing/2014/main" id="{27DD56E1-AC23-4427-B357-B1D3551AE79A}"/>
+                <a16:creationId xmlns:a16="http://schemas.microsoft.com/office/drawing/2014/main" id="{B7C0E022-96FF-4A7A-A694-9C4E20DF00FE}"/>
               </a:ext>
             </a:extLst>
           </p:cNvPr>
@@ -9276,7 +9276,7 @@
           <p:cNvPr id="44" name="Shape 42">
             <a:extLst xmlns:a="http://schemas.openxmlformats.org/drawingml/2006/main">
               <a:ext uri="{FF2B5EF4-FFF2-40B4-BE49-F238E27FC236}">
-                <a16:creationId xmlns:a16="http://schemas.microsoft.com/office/drawing/2014/main" id="{ABAF2816-50E5-44FD-BC1C-5F558ECE554A}"/>
+                <a16:creationId xmlns:a16="http://schemas.microsoft.com/office/drawing/2014/main" id="{D141C2C5-C72D-4FEB-AE7D-95DDCB6118DD}"/>
               </a:ext>
             </a:extLst>
           </p:cNvPr>
@@ -9313,7 +9313,7 @@
           <p:cNvPr id="45" name="Text 43">
             <a:extLst xmlns:a="http://schemas.openxmlformats.org/drawingml/2006/main">
               <a:ext uri="{FF2B5EF4-FFF2-40B4-BE49-F238E27FC236}">
-                <a16:creationId xmlns:a16="http://schemas.microsoft.com/office/drawing/2014/main" id="{137065B4-8335-46F9-8E1E-609A29D5792A}"/>
+                <a16:creationId xmlns:a16="http://schemas.microsoft.com/office/drawing/2014/main" id="{8432C445-BB7A-4C60-BD71-E70DE4CE6E18}"/>
               </a:ext>
             </a:extLst>
           </p:cNvPr>
@@ -9361,7 +9361,7 @@
           <p:cNvPr id="46" name="Text 44">
             <a:extLst xmlns:a="http://schemas.openxmlformats.org/drawingml/2006/main">
               <a:ext uri="{FF2B5EF4-FFF2-40B4-BE49-F238E27FC236}">
-                <a16:creationId xmlns:a16="http://schemas.microsoft.com/office/drawing/2014/main" id="{60B9EC40-F042-4207-A72C-C4A437EE5151}"/>
+                <a16:creationId xmlns:a16="http://schemas.microsoft.com/office/drawing/2014/main" id="{3C386D7E-CF4E-4054-A982-E38C72589B16}"/>
               </a:ext>
             </a:extLst>
           </p:cNvPr>
@@ -9409,7 +9409,7 @@
           <p:cNvPr id="47" name="Text 45">
             <a:extLst xmlns:a="http://schemas.openxmlformats.org/drawingml/2006/main">
               <a:ext uri="{FF2B5EF4-FFF2-40B4-BE49-F238E27FC236}">
-                <a16:creationId xmlns:a16="http://schemas.microsoft.com/office/drawing/2014/main" id="{C4E0A5EF-D263-4C5B-8977-5A6EF43EAF5A}"/>
+                <a16:creationId xmlns:a16="http://schemas.microsoft.com/office/drawing/2014/main" id="{1A245BFC-B69A-4244-8C20-EFE318CA9375}"/>
               </a:ext>
             </a:extLst>
           </p:cNvPr>
@@ -9446,7 +9446,7 @@
                 <a:ea typeface="Microsoft YaHei"/>
                 <a:cs typeface="Microsoft YaHei"/>
               </a:rPr>
-              <a:t>智能云储 · DOEF | 补充实验与方法说明</a:t>
+              <a:t>智储云控 · DOEF | 补充实验与方法说明</a:t>
             </a:r>
             <a:endParaRPr sz="750"/>
           </a:p>
@@ -9457,7 +9457,7 @@
           <p:cNvPr id="48" name="Slide Number Placeholder 0">
             <a:extLst xmlns:a="http://schemas.openxmlformats.org/drawingml/2006/main">
               <a:ext uri="{FF2B5EF4-FFF2-40B4-BE49-F238E27FC236}">
-                <a16:creationId xmlns:a16="http://schemas.microsoft.com/office/drawing/2014/main" id="{7EC470B6-A6B0-4ACD-86B3-AE8DE9943203}"/>
+                <a16:creationId xmlns:a16="http://schemas.microsoft.com/office/drawing/2014/main" id="{127604F2-4CF9-4FAC-9B2E-D94A0B572D52}"/>
               </a:ext>
             </a:extLst>
           </p:cNvPr>
@@ -9507,7 +9507,7 @@
     </p:spTree>
     <p:extLst>
       <p:ext uri="{BB962C8B-B14F-4D97-AF65-F5344CB8AC3E}">
-        <p14:creationId xmlns:p14="http://schemas.microsoft.com/office/powerpoint/2010/main" val="1425597873"/>
+        <p14:creationId xmlns:p14="http://schemas.microsoft.com/office/powerpoint/2010/main" val="234569045"/>
       </p:ext>
     </p:extLst>
   </p:cSld>
@@ -9531,7 +9531,7 @@
           <p:cNvPr id="2" name="Text 0">
             <a:extLst xmlns:a="http://schemas.openxmlformats.org/drawingml/2006/main">
               <a:ext uri="{FF2B5EF4-FFF2-40B4-BE49-F238E27FC236}">
-                <a16:creationId xmlns:a16="http://schemas.microsoft.com/office/drawing/2014/main" id="{1C29E42C-5C32-4844-8914-42A6619ECE86}"/>
+                <a16:creationId xmlns:a16="http://schemas.microsoft.com/office/drawing/2014/main" id="{9CE05643-13C1-40D8-9213-661583504350}"/>
               </a:ext>
             </a:extLst>
           </p:cNvPr>
@@ -9577,7 +9577,7 @@
           <p:cNvPr id="3" name="Text 1">
             <a:extLst xmlns:a="http://schemas.openxmlformats.org/drawingml/2006/main">
               <a:ext uri="{FF2B5EF4-FFF2-40B4-BE49-F238E27FC236}">
-                <a16:creationId xmlns:a16="http://schemas.microsoft.com/office/drawing/2014/main" id="{32899D24-43F9-40E9-B56F-EF851EBBD72C}"/>
+                <a16:creationId xmlns:a16="http://schemas.microsoft.com/office/drawing/2014/main" id="{E7892479-5208-4C27-A7C8-0DB877CD9F68}"/>
               </a:ext>
             </a:extLst>
           </p:cNvPr>
@@ -9623,7 +9623,7 @@
           <p:cNvPr id="4" name="Shape 2">
             <a:extLst xmlns:a="http://schemas.openxmlformats.org/drawingml/2006/main">
               <a:ext uri="{FF2B5EF4-FFF2-40B4-BE49-F238E27FC236}">
-                <a16:creationId xmlns:a16="http://schemas.microsoft.com/office/drawing/2014/main" id="{6256A934-DDD4-4F7B-9ED6-24821BAA3FF1}"/>
+                <a16:creationId xmlns:a16="http://schemas.microsoft.com/office/drawing/2014/main" id="{6FFDB8BE-700F-4E6E-AB9C-8241BB109E81}"/>
               </a:ext>
             </a:extLst>
           </p:cNvPr>
@@ -9660,7 +9660,7 @@
           <p:cNvPr id="5" name="Text 3">
             <a:extLst xmlns:a="http://schemas.openxmlformats.org/drawingml/2006/main">
               <a:ext uri="{FF2B5EF4-FFF2-40B4-BE49-F238E27FC236}">
-                <a16:creationId xmlns:a16="http://schemas.microsoft.com/office/drawing/2014/main" id="{62BF802C-E544-4767-985C-76E57A37B0C1}"/>
+                <a16:creationId xmlns:a16="http://schemas.microsoft.com/office/drawing/2014/main" id="{DEF3B157-75A0-4899-87D4-E0727D4E1376}"/>
               </a:ext>
             </a:extLst>
           </p:cNvPr>
@@ -9708,7 +9708,7 @@
           <p:cNvPr id="6" name="Text 4">
             <a:extLst xmlns:a="http://schemas.openxmlformats.org/drawingml/2006/main">
               <a:ext uri="{FF2B5EF4-FFF2-40B4-BE49-F238E27FC236}">
-                <a16:creationId xmlns:a16="http://schemas.microsoft.com/office/drawing/2014/main" id="{21CC7B41-E907-4023-AE63-1501F91D2ACB}"/>
+                <a16:creationId xmlns:a16="http://schemas.microsoft.com/office/drawing/2014/main" id="{7DA4660E-BBE9-42EA-A413-C17074A4ECDF}"/>
               </a:ext>
             </a:extLst>
           </p:cNvPr>
@@ -9756,7 +9756,7 @@
           <p:cNvPr id="7" name="Text 5">
             <a:extLst xmlns:a="http://schemas.openxmlformats.org/drawingml/2006/main">
               <a:ext uri="{FF2B5EF4-FFF2-40B4-BE49-F238E27FC236}">
-                <a16:creationId xmlns:a16="http://schemas.microsoft.com/office/drawing/2014/main" id="{577FC083-B66A-474B-885B-D59E4F70E9F6}"/>
+                <a16:creationId xmlns:a16="http://schemas.microsoft.com/office/drawing/2014/main" id="{22C2EC9F-7370-41FB-B447-CA52AFF0DC19}"/>
               </a:ext>
             </a:extLst>
           </p:cNvPr>
@@ -9804,7 +9804,7 @@
           <p:cNvPr id="8" name="Shape 6">
             <a:extLst xmlns:a="http://schemas.openxmlformats.org/drawingml/2006/main">
               <a:ext uri="{FF2B5EF4-FFF2-40B4-BE49-F238E27FC236}">
-                <a16:creationId xmlns:a16="http://schemas.microsoft.com/office/drawing/2014/main" id="{91002226-5B83-4367-B30A-66BD8C73848D}"/>
+                <a16:creationId xmlns:a16="http://schemas.microsoft.com/office/drawing/2014/main" id="{9DC883FA-07F9-493E-A305-8192B94E482C}"/>
               </a:ext>
             </a:extLst>
           </p:cNvPr>
@@ -9850,7 +9850,7 @@
           <p:nvPr/>
         </p:nvPicPr>
         <p:blipFill>
-          <a:blip xmlns:r="http://schemas.openxmlformats.org/officeDocument/2006/relationships" xmlns:a="http://schemas.openxmlformats.org/drawingml/2006/main" r:embed="R245b767113bc4ebd"/>
+          <a:blip xmlns:r="http://schemas.openxmlformats.org/officeDocument/2006/relationships" xmlns:a="http://schemas.openxmlformats.org/drawingml/2006/main" r:embed="Rf89eaafdf524424b"/>
           <a:stretch xmlns:a="http://schemas.openxmlformats.org/drawingml/2006/main">
             <a:fillRect l="0" t="0" r="0" b="0"/>
           </a:stretch>
@@ -9870,7 +9870,7 @@
           <p:cNvPr id="10" name="Shape 7">
             <a:extLst xmlns:a="http://schemas.openxmlformats.org/drawingml/2006/main">
               <a:ext uri="{FF2B5EF4-FFF2-40B4-BE49-F238E27FC236}">
-                <a16:creationId xmlns:a16="http://schemas.microsoft.com/office/drawing/2014/main" id="{7D55704E-2EF7-4C61-B9D0-7B76ADF8D7EA}"/>
+                <a16:creationId xmlns:a16="http://schemas.microsoft.com/office/drawing/2014/main" id="{F0281C41-D179-484E-B0B8-130A5C48B0E4}"/>
               </a:ext>
             </a:extLst>
           </p:cNvPr>
@@ -9905,7 +9905,7 @@
           <p:cNvPr id="11" name="Text 8">
             <a:extLst xmlns:a="http://schemas.openxmlformats.org/drawingml/2006/main">
               <a:ext uri="{FF2B5EF4-FFF2-40B4-BE49-F238E27FC236}">
-                <a16:creationId xmlns:a16="http://schemas.microsoft.com/office/drawing/2014/main" id="{3501C665-E146-4FFF-BEB8-38ED679AA2C7}"/>
+                <a16:creationId xmlns:a16="http://schemas.microsoft.com/office/drawing/2014/main" id="{53A5798B-C411-4849-8F9C-E3B1E7A7250B}"/>
               </a:ext>
             </a:extLst>
           </p:cNvPr>
@@ -9951,7 +9951,7 @@
           <p:cNvPr id="12" name="Text 9">
             <a:extLst xmlns:a="http://schemas.openxmlformats.org/drawingml/2006/main">
               <a:ext uri="{FF2B5EF4-FFF2-40B4-BE49-F238E27FC236}">
-                <a16:creationId xmlns:a16="http://schemas.microsoft.com/office/drawing/2014/main" id="{767609B4-73BF-4F79-AFB8-538A3324DA38}"/>
+                <a16:creationId xmlns:a16="http://schemas.microsoft.com/office/drawing/2014/main" id="{A8DD7E17-3DD1-4EFA-A7B1-61D2B282177B}"/>
               </a:ext>
             </a:extLst>
           </p:cNvPr>
@@ -9997,7 +9997,7 @@
           <p:cNvPr id="13" name="Text 10">
             <a:extLst xmlns:a="http://schemas.openxmlformats.org/drawingml/2006/main">
               <a:ext uri="{FF2B5EF4-FFF2-40B4-BE49-F238E27FC236}">
-                <a16:creationId xmlns:a16="http://schemas.microsoft.com/office/drawing/2014/main" id="{698DFEFD-3409-4EDB-A03A-611901CCFC9F}"/>
+                <a16:creationId xmlns:a16="http://schemas.microsoft.com/office/drawing/2014/main" id="{C20EEB3B-8891-4AAC-916C-E880CAD9CA07}"/>
               </a:ext>
             </a:extLst>
           </p:cNvPr>
@@ -10043,7 +10043,7 @@
           <p:cNvPr id="14" name="Text 11">
             <a:extLst xmlns:a="http://schemas.openxmlformats.org/drawingml/2006/main">
               <a:ext uri="{FF2B5EF4-FFF2-40B4-BE49-F238E27FC236}">
-                <a16:creationId xmlns:a16="http://schemas.microsoft.com/office/drawing/2014/main" id="{38A1BA2C-0C93-4E4E-BB8B-144377F10EA9}"/>
+                <a16:creationId xmlns:a16="http://schemas.microsoft.com/office/drawing/2014/main" id="{05EDC6A5-360F-4ED9-B733-2B8E98235B04}"/>
               </a:ext>
             </a:extLst>
           </p:cNvPr>
@@ -10089,7 +10089,7 @@
           <p:cNvPr id="15" name="Text 12">
             <a:extLst xmlns:a="http://schemas.openxmlformats.org/drawingml/2006/main">
               <a:ext uri="{FF2B5EF4-FFF2-40B4-BE49-F238E27FC236}">
-                <a16:creationId xmlns:a16="http://schemas.microsoft.com/office/drawing/2014/main" id="{34603F98-9DF2-48B8-BD7F-8D044C09D99B}"/>
+                <a16:creationId xmlns:a16="http://schemas.microsoft.com/office/drawing/2014/main" id="{2AEF29DB-C1B8-4819-93FC-B785F49B4886}"/>
               </a:ext>
             </a:extLst>
           </p:cNvPr>
@@ -10135,7 +10135,7 @@
           <p:cNvPr id="16" name="Text 13">
             <a:extLst xmlns:a="http://schemas.openxmlformats.org/drawingml/2006/main">
               <a:ext uri="{FF2B5EF4-FFF2-40B4-BE49-F238E27FC236}">
-                <a16:creationId xmlns:a16="http://schemas.microsoft.com/office/drawing/2014/main" id="{FF804D8A-D9D5-46E8-AD32-983968EB9F2A}"/>
+                <a16:creationId xmlns:a16="http://schemas.microsoft.com/office/drawing/2014/main" id="{A7766156-A636-4170-9486-FCAA2D6E6F90}"/>
               </a:ext>
             </a:extLst>
           </p:cNvPr>
@@ -10181,7 +10181,7 @@
           <p:cNvPr id="17" name="Shape 14">
             <a:extLst xmlns:a="http://schemas.openxmlformats.org/drawingml/2006/main">
               <a:ext uri="{FF2B5EF4-FFF2-40B4-BE49-F238E27FC236}">
-                <a16:creationId xmlns:a16="http://schemas.microsoft.com/office/drawing/2014/main" id="{649A122B-B860-46DB-9217-723803A9E755}"/>
+                <a16:creationId xmlns:a16="http://schemas.microsoft.com/office/drawing/2014/main" id="{70850B53-21FD-44E3-B953-4200CC5B5337}"/>
               </a:ext>
             </a:extLst>
           </p:cNvPr>
@@ -10218,7 +10218,7 @@
           <p:cNvPr id="18" name="Text 15">
             <a:extLst xmlns:a="http://schemas.openxmlformats.org/drawingml/2006/main">
               <a:ext uri="{FF2B5EF4-FFF2-40B4-BE49-F238E27FC236}">
-                <a16:creationId xmlns:a16="http://schemas.microsoft.com/office/drawing/2014/main" id="{CB4953C3-ECEB-4E41-AFA3-3DEFF9740B56}"/>
+                <a16:creationId xmlns:a16="http://schemas.microsoft.com/office/drawing/2014/main" id="{932F70C2-8C1F-4D1E-A017-D7F4E244A285}"/>
               </a:ext>
             </a:extLst>
           </p:cNvPr>
@@ -10266,7 +10266,7 @@
           <p:cNvPr id="19" name="Text 16">
             <a:extLst xmlns:a="http://schemas.openxmlformats.org/drawingml/2006/main">
               <a:ext uri="{FF2B5EF4-FFF2-40B4-BE49-F238E27FC236}">
-                <a16:creationId xmlns:a16="http://schemas.microsoft.com/office/drawing/2014/main" id="{A0AF0277-78BA-4F26-AAEA-B8D3B17AA6FF}"/>
+                <a16:creationId xmlns:a16="http://schemas.microsoft.com/office/drawing/2014/main" id="{EF12CF3D-5490-4448-8BF0-2773EE5FAE76}"/>
               </a:ext>
             </a:extLst>
           </p:cNvPr>
@@ -10314,7 +10314,7 @@
           <p:cNvPr id="20" name="Text 17">
             <a:extLst xmlns:a="http://schemas.openxmlformats.org/drawingml/2006/main">
               <a:ext uri="{FF2B5EF4-FFF2-40B4-BE49-F238E27FC236}">
-                <a16:creationId xmlns:a16="http://schemas.microsoft.com/office/drawing/2014/main" id="{094411C4-4B78-4985-955C-37033D913057}"/>
+                <a16:creationId xmlns:a16="http://schemas.microsoft.com/office/drawing/2014/main" id="{DE9B5B55-461C-446A-9867-21B341F77756}"/>
               </a:ext>
             </a:extLst>
           </p:cNvPr>
@@ -10351,7 +10351,7 @@
                 <a:ea typeface="Microsoft YaHei"/>
                 <a:cs typeface="Microsoft YaHei"/>
               </a:rPr>
-              <a:t>智能云储 · DOEF | 补充实验与方法说明</a:t>
+              <a:t>智储云控 · DOEF | 补充实验与方法说明</a:t>
             </a:r>
             <a:endParaRPr sz="750"/>
           </a:p>
@@ -10362,7 +10362,7 @@
           <p:cNvPr id="25" name="Slide Number Placeholder 0">
             <a:extLst xmlns:a="http://schemas.openxmlformats.org/drawingml/2006/main">
               <a:ext uri="{FF2B5EF4-FFF2-40B4-BE49-F238E27FC236}">
-                <a16:creationId xmlns:a16="http://schemas.microsoft.com/office/drawing/2014/main" id="{911F331E-090D-4BFA-8964-B07D903935A1}"/>
+                <a16:creationId xmlns:a16="http://schemas.microsoft.com/office/drawing/2014/main" id="{15F1C17A-EE3B-44B3-8DBF-6DF40A593063}"/>
               </a:ext>
             </a:extLst>
           </p:cNvPr>
@@ -10412,7 +10412,7 @@
     </p:spTree>
     <p:extLst>
       <p:ext uri="{BB962C8B-B14F-4D97-AF65-F5344CB8AC3E}">
-        <p14:creationId xmlns:p14="http://schemas.microsoft.com/office/powerpoint/2010/main" val="374339205"/>
+        <p14:creationId xmlns:p14="http://schemas.microsoft.com/office/powerpoint/2010/main" val="1387862529"/>
       </p:ext>
     </p:extLst>
   </p:cSld>
@@ -10436,7 +10436,7 @@
           <p:cNvPr id="2" name="Text 0">
             <a:extLst xmlns:a="http://schemas.openxmlformats.org/drawingml/2006/main">
               <a:ext uri="{FF2B5EF4-FFF2-40B4-BE49-F238E27FC236}">
-                <a16:creationId xmlns:a16="http://schemas.microsoft.com/office/drawing/2014/main" id="{14A8E42A-41D4-416F-B55C-E6900B96523E}"/>
+                <a16:creationId xmlns:a16="http://schemas.microsoft.com/office/drawing/2014/main" id="{BD2419EC-9411-41AC-A1A6-AF5E77F7F818}"/>
               </a:ext>
             </a:extLst>
           </p:cNvPr>
@@ -10482,7 +10482,7 @@
           <p:cNvPr id="3" name="Text 1">
             <a:extLst xmlns:a="http://schemas.openxmlformats.org/drawingml/2006/main">
               <a:ext uri="{FF2B5EF4-FFF2-40B4-BE49-F238E27FC236}">
-                <a16:creationId xmlns:a16="http://schemas.microsoft.com/office/drawing/2014/main" id="{3DDE559F-2B9E-4D39-A8DF-1E5B26FDF489}"/>
+                <a16:creationId xmlns:a16="http://schemas.microsoft.com/office/drawing/2014/main" id="{B38F44AB-7E45-4930-B232-E3C79967386D}"/>
               </a:ext>
             </a:extLst>
           </p:cNvPr>
@@ -10528,7 +10528,7 @@
           <p:cNvPr id="4" name="Shape 2">
             <a:extLst xmlns:a="http://schemas.openxmlformats.org/drawingml/2006/main">
               <a:ext uri="{FF2B5EF4-FFF2-40B4-BE49-F238E27FC236}">
-                <a16:creationId xmlns:a16="http://schemas.microsoft.com/office/drawing/2014/main" id="{7BD09C8C-234F-4B1A-93E5-EE7B2412900B}"/>
+                <a16:creationId xmlns:a16="http://schemas.microsoft.com/office/drawing/2014/main" id="{734A4907-6B42-438A-A92F-DCACFCB3F08C}"/>
               </a:ext>
             </a:extLst>
           </p:cNvPr>
@@ -10565,7 +10565,7 @@
           <p:cNvPr id="5" name="Text 3">
             <a:extLst xmlns:a="http://schemas.openxmlformats.org/drawingml/2006/main">
               <a:ext uri="{FF2B5EF4-FFF2-40B4-BE49-F238E27FC236}">
-                <a16:creationId xmlns:a16="http://schemas.microsoft.com/office/drawing/2014/main" id="{18C6CE2E-FE61-4381-B578-BE9B64560AC8}"/>
+                <a16:creationId xmlns:a16="http://schemas.microsoft.com/office/drawing/2014/main" id="{E722690F-3362-4A85-92E3-0772D892E3DC}"/>
               </a:ext>
             </a:extLst>
           </p:cNvPr>
@@ -10613,7 +10613,7 @@
           <p:cNvPr id="6" name="Text 4">
             <a:extLst xmlns:a="http://schemas.openxmlformats.org/drawingml/2006/main">
               <a:ext uri="{FF2B5EF4-FFF2-40B4-BE49-F238E27FC236}">
-                <a16:creationId xmlns:a16="http://schemas.microsoft.com/office/drawing/2014/main" id="{90C6860D-51E7-45E1-9E00-82FDCBED52F1}"/>
+                <a16:creationId xmlns:a16="http://schemas.microsoft.com/office/drawing/2014/main" id="{D18E865E-565E-4C3A-96D7-BDADE095E293}"/>
               </a:ext>
             </a:extLst>
           </p:cNvPr>
@@ -10661,7 +10661,7 @@
           <p:cNvPr id="7" name="Text 5">
             <a:extLst xmlns:a="http://schemas.openxmlformats.org/drawingml/2006/main">
               <a:ext uri="{FF2B5EF4-FFF2-40B4-BE49-F238E27FC236}">
-                <a16:creationId xmlns:a16="http://schemas.microsoft.com/office/drawing/2014/main" id="{2329CFCB-35CF-4F59-96AF-9CA3D5A3AEFF}"/>
+                <a16:creationId xmlns:a16="http://schemas.microsoft.com/office/drawing/2014/main" id="{C028A353-6FFF-41EA-A268-0D5F337BA5BA}"/>
               </a:ext>
             </a:extLst>
           </p:cNvPr>
@@ -10709,7 +10709,7 @@
           <p:cNvPr id="8" name="Shape 6">
             <a:extLst xmlns:a="http://schemas.openxmlformats.org/drawingml/2006/main">
               <a:ext uri="{FF2B5EF4-FFF2-40B4-BE49-F238E27FC236}">
-                <a16:creationId xmlns:a16="http://schemas.microsoft.com/office/drawing/2014/main" id="{AF67CB58-C237-412D-995F-0F217E8A0F49}"/>
+                <a16:creationId xmlns:a16="http://schemas.microsoft.com/office/drawing/2014/main" id="{892C5DAD-1D23-446A-B1B0-CA65A16B0F56}"/>
               </a:ext>
             </a:extLst>
           </p:cNvPr>
@@ -10742,7 +10742,7 @@
           <p:cNvPr id="9" name="Text 7">
             <a:extLst xmlns:a="http://schemas.openxmlformats.org/drawingml/2006/main">
               <a:ext uri="{FF2B5EF4-FFF2-40B4-BE49-F238E27FC236}">
-                <a16:creationId xmlns:a16="http://schemas.microsoft.com/office/drawing/2014/main" id="{C85885E2-D90D-4D7C-BDAA-FA4402D6F78C}"/>
+                <a16:creationId xmlns:a16="http://schemas.microsoft.com/office/drawing/2014/main" id="{54BF879E-354E-4580-9B29-F9658DD94745}"/>
               </a:ext>
             </a:extLst>
           </p:cNvPr>
@@ -10788,7 +10788,7 @@
           <p:cNvPr id="10" name="Shape 8">
             <a:extLst xmlns:a="http://schemas.openxmlformats.org/drawingml/2006/main">
               <a:ext uri="{FF2B5EF4-FFF2-40B4-BE49-F238E27FC236}">
-                <a16:creationId xmlns:a16="http://schemas.microsoft.com/office/drawing/2014/main" id="{4A20EBC6-A5DB-4EB9-B14D-0E8E44D89768}"/>
+                <a16:creationId xmlns:a16="http://schemas.microsoft.com/office/drawing/2014/main" id="{FA84808B-79AB-4B05-BE21-4827BCB631DD}"/>
               </a:ext>
             </a:extLst>
           </p:cNvPr>
@@ -10821,7 +10821,7 @@
           <p:cNvPr id="11" name="Text 9">
             <a:extLst xmlns:a="http://schemas.openxmlformats.org/drawingml/2006/main">
               <a:ext uri="{FF2B5EF4-FFF2-40B4-BE49-F238E27FC236}">
-                <a16:creationId xmlns:a16="http://schemas.microsoft.com/office/drawing/2014/main" id="{DC1F0531-1C59-4607-BA40-B3E9D7CE3A69}"/>
+                <a16:creationId xmlns:a16="http://schemas.microsoft.com/office/drawing/2014/main" id="{B342239D-DE64-44E0-8B98-4D1BC0E865FC}"/>
               </a:ext>
             </a:extLst>
           </p:cNvPr>
@@ -10867,7 +10867,7 @@
           <p:cNvPr id="12" name="Shape 10">
             <a:extLst xmlns:a="http://schemas.openxmlformats.org/drawingml/2006/main">
               <a:ext uri="{FF2B5EF4-FFF2-40B4-BE49-F238E27FC236}">
-                <a16:creationId xmlns:a16="http://schemas.microsoft.com/office/drawing/2014/main" id="{5B5EE4FF-1D1C-4A23-8E1A-4A0503546E61}"/>
+                <a16:creationId xmlns:a16="http://schemas.microsoft.com/office/drawing/2014/main" id="{8B15898A-B00E-4384-AD9C-A59E57137308}"/>
               </a:ext>
             </a:extLst>
           </p:cNvPr>
@@ -10900,7 +10900,7 @@
           <p:cNvPr id="13" name="Text 11">
             <a:extLst xmlns:a="http://schemas.openxmlformats.org/drawingml/2006/main">
               <a:ext uri="{FF2B5EF4-FFF2-40B4-BE49-F238E27FC236}">
-                <a16:creationId xmlns:a16="http://schemas.microsoft.com/office/drawing/2014/main" id="{19248468-D922-4197-B0BF-0EF057D920C7}"/>
+                <a16:creationId xmlns:a16="http://schemas.microsoft.com/office/drawing/2014/main" id="{12AA4367-295D-4BCF-A493-1759149C7AD2}"/>
               </a:ext>
             </a:extLst>
           </p:cNvPr>
@@ -10946,7 +10946,7 @@
           <p:cNvPr id="14" name="Shape 12">
             <a:extLst xmlns:a="http://schemas.openxmlformats.org/drawingml/2006/main">
               <a:ext uri="{FF2B5EF4-FFF2-40B4-BE49-F238E27FC236}">
-                <a16:creationId xmlns:a16="http://schemas.microsoft.com/office/drawing/2014/main" id="{2722C2EC-FFBE-485A-9F8E-D1D974961998}"/>
+                <a16:creationId xmlns:a16="http://schemas.microsoft.com/office/drawing/2014/main" id="{A7E1CD4F-7952-48F5-9399-FDB9B7A35227}"/>
               </a:ext>
             </a:extLst>
           </p:cNvPr>
@@ -10979,7 +10979,7 @@
           <p:cNvPr id="15" name="Text 13">
             <a:extLst xmlns:a="http://schemas.openxmlformats.org/drawingml/2006/main">
               <a:ext uri="{FF2B5EF4-FFF2-40B4-BE49-F238E27FC236}">
-                <a16:creationId xmlns:a16="http://schemas.microsoft.com/office/drawing/2014/main" id="{72D83C42-7DDB-4980-8C04-B4410D5AA417}"/>
+                <a16:creationId xmlns:a16="http://schemas.microsoft.com/office/drawing/2014/main" id="{8DBBD090-A8B3-450C-979F-BEC465EA27A8}"/>
               </a:ext>
             </a:extLst>
           </p:cNvPr>
@@ -11025,7 +11025,7 @@
           <p:cNvPr id="16" name="Shape 14">
             <a:extLst xmlns:a="http://schemas.openxmlformats.org/drawingml/2006/main">
               <a:ext uri="{FF2B5EF4-FFF2-40B4-BE49-F238E27FC236}">
-                <a16:creationId xmlns:a16="http://schemas.microsoft.com/office/drawing/2014/main" id="{08DFAE96-6AF0-45E9-837B-3C2B3B435F99}"/>
+                <a16:creationId xmlns:a16="http://schemas.microsoft.com/office/drawing/2014/main" id="{5B5A6A7B-051A-4AD1-B54E-BB4A68190304}"/>
               </a:ext>
             </a:extLst>
           </p:cNvPr>
@@ -11058,7 +11058,7 @@
           <p:cNvPr id="17" name="Text 15">
             <a:extLst xmlns:a="http://schemas.openxmlformats.org/drawingml/2006/main">
               <a:ext uri="{FF2B5EF4-FFF2-40B4-BE49-F238E27FC236}">
-                <a16:creationId xmlns:a16="http://schemas.microsoft.com/office/drawing/2014/main" id="{3E337D4F-6DBE-4416-B710-C1E13D287A0A}"/>
+                <a16:creationId xmlns:a16="http://schemas.microsoft.com/office/drawing/2014/main" id="{0B7A2D3D-714E-4981-91C3-8903D2689982}"/>
               </a:ext>
             </a:extLst>
           </p:cNvPr>
@@ -11106,7 +11106,7 @@
           <p:cNvPr id="18" name="Shape 16">
             <a:extLst xmlns:a="http://schemas.openxmlformats.org/drawingml/2006/main">
               <a:ext uri="{FF2B5EF4-FFF2-40B4-BE49-F238E27FC236}">
-                <a16:creationId xmlns:a16="http://schemas.microsoft.com/office/drawing/2014/main" id="{9F627433-127F-4391-8860-7F4537F97613}"/>
+                <a16:creationId xmlns:a16="http://schemas.microsoft.com/office/drawing/2014/main" id="{81CACD3C-EDAC-4F30-BF89-13B78F9EF880}"/>
               </a:ext>
             </a:extLst>
           </p:cNvPr>
@@ -11139,7 +11139,7 @@
           <p:cNvPr id="19" name="Text 17">
             <a:extLst xmlns:a="http://schemas.openxmlformats.org/drawingml/2006/main">
               <a:ext uri="{FF2B5EF4-FFF2-40B4-BE49-F238E27FC236}">
-                <a16:creationId xmlns:a16="http://schemas.microsoft.com/office/drawing/2014/main" id="{AA2D84D9-C411-473B-B268-3A6A9D9473A5}"/>
+                <a16:creationId xmlns:a16="http://schemas.microsoft.com/office/drawing/2014/main" id="{D5D8CB69-5105-452B-979B-D0ABAC5F524E}"/>
               </a:ext>
             </a:extLst>
           </p:cNvPr>
@@ -11187,7 +11187,7 @@
           <p:cNvPr id="20" name="Shape 18">
             <a:extLst xmlns:a="http://schemas.openxmlformats.org/drawingml/2006/main">
               <a:ext uri="{FF2B5EF4-FFF2-40B4-BE49-F238E27FC236}">
-                <a16:creationId xmlns:a16="http://schemas.microsoft.com/office/drawing/2014/main" id="{798A2E4E-748D-4D64-A9F1-F57A2AED2DEA}"/>
+                <a16:creationId xmlns:a16="http://schemas.microsoft.com/office/drawing/2014/main" id="{3CB1E566-BE09-4A72-9423-CAEDD55B494F}"/>
               </a:ext>
             </a:extLst>
           </p:cNvPr>
@@ -11220,7 +11220,7 @@
           <p:cNvPr id="21" name="Text 19">
             <a:extLst xmlns:a="http://schemas.openxmlformats.org/drawingml/2006/main">
               <a:ext uri="{FF2B5EF4-FFF2-40B4-BE49-F238E27FC236}">
-                <a16:creationId xmlns:a16="http://schemas.microsoft.com/office/drawing/2014/main" id="{97F5522E-8569-48D4-8583-E3E88C7EF17A}"/>
+                <a16:creationId xmlns:a16="http://schemas.microsoft.com/office/drawing/2014/main" id="{5F028E85-4D62-4EC5-BFE8-BADD7F4B65EF}"/>
               </a:ext>
             </a:extLst>
           </p:cNvPr>
@@ -11268,7 +11268,7 @@
           <p:cNvPr id="22" name="Shape 20">
             <a:extLst xmlns:a="http://schemas.openxmlformats.org/drawingml/2006/main">
               <a:ext uri="{FF2B5EF4-FFF2-40B4-BE49-F238E27FC236}">
-                <a16:creationId xmlns:a16="http://schemas.microsoft.com/office/drawing/2014/main" id="{A8A7956F-7902-4617-BF45-65E5327EE64F}"/>
+                <a16:creationId xmlns:a16="http://schemas.microsoft.com/office/drawing/2014/main" id="{6F18E3E5-7DCC-4F4F-8861-5A2993B3E79B}"/>
               </a:ext>
             </a:extLst>
           </p:cNvPr>
@@ -11301,7 +11301,7 @@
           <p:cNvPr id="23" name="Text 21">
             <a:extLst xmlns:a="http://schemas.openxmlformats.org/drawingml/2006/main">
               <a:ext uri="{FF2B5EF4-FFF2-40B4-BE49-F238E27FC236}">
-                <a16:creationId xmlns:a16="http://schemas.microsoft.com/office/drawing/2014/main" id="{2D3A7384-15EF-4800-938B-8631487F80D2}"/>
+                <a16:creationId xmlns:a16="http://schemas.microsoft.com/office/drawing/2014/main" id="{A59A3860-744B-4716-ABB5-411445A73A58}"/>
               </a:ext>
             </a:extLst>
           </p:cNvPr>
@@ -11349,7 +11349,7 @@
           <p:cNvPr id="24" name="Shape 22">
             <a:extLst xmlns:a="http://schemas.openxmlformats.org/drawingml/2006/main">
               <a:ext uri="{FF2B5EF4-FFF2-40B4-BE49-F238E27FC236}">
-                <a16:creationId xmlns:a16="http://schemas.microsoft.com/office/drawing/2014/main" id="{EA650DF0-E86E-48EC-B642-C4CB5A092B41}"/>
+                <a16:creationId xmlns:a16="http://schemas.microsoft.com/office/drawing/2014/main" id="{9A2DECE3-BC8C-4EB2-963C-4FADFEEB1515}"/>
               </a:ext>
             </a:extLst>
           </p:cNvPr>
@@ -11382,7 +11382,7 @@
           <p:cNvPr id="25" name="Text 23">
             <a:extLst xmlns:a="http://schemas.openxmlformats.org/drawingml/2006/main">
               <a:ext uri="{FF2B5EF4-FFF2-40B4-BE49-F238E27FC236}">
-                <a16:creationId xmlns:a16="http://schemas.microsoft.com/office/drawing/2014/main" id="{490BC210-B3CE-426E-A154-AAA4F7AA3457}"/>
+                <a16:creationId xmlns:a16="http://schemas.microsoft.com/office/drawing/2014/main" id="{49940A28-AB99-40E8-B4C4-301D4CCCDAA7}"/>
               </a:ext>
             </a:extLst>
           </p:cNvPr>
@@ -11430,7 +11430,7 @@
           <p:cNvPr id="26" name="Shape 24">
             <a:extLst xmlns:a="http://schemas.openxmlformats.org/drawingml/2006/main">
               <a:ext uri="{FF2B5EF4-FFF2-40B4-BE49-F238E27FC236}">
-                <a16:creationId xmlns:a16="http://schemas.microsoft.com/office/drawing/2014/main" id="{405B1E25-1731-4A3A-8CF1-0E37634FE465}"/>
+                <a16:creationId xmlns:a16="http://schemas.microsoft.com/office/drawing/2014/main" id="{7C17712C-EB82-4F77-88C5-B14017C3FCA2}"/>
               </a:ext>
             </a:extLst>
           </p:cNvPr>
@@ -11463,7 +11463,7 @@
           <p:cNvPr id="27" name="Text 25">
             <a:extLst xmlns:a="http://schemas.openxmlformats.org/drawingml/2006/main">
               <a:ext uri="{FF2B5EF4-FFF2-40B4-BE49-F238E27FC236}">
-                <a16:creationId xmlns:a16="http://schemas.microsoft.com/office/drawing/2014/main" id="{76D47934-32FF-41C5-B69A-7247ADC1FBE5}"/>
+                <a16:creationId xmlns:a16="http://schemas.microsoft.com/office/drawing/2014/main" id="{36A0CA86-AC58-43AA-B90C-66656D2F9030}"/>
               </a:ext>
             </a:extLst>
           </p:cNvPr>
@@ -11511,7 +11511,7 @@
           <p:cNvPr id="28" name="Shape 26">
             <a:extLst xmlns:a="http://schemas.openxmlformats.org/drawingml/2006/main">
               <a:ext uri="{FF2B5EF4-FFF2-40B4-BE49-F238E27FC236}">
-                <a16:creationId xmlns:a16="http://schemas.microsoft.com/office/drawing/2014/main" id="{C36705B9-DC2C-464C-A33C-C4C678B5656A}"/>
+                <a16:creationId xmlns:a16="http://schemas.microsoft.com/office/drawing/2014/main" id="{08CAA2E8-B8A1-47F6-B203-FBC08AADAB64}"/>
               </a:ext>
             </a:extLst>
           </p:cNvPr>
@@ -11544,7 +11544,7 @@
           <p:cNvPr id="29" name="Text 27">
             <a:extLst xmlns:a="http://schemas.openxmlformats.org/drawingml/2006/main">
               <a:ext uri="{FF2B5EF4-FFF2-40B4-BE49-F238E27FC236}">
-                <a16:creationId xmlns:a16="http://schemas.microsoft.com/office/drawing/2014/main" id="{17D97EBE-89B0-4BE0-B689-D379C4518AC5}"/>
+                <a16:creationId xmlns:a16="http://schemas.microsoft.com/office/drawing/2014/main" id="{C37C25BD-740E-4AAC-8C88-428DF228209F}"/>
               </a:ext>
             </a:extLst>
           </p:cNvPr>
@@ -11592,7 +11592,7 @@
           <p:cNvPr id="30" name="Shape 28">
             <a:extLst xmlns:a="http://schemas.openxmlformats.org/drawingml/2006/main">
               <a:ext uri="{FF2B5EF4-FFF2-40B4-BE49-F238E27FC236}">
-                <a16:creationId xmlns:a16="http://schemas.microsoft.com/office/drawing/2014/main" id="{0FB3EB3C-796B-4617-A74D-EC4667FBFA52}"/>
+                <a16:creationId xmlns:a16="http://schemas.microsoft.com/office/drawing/2014/main" id="{2D4D0D5D-53B7-4D2E-BFA4-1465663C023E}"/>
               </a:ext>
             </a:extLst>
           </p:cNvPr>
@@ -11625,7 +11625,7 @@
           <p:cNvPr id="31" name="Text 29">
             <a:extLst xmlns:a="http://schemas.openxmlformats.org/drawingml/2006/main">
               <a:ext uri="{FF2B5EF4-FFF2-40B4-BE49-F238E27FC236}">
-                <a16:creationId xmlns:a16="http://schemas.microsoft.com/office/drawing/2014/main" id="{F6853966-CCD9-4C72-9B8E-FC1B1E5C5275}"/>
+                <a16:creationId xmlns:a16="http://schemas.microsoft.com/office/drawing/2014/main" id="{86CEB8CD-76AD-48D6-884B-CB80A0B5D7AA}"/>
               </a:ext>
             </a:extLst>
           </p:cNvPr>
@@ -11673,7 +11673,7 @@
           <p:cNvPr id="32" name="Shape 30">
             <a:extLst xmlns:a="http://schemas.openxmlformats.org/drawingml/2006/main">
               <a:ext uri="{FF2B5EF4-FFF2-40B4-BE49-F238E27FC236}">
-                <a16:creationId xmlns:a16="http://schemas.microsoft.com/office/drawing/2014/main" id="{067369FC-A708-4AEE-9303-E24C470B50F1}"/>
+                <a16:creationId xmlns:a16="http://schemas.microsoft.com/office/drawing/2014/main" id="{788DBA0B-B5EC-4EA2-A702-3ABEBCC93D39}"/>
               </a:ext>
             </a:extLst>
           </p:cNvPr>
@@ -11706,7 +11706,7 @@
           <p:cNvPr id="33" name="Text 31">
             <a:extLst xmlns:a="http://schemas.openxmlformats.org/drawingml/2006/main">
               <a:ext uri="{FF2B5EF4-FFF2-40B4-BE49-F238E27FC236}">
-                <a16:creationId xmlns:a16="http://schemas.microsoft.com/office/drawing/2014/main" id="{12241134-4465-4E86-AB0D-D4AFEFB2FBEA}"/>
+                <a16:creationId xmlns:a16="http://schemas.microsoft.com/office/drawing/2014/main" id="{B0CF3420-848B-4A36-97F8-1F4D032A980B}"/>
               </a:ext>
             </a:extLst>
           </p:cNvPr>
@@ -11754,7 +11754,7 @@
           <p:cNvPr id="34" name="Shape 32">
             <a:extLst xmlns:a="http://schemas.openxmlformats.org/drawingml/2006/main">
               <a:ext uri="{FF2B5EF4-FFF2-40B4-BE49-F238E27FC236}">
-                <a16:creationId xmlns:a16="http://schemas.microsoft.com/office/drawing/2014/main" id="{A9863915-E2EE-45E2-B4CD-E28C0CA26DE0}"/>
+                <a16:creationId xmlns:a16="http://schemas.microsoft.com/office/drawing/2014/main" id="{E7E98E84-F7C1-4953-B9E0-837D6CE05C2C}"/>
               </a:ext>
             </a:extLst>
           </p:cNvPr>
@@ -11787,7 +11787,7 @@
           <p:cNvPr id="35" name="Text 33">
             <a:extLst xmlns:a="http://schemas.openxmlformats.org/drawingml/2006/main">
               <a:ext uri="{FF2B5EF4-FFF2-40B4-BE49-F238E27FC236}">
-                <a16:creationId xmlns:a16="http://schemas.microsoft.com/office/drawing/2014/main" id="{110A27FB-5945-49CC-A5B6-C0A87F28E787}"/>
+                <a16:creationId xmlns:a16="http://schemas.microsoft.com/office/drawing/2014/main" id="{D733D9C7-1B2D-4C18-93DD-4458B32DC291}"/>
               </a:ext>
             </a:extLst>
           </p:cNvPr>
@@ -11835,7 +11835,7 @@
           <p:cNvPr id="36" name="Shape 34">
             <a:extLst xmlns:a="http://schemas.openxmlformats.org/drawingml/2006/main">
               <a:ext uri="{FF2B5EF4-FFF2-40B4-BE49-F238E27FC236}">
-                <a16:creationId xmlns:a16="http://schemas.microsoft.com/office/drawing/2014/main" id="{A6DFAE6F-685B-46C5-93A1-4509E7F4C91F}"/>
+                <a16:creationId xmlns:a16="http://schemas.microsoft.com/office/drawing/2014/main" id="{BEE8F96F-E889-4717-9270-AC8BB72CAD62}"/>
               </a:ext>
             </a:extLst>
           </p:cNvPr>
@@ -11868,7 +11868,7 @@
           <p:cNvPr id="37" name="Text 35">
             <a:extLst xmlns:a="http://schemas.openxmlformats.org/drawingml/2006/main">
               <a:ext uri="{FF2B5EF4-FFF2-40B4-BE49-F238E27FC236}">
-                <a16:creationId xmlns:a16="http://schemas.microsoft.com/office/drawing/2014/main" id="{A7A04876-FE24-4186-892A-30F41B3DB514}"/>
+                <a16:creationId xmlns:a16="http://schemas.microsoft.com/office/drawing/2014/main" id="{0EF69C5B-3FE1-4EAE-BA64-4E4EC2CEDB41}"/>
               </a:ext>
             </a:extLst>
           </p:cNvPr>
@@ -11916,7 +11916,7 @@
           <p:cNvPr id="38" name="Shape 36">
             <a:extLst xmlns:a="http://schemas.openxmlformats.org/drawingml/2006/main">
               <a:ext uri="{FF2B5EF4-FFF2-40B4-BE49-F238E27FC236}">
-                <a16:creationId xmlns:a16="http://schemas.microsoft.com/office/drawing/2014/main" id="{42C4FAEE-8B18-4099-9D80-459D654D0B3F}"/>
+                <a16:creationId xmlns:a16="http://schemas.microsoft.com/office/drawing/2014/main" id="{A827EA18-B769-4B10-A130-92088E275296}"/>
               </a:ext>
             </a:extLst>
           </p:cNvPr>
@@ -11949,7 +11949,7 @@
           <p:cNvPr id="39" name="Text 37">
             <a:extLst xmlns:a="http://schemas.openxmlformats.org/drawingml/2006/main">
               <a:ext uri="{FF2B5EF4-FFF2-40B4-BE49-F238E27FC236}">
-                <a16:creationId xmlns:a16="http://schemas.microsoft.com/office/drawing/2014/main" id="{EF0721B4-D611-4D4B-B57C-D653460F8867}"/>
+                <a16:creationId xmlns:a16="http://schemas.microsoft.com/office/drawing/2014/main" id="{44EB698B-EF5E-4FA7-B067-A9A7F8009114}"/>
               </a:ext>
             </a:extLst>
           </p:cNvPr>
@@ -11997,7 +11997,7 @@
           <p:cNvPr id="40" name="Shape 38">
             <a:extLst xmlns:a="http://schemas.openxmlformats.org/drawingml/2006/main">
               <a:ext uri="{FF2B5EF4-FFF2-40B4-BE49-F238E27FC236}">
-                <a16:creationId xmlns:a16="http://schemas.microsoft.com/office/drawing/2014/main" id="{ADFD35AB-1F4E-4D9F-8B9F-C8111381FC4C}"/>
+                <a16:creationId xmlns:a16="http://schemas.microsoft.com/office/drawing/2014/main" id="{EF5323BE-A620-475C-8EE8-FF9D78BDF6B4}"/>
               </a:ext>
             </a:extLst>
           </p:cNvPr>
@@ -12030,7 +12030,7 @@
           <p:cNvPr id="41" name="Text 39">
             <a:extLst xmlns:a="http://schemas.openxmlformats.org/drawingml/2006/main">
               <a:ext uri="{FF2B5EF4-FFF2-40B4-BE49-F238E27FC236}">
-                <a16:creationId xmlns:a16="http://schemas.microsoft.com/office/drawing/2014/main" id="{4837F3FF-FC1D-484B-9A69-FBFC681810BA}"/>
+                <a16:creationId xmlns:a16="http://schemas.microsoft.com/office/drawing/2014/main" id="{B9DA0E8F-FD1A-4943-AA89-309A732E6D04}"/>
               </a:ext>
             </a:extLst>
           </p:cNvPr>
@@ -12078,7 +12078,7 @@
           <p:cNvPr id="42" name="Shape 40">
             <a:extLst xmlns:a="http://schemas.openxmlformats.org/drawingml/2006/main">
               <a:ext uri="{FF2B5EF4-FFF2-40B4-BE49-F238E27FC236}">
-                <a16:creationId xmlns:a16="http://schemas.microsoft.com/office/drawing/2014/main" id="{351F12E5-5A1F-4CC2-A331-A74DF8B40CDC}"/>
+                <a16:creationId xmlns:a16="http://schemas.microsoft.com/office/drawing/2014/main" id="{BB28FDCA-08DE-4B9D-89A2-9DE4EB368145}"/>
               </a:ext>
             </a:extLst>
           </p:cNvPr>
@@ -12111,7 +12111,7 @@
           <p:cNvPr id="43" name="Text 41">
             <a:extLst xmlns:a="http://schemas.openxmlformats.org/drawingml/2006/main">
               <a:ext uri="{FF2B5EF4-FFF2-40B4-BE49-F238E27FC236}">
-                <a16:creationId xmlns:a16="http://schemas.microsoft.com/office/drawing/2014/main" id="{2725004F-E817-461D-8142-9B1B37F894C1}"/>
+                <a16:creationId xmlns:a16="http://schemas.microsoft.com/office/drawing/2014/main" id="{B38DC976-12C5-4308-B9BD-0A34D7345336}"/>
               </a:ext>
             </a:extLst>
           </p:cNvPr>
@@ -12159,7 +12159,7 @@
           <p:cNvPr id="44" name="Shape 42">
             <a:extLst xmlns:a="http://schemas.openxmlformats.org/drawingml/2006/main">
               <a:ext uri="{FF2B5EF4-FFF2-40B4-BE49-F238E27FC236}">
-                <a16:creationId xmlns:a16="http://schemas.microsoft.com/office/drawing/2014/main" id="{914ACA4F-94A4-4348-AA74-7EC86C6DBEC9}"/>
+                <a16:creationId xmlns:a16="http://schemas.microsoft.com/office/drawing/2014/main" id="{11BA1EC6-24CD-4F9A-99AB-AADC583FCAC6}"/>
               </a:ext>
             </a:extLst>
           </p:cNvPr>
@@ -12192,7 +12192,7 @@
           <p:cNvPr id="45" name="Text 43">
             <a:extLst xmlns:a="http://schemas.openxmlformats.org/drawingml/2006/main">
               <a:ext uri="{FF2B5EF4-FFF2-40B4-BE49-F238E27FC236}">
-                <a16:creationId xmlns:a16="http://schemas.microsoft.com/office/drawing/2014/main" id="{DEE84753-4902-4E12-9D12-D5AEE175EA1C}"/>
+                <a16:creationId xmlns:a16="http://schemas.microsoft.com/office/drawing/2014/main" id="{EA381ADC-DAF1-42DA-8996-4BFD45D93CE4}"/>
               </a:ext>
             </a:extLst>
           </p:cNvPr>
@@ -12240,7 +12240,7 @@
           <p:cNvPr id="46" name="Shape 44">
             <a:extLst xmlns:a="http://schemas.openxmlformats.org/drawingml/2006/main">
               <a:ext uri="{FF2B5EF4-FFF2-40B4-BE49-F238E27FC236}">
-                <a16:creationId xmlns:a16="http://schemas.microsoft.com/office/drawing/2014/main" id="{E8304B71-1DC4-4CA9-8C58-FECD8EAB1F42}"/>
+                <a16:creationId xmlns:a16="http://schemas.microsoft.com/office/drawing/2014/main" id="{6C327781-DE55-4615-8EA5-B6B9AB3AF9B2}"/>
               </a:ext>
             </a:extLst>
           </p:cNvPr>
@@ -12273,7 +12273,7 @@
           <p:cNvPr id="47" name="Text 45">
             <a:extLst xmlns:a="http://schemas.openxmlformats.org/drawingml/2006/main">
               <a:ext uri="{FF2B5EF4-FFF2-40B4-BE49-F238E27FC236}">
-                <a16:creationId xmlns:a16="http://schemas.microsoft.com/office/drawing/2014/main" id="{F5FD444E-F31F-45B4-93A3-AE2DA7481A3E}"/>
+                <a16:creationId xmlns:a16="http://schemas.microsoft.com/office/drawing/2014/main" id="{FCF2055D-DFF6-4AAA-AAFB-B00A7478262F}"/>
               </a:ext>
             </a:extLst>
           </p:cNvPr>
@@ -12321,7 +12321,7 @@
           <p:cNvPr id="48" name="Shape 46">
             <a:extLst xmlns:a="http://schemas.openxmlformats.org/drawingml/2006/main">
               <a:ext uri="{FF2B5EF4-FFF2-40B4-BE49-F238E27FC236}">
-                <a16:creationId xmlns:a16="http://schemas.microsoft.com/office/drawing/2014/main" id="{809C4540-F142-4736-85BB-5AEA17717AD0}"/>
+                <a16:creationId xmlns:a16="http://schemas.microsoft.com/office/drawing/2014/main" id="{92A110A2-6219-4383-A09B-E250508BA289}"/>
               </a:ext>
             </a:extLst>
           </p:cNvPr>
@@ -12354,7 +12354,7 @@
           <p:cNvPr id="49" name="Text 47">
             <a:extLst xmlns:a="http://schemas.openxmlformats.org/drawingml/2006/main">
               <a:ext uri="{FF2B5EF4-FFF2-40B4-BE49-F238E27FC236}">
-                <a16:creationId xmlns:a16="http://schemas.microsoft.com/office/drawing/2014/main" id="{4BF5C3E6-05CA-4048-A16E-BA21C37FF076}"/>
+                <a16:creationId xmlns:a16="http://schemas.microsoft.com/office/drawing/2014/main" id="{A76472D1-7BBA-4C62-87C2-3ECBB13EB777}"/>
               </a:ext>
             </a:extLst>
           </p:cNvPr>
@@ -12402,7 +12402,7 @@
           <p:cNvPr id="50" name="Shape 48">
             <a:extLst xmlns:a="http://schemas.openxmlformats.org/drawingml/2006/main">
               <a:ext uri="{FF2B5EF4-FFF2-40B4-BE49-F238E27FC236}">
-                <a16:creationId xmlns:a16="http://schemas.microsoft.com/office/drawing/2014/main" id="{A767B97D-F68A-48FF-A61C-643B04AF736C}"/>
+                <a16:creationId xmlns:a16="http://schemas.microsoft.com/office/drawing/2014/main" id="{49EC3E05-03D6-4273-B20D-7486A208A553}"/>
               </a:ext>
             </a:extLst>
           </p:cNvPr>
@@ -12435,7 +12435,7 @@
           <p:cNvPr id="51" name="Text 49">
             <a:extLst xmlns:a="http://schemas.openxmlformats.org/drawingml/2006/main">
               <a:ext uri="{FF2B5EF4-FFF2-40B4-BE49-F238E27FC236}">
-                <a16:creationId xmlns:a16="http://schemas.microsoft.com/office/drawing/2014/main" id="{54F8F803-24C0-468C-BCF3-3E3A21D36AAF}"/>
+                <a16:creationId xmlns:a16="http://schemas.microsoft.com/office/drawing/2014/main" id="{5B20F006-E4DF-4CE8-97A5-29A507ABB188}"/>
               </a:ext>
             </a:extLst>
           </p:cNvPr>
@@ -12483,7 +12483,7 @@
           <p:cNvPr id="52" name="Shape 50">
             <a:extLst xmlns:a="http://schemas.openxmlformats.org/drawingml/2006/main">
               <a:ext uri="{FF2B5EF4-FFF2-40B4-BE49-F238E27FC236}">
-                <a16:creationId xmlns:a16="http://schemas.microsoft.com/office/drawing/2014/main" id="{67A5DE2D-7BC3-45D3-8E38-E48AE0AC315F}"/>
+                <a16:creationId xmlns:a16="http://schemas.microsoft.com/office/drawing/2014/main" id="{8BA59C9D-8725-430A-9676-28287AB5FC88}"/>
               </a:ext>
             </a:extLst>
           </p:cNvPr>
@@ -12516,7 +12516,7 @@
           <p:cNvPr id="53" name="Text 51">
             <a:extLst xmlns:a="http://schemas.openxmlformats.org/drawingml/2006/main">
               <a:ext uri="{FF2B5EF4-FFF2-40B4-BE49-F238E27FC236}">
-                <a16:creationId xmlns:a16="http://schemas.microsoft.com/office/drawing/2014/main" id="{F711E956-AF13-4623-8D24-DCF8F7BAD1FF}"/>
+                <a16:creationId xmlns:a16="http://schemas.microsoft.com/office/drawing/2014/main" id="{F608C025-1C5C-4F16-B98C-3A605FB9923E}"/>
               </a:ext>
             </a:extLst>
           </p:cNvPr>
@@ -12564,7 +12564,7 @@
           <p:cNvPr id="54" name="Shape 52">
             <a:extLst xmlns:a="http://schemas.openxmlformats.org/drawingml/2006/main">
               <a:ext uri="{FF2B5EF4-FFF2-40B4-BE49-F238E27FC236}">
-                <a16:creationId xmlns:a16="http://schemas.microsoft.com/office/drawing/2014/main" id="{57406EC1-50C2-43F9-90AC-DD1618A401BB}"/>
+                <a16:creationId xmlns:a16="http://schemas.microsoft.com/office/drawing/2014/main" id="{7DE8C74C-A205-4F79-937C-804C7268A79D}"/>
               </a:ext>
             </a:extLst>
           </p:cNvPr>
@@ -12597,7 +12597,7 @@
           <p:cNvPr id="55" name="Text 53">
             <a:extLst xmlns:a="http://schemas.openxmlformats.org/drawingml/2006/main">
               <a:ext uri="{FF2B5EF4-FFF2-40B4-BE49-F238E27FC236}">
-                <a16:creationId xmlns:a16="http://schemas.microsoft.com/office/drawing/2014/main" id="{37AC5EDA-6E39-468B-9FAF-E62B86AE0565}"/>
+                <a16:creationId xmlns:a16="http://schemas.microsoft.com/office/drawing/2014/main" id="{EA773400-A5A6-4BDE-A257-F49FAA2BE084}"/>
               </a:ext>
             </a:extLst>
           </p:cNvPr>
@@ -12645,7 +12645,7 @@
           <p:cNvPr id="56" name="Shape 54">
             <a:extLst xmlns:a="http://schemas.openxmlformats.org/drawingml/2006/main">
               <a:ext uri="{FF2B5EF4-FFF2-40B4-BE49-F238E27FC236}">
-                <a16:creationId xmlns:a16="http://schemas.microsoft.com/office/drawing/2014/main" id="{5A3D998E-C01E-48D1-B853-997511192A41}"/>
+                <a16:creationId xmlns:a16="http://schemas.microsoft.com/office/drawing/2014/main" id="{C0FEC87C-3F66-4DEE-82FA-E26950DE5882}"/>
               </a:ext>
             </a:extLst>
           </p:cNvPr>
@@ -12678,7 +12678,7 @@
           <p:cNvPr id="57" name="Text 55">
             <a:extLst xmlns:a="http://schemas.openxmlformats.org/drawingml/2006/main">
               <a:ext uri="{FF2B5EF4-FFF2-40B4-BE49-F238E27FC236}">
-                <a16:creationId xmlns:a16="http://schemas.microsoft.com/office/drawing/2014/main" id="{EC15A875-C1CD-4928-A6E5-D2864A3CC131}"/>
+                <a16:creationId xmlns:a16="http://schemas.microsoft.com/office/drawing/2014/main" id="{E0F05784-E5DA-46DC-B980-D44EA475AF7A}"/>
               </a:ext>
             </a:extLst>
           </p:cNvPr>
@@ -12726,7 +12726,7 @@
           <p:cNvPr id="58" name="Shape 56">
             <a:extLst xmlns:a="http://schemas.openxmlformats.org/drawingml/2006/main">
               <a:ext uri="{FF2B5EF4-FFF2-40B4-BE49-F238E27FC236}">
-                <a16:creationId xmlns:a16="http://schemas.microsoft.com/office/drawing/2014/main" id="{B6CD06A2-A5AE-4E2A-AC41-1822CCEA5C01}"/>
+                <a16:creationId xmlns:a16="http://schemas.microsoft.com/office/drawing/2014/main" id="{ABCCAC1C-C89C-4283-BA65-876FDD229A23}"/>
               </a:ext>
             </a:extLst>
           </p:cNvPr>
@@ -12759,7 +12759,7 @@
           <p:cNvPr id="59" name="Text 57">
             <a:extLst xmlns:a="http://schemas.openxmlformats.org/drawingml/2006/main">
               <a:ext uri="{FF2B5EF4-FFF2-40B4-BE49-F238E27FC236}">
-                <a16:creationId xmlns:a16="http://schemas.microsoft.com/office/drawing/2014/main" id="{0DA462B8-950F-4358-BCFD-81FD969E7CB6}"/>
+                <a16:creationId xmlns:a16="http://schemas.microsoft.com/office/drawing/2014/main" id="{0F8C69D7-7993-4BD1-8557-91D3A6A63F38}"/>
               </a:ext>
             </a:extLst>
           </p:cNvPr>
@@ -12807,7 +12807,7 @@
           <p:cNvPr id="60" name="Shape 58">
             <a:extLst xmlns:a="http://schemas.openxmlformats.org/drawingml/2006/main">
               <a:ext uri="{FF2B5EF4-FFF2-40B4-BE49-F238E27FC236}">
-                <a16:creationId xmlns:a16="http://schemas.microsoft.com/office/drawing/2014/main" id="{B759373F-7C80-4EE6-850E-F080F1DF46CF}"/>
+                <a16:creationId xmlns:a16="http://schemas.microsoft.com/office/drawing/2014/main" id="{92F82A85-9D02-45D4-992C-E3073C53AA9E}"/>
               </a:ext>
             </a:extLst>
           </p:cNvPr>
@@ -12840,7 +12840,7 @@
           <p:cNvPr id="61" name="Text 59">
             <a:extLst xmlns:a="http://schemas.openxmlformats.org/drawingml/2006/main">
               <a:ext uri="{FF2B5EF4-FFF2-40B4-BE49-F238E27FC236}">
-                <a16:creationId xmlns:a16="http://schemas.microsoft.com/office/drawing/2014/main" id="{F5A44F91-641C-49F4-BC39-A91DDFF21746}"/>
+                <a16:creationId xmlns:a16="http://schemas.microsoft.com/office/drawing/2014/main" id="{1C55F21C-7F6C-48F7-A494-390487F06049}"/>
               </a:ext>
             </a:extLst>
           </p:cNvPr>
@@ -12888,7 +12888,7 @@
           <p:cNvPr id="62" name="Shape 60">
             <a:extLst xmlns:a="http://schemas.openxmlformats.org/drawingml/2006/main">
               <a:ext uri="{FF2B5EF4-FFF2-40B4-BE49-F238E27FC236}">
-                <a16:creationId xmlns:a16="http://schemas.microsoft.com/office/drawing/2014/main" id="{9359A460-942B-43E9-AE9D-213E9491A109}"/>
+                <a16:creationId xmlns:a16="http://schemas.microsoft.com/office/drawing/2014/main" id="{6428C8AC-E4F0-4372-96BB-20F966109A2C}"/>
               </a:ext>
             </a:extLst>
           </p:cNvPr>
@@ -12921,7 +12921,7 @@
           <p:cNvPr id="63" name="Text 61">
             <a:extLst xmlns:a="http://schemas.openxmlformats.org/drawingml/2006/main">
               <a:ext uri="{FF2B5EF4-FFF2-40B4-BE49-F238E27FC236}">
-                <a16:creationId xmlns:a16="http://schemas.microsoft.com/office/drawing/2014/main" id="{BE15EBBB-D1BA-4774-BF1F-2AC81FB4D9E5}"/>
+                <a16:creationId xmlns:a16="http://schemas.microsoft.com/office/drawing/2014/main" id="{FA6CC62C-2603-4995-A087-7E549206798E}"/>
               </a:ext>
             </a:extLst>
           </p:cNvPr>
@@ -12969,7 +12969,7 @@
           <p:cNvPr id="64" name="Shape 62">
             <a:extLst xmlns:a="http://schemas.openxmlformats.org/drawingml/2006/main">
               <a:ext uri="{FF2B5EF4-FFF2-40B4-BE49-F238E27FC236}">
-                <a16:creationId xmlns:a16="http://schemas.microsoft.com/office/drawing/2014/main" id="{18E52BBB-8969-4766-8ED6-B48F0D913641}"/>
+                <a16:creationId xmlns:a16="http://schemas.microsoft.com/office/drawing/2014/main" id="{E2E890E5-979A-4300-BDEE-E192AAAC1136}"/>
               </a:ext>
             </a:extLst>
           </p:cNvPr>
@@ -13002,7 +13002,7 @@
           <p:cNvPr id="65" name="Text 63">
             <a:extLst xmlns:a="http://schemas.openxmlformats.org/drawingml/2006/main">
               <a:ext uri="{FF2B5EF4-FFF2-40B4-BE49-F238E27FC236}">
-                <a16:creationId xmlns:a16="http://schemas.microsoft.com/office/drawing/2014/main" id="{10742285-7896-482E-8215-774A5B06E67C}"/>
+                <a16:creationId xmlns:a16="http://schemas.microsoft.com/office/drawing/2014/main" id="{EE00B1A1-41C1-4F1B-99A6-E05CFF88F2B2}"/>
               </a:ext>
             </a:extLst>
           </p:cNvPr>
@@ -13050,7 +13050,7 @@
           <p:cNvPr id="66" name="Shape 64">
             <a:extLst xmlns:a="http://schemas.openxmlformats.org/drawingml/2006/main">
               <a:ext uri="{FF2B5EF4-FFF2-40B4-BE49-F238E27FC236}">
-                <a16:creationId xmlns:a16="http://schemas.microsoft.com/office/drawing/2014/main" id="{1FD4C183-4B0E-4EC9-A262-EF0BF07E3D3C}"/>
+                <a16:creationId xmlns:a16="http://schemas.microsoft.com/office/drawing/2014/main" id="{A3B6E682-8F3A-480F-9CDE-38EC8080B575}"/>
               </a:ext>
             </a:extLst>
           </p:cNvPr>
@@ -13083,7 +13083,7 @@
           <p:cNvPr id="67" name="Text 65">
             <a:extLst xmlns:a="http://schemas.openxmlformats.org/drawingml/2006/main">
               <a:ext uri="{FF2B5EF4-FFF2-40B4-BE49-F238E27FC236}">
-                <a16:creationId xmlns:a16="http://schemas.microsoft.com/office/drawing/2014/main" id="{EF3069FC-4411-4C28-9BAC-9E9282DC0212}"/>
+                <a16:creationId xmlns:a16="http://schemas.microsoft.com/office/drawing/2014/main" id="{D82501FF-7749-4F06-8FBD-D632B3E65A63}"/>
               </a:ext>
             </a:extLst>
           </p:cNvPr>
@@ -13131,7 +13131,7 @@
           <p:cNvPr id="68" name="Shape 66">
             <a:extLst xmlns:a="http://schemas.openxmlformats.org/drawingml/2006/main">
               <a:ext uri="{FF2B5EF4-FFF2-40B4-BE49-F238E27FC236}">
-                <a16:creationId xmlns:a16="http://schemas.microsoft.com/office/drawing/2014/main" id="{E01BD471-C102-4E6C-B2A0-5E8D71D6EF62}"/>
+                <a16:creationId xmlns:a16="http://schemas.microsoft.com/office/drawing/2014/main" id="{AC39305F-525B-4200-8450-00840D71C79D}"/>
               </a:ext>
             </a:extLst>
           </p:cNvPr>
@@ -13164,7 +13164,7 @@
           <p:cNvPr id="69" name="Text 67">
             <a:extLst xmlns:a="http://schemas.openxmlformats.org/drawingml/2006/main">
               <a:ext uri="{FF2B5EF4-FFF2-40B4-BE49-F238E27FC236}">
-                <a16:creationId xmlns:a16="http://schemas.microsoft.com/office/drawing/2014/main" id="{0FE1CFE4-669F-408B-B937-9E3564A31B19}"/>
+                <a16:creationId xmlns:a16="http://schemas.microsoft.com/office/drawing/2014/main" id="{1AEAF580-7525-48B8-BE1F-C4E19E2761D0}"/>
               </a:ext>
             </a:extLst>
           </p:cNvPr>
@@ -13212,7 +13212,7 @@
           <p:cNvPr id="70" name="Shape 68">
             <a:extLst xmlns:a="http://schemas.openxmlformats.org/drawingml/2006/main">
               <a:ext uri="{FF2B5EF4-FFF2-40B4-BE49-F238E27FC236}">
-                <a16:creationId xmlns:a16="http://schemas.microsoft.com/office/drawing/2014/main" id="{6E88E561-70FD-46EC-9A2F-7A5A967DD643}"/>
+                <a16:creationId xmlns:a16="http://schemas.microsoft.com/office/drawing/2014/main" id="{89F71C3D-D971-45E6-B990-045F57960A2E}"/>
               </a:ext>
             </a:extLst>
           </p:cNvPr>
@@ -13245,7 +13245,7 @@
           <p:cNvPr id="71" name="Text 69">
             <a:extLst xmlns:a="http://schemas.openxmlformats.org/drawingml/2006/main">
               <a:ext uri="{FF2B5EF4-FFF2-40B4-BE49-F238E27FC236}">
-                <a16:creationId xmlns:a16="http://schemas.microsoft.com/office/drawing/2014/main" id="{0CC97180-CA48-48B3-B32E-04FB76B18959}"/>
+                <a16:creationId xmlns:a16="http://schemas.microsoft.com/office/drawing/2014/main" id="{AE40AB7E-32C1-4451-A275-E9A7961CB67D}"/>
               </a:ext>
             </a:extLst>
           </p:cNvPr>
@@ -13293,7 +13293,7 @@
           <p:cNvPr id="72" name="Shape 70">
             <a:extLst xmlns:a="http://schemas.openxmlformats.org/drawingml/2006/main">
               <a:ext uri="{FF2B5EF4-FFF2-40B4-BE49-F238E27FC236}">
-                <a16:creationId xmlns:a16="http://schemas.microsoft.com/office/drawing/2014/main" id="{C60F20B0-9629-4CE8-BAC9-33EE1A876B91}"/>
+                <a16:creationId xmlns:a16="http://schemas.microsoft.com/office/drawing/2014/main" id="{0FE534F7-3FCF-4F53-BF7D-4655E911F212}"/>
               </a:ext>
             </a:extLst>
           </p:cNvPr>
@@ -13326,7 +13326,7 @@
           <p:cNvPr id="73" name="Text 71">
             <a:extLst xmlns:a="http://schemas.openxmlformats.org/drawingml/2006/main">
               <a:ext uri="{FF2B5EF4-FFF2-40B4-BE49-F238E27FC236}">
-                <a16:creationId xmlns:a16="http://schemas.microsoft.com/office/drawing/2014/main" id="{7B91AED8-3712-4AF5-8867-0251284BB8BC}"/>
+                <a16:creationId xmlns:a16="http://schemas.microsoft.com/office/drawing/2014/main" id="{23EB9F90-F3D3-4F94-AAD9-7043412E33F6}"/>
               </a:ext>
             </a:extLst>
           </p:cNvPr>
@@ -13374,7 +13374,7 @@
           <p:cNvPr id="74" name="Shape 72">
             <a:extLst xmlns:a="http://schemas.openxmlformats.org/drawingml/2006/main">
               <a:ext uri="{FF2B5EF4-FFF2-40B4-BE49-F238E27FC236}">
-                <a16:creationId xmlns:a16="http://schemas.microsoft.com/office/drawing/2014/main" id="{FE16D209-337E-4A2B-87BD-C2CD3631FE90}"/>
+                <a16:creationId xmlns:a16="http://schemas.microsoft.com/office/drawing/2014/main" id="{B5D199F7-D20F-4A51-B310-2409FAF4F8F1}"/>
               </a:ext>
             </a:extLst>
           </p:cNvPr>
@@ -13407,7 +13407,7 @@
           <p:cNvPr id="75" name="Text 73">
             <a:extLst xmlns:a="http://schemas.openxmlformats.org/drawingml/2006/main">
               <a:ext uri="{FF2B5EF4-FFF2-40B4-BE49-F238E27FC236}">
-                <a16:creationId xmlns:a16="http://schemas.microsoft.com/office/drawing/2014/main" id="{ECD0E25D-90BE-45F3-A17B-D4D2B0BD36F4}"/>
+                <a16:creationId xmlns:a16="http://schemas.microsoft.com/office/drawing/2014/main" id="{74125964-C5A9-4121-BF8C-7F321C4FC0D2}"/>
               </a:ext>
             </a:extLst>
           </p:cNvPr>
@@ -13455,7 +13455,7 @@
           <p:cNvPr id="76" name="Shape 74">
             <a:extLst xmlns:a="http://schemas.openxmlformats.org/drawingml/2006/main">
               <a:ext uri="{FF2B5EF4-FFF2-40B4-BE49-F238E27FC236}">
-                <a16:creationId xmlns:a16="http://schemas.microsoft.com/office/drawing/2014/main" id="{9C5BB79B-3F0A-4562-8B60-A7D1237AB103}"/>
+                <a16:creationId xmlns:a16="http://schemas.microsoft.com/office/drawing/2014/main" id="{0426412C-4FCE-4B98-A191-4109E395A6C4}"/>
               </a:ext>
             </a:extLst>
           </p:cNvPr>
@@ -13488,7 +13488,7 @@
           <p:cNvPr id="77" name="Text 75">
             <a:extLst xmlns:a="http://schemas.openxmlformats.org/drawingml/2006/main">
               <a:ext uri="{FF2B5EF4-FFF2-40B4-BE49-F238E27FC236}">
-                <a16:creationId xmlns:a16="http://schemas.microsoft.com/office/drawing/2014/main" id="{E67E5550-381C-410D-B17C-0EE3443340B6}"/>
+                <a16:creationId xmlns:a16="http://schemas.microsoft.com/office/drawing/2014/main" id="{2F801BBF-9600-4FEB-93F4-2D819F3DF949}"/>
               </a:ext>
             </a:extLst>
           </p:cNvPr>
@@ -13536,7 +13536,7 @@
           <p:cNvPr id="78" name="Shape 76">
             <a:extLst xmlns:a="http://schemas.openxmlformats.org/drawingml/2006/main">
               <a:ext uri="{FF2B5EF4-FFF2-40B4-BE49-F238E27FC236}">
-                <a16:creationId xmlns:a16="http://schemas.microsoft.com/office/drawing/2014/main" id="{0EB3CA2F-CB11-45B0-9071-335C797368E7}"/>
+                <a16:creationId xmlns:a16="http://schemas.microsoft.com/office/drawing/2014/main" id="{F9A742F1-A396-4424-B792-1CD51C151BB2}"/>
               </a:ext>
             </a:extLst>
           </p:cNvPr>
@@ -13569,7 +13569,7 @@
           <p:cNvPr id="79" name="Text 77">
             <a:extLst xmlns:a="http://schemas.openxmlformats.org/drawingml/2006/main">
               <a:ext uri="{FF2B5EF4-FFF2-40B4-BE49-F238E27FC236}">
-                <a16:creationId xmlns:a16="http://schemas.microsoft.com/office/drawing/2014/main" id="{89E6F7D6-3655-4357-8EFF-42D490D81668}"/>
+                <a16:creationId xmlns:a16="http://schemas.microsoft.com/office/drawing/2014/main" id="{F7E0D73C-8527-42B3-A267-D50ABC0BB2E6}"/>
               </a:ext>
             </a:extLst>
           </p:cNvPr>
@@ -13617,7 +13617,7 @@
           <p:cNvPr id="80" name="Text 78">
             <a:extLst xmlns:a="http://schemas.openxmlformats.org/drawingml/2006/main">
               <a:ext uri="{FF2B5EF4-FFF2-40B4-BE49-F238E27FC236}">
-                <a16:creationId xmlns:a16="http://schemas.microsoft.com/office/drawing/2014/main" id="{63E99A03-008D-4718-93E2-FD50D0A2D26C}"/>
+                <a16:creationId xmlns:a16="http://schemas.microsoft.com/office/drawing/2014/main" id="{E078BCBA-80B3-44DB-9AE2-291313EEE37A}"/>
               </a:ext>
             </a:extLst>
           </p:cNvPr>
@@ -13665,7 +13665,7 @@
           <p:cNvPr id="81" name="Text 79">
             <a:extLst xmlns:a="http://schemas.openxmlformats.org/drawingml/2006/main">
               <a:ext uri="{FF2B5EF4-FFF2-40B4-BE49-F238E27FC236}">
-                <a16:creationId xmlns:a16="http://schemas.microsoft.com/office/drawing/2014/main" id="{EBCE58CE-AE67-476C-9A4F-09185261440D}"/>
+                <a16:creationId xmlns:a16="http://schemas.microsoft.com/office/drawing/2014/main" id="{8B1F9B3A-DABB-4CCB-AA7F-01AC87ABB13E}"/>
               </a:ext>
             </a:extLst>
           </p:cNvPr>
@@ -13702,7 +13702,7 @@
                 <a:ea typeface="Microsoft YaHei"/>
                 <a:cs typeface="Microsoft YaHei"/>
               </a:rPr>
-              <a:t>智能云储 · DOEF | 补充实验与方法说明</a:t>
+              <a:t>智储云控 · DOEF | 补充实验与方法说明</a:t>
             </a:r>
             <a:endParaRPr sz="750"/>
           </a:p>
@@ -13713,7 +13713,7 @@
           <p:cNvPr id="82" name="Slide Number Placeholder 0">
             <a:extLst xmlns:a="http://schemas.openxmlformats.org/drawingml/2006/main">
               <a:ext uri="{FF2B5EF4-FFF2-40B4-BE49-F238E27FC236}">
-                <a16:creationId xmlns:a16="http://schemas.microsoft.com/office/drawing/2014/main" id="{27D8F792-C012-4664-80E8-AE7320C39F98}"/>
+                <a16:creationId xmlns:a16="http://schemas.microsoft.com/office/drawing/2014/main" id="{03E3CE86-68C4-4870-B679-BB1E0826B175}"/>
               </a:ext>
             </a:extLst>
           </p:cNvPr>
@@ -13763,7 +13763,7 @@
     </p:spTree>
     <p:extLst>
       <p:ext uri="{BB962C8B-B14F-4D97-AF65-F5344CB8AC3E}">
-        <p14:creationId xmlns:p14="http://schemas.microsoft.com/office/powerpoint/2010/main" val="746193629"/>
+        <p14:creationId xmlns:p14="http://schemas.microsoft.com/office/powerpoint/2010/main" val="129106609"/>
       </p:ext>
     </p:extLst>
   </p:cSld>
@@ -13787,7 +13787,7 @@
           <p:cNvPr id="2" name="Text 0">
             <a:extLst xmlns:a="http://schemas.openxmlformats.org/drawingml/2006/main">
               <a:ext uri="{FF2B5EF4-FFF2-40B4-BE49-F238E27FC236}">
-                <a16:creationId xmlns:a16="http://schemas.microsoft.com/office/drawing/2014/main" id="{83E587A8-064B-4963-9187-4F086B5B2493}"/>
+                <a16:creationId xmlns:a16="http://schemas.microsoft.com/office/drawing/2014/main" id="{8D8C87BE-0D18-480A-A190-08E192381655}"/>
               </a:ext>
             </a:extLst>
           </p:cNvPr>
@@ -13833,7 +13833,7 @@
           <p:cNvPr id="3" name="Text 1">
             <a:extLst xmlns:a="http://schemas.openxmlformats.org/drawingml/2006/main">
               <a:ext uri="{FF2B5EF4-FFF2-40B4-BE49-F238E27FC236}">
-                <a16:creationId xmlns:a16="http://schemas.microsoft.com/office/drawing/2014/main" id="{DBFDBE55-77DB-4FA4-90C3-642DF4B192B7}"/>
+                <a16:creationId xmlns:a16="http://schemas.microsoft.com/office/drawing/2014/main" id="{4B9B76CF-FED6-4476-B710-1FA574827AAD}"/>
               </a:ext>
             </a:extLst>
           </p:cNvPr>
@@ -13879,7 +13879,7 @@
           <p:cNvPr id="4" name="Shape 2">
             <a:extLst xmlns:a="http://schemas.openxmlformats.org/drawingml/2006/main">
               <a:ext uri="{FF2B5EF4-FFF2-40B4-BE49-F238E27FC236}">
-                <a16:creationId xmlns:a16="http://schemas.microsoft.com/office/drawing/2014/main" id="{255FFD57-A99B-493F-A352-9D2C94983736}"/>
+                <a16:creationId xmlns:a16="http://schemas.microsoft.com/office/drawing/2014/main" id="{ACBCF50D-949C-403F-B892-33C62BAE904E}"/>
               </a:ext>
             </a:extLst>
           </p:cNvPr>
@@ -13916,7 +13916,7 @@
           <p:cNvPr id="5" name="Text 3">
             <a:extLst xmlns:a="http://schemas.openxmlformats.org/drawingml/2006/main">
               <a:ext uri="{FF2B5EF4-FFF2-40B4-BE49-F238E27FC236}">
-                <a16:creationId xmlns:a16="http://schemas.microsoft.com/office/drawing/2014/main" id="{69BE5ABF-3DF3-479D-97DF-70F09C3D7268}"/>
+                <a16:creationId xmlns:a16="http://schemas.microsoft.com/office/drawing/2014/main" id="{3F19EF09-0E57-41AE-A32A-81F5DD916298}"/>
               </a:ext>
             </a:extLst>
           </p:cNvPr>
@@ -13964,7 +13964,7 @@
           <p:cNvPr id="6" name="Text 4">
             <a:extLst xmlns:a="http://schemas.openxmlformats.org/drawingml/2006/main">
               <a:ext uri="{FF2B5EF4-FFF2-40B4-BE49-F238E27FC236}">
-                <a16:creationId xmlns:a16="http://schemas.microsoft.com/office/drawing/2014/main" id="{82890213-B0E7-45B3-B988-03AC661185EE}"/>
+                <a16:creationId xmlns:a16="http://schemas.microsoft.com/office/drawing/2014/main" id="{E210C099-8BE3-4EC4-8E47-800EC345E5EC}"/>
               </a:ext>
             </a:extLst>
           </p:cNvPr>
@@ -14012,7 +14012,7 @@
           <p:cNvPr id="7" name="Text 5">
             <a:extLst xmlns:a="http://schemas.openxmlformats.org/drawingml/2006/main">
               <a:ext uri="{FF2B5EF4-FFF2-40B4-BE49-F238E27FC236}">
-                <a16:creationId xmlns:a16="http://schemas.microsoft.com/office/drawing/2014/main" id="{64035330-6019-4BA0-A1E2-4B236CBCC115}"/>
+                <a16:creationId xmlns:a16="http://schemas.microsoft.com/office/drawing/2014/main" id="{572828E5-0650-4F33-8991-32830CBD4DFA}"/>
               </a:ext>
             </a:extLst>
           </p:cNvPr>
@@ -14060,7 +14060,7 @@
           <p:cNvPr id="8" name="Shape 6">
             <a:extLst xmlns:a="http://schemas.openxmlformats.org/drawingml/2006/main">
               <a:ext uri="{FF2B5EF4-FFF2-40B4-BE49-F238E27FC236}">
-                <a16:creationId xmlns:a16="http://schemas.microsoft.com/office/drawing/2014/main" id="{C028BEEC-2008-4BEB-A1FC-49F3D8D18314}"/>
+                <a16:creationId xmlns:a16="http://schemas.microsoft.com/office/drawing/2014/main" id="{ED7C0485-6B21-43D1-AA35-F9BBA2299523}"/>
               </a:ext>
             </a:extLst>
           </p:cNvPr>
@@ -14102,7 +14102,7 @@
           <p:cNvPr id="9" name="Text 7">
             <a:extLst xmlns:a="http://schemas.openxmlformats.org/drawingml/2006/main">
               <a:ext uri="{FF2B5EF4-FFF2-40B4-BE49-F238E27FC236}">
-                <a16:creationId xmlns:a16="http://schemas.microsoft.com/office/drawing/2014/main" id="{7A08305D-A0E5-43EE-AA18-AD6A752E8671}"/>
+                <a16:creationId xmlns:a16="http://schemas.microsoft.com/office/drawing/2014/main" id="{49CED038-5892-4AC7-8933-6461BE6714A6}"/>
               </a:ext>
             </a:extLst>
           </p:cNvPr>
@@ -14148,7 +14148,7 @@
           <p:cNvPr id="10" name="Text 8">
             <a:extLst xmlns:a="http://schemas.openxmlformats.org/drawingml/2006/main">
               <a:ext uri="{FF2B5EF4-FFF2-40B4-BE49-F238E27FC236}">
-                <a16:creationId xmlns:a16="http://schemas.microsoft.com/office/drawing/2014/main" id="{DB770125-BE81-4B43-9080-948F74FE23A7}"/>
+                <a16:creationId xmlns:a16="http://schemas.microsoft.com/office/drawing/2014/main" id="{D0F38316-47D9-46B6-A9BE-E75996BD142E}"/>
               </a:ext>
             </a:extLst>
           </p:cNvPr>
@@ -14196,7 +14196,7 @@
           <p:cNvPr id="11" name="Text 9">
             <a:extLst xmlns:a="http://schemas.openxmlformats.org/drawingml/2006/main">
               <a:ext uri="{FF2B5EF4-FFF2-40B4-BE49-F238E27FC236}">
-                <a16:creationId xmlns:a16="http://schemas.microsoft.com/office/drawing/2014/main" id="{760515B4-1D84-4A26-A578-80E21DC67F18}"/>
+                <a16:creationId xmlns:a16="http://schemas.microsoft.com/office/drawing/2014/main" id="{6BB393CB-C823-44F4-B47B-BE0EE1780232}"/>
               </a:ext>
             </a:extLst>
           </p:cNvPr>
@@ -14242,7 +14242,7 @@
           <p:cNvPr id="12" name="Shape 10">
             <a:extLst xmlns:a="http://schemas.openxmlformats.org/drawingml/2006/main">
               <a:ext uri="{FF2B5EF4-FFF2-40B4-BE49-F238E27FC236}">
-                <a16:creationId xmlns:a16="http://schemas.microsoft.com/office/drawing/2014/main" id="{26003415-9C20-4C26-A704-7571D9B16D43}"/>
+                <a16:creationId xmlns:a16="http://schemas.microsoft.com/office/drawing/2014/main" id="{EE75CD4B-5087-4571-9EC4-8AD041926727}"/>
               </a:ext>
             </a:extLst>
           </p:cNvPr>
@@ -14284,7 +14284,7 @@
           <p:cNvPr id="13" name="Text 11">
             <a:extLst xmlns:a="http://schemas.openxmlformats.org/drawingml/2006/main">
               <a:ext uri="{FF2B5EF4-FFF2-40B4-BE49-F238E27FC236}">
-                <a16:creationId xmlns:a16="http://schemas.microsoft.com/office/drawing/2014/main" id="{CBC41DC1-3617-4CB6-BC78-4A7524A34319}"/>
+                <a16:creationId xmlns:a16="http://schemas.microsoft.com/office/drawing/2014/main" id="{B47912B8-EBED-4798-95DF-65B95CF133D0}"/>
               </a:ext>
             </a:extLst>
           </p:cNvPr>
@@ -14330,7 +14330,7 @@
           <p:cNvPr id="14" name="Text 12">
             <a:extLst xmlns:a="http://schemas.openxmlformats.org/drawingml/2006/main">
               <a:ext uri="{FF2B5EF4-FFF2-40B4-BE49-F238E27FC236}">
-                <a16:creationId xmlns:a16="http://schemas.microsoft.com/office/drawing/2014/main" id="{EB69C079-529C-427C-B67C-59EDFF25B80F}"/>
+                <a16:creationId xmlns:a16="http://schemas.microsoft.com/office/drawing/2014/main" id="{5D908CD7-620B-41BC-929E-5F072ADF033D}"/>
               </a:ext>
             </a:extLst>
           </p:cNvPr>
@@ -14378,7 +14378,7 @@
           <p:cNvPr id="15" name="Text 13">
             <a:extLst xmlns:a="http://schemas.openxmlformats.org/drawingml/2006/main">
               <a:ext uri="{FF2B5EF4-FFF2-40B4-BE49-F238E27FC236}">
-                <a16:creationId xmlns:a16="http://schemas.microsoft.com/office/drawing/2014/main" id="{8A082938-3D60-449C-AFA1-D4756251966F}"/>
+                <a16:creationId xmlns:a16="http://schemas.microsoft.com/office/drawing/2014/main" id="{6B481F50-CE9D-4247-AF6D-D69D26EC9F5D}"/>
               </a:ext>
             </a:extLst>
           </p:cNvPr>
@@ -14424,7 +14424,7 @@
           <p:cNvPr id="16" name="Shape 14">
             <a:extLst xmlns:a="http://schemas.openxmlformats.org/drawingml/2006/main">
               <a:ext uri="{FF2B5EF4-FFF2-40B4-BE49-F238E27FC236}">
-                <a16:creationId xmlns:a16="http://schemas.microsoft.com/office/drawing/2014/main" id="{D4CEBE0A-6062-47C2-BA18-EF6E6AA25AC2}"/>
+                <a16:creationId xmlns:a16="http://schemas.microsoft.com/office/drawing/2014/main" id="{F9AB6627-07C5-47B0-86C3-2A199A73999B}"/>
               </a:ext>
             </a:extLst>
           </p:cNvPr>
@@ -14466,7 +14466,7 @@
           <p:cNvPr id="17" name="Text 15">
             <a:extLst xmlns:a="http://schemas.openxmlformats.org/drawingml/2006/main">
               <a:ext uri="{FF2B5EF4-FFF2-40B4-BE49-F238E27FC236}">
-                <a16:creationId xmlns:a16="http://schemas.microsoft.com/office/drawing/2014/main" id="{E1FCC51C-8F7D-483F-9D69-5CC209D744B5}"/>
+                <a16:creationId xmlns:a16="http://schemas.microsoft.com/office/drawing/2014/main" id="{9B2A168F-1608-4492-8656-448B3FE27209}"/>
               </a:ext>
             </a:extLst>
           </p:cNvPr>
@@ -14512,7 +14512,7 @@
           <p:cNvPr id="18" name="Text 16">
             <a:extLst xmlns:a="http://schemas.openxmlformats.org/drawingml/2006/main">
               <a:ext uri="{FF2B5EF4-FFF2-40B4-BE49-F238E27FC236}">
-                <a16:creationId xmlns:a16="http://schemas.microsoft.com/office/drawing/2014/main" id="{D26536FB-BD41-4189-ADD1-CEEC405F40A0}"/>
+                <a16:creationId xmlns:a16="http://schemas.microsoft.com/office/drawing/2014/main" id="{41E1B401-35D4-472A-BEED-14FB9A4FF22B}"/>
               </a:ext>
             </a:extLst>
           </p:cNvPr>
@@ -14560,7 +14560,7 @@
           <p:cNvPr id="19" name="Text 17">
             <a:extLst xmlns:a="http://schemas.openxmlformats.org/drawingml/2006/main">
               <a:ext uri="{FF2B5EF4-FFF2-40B4-BE49-F238E27FC236}">
-                <a16:creationId xmlns:a16="http://schemas.microsoft.com/office/drawing/2014/main" id="{A9659BD0-46D1-4FB7-A926-57CFC5AE6147}"/>
+                <a16:creationId xmlns:a16="http://schemas.microsoft.com/office/drawing/2014/main" id="{F5377649-FE02-4288-A913-3A21206BBE57}"/>
               </a:ext>
             </a:extLst>
           </p:cNvPr>
@@ -14606,7 +14606,7 @@
           <p:cNvPr id="20" name="Shape 18">
             <a:extLst xmlns:a="http://schemas.openxmlformats.org/drawingml/2006/main">
               <a:ext uri="{FF2B5EF4-FFF2-40B4-BE49-F238E27FC236}">
-                <a16:creationId xmlns:a16="http://schemas.microsoft.com/office/drawing/2014/main" id="{715C7C32-8705-4E1C-9DAB-D56F64E2DE6B}"/>
+                <a16:creationId xmlns:a16="http://schemas.microsoft.com/office/drawing/2014/main" id="{4CCA6513-FD0F-436A-B2F8-D9956086D348}"/>
               </a:ext>
             </a:extLst>
           </p:cNvPr>
@@ -14648,7 +14648,7 @@
           <p:cNvPr id="21" name="Text 19">
             <a:extLst xmlns:a="http://schemas.openxmlformats.org/drawingml/2006/main">
               <a:ext uri="{FF2B5EF4-FFF2-40B4-BE49-F238E27FC236}">
-                <a16:creationId xmlns:a16="http://schemas.microsoft.com/office/drawing/2014/main" id="{60EB33C4-6F0A-4FCA-B0C5-FB3B4F859D0E}"/>
+                <a16:creationId xmlns:a16="http://schemas.microsoft.com/office/drawing/2014/main" id="{47ED9D0B-CB8F-4BDE-BCD0-1BE92C0E1C1B}"/>
               </a:ext>
             </a:extLst>
           </p:cNvPr>
@@ -14694,7 +14694,7 @@
           <p:cNvPr id="22" name="Text 20">
             <a:extLst xmlns:a="http://schemas.openxmlformats.org/drawingml/2006/main">
               <a:ext uri="{FF2B5EF4-FFF2-40B4-BE49-F238E27FC236}">
-                <a16:creationId xmlns:a16="http://schemas.microsoft.com/office/drawing/2014/main" id="{19684BEE-B1BE-4D30-B187-1530E71BB6DB}"/>
+                <a16:creationId xmlns:a16="http://schemas.microsoft.com/office/drawing/2014/main" id="{56E83950-B1BD-4019-9268-1EF6ED6C4F58}"/>
               </a:ext>
             </a:extLst>
           </p:cNvPr>
@@ -14742,7 +14742,7 @@
           <p:cNvPr id="23" name="Text 21">
             <a:extLst xmlns:a="http://schemas.openxmlformats.org/drawingml/2006/main">
               <a:ext uri="{FF2B5EF4-FFF2-40B4-BE49-F238E27FC236}">
-                <a16:creationId xmlns:a16="http://schemas.microsoft.com/office/drawing/2014/main" id="{9A770632-8647-4ECA-B6AF-93D5312F158A}"/>
+                <a16:creationId xmlns:a16="http://schemas.microsoft.com/office/drawing/2014/main" id="{136C5623-5F50-4B3A-B6BF-8888B6F4EAD4}"/>
               </a:ext>
             </a:extLst>
           </p:cNvPr>
@@ -14788,7 +14788,7 @@
           <p:cNvPr id="24" name="Shape 22">
             <a:extLst xmlns:a="http://schemas.openxmlformats.org/drawingml/2006/main">
               <a:ext uri="{FF2B5EF4-FFF2-40B4-BE49-F238E27FC236}">
-                <a16:creationId xmlns:a16="http://schemas.microsoft.com/office/drawing/2014/main" id="{A68D7E68-13BE-456B-95AC-F5E8EE1E158D}"/>
+                <a16:creationId xmlns:a16="http://schemas.microsoft.com/office/drawing/2014/main" id="{1E69B84D-BAB5-4E85-B080-25AF8B2F8A1D}"/>
               </a:ext>
             </a:extLst>
           </p:cNvPr>
@@ -14830,7 +14830,7 @@
           <p:cNvPr id="25" name="Text 23">
             <a:extLst xmlns:a="http://schemas.openxmlformats.org/drawingml/2006/main">
               <a:ext uri="{FF2B5EF4-FFF2-40B4-BE49-F238E27FC236}">
-                <a16:creationId xmlns:a16="http://schemas.microsoft.com/office/drawing/2014/main" id="{827CEB5D-09A8-45C3-B5E8-89B7DCC87D72}"/>
+                <a16:creationId xmlns:a16="http://schemas.microsoft.com/office/drawing/2014/main" id="{1A77357E-D1AF-46C7-9919-21CE5723E19A}"/>
               </a:ext>
             </a:extLst>
           </p:cNvPr>
@@ -14876,7 +14876,7 @@
           <p:cNvPr id="26" name="Text 24">
             <a:extLst xmlns:a="http://schemas.openxmlformats.org/drawingml/2006/main">
               <a:ext uri="{FF2B5EF4-FFF2-40B4-BE49-F238E27FC236}">
-                <a16:creationId xmlns:a16="http://schemas.microsoft.com/office/drawing/2014/main" id="{7227A0C1-3FCC-41CE-8293-812455EAA5B7}"/>
+                <a16:creationId xmlns:a16="http://schemas.microsoft.com/office/drawing/2014/main" id="{9B208045-64B2-4417-B868-8A1BE9A9B029}"/>
               </a:ext>
             </a:extLst>
           </p:cNvPr>
@@ -14924,7 +14924,7 @@
           <p:cNvPr id="27" name="Text 25">
             <a:extLst xmlns:a="http://schemas.openxmlformats.org/drawingml/2006/main">
               <a:ext uri="{FF2B5EF4-FFF2-40B4-BE49-F238E27FC236}">
-                <a16:creationId xmlns:a16="http://schemas.microsoft.com/office/drawing/2014/main" id="{D90DFFA2-1013-42F3-87C3-0C121C37E227}"/>
+                <a16:creationId xmlns:a16="http://schemas.microsoft.com/office/drawing/2014/main" id="{F8F65F4D-EFEA-4024-AEB7-ACDCF648F363}"/>
               </a:ext>
             </a:extLst>
           </p:cNvPr>
@@ -14970,7 +14970,7 @@
           <p:cNvPr id="28" name="Shape 26">
             <a:extLst xmlns:a="http://schemas.openxmlformats.org/drawingml/2006/main">
               <a:ext uri="{FF2B5EF4-FFF2-40B4-BE49-F238E27FC236}">
-                <a16:creationId xmlns:a16="http://schemas.microsoft.com/office/drawing/2014/main" id="{769D09D2-F000-4D43-9E66-9C85CC63F4F7}"/>
+                <a16:creationId xmlns:a16="http://schemas.microsoft.com/office/drawing/2014/main" id="{E8CC6222-D29C-4B3F-A6AA-E55C27ECEF56}"/>
               </a:ext>
             </a:extLst>
           </p:cNvPr>
@@ -15012,7 +15012,7 @@
           <p:cNvPr id="29" name="Text 27">
             <a:extLst xmlns:a="http://schemas.openxmlformats.org/drawingml/2006/main">
               <a:ext uri="{FF2B5EF4-FFF2-40B4-BE49-F238E27FC236}">
-                <a16:creationId xmlns:a16="http://schemas.microsoft.com/office/drawing/2014/main" id="{1259901A-91E6-4203-8C07-7DD167E6F7FE}"/>
+                <a16:creationId xmlns:a16="http://schemas.microsoft.com/office/drawing/2014/main" id="{E86DC57A-1910-4B2E-904D-F8B184132AAF}"/>
               </a:ext>
             </a:extLst>
           </p:cNvPr>
@@ -15058,7 +15058,7 @@
           <p:cNvPr id="30" name="Text 28">
             <a:extLst xmlns:a="http://schemas.openxmlformats.org/drawingml/2006/main">
               <a:ext uri="{FF2B5EF4-FFF2-40B4-BE49-F238E27FC236}">
-                <a16:creationId xmlns:a16="http://schemas.microsoft.com/office/drawing/2014/main" id="{1D39BBF4-CF41-4754-8BFC-DEFCB0507A6A}"/>
+                <a16:creationId xmlns:a16="http://schemas.microsoft.com/office/drawing/2014/main" id="{BAD5D0D1-10EB-4403-871D-ED659643B9FE}"/>
               </a:ext>
             </a:extLst>
           </p:cNvPr>
@@ -15106,7 +15106,7 @@
           <p:cNvPr id="31" name="Text 29">
             <a:extLst xmlns:a="http://schemas.openxmlformats.org/drawingml/2006/main">
               <a:ext uri="{FF2B5EF4-FFF2-40B4-BE49-F238E27FC236}">
-                <a16:creationId xmlns:a16="http://schemas.microsoft.com/office/drawing/2014/main" id="{BCF0719C-20F2-41C6-A526-CA3139DDA5B1}"/>
+                <a16:creationId xmlns:a16="http://schemas.microsoft.com/office/drawing/2014/main" id="{F9A6A789-28E7-4BB2-AE40-6CB05154DA72}"/>
               </a:ext>
             </a:extLst>
           </p:cNvPr>
@@ -15152,7 +15152,7 @@
           <p:cNvPr id="32" name="Shape 30">
             <a:extLst xmlns:a="http://schemas.openxmlformats.org/drawingml/2006/main">
               <a:ext uri="{FF2B5EF4-FFF2-40B4-BE49-F238E27FC236}">
-                <a16:creationId xmlns:a16="http://schemas.microsoft.com/office/drawing/2014/main" id="{5741F171-DD33-4CA2-ADDD-5E7497C5897C}"/>
+                <a16:creationId xmlns:a16="http://schemas.microsoft.com/office/drawing/2014/main" id="{B701905B-496C-49DE-995E-573600D588E8}"/>
               </a:ext>
             </a:extLst>
           </p:cNvPr>
@@ -15189,7 +15189,7 @@
           <p:cNvPr id="33" name="Text 31">
             <a:extLst xmlns:a="http://schemas.openxmlformats.org/drawingml/2006/main">
               <a:ext uri="{FF2B5EF4-FFF2-40B4-BE49-F238E27FC236}">
-                <a16:creationId xmlns:a16="http://schemas.microsoft.com/office/drawing/2014/main" id="{73C92E67-ED14-490D-B1CE-CDD296D02541}"/>
+                <a16:creationId xmlns:a16="http://schemas.microsoft.com/office/drawing/2014/main" id="{B0FCDF51-059B-4E49-8804-F87BE4F6CC81}"/>
               </a:ext>
             </a:extLst>
           </p:cNvPr>
@@ -15237,7 +15237,7 @@
           <p:cNvPr id="34" name="Text 32">
             <a:extLst xmlns:a="http://schemas.openxmlformats.org/drawingml/2006/main">
               <a:ext uri="{FF2B5EF4-FFF2-40B4-BE49-F238E27FC236}">
-                <a16:creationId xmlns:a16="http://schemas.microsoft.com/office/drawing/2014/main" id="{8DB6E177-81FA-44AF-AF53-CEC4422A49F0}"/>
+                <a16:creationId xmlns:a16="http://schemas.microsoft.com/office/drawing/2014/main" id="{930FDEC7-9A01-4182-A95A-F2F53A92E73F}"/>
               </a:ext>
             </a:extLst>
           </p:cNvPr>
@@ -15285,7 +15285,7 @@
           <p:cNvPr id="35" name="Text 33">
             <a:extLst xmlns:a="http://schemas.openxmlformats.org/drawingml/2006/main">
               <a:ext uri="{FF2B5EF4-FFF2-40B4-BE49-F238E27FC236}">
-                <a16:creationId xmlns:a16="http://schemas.microsoft.com/office/drawing/2014/main" id="{5EBC8A97-1F56-4422-8D24-24B1F61F585E}"/>
+                <a16:creationId xmlns:a16="http://schemas.microsoft.com/office/drawing/2014/main" id="{CB54B344-7AFD-4E87-86EE-06D60A859C7B}"/>
               </a:ext>
             </a:extLst>
           </p:cNvPr>
@@ -15322,7 +15322,7 @@
                 <a:ea typeface="Microsoft YaHei"/>
                 <a:cs typeface="Microsoft YaHei"/>
               </a:rPr>
-              <a:t>智能云储 · DOEF | 补充实验与方法说明</a:t>
+              <a:t>智储云控 · DOEF | 补充实验与方法说明</a:t>
             </a:r>
             <a:endParaRPr sz="750"/>
           </a:p>
@@ -15333,7 +15333,7 @@
           <p:cNvPr id="36" name="Slide Number Placeholder 0">
             <a:extLst xmlns:a="http://schemas.openxmlformats.org/drawingml/2006/main">
               <a:ext uri="{FF2B5EF4-FFF2-40B4-BE49-F238E27FC236}">
-                <a16:creationId xmlns:a16="http://schemas.microsoft.com/office/drawing/2014/main" id="{484AE328-AE54-4EB9-982F-C6E19362442E}"/>
+                <a16:creationId xmlns:a16="http://schemas.microsoft.com/office/drawing/2014/main" id="{18A2414A-5903-446D-ADA2-8257F709872A}"/>
               </a:ext>
             </a:extLst>
           </p:cNvPr>
@@ -15383,7 +15383,7 @@
     </p:spTree>
     <p:extLst>
       <p:ext uri="{BB962C8B-B14F-4D97-AF65-F5344CB8AC3E}">
-        <p14:creationId xmlns:p14="http://schemas.microsoft.com/office/powerpoint/2010/main" val="1314315592"/>
+        <p14:creationId xmlns:p14="http://schemas.microsoft.com/office/powerpoint/2010/main" val="318365269"/>
       </p:ext>
     </p:extLst>
   </p:cSld>
@@ -15407,7 +15407,7 @@
           <p:cNvPr id="2" name="Text 0">
             <a:extLst xmlns:a="http://schemas.openxmlformats.org/drawingml/2006/main">
               <a:ext uri="{FF2B5EF4-FFF2-40B4-BE49-F238E27FC236}">
-                <a16:creationId xmlns:a16="http://schemas.microsoft.com/office/drawing/2014/main" id="{95062F60-246E-4AF1-9E12-EDE83978B944}"/>
+                <a16:creationId xmlns:a16="http://schemas.microsoft.com/office/drawing/2014/main" id="{FB805BA4-7FDD-44E7-A224-99F0712124B4}"/>
               </a:ext>
             </a:extLst>
           </p:cNvPr>
@@ -15453,7 +15453,7 @@
           <p:cNvPr id="3" name="Text 1">
             <a:extLst xmlns:a="http://schemas.openxmlformats.org/drawingml/2006/main">
               <a:ext uri="{FF2B5EF4-FFF2-40B4-BE49-F238E27FC236}">
-                <a16:creationId xmlns:a16="http://schemas.microsoft.com/office/drawing/2014/main" id="{7CE4B646-629D-452A-B273-CCD7F5CACD96}"/>
+                <a16:creationId xmlns:a16="http://schemas.microsoft.com/office/drawing/2014/main" id="{E9AE6FD5-74D0-473C-913E-A585F606152F}"/>
               </a:ext>
             </a:extLst>
           </p:cNvPr>
@@ -15499,7 +15499,7 @@
           <p:cNvPr id="4" name="Shape 2">
             <a:extLst xmlns:a="http://schemas.openxmlformats.org/drawingml/2006/main">
               <a:ext uri="{FF2B5EF4-FFF2-40B4-BE49-F238E27FC236}">
-                <a16:creationId xmlns:a16="http://schemas.microsoft.com/office/drawing/2014/main" id="{804FAAE0-189A-4756-8CA6-EEF42B565DBF}"/>
+                <a16:creationId xmlns:a16="http://schemas.microsoft.com/office/drawing/2014/main" id="{99F5E195-BC79-44AD-8D08-BE9164CC2A45}"/>
               </a:ext>
             </a:extLst>
           </p:cNvPr>
@@ -15536,7 +15536,7 @@
           <p:cNvPr id="5" name="Text 3">
             <a:extLst xmlns:a="http://schemas.openxmlformats.org/drawingml/2006/main">
               <a:ext uri="{FF2B5EF4-FFF2-40B4-BE49-F238E27FC236}">
-                <a16:creationId xmlns:a16="http://schemas.microsoft.com/office/drawing/2014/main" id="{8F37FB13-83E1-4FF6-B258-027F3E718FAB}"/>
+                <a16:creationId xmlns:a16="http://schemas.microsoft.com/office/drawing/2014/main" id="{35823494-8C1F-4A13-98F9-1F3BBAC44DEF}"/>
               </a:ext>
             </a:extLst>
           </p:cNvPr>
@@ -15584,7 +15584,7 @@
           <p:cNvPr id="6" name="Text 4">
             <a:extLst xmlns:a="http://schemas.openxmlformats.org/drawingml/2006/main">
               <a:ext uri="{FF2B5EF4-FFF2-40B4-BE49-F238E27FC236}">
-                <a16:creationId xmlns:a16="http://schemas.microsoft.com/office/drawing/2014/main" id="{26E4E0B8-CBEF-40FA-B6B3-4C7BCDAE5646}"/>
+                <a16:creationId xmlns:a16="http://schemas.microsoft.com/office/drawing/2014/main" id="{4099C821-7B3C-4A22-9213-9F44CC70487C}"/>
               </a:ext>
             </a:extLst>
           </p:cNvPr>
@@ -15632,7 +15632,7 @@
           <p:cNvPr id="7" name="Text 5">
             <a:extLst xmlns:a="http://schemas.openxmlformats.org/drawingml/2006/main">
               <a:ext uri="{FF2B5EF4-FFF2-40B4-BE49-F238E27FC236}">
-                <a16:creationId xmlns:a16="http://schemas.microsoft.com/office/drawing/2014/main" id="{1C9263FC-E88F-4724-A56F-8F3241F2DCEB}"/>
+                <a16:creationId xmlns:a16="http://schemas.microsoft.com/office/drawing/2014/main" id="{1B423F0C-A45E-46EA-8A59-5B89A07EBAED}"/>
               </a:ext>
             </a:extLst>
           </p:cNvPr>
@@ -15680,7 +15680,7 @@
           <p:cNvPr id="8" name="Shape 6">
             <a:extLst xmlns:a="http://schemas.openxmlformats.org/drawingml/2006/main">
               <a:ext uri="{FF2B5EF4-FFF2-40B4-BE49-F238E27FC236}">
-                <a16:creationId xmlns:a16="http://schemas.microsoft.com/office/drawing/2014/main" id="{6688A487-2686-4F97-9D01-B898464FF8A2}"/>
+                <a16:creationId xmlns:a16="http://schemas.microsoft.com/office/drawing/2014/main" id="{1489BF56-85CE-414A-9BFE-0BD2D080D65D}"/>
               </a:ext>
             </a:extLst>
           </p:cNvPr>
@@ -15713,7 +15713,7 @@
           <p:cNvPr id="9" name="Text 7">
             <a:extLst xmlns:a="http://schemas.openxmlformats.org/drawingml/2006/main">
               <a:ext uri="{FF2B5EF4-FFF2-40B4-BE49-F238E27FC236}">
-                <a16:creationId xmlns:a16="http://schemas.microsoft.com/office/drawing/2014/main" id="{DAF3882F-2065-4F2C-AFD2-B41CCA8AC465}"/>
+                <a16:creationId xmlns:a16="http://schemas.microsoft.com/office/drawing/2014/main" id="{81D3D80D-3815-417B-B252-53DDC399E6E2}"/>
               </a:ext>
             </a:extLst>
           </p:cNvPr>
@@ -15761,7 +15761,7 @@
           <p:cNvPr id="10" name="Shape 8">
             <a:extLst xmlns:a="http://schemas.openxmlformats.org/drawingml/2006/main">
               <a:ext uri="{FF2B5EF4-FFF2-40B4-BE49-F238E27FC236}">
-                <a16:creationId xmlns:a16="http://schemas.microsoft.com/office/drawing/2014/main" id="{92FACE4A-BDC2-417A-BA6F-6B102F61AF53}"/>
+                <a16:creationId xmlns:a16="http://schemas.microsoft.com/office/drawing/2014/main" id="{49D43850-DB64-4C8C-B797-3B26F3D3D38D}"/>
               </a:ext>
             </a:extLst>
           </p:cNvPr>
@@ -15794,7 +15794,7 @@
           <p:cNvPr id="11" name="Text 9">
             <a:extLst xmlns:a="http://schemas.openxmlformats.org/drawingml/2006/main">
               <a:ext uri="{FF2B5EF4-FFF2-40B4-BE49-F238E27FC236}">
-                <a16:creationId xmlns:a16="http://schemas.microsoft.com/office/drawing/2014/main" id="{C7DD565E-DB2E-4713-9519-24BABC0B77B9}"/>
+                <a16:creationId xmlns:a16="http://schemas.microsoft.com/office/drawing/2014/main" id="{19022E5E-7893-4C36-8B29-896E5F9CD220}"/>
               </a:ext>
             </a:extLst>
           </p:cNvPr>
@@ -15842,7 +15842,7 @@
           <p:cNvPr id="12" name="Shape 10">
             <a:extLst xmlns:a="http://schemas.openxmlformats.org/drawingml/2006/main">
               <a:ext uri="{FF2B5EF4-FFF2-40B4-BE49-F238E27FC236}">
-                <a16:creationId xmlns:a16="http://schemas.microsoft.com/office/drawing/2014/main" id="{9C87DDD3-DB1D-46D6-9E66-7F7DF168957C}"/>
+                <a16:creationId xmlns:a16="http://schemas.microsoft.com/office/drawing/2014/main" id="{8F585CC4-12D9-439E-9856-155FE2327927}"/>
               </a:ext>
             </a:extLst>
           </p:cNvPr>
@@ -15875,7 +15875,7 @@
           <p:cNvPr id="13" name="Text 11">
             <a:extLst xmlns:a="http://schemas.openxmlformats.org/drawingml/2006/main">
               <a:ext uri="{FF2B5EF4-FFF2-40B4-BE49-F238E27FC236}">
-                <a16:creationId xmlns:a16="http://schemas.microsoft.com/office/drawing/2014/main" id="{F2183329-2D09-4132-8B9F-5EC2DFBE9445}"/>
+                <a16:creationId xmlns:a16="http://schemas.microsoft.com/office/drawing/2014/main" id="{9B9AF3F3-66EB-4CBA-AC04-5CADFED6B911}"/>
               </a:ext>
             </a:extLst>
           </p:cNvPr>
@@ -15923,7 +15923,7 @@
           <p:cNvPr id="14" name="Shape 12">
             <a:extLst xmlns:a="http://schemas.openxmlformats.org/drawingml/2006/main">
               <a:ext uri="{FF2B5EF4-FFF2-40B4-BE49-F238E27FC236}">
-                <a16:creationId xmlns:a16="http://schemas.microsoft.com/office/drawing/2014/main" id="{7F008468-6246-4415-BD94-AC4CD975B9A8}"/>
+                <a16:creationId xmlns:a16="http://schemas.microsoft.com/office/drawing/2014/main" id="{0F8AAA97-513E-4F33-AC75-32A007A5C281}"/>
               </a:ext>
             </a:extLst>
           </p:cNvPr>
@@ -15956,7 +15956,7 @@
           <p:cNvPr id="15" name="Text 13">
             <a:extLst xmlns:a="http://schemas.openxmlformats.org/drawingml/2006/main">
               <a:ext uri="{FF2B5EF4-FFF2-40B4-BE49-F238E27FC236}">
-                <a16:creationId xmlns:a16="http://schemas.microsoft.com/office/drawing/2014/main" id="{A08409C3-A4D1-4EC8-94BD-DF71F123449D}"/>
+                <a16:creationId xmlns:a16="http://schemas.microsoft.com/office/drawing/2014/main" id="{946DD3A9-4930-46CE-AA22-B62F088769A4}"/>
               </a:ext>
             </a:extLst>
           </p:cNvPr>
@@ -16004,7 +16004,7 @@
           <p:cNvPr id="16" name="Shape 14">
             <a:extLst xmlns:a="http://schemas.openxmlformats.org/drawingml/2006/main">
               <a:ext uri="{FF2B5EF4-FFF2-40B4-BE49-F238E27FC236}">
-                <a16:creationId xmlns:a16="http://schemas.microsoft.com/office/drawing/2014/main" id="{23242F93-15FA-496E-AC82-83A7AB2A6C68}"/>
+                <a16:creationId xmlns:a16="http://schemas.microsoft.com/office/drawing/2014/main" id="{A8515EEA-E9A8-438C-8F5C-CF306C867D50}"/>
               </a:ext>
             </a:extLst>
           </p:cNvPr>
@@ -16037,7 +16037,7 @@
           <p:cNvPr id="17" name="Text 15">
             <a:extLst xmlns:a="http://schemas.openxmlformats.org/drawingml/2006/main">
               <a:ext uri="{FF2B5EF4-FFF2-40B4-BE49-F238E27FC236}">
-                <a16:creationId xmlns:a16="http://schemas.microsoft.com/office/drawing/2014/main" id="{783FF561-4B01-4F3B-83B7-67CACACC44AE}"/>
+                <a16:creationId xmlns:a16="http://schemas.microsoft.com/office/drawing/2014/main" id="{F1C7FCDD-9D32-40E1-9FFB-A0E6254DAF8B}"/>
               </a:ext>
             </a:extLst>
           </p:cNvPr>
@@ -16085,7 +16085,7 @@
           <p:cNvPr id="18" name="Shape 16">
             <a:extLst xmlns:a="http://schemas.openxmlformats.org/drawingml/2006/main">
               <a:ext uri="{FF2B5EF4-FFF2-40B4-BE49-F238E27FC236}">
-                <a16:creationId xmlns:a16="http://schemas.microsoft.com/office/drawing/2014/main" id="{14615860-4CA6-4E22-A830-5ADE1F938B07}"/>
+                <a16:creationId xmlns:a16="http://schemas.microsoft.com/office/drawing/2014/main" id="{F3CBBE45-9D35-44C5-95D7-CFE90323D852}"/>
               </a:ext>
             </a:extLst>
           </p:cNvPr>
@@ -16118,7 +16118,7 @@
           <p:cNvPr id="19" name="Text 17">
             <a:extLst xmlns:a="http://schemas.openxmlformats.org/drawingml/2006/main">
               <a:ext uri="{FF2B5EF4-FFF2-40B4-BE49-F238E27FC236}">
-                <a16:creationId xmlns:a16="http://schemas.microsoft.com/office/drawing/2014/main" id="{3621ACEE-FBA1-4A12-950B-671704D040B8}"/>
+                <a16:creationId xmlns:a16="http://schemas.microsoft.com/office/drawing/2014/main" id="{7FE0B326-D453-4579-AD7A-86F0532BCE61}"/>
               </a:ext>
             </a:extLst>
           </p:cNvPr>
@@ -16166,7 +16166,7 @@
           <p:cNvPr id="20" name="Shape 18">
             <a:extLst xmlns:a="http://schemas.openxmlformats.org/drawingml/2006/main">
               <a:ext uri="{FF2B5EF4-FFF2-40B4-BE49-F238E27FC236}">
-                <a16:creationId xmlns:a16="http://schemas.microsoft.com/office/drawing/2014/main" id="{9B699210-2F2C-44D6-87D6-47038FE35A3C}"/>
+                <a16:creationId xmlns:a16="http://schemas.microsoft.com/office/drawing/2014/main" id="{D3ECC0F5-6B94-499D-9900-60C009C5BB01}"/>
               </a:ext>
             </a:extLst>
           </p:cNvPr>
@@ -16199,7 +16199,7 @@
           <p:cNvPr id="21" name="Text 19">
             <a:extLst xmlns:a="http://schemas.openxmlformats.org/drawingml/2006/main">
               <a:ext uri="{FF2B5EF4-FFF2-40B4-BE49-F238E27FC236}">
-                <a16:creationId xmlns:a16="http://schemas.microsoft.com/office/drawing/2014/main" id="{01F6AEC6-8C85-43DC-BB6F-16FFA72FF4C8}"/>
+                <a16:creationId xmlns:a16="http://schemas.microsoft.com/office/drawing/2014/main" id="{AE337D6A-4A6A-4DF3-B295-CCDDE86D6C98}"/>
               </a:ext>
             </a:extLst>
           </p:cNvPr>
@@ -16247,7 +16247,7 @@
           <p:cNvPr id="22" name="Shape 20">
             <a:extLst xmlns:a="http://schemas.openxmlformats.org/drawingml/2006/main">
               <a:ext uri="{FF2B5EF4-FFF2-40B4-BE49-F238E27FC236}">
-                <a16:creationId xmlns:a16="http://schemas.microsoft.com/office/drawing/2014/main" id="{344693A5-5D46-4B03-AD7E-F8DED92AF032}"/>
+                <a16:creationId xmlns:a16="http://schemas.microsoft.com/office/drawing/2014/main" id="{4978DB14-5AD8-49B1-A246-EA2A9360AD8B}"/>
               </a:ext>
             </a:extLst>
           </p:cNvPr>
@@ -16280,7 +16280,7 @@
           <p:cNvPr id="23" name="Text 21">
             <a:extLst xmlns:a="http://schemas.openxmlformats.org/drawingml/2006/main">
               <a:ext uri="{FF2B5EF4-FFF2-40B4-BE49-F238E27FC236}">
-                <a16:creationId xmlns:a16="http://schemas.microsoft.com/office/drawing/2014/main" id="{8767F7F1-7928-4D5D-A7CE-712109653B0F}"/>
+                <a16:creationId xmlns:a16="http://schemas.microsoft.com/office/drawing/2014/main" id="{AE8C8C3E-DDF4-46FB-979D-63F9728C14C1}"/>
               </a:ext>
             </a:extLst>
           </p:cNvPr>
@@ -16328,7 +16328,7 @@
           <p:cNvPr id="24" name="Shape 22">
             <a:extLst xmlns:a="http://schemas.openxmlformats.org/drawingml/2006/main">
               <a:ext uri="{FF2B5EF4-FFF2-40B4-BE49-F238E27FC236}">
-                <a16:creationId xmlns:a16="http://schemas.microsoft.com/office/drawing/2014/main" id="{7A3E9932-CB94-45B1-8BB6-D512BAEDD302}"/>
+                <a16:creationId xmlns:a16="http://schemas.microsoft.com/office/drawing/2014/main" id="{EAF80A68-B62B-4698-BD25-D677644CBED6}"/>
               </a:ext>
             </a:extLst>
           </p:cNvPr>
@@ -16361,7 +16361,7 @@
           <p:cNvPr id="25" name="Text 23">
             <a:extLst xmlns:a="http://schemas.openxmlformats.org/drawingml/2006/main">
               <a:ext uri="{FF2B5EF4-FFF2-40B4-BE49-F238E27FC236}">
-                <a16:creationId xmlns:a16="http://schemas.microsoft.com/office/drawing/2014/main" id="{5D80DBAE-89DE-4D43-B6FA-6DA6B138501B}"/>
+                <a16:creationId xmlns:a16="http://schemas.microsoft.com/office/drawing/2014/main" id="{4B9429EB-BD84-43B4-BFFC-1DF21DF3EFDF}"/>
               </a:ext>
             </a:extLst>
           </p:cNvPr>
@@ -16409,7 +16409,7 @@
           <p:cNvPr id="26" name="Shape 24">
             <a:extLst xmlns:a="http://schemas.openxmlformats.org/drawingml/2006/main">
               <a:ext uri="{FF2B5EF4-FFF2-40B4-BE49-F238E27FC236}">
-                <a16:creationId xmlns:a16="http://schemas.microsoft.com/office/drawing/2014/main" id="{C7D7B22C-29A2-4D89-84C8-DF3201032297}"/>
+                <a16:creationId xmlns:a16="http://schemas.microsoft.com/office/drawing/2014/main" id="{16E8AAF4-C7C4-45B6-A533-DBBD8345FEF3}"/>
               </a:ext>
             </a:extLst>
           </p:cNvPr>
@@ -16442,7 +16442,7 @@
           <p:cNvPr id="27" name="Text 25">
             <a:extLst xmlns:a="http://schemas.openxmlformats.org/drawingml/2006/main">
               <a:ext uri="{FF2B5EF4-FFF2-40B4-BE49-F238E27FC236}">
-                <a16:creationId xmlns:a16="http://schemas.microsoft.com/office/drawing/2014/main" id="{7389B1E1-66B0-4E93-9027-031FAE7E6F2B}"/>
+                <a16:creationId xmlns:a16="http://schemas.microsoft.com/office/drawing/2014/main" id="{E67CF07F-7681-4B00-8028-8B1E2EA2B428}"/>
               </a:ext>
             </a:extLst>
           </p:cNvPr>
@@ -16490,7 +16490,7 @@
           <p:cNvPr id="28" name="Shape 26">
             <a:extLst xmlns:a="http://schemas.openxmlformats.org/drawingml/2006/main">
               <a:ext uri="{FF2B5EF4-FFF2-40B4-BE49-F238E27FC236}">
-                <a16:creationId xmlns:a16="http://schemas.microsoft.com/office/drawing/2014/main" id="{5DB5BF4D-E1DC-429D-A789-F4034201B875}"/>
+                <a16:creationId xmlns:a16="http://schemas.microsoft.com/office/drawing/2014/main" id="{32CA90CA-317E-4923-B0CD-4A8889E430A1}"/>
               </a:ext>
             </a:extLst>
           </p:cNvPr>
@@ -16523,7 +16523,7 @@
           <p:cNvPr id="29" name="Text 27">
             <a:extLst xmlns:a="http://schemas.openxmlformats.org/drawingml/2006/main">
               <a:ext uri="{FF2B5EF4-FFF2-40B4-BE49-F238E27FC236}">
-                <a16:creationId xmlns:a16="http://schemas.microsoft.com/office/drawing/2014/main" id="{EEE8EBB6-C638-46DC-964E-3D38DAC1C9B7}"/>
+                <a16:creationId xmlns:a16="http://schemas.microsoft.com/office/drawing/2014/main" id="{A0593A25-708E-41F5-BF8A-F2D666693813}"/>
               </a:ext>
             </a:extLst>
           </p:cNvPr>
@@ -16571,7 +16571,7 @@
           <p:cNvPr id="30" name="Shape 28">
             <a:extLst xmlns:a="http://schemas.openxmlformats.org/drawingml/2006/main">
               <a:ext uri="{FF2B5EF4-FFF2-40B4-BE49-F238E27FC236}">
-                <a16:creationId xmlns:a16="http://schemas.microsoft.com/office/drawing/2014/main" id="{47255C22-54AE-4F3D-AB81-C8473FA3AF28}"/>
+                <a16:creationId xmlns:a16="http://schemas.microsoft.com/office/drawing/2014/main" id="{425EB4A4-6971-4B82-9F12-DD0AACE22AAC}"/>
               </a:ext>
             </a:extLst>
           </p:cNvPr>
@@ -16604,7 +16604,7 @@
           <p:cNvPr id="31" name="Text 29">
             <a:extLst xmlns:a="http://schemas.openxmlformats.org/drawingml/2006/main">
               <a:ext uri="{FF2B5EF4-FFF2-40B4-BE49-F238E27FC236}">
-                <a16:creationId xmlns:a16="http://schemas.microsoft.com/office/drawing/2014/main" id="{5689B47A-FAF7-4040-AAB3-D54EFB2C8F43}"/>
+                <a16:creationId xmlns:a16="http://schemas.microsoft.com/office/drawing/2014/main" id="{DBE65831-0466-4312-970C-F084B3B9704C}"/>
               </a:ext>
             </a:extLst>
           </p:cNvPr>
@@ -16652,7 +16652,7 @@
           <p:cNvPr id="32" name="Shape 30">
             <a:extLst xmlns:a="http://schemas.openxmlformats.org/drawingml/2006/main">
               <a:ext uri="{FF2B5EF4-FFF2-40B4-BE49-F238E27FC236}">
-                <a16:creationId xmlns:a16="http://schemas.microsoft.com/office/drawing/2014/main" id="{9F94A51B-FFB5-4190-97CB-23216C9B5839}"/>
+                <a16:creationId xmlns:a16="http://schemas.microsoft.com/office/drawing/2014/main" id="{AD9DE969-F03C-44FC-B1A6-0C99759E98ED}"/>
               </a:ext>
             </a:extLst>
           </p:cNvPr>
@@ -16685,7 +16685,7 @@
           <p:cNvPr id="33" name="Text 31">
             <a:extLst xmlns:a="http://schemas.openxmlformats.org/drawingml/2006/main">
               <a:ext uri="{FF2B5EF4-FFF2-40B4-BE49-F238E27FC236}">
-                <a16:creationId xmlns:a16="http://schemas.microsoft.com/office/drawing/2014/main" id="{244D496A-E2C2-4F74-8DF4-78A3D96A20CF}"/>
+                <a16:creationId xmlns:a16="http://schemas.microsoft.com/office/drawing/2014/main" id="{55BC2083-79A9-4CFB-A39F-328ABDCE2FD3}"/>
               </a:ext>
             </a:extLst>
           </p:cNvPr>
@@ -16733,7 +16733,7 @@
           <p:cNvPr id="34" name="Shape 32">
             <a:extLst xmlns:a="http://schemas.openxmlformats.org/drawingml/2006/main">
               <a:ext uri="{FF2B5EF4-FFF2-40B4-BE49-F238E27FC236}">
-                <a16:creationId xmlns:a16="http://schemas.microsoft.com/office/drawing/2014/main" id="{31C12490-AF82-4AD7-9120-2DD49FB32202}"/>
+                <a16:creationId xmlns:a16="http://schemas.microsoft.com/office/drawing/2014/main" id="{04B41ECC-BBBF-4012-ABA5-60767AA1668B}"/>
               </a:ext>
             </a:extLst>
           </p:cNvPr>
@@ -16766,7 +16766,7 @@
           <p:cNvPr id="35" name="Text 33">
             <a:extLst xmlns:a="http://schemas.openxmlformats.org/drawingml/2006/main">
               <a:ext uri="{FF2B5EF4-FFF2-40B4-BE49-F238E27FC236}">
-                <a16:creationId xmlns:a16="http://schemas.microsoft.com/office/drawing/2014/main" id="{B69FAF17-F05F-4C97-B456-5FC9DD2429B5}"/>
+                <a16:creationId xmlns:a16="http://schemas.microsoft.com/office/drawing/2014/main" id="{11DEECE9-53A5-49EF-825C-F21AB47C3F97}"/>
               </a:ext>
             </a:extLst>
           </p:cNvPr>
@@ -16814,7 +16814,7 @@
           <p:cNvPr id="36" name="Shape 34">
             <a:extLst xmlns:a="http://schemas.openxmlformats.org/drawingml/2006/main">
               <a:ext uri="{FF2B5EF4-FFF2-40B4-BE49-F238E27FC236}">
-                <a16:creationId xmlns:a16="http://schemas.microsoft.com/office/drawing/2014/main" id="{B76F98BC-26CD-4F12-879A-CB38A937AD98}"/>
+                <a16:creationId xmlns:a16="http://schemas.microsoft.com/office/drawing/2014/main" id="{A156B01B-7C71-4A57-BBBE-E8BA2561A094}"/>
               </a:ext>
             </a:extLst>
           </p:cNvPr>
@@ -16847,7 +16847,7 @@
           <p:cNvPr id="37" name="Text 35">
             <a:extLst xmlns:a="http://schemas.openxmlformats.org/drawingml/2006/main">
               <a:ext uri="{FF2B5EF4-FFF2-40B4-BE49-F238E27FC236}">
-                <a16:creationId xmlns:a16="http://schemas.microsoft.com/office/drawing/2014/main" id="{09EB2E77-E815-4CBA-9965-56ADEC754B39}"/>
+                <a16:creationId xmlns:a16="http://schemas.microsoft.com/office/drawing/2014/main" id="{AE815BDA-85E5-4298-8B7D-9AB650EFC7BD}"/>
               </a:ext>
             </a:extLst>
           </p:cNvPr>
@@ -16895,7 +16895,7 @@
           <p:cNvPr id="38" name="Shape 36">
             <a:extLst xmlns:a="http://schemas.openxmlformats.org/drawingml/2006/main">
               <a:ext uri="{FF2B5EF4-FFF2-40B4-BE49-F238E27FC236}">
-                <a16:creationId xmlns:a16="http://schemas.microsoft.com/office/drawing/2014/main" id="{E23720D1-881B-4F37-8102-FA7FAFFE3FCB}"/>
+                <a16:creationId xmlns:a16="http://schemas.microsoft.com/office/drawing/2014/main" id="{55393B00-7DA9-4EBC-B84F-2D8F25B8EE17}"/>
               </a:ext>
             </a:extLst>
           </p:cNvPr>
@@ -16928,7 +16928,7 @@
           <p:cNvPr id="39" name="Text 37">
             <a:extLst xmlns:a="http://schemas.openxmlformats.org/drawingml/2006/main">
               <a:ext uri="{FF2B5EF4-FFF2-40B4-BE49-F238E27FC236}">
-                <a16:creationId xmlns:a16="http://schemas.microsoft.com/office/drawing/2014/main" id="{864A7E34-0C1D-44B4-B039-E19D133A1C19}"/>
+                <a16:creationId xmlns:a16="http://schemas.microsoft.com/office/drawing/2014/main" id="{8F6C364A-59CE-4AC0-862E-63F5EA238FAF}"/>
               </a:ext>
             </a:extLst>
           </p:cNvPr>
@@ -16976,7 +16976,7 @@
           <p:cNvPr id="40" name="Shape 38">
             <a:extLst xmlns:a="http://schemas.openxmlformats.org/drawingml/2006/main">
               <a:ext uri="{FF2B5EF4-FFF2-40B4-BE49-F238E27FC236}">
-                <a16:creationId xmlns:a16="http://schemas.microsoft.com/office/drawing/2014/main" id="{ECA68D8A-98B7-4B0D-9789-6A0676E6007B}"/>
+                <a16:creationId xmlns:a16="http://schemas.microsoft.com/office/drawing/2014/main" id="{22BE529F-2A36-4A62-8E55-AA5A1585FC1F}"/>
               </a:ext>
             </a:extLst>
           </p:cNvPr>
@@ -17009,7 +17009,7 @@
           <p:cNvPr id="41" name="Text 39">
             <a:extLst xmlns:a="http://schemas.openxmlformats.org/drawingml/2006/main">
               <a:ext uri="{FF2B5EF4-FFF2-40B4-BE49-F238E27FC236}">
-                <a16:creationId xmlns:a16="http://schemas.microsoft.com/office/drawing/2014/main" id="{8E7A5482-1C90-4ED5-92B3-52C920275D42}"/>
+                <a16:creationId xmlns:a16="http://schemas.microsoft.com/office/drawing/2014/main" id="{C0B2CEE5-070A-44A8-89FB-DE80B09E906C}"/>
               </a:ext>
             </a:extLst>
           </p:cNvPr>
@@ -17057,7 +17057,7 @@
           <p:cNvPr id="42" name="Shape 40">
             <a:extLst xmlns:a="http://schemas.openxmlformats.org/drawingml/2006/main">
               <a:ext uri="{FF2B5EF4-FFF2-40B4-BE49-F238E27FC236}">
-                <a16:creationId xmlns:a16="http://schemas.microsoft.com/office/drawing/2014/main" id="{3477D3FE-EAA5-4467-BC0F-EE2298AC89A3}"/>
+                <a16:creationId xmlns:a16="http://schemas.microsoft.com/office/drawing/2014/main" id="{73CF4F49-F41F-4405-8945-D0A48A4D0924}"/>
               </a:ext>
             </a:extLst>
           </p:cNvPr>
@@ -17090,7 +17090,7 @@
           <p:cNvPr id="43" name="Text 41">
             <a:extLst xmlns:a="http://schemas.openxmlformats.org/drawingml/2006/main">
               <a:ext uri="{FF2B5EF4-FFF2-40B4-BE49-F238E27FC236}">
-                <a16:creationId xmlns:a16="http://schemas.microsoft.com/office/drawing/2014/main" id="{BAB7552E-9D28-4460-9A7D-78810CE0A867}"/>
+                <a16:creationId xmlns:a16="http://schemas.microsoft.com/office/drawing/2014/main" id="{57218341-76D1-4CA9-AAF3-2A84E5FEE6C1}"/>
               </a:ext>
             </a:extLst>
           </p:cNvPr>
@@ -17138,7 +17138,7 @@
           <p:cNvPr id="44" name="Shape 42">
             <a:extLst xmlns:a="http://schemas.openxmlformats.org/drawingml/2006/main">
               <a:ext uri="{FF2B5EF4-FFF2-40B4-BE49-F238E27FC236}">
-                <a16:creationId xmlns:a16="http://schemas.microsoft.com/office/drawing/2014/main" id="{6870CB39-9F48-4D85-A08B-E932CBCE6CC8}"/>
+                <a16:creationId xmlns:a16="http://schemas.microsoft.com/office/drawing/2014/main" id="{7A9D6439-BDF0-417F-A27E-AC6F0015BCF6}"/>
               </a:ext>
             </a:extLst>
           </p:cNvPr>
@@ -17171,7 +17171,7 @@
           <p:cNvPr id="45" name="Text 43">
             <a:extLst xmlns:a="http://schemas.openxmlformats.org/drawingml/2006/main">
               <a:ext uri="{FF2B5EF4-FFF2-40B4-BE49-F238E27FC236}">
-                <a16:creationId xmlns:a16="http://schemas.microsoft.com/office/drawing/2014/main" id="{29AC120C-C3BF-4A89-8BB1-1A7C4099C1D0}"/>
+                <a16:creationId xmlns:a16="http://schemas.microsoft.com/office/drawing/2014/main" id="{FF0F7D9B-EA55-49D0-AB50-357CAA5F70B1}"/>
               </a:ext>
             </a:extLst>
           </p:cNvPr>
@@ -17219,7 +17219,7 @@
           <p:cNvPr id="46" name="Shape 44">
             <a:extLst xmlns:a="http://schemas.openxmlformats.org/drawingml/2006/main">
               <a:ext uri="{FF2B5EF4-FFF2-40B4-BE49-F238E27FC236}">
-                <a16:creationId xmlns:a16="http://schemas.microsoft.com/office/drawing/2014/main" id="{F4D8B156-0677-4A6E-9FE9-5D527257C887}"/>
+                <a16:creationId xmlns:a16="http://schemas.microsoft.com/office/drawing/2014/main" id="{98C402A0-BF3C-4D50-87F7-9A9BBE76D2C9}"/>
               </a:ext>
             </a:extLst>
           </p:cNvPr>
@@ -17252,7 +17252,7 @@
           <p:cNvPr id="47" name="Text 45">
             <a:extLst xmlns:a="http://schemas.openxmlformats.org/drawingml/2006/main">
               <a:ext uri="{FF2B5EF4-FFF2-40B4-BE49-F238E27FC236}">
-                <a16:creationId xmlns:a16="http://schemas.microsoft.com/office/drawing/2014/main" id="{F7CC2EA3-797B-4E07-87DE-A6E53CB29EA1}"/>
+                <a16:creationId xmlns:a16="http://schemas.microsoft.com/office/drawing/2014/main" id="{37655127-94BA-4CE0-86BD-38BD444D0615}"/>
               </a:ext>
             </a:extLst>
           </p:cNvPr>
@@ -17300,7 +17300,7 @@
           <p:cNvPr id="48" name="Shape 46">
             <a:extLst xmlns:a="http://schemas.openxmlformats.org/drawingml/2006/main">
               <a:ext uri="{FF2B5EF4-FFF2-40B4-BE49-F238E27FC236}">
-                <a16:creationId xmlns:a16="http://schemas.microsoft.com/office/drawing/2014/main" id="{7BE4C352-9BB8-4107-B5CE-FE0A53C3176D}"/>
+                <a16:creationId xmlns:a16="http://schemas.microsoft.com/office/drawing/2014/main" id="{9435BD47-9AA8-4F1D-B4C2-46150B182033}"/>
               </a:ext>
             </a:extLst>
           </p:cNvPr>
@@ -17333,7 +17333,7 @@
           <p:cNvPr id="49" name="Text 47">
             <a:extLst xmlns:a="http://schemas.openxmlformats.org/drawingml/2006/main">
               <a:ext uri="{FF2B5EF4-FFF2-40B4-BE49-F238E27FC236}">
-                <a16:creationId xmlns:a16="http://schemas.microsoft.com/office/drawing/2014/main" id="{D38DEEEC-7A47-4335-A792-63BB9F30A89D}"/>
+                <a16:creationId xmlns:a16="http://schemas.microsoft.com/office/drawing/2014/main" id="{9E9AF287-CF95-4224-8778-2E273D61AD3C}"/>
               </a:ext>
             </a:extLst>
           </p:cNvPr>
@@ -17381,7 +17381,7 @@
           <p:cNvPr id="50" name="Shape 48">
             <a:extLst xmlns:a="http://schemas.openxmlformats.org/drawingml/2006/main">
               <a:ext uri="{FF2B5EF4-FFF2-40B4-BE49-F238E27FC236}">
-                <a16:creationId xmlns:a16="http://schemas.microsoft.com/office/drawing/2014/main" id="{1CE3A416-FEB1-4C72-B274-36BBFF202A3E}"/>
+                <a16:creationId xmlns:a16="http://schemas.microsoft.com/office/drawing/2014/main" id="{02010D4B-B811-44AE-9E17-C9D2538F325F}"/>
               </a:ext>
             </a:extLst>
           </p:cNvPr>
@@ -17414,7 +17414,7 @@
           <p:cNvPr id="51" name="Text 49">
             <a:extLst xmlns:a="http://schemas.openxmlformats.org/drawingml/2006/main">
               <a:ext uri="{FF2B5EF4-FFF2-40B4-BE49-F238E27FC236}">
-                <a16:creationId xmlns:a16="http://schemas.microsoft.com/office/drawing/2014/main" id="{1458266D-15A4-4EDD-9101-5295CBB66AEE}"/>
+                <a16:creationId xmlns:a16="http://schemas.microsoft.com/office/drawing/2014/main" id="{97EF69DE-E30B-4097-86C7-3E6EC59DA64E}"/>
               </a:ext>
             </a:extLst>
           </p:cNvPr>
@@ -17462,7 +17462,7 @@
           <p:cNvPr id="52" name="Shape 50">
             <a:extLst xmlns:a="http://schemas.openxmlformats.org/drawingml/2006/main">
               <a:ext uri="{FF2B5EF4-FFF2-40B4-BE49-F238E27FC236}">
-                <a16:creationId xmlns:a16="http://schemas.microsoft.com/office/drawing/2014/main" id="{AECE029E-F7F7-4806-87CB-299F48342C1D}"/>
+                <a16:creationId xmlns:a16="http://schemas.microsoft.com/office/drawing/2014/main" id="{3A180AEA-024D-40D8-875B-25D5573DF124}"/>
               </a:ext>
             </a:extLst>
           </p:cNvPr>
@@ -17495,7 +17495,7 @@
           <p:cNvPr id="53" name="Text 51">
             <a:extLst xmlns:a="http://schemas.openxmlformats.org/drawingml/2006/main">
               <a:ext uri="{FF2B5EF4-FFF2-40B4-BE49-F238E27FC236}">
-                <a16:creationId xmlns:a16="http://schemas.microsoft.com/office/drawing/2014/main" id="{1AA3E01D-6215-4222-A80B-88C19A222454}"/>
+                <a16:creationId xmlns:a16="http://schemas.microsoft.com/office/drawing/2014/main" id="{5760C4C7-CE0B-4412-ABD9-45F1A9573ECA}"/>
               </a:ext>
             </a:extLst>
           </p:cNvPr>
@@ -17543,7 +17543,7 @@
           <p:cNvPr id="54" name="Shape 52">
             <a:extLst xmlns:a="http://schemas.openxmlformats.org/drawingml/2006/main">
               <a:ext uri="{FF2B5EF4-FFF2-40B4-BE49-F238E27FC236}">
-                <a16:creationId xmlns:a16="http://schemas.microsoft.com/office/drawing/2014/main" id="{3331C21E-C4D2-4077-A88B-F2D89BDC39B0}"/>
+                <a16:creationId xmlns:a16="http://schemas.microsoft.com/office/drawing/2014/main" id="{A4012B96-24B7-4FA2-9EA2-B274560598A5}"/>
               </a:ext>
             </a:extLst>
           </p:cNvPr>
@@ -17576,7 +17576,7 @@
           <p:cNvPr id="55" name="Text 53">
             <a:extLst xmlns:a="http://schemas.openxmlformats.org/drawingml/2006/main">
               <a:ext uri="{FF2B5EF4-FFF2-40B4-BE49-F238E27FC236}">
-                <a16:creationId xmlns:a16="http://schemas.microsoft.com/office/drawing/2014/main" id="{744C2C9C-512D-4415-B797-EB5B4549AD93}"/>
+                <a16:creationId xmlns:a16="http://schemas.microsoft.com/office/drawing/2014/main" id="{A1900774-4AB6-495C-B577-C1F1EAE28E3D}"/>
               </a:ext>
             </a:extLst>
           </p:cNvPr>
@@ -17624,7 +17624,7 @@
           <p:cNvPr id="56" name="Shape 54">
             <a:extLst xmlns:a="http://schemas.openxmlformats.org/drawingml/2006/main">
               <a:ext uri="{FF2B5EF4-FFF2-40B4-BE49-F238E27FC236}">
-                <a16:creationId xmlns:a16="http://schemas.microsoft.com/office/drawing/2014/main" id="{C624B7FA-2319-4AB1-AB4D-9EC0F7D0CFC2}"/>
+                <a16:creationId xmlns:a16="http://schemas.microsoft.com/office/drawing/2014/main" id="{71C654E0-0350-4284-B4E1-17122B1C4D78}"/>
               </a:ext>
             </a:extLst>
           </p:cNvPr>
@@ -17657,7 +17657,7 @@
           <p:cNvPr id="57" name="Text 55">
             <a:extLst xmlns:a="http://schemas.openxmlformats.org/drawingml/2006/main">
               <a:ext uri="{FF2B5EF4-FFF2-40B4-BE49-F238E27FC236}">
-                <a16:creationId xmlns:a16="http://schemas.microsoft.com/office/drawing/2014/main" id="{2544D596-668F-4B39-A91C-742019501373}"/>
+                <a16:creationId xmlns:a16="http://schemas.microsoft.com/office/drawing/2014/main" id="{BA5B3E78-2847-41DD-B55E-6333DF0F89B1}"/>
               </a:ext>
             </a:extLst>
           </p:cNvPr>
@@ -17705,7 +17705,7 @@
           <p:cNvPr id="58" name="Shape 56">
             <a:extLst xmlns:a="http://schemas.openxmlformats.org/drawingml/2006/main">
               <a:ext uri="{FF2B5EF4-FFF2-40B4-BE49-F238E27FC236}">
-                <a16:creationId xmlns:a16="http://schemas.microsoft.com/office/drawing/2014/main" id="{C9BC76E0-DD00-4A7B-BE5D-75AF3219E8BB}"/>
+                <a16:creationId xmlns:a16="http://schemas.microsoft.com/office/drawing/2014/main" id="{335DB02B-4301-47A7-9F20-F929CEAB5D2E}"/>
               </a:ext>
             </a:extLst>
           </p:cNvPr>
@@ -17738,7 +17738,7 @@
           <p:cNvPr id="59" name="Text 57">
             <a:extLst xmlns:a="http://schemas.openxmlformats.org/drawingml/2006/main">
               <a:ext uri="{FF2B5EF4-FFF2-40B4-BE49-F238E27FC236}">
-                <a16:creationId xmlns:a16="http://schemas.microsoft.com/office/drawing/2014/main" id="{FFCF4D62-62E9-462D-B8EC-93D3F0F7E798}"/>
+                <a16:creationId xmlns:a16="http://schemas.microsoft.com/office/drawing/2014/main" id="{AED87C06-3FEA-464B-B4F4-46D217179327}"/>
               </a:ext>
             </a:extLst>
           </p:cNvPr>
@@ -17786,7 +17786,7 @@
           <p:cNvPr id="60" name="Shape 58">
             <a:extLst xmlns:a="http://schemas.openxmlformats.org/drawingml/2006/main">
               <a:ext uri="{FF2B5EF4-FFF2-40B4-BE49-F238E27FC236}">
-                <a16:creationId xmlns:a16="http://schemas.microsoft.com/office/drawing/2014/main" id="{0816887F-2F9A-4A30-9F6D-AC080EA54B05}"/>
+                <a16:creationId xmlns:a16="http://schemas.microsoft.com/office/drawing/2014/main" id="{DD3ED022-4545-4378-99AE-96E7C18A04B1}"/>
               </a:ext>
             </a:extLst>
           </p:cNvPr>
@@ -17819,7 +17819,7 @@
           <p:cNvPr id="61" name="Text 59">
             <a:extLst xmlns:a="http://schemas.openxmlformats.org/drawingml/2006/main">
               <a:ext uri="{FF2B5EF4-FFF2-40B4-BE49-F238E27FC236}">
-                <a16:creationId xmlns:a16="http://schemas.microsoft.com/office/drawing/2014/main" id="{8E19EBC5-A529-438E-A425-38FC73169E4A}"/>
+                <a16:creationId xmlns:a16="http://schemas.microsoft.com/office/drawing/2014/main" id="{5F2F46A9-982B-462C-8BB6-1B18BF86D563}"/>
               </a:ext>
             </a:extLst>
           </p:cNvPr>
@@ -17867,7 +17867,7 @@
           <p:cNvPr id="62" name="Shape 60">
             <a:extLst xmlns:a="http://schemas.openxmlformats.org/drawingml/2006/main">
               <a:ext uri="{FF2B5EF4-FFF2-40B4-BE49-F238E27FC236}">
-                <a16:creationId xmlns:a16="http://schemas.microsoft.com/office/drawing/2014/main" id="{464A3F1A-9923-40AD-B4ED-9B7349A0F7E8}"/>
+                <a16:creationId xmlns:a16="http://schemas.microsoft.com/office/drawing/2014/main" id="{4EDECA59-8295-4610-ACBD-7E5D922921C2}"/>
               </a:ext>
             </a:extLst>
           </p:cNvPr>
@@ -17900,7 +17900,7 @@
           <p:cNvPr id="63" name="Text 61">
             <a:extLst xmlns:a="http://schemas.openxmlformats.org/drawingml/2006/main">
               <a:ext uri="{FF2B5EF4-FFF2-40B4-BE49-F238E27FC236}">
-                <a16:creationId xmlns:a16="http://schemas.microsoft.com/office/drawing/2014/main" id="{57A8766C-886E-44E0-8543-EF9A56D2A6FC}"/>
+                <a16:creationId xmlns:a16="http://schemas.microsoft.com/office/drawing/2014/main" id="{98159472-A2C3-4C5C-8BD8-C991676A39CE}"/>
               </a:ext>
             </a:extLst>
           </p:cNvPr>
@@ -17948,7 +17948,7 @@
           <p:cNvPr id="64" name="Shape 62">
             <a:extLst xmlns:a="http://schemas.openxmlformats.org/drawingml/2006/main">
               <a:ext uri="{FF2B5EF4-FFF2-40B4-BE49-F238E27FC236}">
-                <a16:creationId xmlns:a16="http://schemas.microsoft.com/office/drawing/2014/main" id="{A3D0F21D-2A41-4C5C-9B5E-C1DF81DC731A}"/>
+                <a16:creationId xmlns:a16="http://schemas.microsoft.com/office/drawing/2014/main" id="{55E5E525-770B-42F5-A2E8-91366D3B932D}"/>
               </a:ext>
             </a:extLst>
           </p:cNvPr>
@@ -17981,7 +17981,7 @@
           <p:cNvPr id="65" name="Text 63">
             <a:extLst xmlns:a="http://schemas.openxmlformats.org/drawingml/2006/main">
               <a:ext uri="{FF2B5EF4-FFF2-40B4-BE49-F238E27FC236}">
-                <a16:creationId xmlns:a16="http://schemas.microsoft.com/office/drawing/2014/main" id="{DA31648A-594D-41B2-9513-6F9E60EA5245}"/>
+                <a16:creationId xmlns:a16="http://schemas.microsoft.com/office/drawing/2014/main" id="{EBA64500-4773-4121-AAC1-1AB2D4E3E526}"/>
               </a:ext>
             </a:extLst>
           </p:cNvPr>
@@ -18029,7 +18029,7 @@
           <p:cNvPr id="66" name="Shape 64">
             <a:extLst xmlns:a="http://schemas.openxmlformats.org/drawingml/2006/main">
               <a:ext uri="{FF2B5EF4-FFF2-40B4-BE49-F238E27FC236}">
-                <a16:creationId xmlns:a16="http://schemas.microsoft.com/office/drawing/2014/main" id="{0D3EF4EC-6127-4757-8B04-DE715734A909}"/>
+                <a16:creationId xmlns:a16="http://schemas.microsoft.com/office/drawing/2014/main" id="{4B3E5CF1-BEE4-469C-A775-6A50F26E7944}"/>
               </a:ext>
             </a:extLst>
           </p:cNvPr>
@@ -18062,7 +18062,7 @@
           <p:cNvPr id="67" name="Text 65">
             <a:extLst xmlns:a="http://schemas.openxmlformats.org/drawingml/2006/main">
               <a:ext uri="{FF2B5EF4-FFF2-40B4-BE49-F238E27FC236}">
-                <a16:creationId xmlns:a16="http://schemas.microsoft.com/office/drawing/2014/main" id="{C4CC218F-D180-4AA0-BCD2-2DB33BF09935}"/>
+                <a16:creationId xmlns:a16="http://schemas.microsoft.com/office/drawing/2014/main" id="{1812A07D-D253-4F40-BD0E-9260C0ED6583}"/>
               </a:ext>
             </a:extLst>
           </p:cNvPr>
@@ -18110,7 +18110,7 @@
           <p:cNvPr id="68" name="Shape 66">
             <a:extLst xmlns:a="http://schemas.openxmlformats.org/drawingml/2006/main">
               <a:ext uri="{FF2B5EF4-FFF2-40B4-BE49-F238E27FC236}">
-                <a16:creationId xmlns:a16="http://schemas.microsoft.com/office/drawing/2014/main" id="{A50C91C9-DC27-470C-9473-BBF555D69BEF}"/>
+                <a16:creationId xmlns:a16="http://schemas.microsoft.com/office/drawing/2014/main" id="{CCAA38F7-33E6-434C-A9DD-E83FFBDB6B74}"/>
               </a:ext>
             </a:extLst>
           </p:cNvPr>
@@ -18143,7 +18143,7 @@
           <p:cNvPr id="69" name="Text 67">
             <a:extLst xmlns:a="http://schemas.openxmlformats.org/drawingml/2006/main">
               <a:ext uri="{FF2B5EF4-FFF2-40B4-BE49-F238E27FC236}">
-                <a16:creationId xmlns:a16="http://schemas.microsoft.com/office/drawing/2014/main" id="{C369E6D1-34D8-478D-95C3-FFA271C1CD58}"/>
+                <a16:creationId xmlns:a16="http://schemas.microsoft.com/office/drawing/2014/main" id="{6949DAF4-D523-4328-853C-D69790C8EBE2}"/>
               </a:ext>
             </a:extLst>
           </p:cNvPr>
@@ -18191,7 +18191,7 @@
           <p:cNvPr id="70" name="Shape 68">
             <a:extLst xmlns:a="http://schemas.openxmlformats.org/drawingml/2006/main">
               <a:ext uri="{FF2B5EF4-FFF2-40B4-BE49-F238E27FC236}">
-                <a16:creationId xmlns:a16="http://schemas.microsoft.com/office/drawing/2014/main" id="{E4888266-A223-414E-AEDC-94DA29F54BC9}"/>
+                <a16:creationId xmlns:a16="http://schemas.microsoft.com/office/drawing/2014/main" id="{FF15810A-B480-4688-AFC2-8DE31B88723C}"/>
               </a:ext>
             </a:extLst>
           </p:cNvPr>
@@ -18224,7 +18224,7 @@
           <p:cNvPr id="71" name="Text 69">
             <a:extLst xmlns:a="http://schemas.openxmlformats.org/drawingml/2006/main">
               <a:ext uri="{FF2B5EF4-FFF2-40B4-BE49-F238E27FC236}">
-                <a16:creationId xmlns:a16="http://schemas.microsoft.com/office/drawing/2014/main" id="{9D167D2C-80C5-417E-B5A4-F64A799E7A9A}"/>
+                <a16:creationId xmlns:a16="http://schemas.microsoft.com/office/drawing/2014/main" id="{12B344B9-EB07-4B54-8B58-7277F340BC33}"/>
               </a:ext>
             </a:extLst>
           </p:cNvPr>
@@ -18272,7 +18272,7 @@
           <p:cNvPr id="72" name="Shape 70">
             <a:extLst xmlns:a="http://schemas.openxmlformats.org/drawingml/2006/main">
               <a:ext uri="{FF2B5EF4-FFF2-40B4-BE49-F238E27FC236}">
-                <a16:creationId xmlns:a16="http://schemas.microsoft.com/office/drawing/2014/main" id="{91F47739-E138-45AC-802E-6352ED954FD5}"/>
+                <a16:creationId xmlns:a16="http://schemas.microsoft.com/office/drawing/2014/main" id="{D1DD8978-2B1D-45EB-B4F6-E510B4C6318E}"/>
               </a:ext>
             </a:extLst>
           </p:cNvPr>
@@ -18305,7 +18305,7 @@
           <p:cNvPr id="73" name="Text 71">
             <a:extLst xmlns:a="http://schemas.openxmlformats.org/drawingml/2006/main">
               <a:ext uri="{FF2B5EF4-FFF2-40B4-BE49-F238E27FC236}">
-                <a16:creationId xmlns:a16="http://schemas.microsoft.com/office/drawing/2014/main" id="{1C53580D-7F00-4596-B23D-9EAA5A631F63}"/>
+                <a16:creationId xmlns:a16="http://schemas.microsoft.com/office/drawing/2014/main" id="{41E523F1-6AA1-479C-B8F8-2808426088E8}"/>
               </a:ext>
             </a:extLst>
           </p:cNvPr>
@@ -18353,7 +18353,7 @@
           <p:cNvPr id="74" name="Shape 72">
             <a:extLst xmlns:a="http://schemas.openxmlformats.org/drawingml/2006/main">
               <a:ext uri="{FF2B5EF4-FFF2-40B4-BE49-F238E27FC236}">
-                <a16:creationId xmlns:a16="http://schemas.microsoft.com/office/drawing/2014/main" id="{72069F00-E8C2-4553-B1B1-C61837D44DC1}"/>
+                <a16:creationId xmlns:a16="http://schemas.microsoft.com/office/drawing/2014/main" id="{DB691C3C-72AC-4D21-AFD5-8BD445D50F4F}"/>
               </a:ext>
             </a:extLst>
           </p:cNvPr>
@@ -18386,7 +18386,7 @@
           <p:cNvPr id="75" name="Text 73">
             <a:extLst xmlns:a="http://schemas.openxmlformats.org/drawingml/2006/main">
               <a:ext uri="{FF2B5EF4-FFF2-40B4-BE49-F238E27FC236}">
-                <a16:creationId xmlns:a16="http://schemas.microsoft.com/office/drawing/2014/main" id="{AB6CBB2F-4A08-46FD-9E4F-989CADAE2139}"/>
+                <a16:creationId xmlns:a16="http://schemas.microsoft.com/office/drawing/2014/main" id="{748AD96B-12B1-435D-8726-BF6F903A7844}"/>
               </a:ext>
             </a:extLst>
           </p:cNvPr>
@@ -18434,7 +18434,7 @@
           <p:cNvPr id="76" name="Shape 74">
             <a:extLst xmlns:a="http://schemas.openxmlformats.org/drawingml/2006/main">
               <a:ext uri="{FF2B5EF4-FFF2-40B4-BE49-F238E27FC236}">
-                <a16:creationId xmlns:a16="http://schemas.microsoft.com/office/drawing/2014/main" id="{EFAF5302-2C03-4789-A571-117326A403F1}"/>
+                <a16:creationId xmlns:a16="http://schemas.microsoft.com/office/drawing/2014/main" id="{3309E03F-1AD2-45FE-9833-61E07C183597}"/>
               </a:ext>
             </a:extLst>
           </p:cNvPr>
@@ -18467,7 +18467,7 @@
           <p:cNvPr id="77" name="Text 75">
             <a:extLst xmlns:a="http://schemas.openxmlformats.org/drawingml/2006/main">
               <a:ext uri="{FF2B5EF4-FFF2-40B4-BE49-F238E27FC236}">
-                <a16:creationId xmlns:a16="http://schemas.microsoft.com/office/drawing/2014/main" id="{661EA17B-D1BC-401C-A651-E8761CCDD6CF}"/>
+                <a16:creationId xmlns:a16="http://schemas.microsoft.com/office/drawing/2014/main" id="{2BF428B7-2FB1-47D9-BB55-4AFAF3CE84D9}"/>
               </a:ext>
             </a:extLst>
           </p:cNvPr>
@@ -18515,7 +18515,7 @@
           <p:cNvPr id="78" name="Shape 76">
             <a:extLst xmlns:a="http://schemas.openxmlformats.org/drawingml/2006/main">
               <a:ext uri="{FF2B5EF4-FFF2-40B4-BE49-F238E27FC236}">
-                <a16:creationId xmlns:a16="http://schemas.microsoft.com/office/drawing/2014/main" id="{DE23D8E4-2ADD-41A9-AE66-F257C941401E}"/>
+                <a16:creationId xmlns:a16="http://schemas.microsoft.com/office/drawing/2014/main" id="{1B6F19C2-17DD-40F1-A77A-015FAAB84C71}"/>
               </a:ext>
             </a:extLst>
           </p:cNvPr>
@@ -18548,7 +18548,7 @@
           <p:cNvPr id="79" name="Text 77">
             <a:extLst xmlns:a="http://schemas.openxmlformats.org/drawingml/2006/main">
               <a:ext uri="{FF2B5EF4-FFF2-40B4-BE49-F238E27FC236}">
-                <a16:creationId xmlns:a16="http://schemas.microsoft.com/office/drawing/2014/main" id="{ED17A4AF-31DE-4D6F-BEB5-6E0B0246903A}"/>
+                <a16:creationId xmlns:a16="http://schemas.microsoft.com/office/drawing/2014/main" id="{F1CFA5BA-D03E-4B5E-94D2-0DF18FCE05F3}"/>
               </a:ext>
             </a:extLst>
           </p:cNvPr>
@@ -18596,7 +18596,7 @@
           <p:cNvPr id="80" name="Shape 78">
             <a:extLst xmlns:a="http://schemas.openxmlformats.org/drawingml/2006/main">
               <a:ext uri="{FF2B5EF4-FFF2-40B4-BE49-F238E27FC236}">
-                <a16:creationId xmlns:a16="http://schemas.microsoft.com/office/drawing/2014/main" id="{228B8182-CA9A-4FEA-A926-FE99723D61B4}"/>
+                <a16:creationId xmlns:a16="http://schemas.microsoft.com/office/drawing/2014/main" id="{1546C0E9-0978-42BA-B81F-A991F3D2EC2E}"/>
               </a:ext>
             </a:extLst>
           </p:cNvPr>
@@ -18629,7 +18629,7 @@
           <p:cNvPr id="81" name="Text 79">
             <a:extLst xmlns:a="http://schemas.openxmlformats.org/drawingml/2006/main">
               <a:ext uri="{FF2B5EF4-FFF2-40B4-BE49-F238E27FC236}">
-                <a16:creationId xmlns:a16="http://schemas.microsoft.com/office/drawing/2014/main" id="{B98D3745-2BA4-4842-BE66-3F84F32803EF}"/>
+                <a16:creationId xmlns:a16="http://schemas.microsoft.com/office/drawing/2014/main" id="{202EEC9B-E738-4ED9-A806-EF70983D92FF}"/>
               </a:ext>
             </a:extLst>
           </p:cNvPr>
@@ -18677,7 +18677,7 @@
           <p:cNvPr id="82" name="Shape 80">
             <a:extLst xmlns:a="http://schemas.openxmlformats.org/drawingml/2006/main">
               <a:ext uri="{FF2B5EF4-FFF2-40B4-BE49-F238E27FC236}">
-                <a16:creationId xmlns:a16="http://schemas.microsoft.com/office/drawing/2014/main" id="{A6A6F846-0A9F-4E61-9265-01CDA8DDBACA}"/>
+                <a16:creationId xmlns:a16="http://schemas.microsoft.com/office/drawing/2014/main" id="{60015E0E-A38B-462C-910E-CA7722BB2420}"/>
               </a:ext>
             </a:extLst>
           </p:cNvPr>
@@ -18710,7 +18710,7 @@
           <p:cNvPr id="83" name="Text 81">
             <a:extLst xmlns:a="http://schemas.openxmlformats.org/drawingml/2006/main">
               <a:ext uri="{FF2B5EF4-FFF2-40B4-BE49-F238E27FC236}">
-                <a16:creationId xmlns:a16="http://schemas.microsoft.com/office/drawing/2014/main" id="{87868DE1-6EAC-48E2-9D04-6E03AB5C8D6C}"/>
+                <a16:creationId xmlns:a16="http://schemas.microsoft.com/office/drawing/2014/main" id="{58C08A23-B473-4161-A671-39D853288FA1}"/>
               </a:ext>
             </a:extLst>
           </p:cNvPr>
@@ -18758,7 +18758,7 @@
           <p:cNvPr id="84" name="Shape 82">
             <a:extLst xmlns:a="http://schemas.openxmlformats.org/drawingml/2006/main">
               <a:ext uri="{FF2B5EF4-FFF2-40B4-BE49-F238E27FC236}">
-                <a16:creationId xmlns:a16="http://schemas.microsoft.com/office/drawing/2014/main" id="{34E62C53-EEF3-4241-95FF-9E9E4CF4DACB}"/>
+                <a16:creationId xmlns:a16="http://schemas.microsoft.com/office/drawing/2014/main" id="{1EB5E9DD-F672-4F00-A8B8-6DB0D5ECCB0F}"/>
               </a:ext>
             </a:extLst>
           </p:cNvPr>
@@ -18791,7 +18791,7 @@
           <p:cNvPr id="85" name="Text 83">
             <a:extLst xmlns:a="http://schemas.openxmlformats.org/drawingml/2006/main">
               <a:ext uri="{FF2B5EF4-FFF2-40B4-BE49-F238E27FC236}">
-                <a16:creationId xmlns:a16="http://schemas.microsoft.com/office/drawing/2014/main" id="{BFC61AB7-0DC5-4C75-8909-D079F48C8FB9}"/>
+                <a16:creationId xmlns:a16="http://schemas.microsoft.com/office/drawing/2014/main" id="{03715BFC-2F9D-47BF-981B-CD04CDDD6097}"/>
               </a:ext>
             </a:extLst>
           </p:cNvPr>
@@ -18839,7 +18839,7 @@
           <p:cNvPr id="86" name="Shape 84">
             <a:extLst xmlns:a="http://schemas.openxmlformats.org/drawingml/2006/main">
               <a:ext uri="{FF2B5EF4-FFF2-40B4-BE49-F238E27FC236}">
-                <a16:creationId xmlns:a16="http://schemas.microsoft.com/office/drawing/2014/main" id="{818C769F-DFC1-4154-9648-11967EA6987F}"/>
+                <a16:creationId xmlns:a16="http://schemas.microsoft.com/office/drawing/2014/main" id="{30A43A38-58F6-4432-A01B-1231B86FCAA3}"/>
               </a:ext>
             </a:extLst>
           </p:cNvPr>
@@ -18872,7 +18872,7 @@
           <p:cNvPr id="87" name="Text 85">
             <a:extLst xmlns:a="http://schemas.openxmlformats.org/drawingml/2006/main">
               <a:ext uri="{FF2B5EF4-FFF2-40B4-BE49-F238E27FC236}">
-                <a16:creationId xmlns:a16="http://schemas.microsoft.com/office/drawing/2014/main" id="{3116782F-EBF5-4006-9896-22F8207FE3AA}"/>
+                <a16:creationId xmlns:a16="http://schemas.microsoft.com/office/drawing/2014/main" id="{6DBFDD37-A1A1-46B8-95CF-70585E89DC42}"/>
               </a:ext>
             </a:extLst>
           </p:cNvPr>
@@ -18920,7 +18920,7 @@
           <p:cNvPr id="88" name="Shape 86">
             <a:extLst xmlns:a="http://schemas.openxmlformats.org/drawingml/2006/main">
               <a:ext uri="{FF2B5EF4-FFF2-40B4-BE49-F238E27FC236}">
-                <a16:creationId xmlns:a16="http://schemas.microsoft.com/office/drawing/2014/main" id="{893F9760-D67D-4E9D-8B7C-60DE72870D3D}"/>
+                <a16:creationId xmlns:a16="http://schemas.microsoft.com/office/drawing/2014/main" id="{F8261168-61AB-4C10-B6F4-408B27DFC7F2}"/>
               </a:ext>
             </a:extLst>
           </p:cNvPr>
@@ -18953,7 +18953,7 @@
           <p:cNvPr id="89" name="Text 87">
             <a:extLst xmlns:a="http://schemas.openxmlformats.org/drawingml/2006/main">
               <a:ext uri="{FF2B5EF4-FFF2-40B4-BE49-F238E27FC236}">
-                <a16:creationId xmlns:a16="http://schemas.microsoft.com/office/drawing/2014/main" id="{F9064052-2F76-46D4-9959-F3F3530BFC21}"/>
+                <a16:creationId xmlns:a16="http://schemas.microsoft.com/office/drawing/2014/main" id="{1287EA8B-4779-43EB-95F8-E7761B4CE4BD}"/>
               </a:ext>
             </a:extLst>
           </p:cNvPr>
@@ -19001,7 +19001,7 @@
           <p:cNvPr id="90" name="Shape 88">
             <a:extLst xmlns:a="http://schemas.openxmlformats.org/drawingml/2006/main">
               <a:ext uri="{FF2B5EF4-FFF2-40B4-BE49-F238E27FC236}">
-                <a16:creationId xmlns:a16="http://schemas.microsoft.com/office/drawing/2014/main" id="{28476242-8826-4A2C-A399-592FCF753004}"/>
+                <a16:creationId xmlns:a16="http://schemas.microsoft.com/office/drawing/2014/main" id="{C7D00A21-B6F2-4A0B-8E15-1F511B0C679E}"/>
               </a:ext>
             </a:extLst>
           </p:cNvPr>
@@ -19034,7 +19034,7 @@
           <p:cNvPr id="91" name="Text 89">
             <a:extLst xmlns:a="http://schemas.openxmlformats.org/drawingml/2006/main">
               <a:ext uri="{FF2B5EF4-FFF2-40B4-BE49-F238E27FC236}">
-                <a16:creationId xmlns:a16="http://schemas.microsoft.com/office/drawing/2014/main" id="{3D6B4025-C789-45DD-9D8B-5E7E575D8627}"/>
+                <a16:creationId xmlns:a16="http://schemas.microsoft.com/office/drawing/2014/main" id="{894F12D8-32FD-456A-A497-8F03BB326540}"/>
               </a:ext>
             </a:extLst>
           </p:cNvPr>
@@ -19082,7 +19082,7 @@
           <p:cNvPr id="92" name="Shape 90">
             <a:extLst xmlns:a="http://schemas.openxmlformats.org/drawingml/2006/main">
               <a:ext uri="{FF2B5EF4-FFF2-40B4-BE49-F238E27FC236}">
-                <a16:creationId xmlns:a16="http://schemas.microsoft.com/office/drawing/2014/main" id="{FCC2FC84-3482-4C77-B20C-FE89C75B0350}"/>
+                <a16:creationId xmlns:a16="http://schemas.microsoft.com/office/drawing/2014/main" id="{B4F12CF4-19FA-4AFE-A80F-EDF13C0B3914}"/>
               </a:ext>
             </a:extLst>
           </p:cNvPr>
@@ -19115,7 +19115,7 @@
           <p:cNvPr id="93" name="Text 91">
             <a:extLst xmlns:a="http://schemas.openxmlformats.org/drawingml/2006/main">
               <a:ext uri="{FF2B5EF4-FFF2-40B4-BE49-F238E27FC236}">
-                <a16:creationId xmlns:a16="http://schemas.microsoft.com/office/drawing/2014/main" id="{33B79FF1-723B-494C-B7E0-D8F54F2A4247}"/>
+                <a16:creationId xmlns:a16="http://schemas.microsoft.com/office/drawing/2014/main" id="{15062899-95F7-4537-BBE0-B8F9FD23BDCF}"/>
               </a:ext>
             </a:extLst>
           </p:cNvPr>
@@ -19163,7 +19163,7 @@
           <p:cNvPr id="94" name="Shape 92">
             <a:extLst xmlns:a="http://schemas.openxmlformats.org/drawingml/2006/main">
               <a:ext uri="{FF2B5EF4-FFF2-40B4-BE49-F238E27FC236}">
-                <a16:creationId xmlns:a16="http://schemas.microsoft.com/office/drawing/2014/main" id="{F20AA9E7-E634-4909-9290-DDF6621F30E9}"/>
+                <a16:creationId xmlns:a16="http://schemas.microsoft.com/office/drawing/2014/main" id="{7E89B6D2-86D9-4FD9-B9D9-EC836C08FF1B}"/>
               </a:ext>
             </a:extLst>
           </p:cNvPr>
@@ -19196,7 +19196,7 @@
           <p:cNvPr id="95" name="Text 93">
             <a:extLst xmlns:a="http://schemas.openxmlformats.org/drawingml/2006/main">
               <a:ext uri="{FF2B5EF4-FFF2-40B4-BE49-F238E27FC236}">
-                <a16:creationId xmlns:a16="http://schemas.microsoft.com/office/drawing/2014/main" id="{86E341E9-B4EA-4632-962F-2B59B923AF09}"/>
+                <a16:creationId xmlns:a16="http://schemas.microsoft.com/office/drawing/2014/main" id="{2B11395F-81C7-4F8B-8536-950768D9D024}"/>
               </a:ext>
             </a:extLst>
           </p:cNvPr>
@@ -19244,7 +19244,7 @@
           <p:cNvPr id="96" name="Shape 94">
             <a:extLst xmlns:a="http://schemas.openxmlformats.org/drawingml/2006/main">
               <a:ext uri="{FF2B5EF4-FFF2-40B4-BE49-F238E27FC236}">
-                <a16:creationId xmlns:a16="http://schemas.microsoft.com/office/drawing/2014/main" id="{2BBACED7-E107-4775-AC99-2D46E7888498}"/>
+                <a16:creationId xmlns:a16="http://schemas.microsoft.com/office/drawing/2014/main" id="{13B54828-0C9C-40B9-96BB-830B8FE4E3B2}"/>
               </a:ext>
             </a:extLst>
           </p:cNvPr>
@@ -19277,7 +19277,7 @@
           <p:cNvPr id="97" name="Text 95">
             <a:extLst xmlns:a="http://schemas.openxmlformats.org/drawingml/2006/main">
               <a:ext uri="{FF2B5EF4-FFF2-40B4-BE49-F238E27FC236}">
-                <a16:creationId xmlns:a16="http://schemas.microsoft.com/office/drawing/2014/main" id="{24D8F60C-BDC5-4B2A-BB25-8A87EE88E322}"/>
+                <a16:creationId xmlns:a16="http://schemas.microsoft.com/office/drawing/2014/main" id="{0F0D2601-05EA-4CBB-9FFC-07E320794EE4}"/>
               </a:ext>
             </a:extLst>
           </p:cNvPr>
@@ -19325,7 +19325,7 @@
           <p:cNvPr id="98" name="Text 96">
             <a:extLst xmlns:a="http://schemas.openxmlformats.org/drawingml/2006/main">
               <a:ext uri="{FF2B5EF4-FFF2-40B4-BE49-F238E27FC236}">
-                <a16:creationId xmlns:a16="http://schemas.microsoft.com/office/drawing/2014/main" id="{F9EFBBC2-706A-43F3-ADBA-8AA0EDA98F15}"/>
+                <a16:creationId xmlns:a16="http://schemas.microsoft.com/office/drawing/2014/main" id="{F12ACD35-A9F2-4B37-BA24-68FDC320DA80}"/>
               </a:ext>
             </a:extLst>
           </p:cNvPr>
@@ -19373,7 +19373,7 @@
           <p:cNvPr id="99" name="Text 97">
             <a:extLst xmlns:a="http://schemas.openxmlformats.org/drawingml/2006/main">
               <a:ext uri="{FF2B5EF4-FFF2-40B4-BE49-F238E27FC236}">
-                <a16:creationId xmlns:a16="http://schemas.microsoft.com/office/drawing/2014/main" id="{8F83CD73-FB08-4D0C-84A6-1DDE2FA7A003}"/>
+                <a16:creationId xmlns:a16="http://schemas.microsoft.com/office/drawing/2014/main" id="{D4566AB1-EBCF-48DB-9716-813956FAD126}"/>
               </a:ext>
             </a:extLst>
           </p:cNvPr>
@@ -19410,7 +19410,7 @@
                 <a:ea typeface="Microsoft YaHei"/>
                 <a:cs typeface="Microsoft YaHei"/>
               </a:rPr>
-              <a:t>智能云储 · DOEF | 补充实验与方法说明</a:t>
+              <a:t>智储云控 · DOEF | 补充实验与方法说明</a:t>
             </a:r>
             <a:endParaRPr sz="750"/>
           </a:p>
@@ -19421,7 +19421,7 @@
           <p:cNvPr id="100" name="Slide Number Placeholder 0">
             <a:extLst xmlns:a="http://schemas.openxmlformats.org/drawingml/2006/main">
               <a:ext uri="{FF2B5EF4-FFF2-40B4-BE49-F238E27FC236}">
-                <a16:creationId xmlns:a16="http://schemas.microsoft.com/office/drawing/2014/main" id="{4CEE5F39-C137-4067-9EB0-D631787FDD44}"/>
+                <a16:creationId xmlns:a16="http://schemas.microsoft.com/office/drawing/2014/main" id="{398E77F0-C4FD-4ABC-B4A0-159B245DA5BE}"/>
               </a:ext>
             </a:extLst>
           </p:cNvPr>
@@ -19471,7 +19471,7 @@
     </p:spTree>
     <p:extLst>
       <p:ext uri="{BB962C8B-B14F-4D97-AF65-F5344CB8AC3E}">
-        <p14:creationId xmlns:p14="http://schemas.microsoft.com/office/powerpoint/2010/main" val="1229987468"/>
+        <p14:creationId xmlns:p14="http://schemas.microsoft.com/office/powerpoint/2010/main" val="1493300868"/>
       </p:ext>
     </p:extLst>
   </p:cSld>
@@ -19495,7 +19495,7 @@
           <p:cNvPr id="2" name="Text 0">
             <a:extLst xmlns:a="http://schemas.openxmlformats.org/drawingml/2006/main">
               <a:ext uri="{FF2B5EF4-FFF2-40B4-BE49-F238E27FC236}">
-                <a16:creationId xmlns:a16="http://schemas.microsoft.com/office/drawing/2014/main" id="{27AF6F75-D4E4-4993-94AB-A02A36E8712B}"/>
+                <a16:creationId xmlns:a16="http://schemas.microsoft.com/office/drawing/2014/main" id="{29F467B5-3118-424C-B313-E258D6BFFC29}"/>
               </a:ext>
             </a:extLst>
           </p:cNvPr>
@@ -19541,7 +19541,7 @@
           <p:cNvPr id="3" name="Text 1">
             <a:extLst xmlns:a="http://schemas.openxmlformats.org/drawingml/2006/main">
               <a:ext uri="{FF2B5EF4-FFF2-40B4-BE49-F238E27FC236}">
-                <a16:creationId xmlns:a16="http://schemas.microsoft.com/office/drawing/2014/main" id="{C0A0013D-8CD3-414C-8754-59CCC0CEB20E}"/>
+                <a16:creationId xmlns:a16="http://schemas.microsoft.com/office/drawing/2014/main" id="{69357160-C2A1-40C7-8584-6F4BE72B6F1D}"/>
               </a:ext>
             </a:extLst>
           </p:cNvPr>
@@ -19587,7 +19587,7 @@
           <p:cNvPr id="4" name="Shape 2">
             <a:extLst xmlns:a="http://schemas.openxmlformats.org/drawingml/2006/main">
               <a:ext uri="{FF2B5EF4-FFF2-40B4-BE49-F238E27FC236}">
-                <a16:creationId xmlns:a16="http://schemas.microsoft.com/office/drawing/2014/main" id="{D96E04E9-08FA-4B61-BE66-6047EFA728A7}"/>
+                <a16:creationId xmlns:a16="http://schemas.microsoft.com/office/drawing/2014/main" id="{413B37A8-C8E7-4878-883A-DCA02FD06BB2}"/>
               </a:ext>
             </a:extLst>
           </p:cNvPr>
@@ -19624,7 +19624,7 @@
           <p:cNvPr id="5" name="Text 3">
             <a:extLst xmlns:a="http://schemas.openxmlformats.org/drawingml/2006/main">
               <a:ext uri="{FF2B5EF4-FFF2-40B4-BE49-F238E27FC236}">
-                <a16:creationId xmlns:a16="http://schemas.microsoft.com/office/drawing/2014/main" id="{9B73CA3F-C411-4CB0-B481-D73E05185826}"/>
+                <a16:creationId xmlns:a16="http://schemas.microsoft.com/office/drawing/2014/main" id="{D54DCBE3-C24B-4C21-B548-5DE9FC5489C1}"/>
               </a:ext>
             </a:extLst>
           </p:cNvPr>
@@ -19672,7 +19672,7 @@
           <p:cNvPr id="6" name="Text 4">
             <a:extLst xmlns:a="http://schemas.openxmlformats.org/drawingml/2006/main">
               <a:ext uri="{FF2B5EF4-FFF2-40B4-BE49-F238E27FC236}">
-                <a16:creationId xmlns:a16="http://schemas.microsoft.com/office/drawing/2014/main" id="{A5DFA6B2-AEB7-4E12-BD54-56C3E18C8ACD}"/>
+                <a16:creationId xmlns:a16="http://schemas.microsoft.com/office/drawing/2014/main" id="{F4E56832-77CB-4E9D-9C62-062C85C87EAF}"/>
               </a:ext>
             </a:extLst>
           </p:cNvPr>
@@ -19720,7 +19720,7 @@
           <p:cNvPr id="7" name="Text 5">
             <a:extLst xmlns:a="http://schemas.openxmlformats.org/drawingml/2006/main">
               <a:ext uri="{FF2B5EF4-FFF2-40B4-BE49-F238E27FC236}">
-                <a16:creationId xmlns:a16="http://schemas.microsoft.com/office/drawing/2014/main" id="{3FFC8B42-9F6D-4B97-9BF6-50A541551FD8}"/>
+                <a16:creationId xmlns:a16="http://schemas.microsoft.com/office/drawing/2014/main" id="{0157C4CF-3596-437B-8A06-BEDEE180AC03}"/>
               </a:ext>
             </a:extLst>
           </p:cNvPr>
@@ -19768,7 +19768,7 @@
           <p:cNvPr id="8" name="Shape 6">
             <a:extLst xmlns:a="http://schemas.openxmlformats.org/drawingml/2006/main">
               <a:ext uri="{FF2B5EF4-FFF2-40B4-BE49-F238E27FC236}">
-                <a16:creationId xmlns:a16="http://schemas.microsoft.com/office/drawing/2014/main" id="{5276D88A-0EE5-4A42-A174-F568D843CD4F}"/>
+                <a16:creationId xmlns:a16="http://schemas.microsoft.com/office/drawing/2014/main" id="{2D976D60-2BB1-4AA5-8901-162CB7A6370A}"/>
               </a:ext>
             </a:extLst>
           </p:cNvPr>
@@ -19803,7 +19803,7 @@
           <p:cNvPr id="9" name="Text 7">
             <a:extLst xmlns:a="http://schemas.openxmlformats.org/drawingml/2006/main">
               <a:ext uri="{FF2B5EF4-FFF2-40B4-BE49-F238E27FC236}">
-                <a16:creationId xmlns:a16="http://schemas.microsoft.com/office/drawing/2014/main" id="{9D9251A3-0FCE-4694-9953-BBBADBE715B3}"/>
+                <a16:creationId xmlns:a16="http://schemas.microsoft.com/office/drawing/2014/main" id="{0CBA0D0B-4E69-4D68-9AC8-84E638C89F20}"/>
               </a:ext>
             </a:extLst>
           </p:cNvPr>
@@ -19849,7 +19849,7 @@
           <p:cNvPr id="10" name="Text 8">
             <a:extLst xmlns:a="http://schemas.openxmlformats.org/drawingml/2006/main">
               <a:ext uri="{FF2B5EF4-FFF2-40B4-BE49-F238E27FC236}">
-                <a16:creationId xmlns:a16="http://schemas.microsoft.com/office/drawing/2014/main" id="{96EDEC24-A97A-4DDD-B0B0-2D5A9653ACB8}"/>
+                <a16:creationId xmlns:a16="http://schemas.microsoft.com/office/drawing/2014/main" id="{0C2110DD-7C74-451C-8460-56C85271A2BF}"/>
               </a:ext>
             </a:extLst>
           </p:cNvPr>
@@ -19895,7 +19895,7 @@
           <p:cNvPr id="11" name="Text 9">
             <a:extLst xmlns:a="http://schemas.openxmlformats.org/drawingml/2006/main">
               <a:ext uri="{FF2B5EF4-FFF2-40B4-BE49-F238E27FC236}">
-                <a16:creationId xmlns:a16="http://schemas.microsoft.com/office/drawing/2014/main" id="{403A0EB7-32BF-4311-8F3B-FD42865CD7A7}"/>
+                <a16:creationId xmlns:a16="http://schemas.microsoft.com/office/drawing/2014/main" id="{A9BE8738-5677-4D0D-8D1F-9FB1B66BE171}"/>
               </a:ext>
             </a:extLst>
           </p:cNvPr>
@@ -19943,7 +19943,7 @@
           <p:cNvPr id="12" name="Text 10">
             <a:extLst xmlns:a="http://schemas.openxmlformats.org/drawingml/2006/main">
               <a:ext uri="{FF2B5EF4-FFF2-40B4-BE49-F238E27FC236}">
-                <a16:creationId xmlns:a16="http://schemas.microsoft.com/office/drawing/2014/main" id="{847854B3-1BE1-46C3-8C21-F40200A54B6F}"/>
+                <a16:creationId xmlns:a16="http://schemas.microsoft.com/office/drawing/2014/main" id="{0C62909C-4EE6-4BA6-BB00-23CF09F50D72}"/>
               </a:ext>
             </a:extLst>
           </p:cNvPr>
@@ -19991,7 +19991,7 @@
           <p:cNvPr id="13" name="Text 11">
             <a:extLst xmlns:a="http://schemas.openxmlformats.org/drawingml/2006/main">
               <a:ext uri="{FF2B5EF4-FFF2-40B4-BE49-F238E27FC236}">
-                <a16:creationId xmlns:a16="http://schemas.microsoft.com/office/drawing/2014/main" id="{DA969E89-B156-46FD-A767-A305E512443B}"/>
+                <a16:creationId xmlns:a16="http://schemas.microsoft.com/office/drawing/2014/main" id="{4A389095-7F8C-4A37-A559-BA3E86DCC235}"/>
               </a:ext>
             </a:extLst>
           </p:cNvPr>
@@ -20039,7 +20039,7 @@
           <p:cNvPr id="14" name="Text 12">
             <a:extLst xmlns:a="http://schemas.openxmlformats.org/drawingml/2006/main">
               <a:ext uri="{FF2B5EF4-FFF2-40B4-BE49-F238E27FC236}">
-                <a16:creationId xmlns:a16="http://schemas.microsoft.com/office/drawing/2014/main" id="{FF6CFB9A-36F0-4475-9F27-367440E0275A}"/>
+                <a16:creationId xmlns:a16="http://schemas.microsoft.com/office/drawing/2014/main" id="{BE2C9A8B-C588-4585-9F5C-8592951F0B80}"/>
               </a:ext>
             </a:extLst>
           </p:cNvPr>
@@ -20087,7 +20087,7 @@
           <p:cNvPr id="15" name="Text 13">
             <a:extLst xmlns:a="http://schemas.openxmlformats.org/drawingml/2006/main">
               <a:ext uri="{FF2B5EF4-FFF2-40B4-BE49-F238E27FC236}">
-                <a16:creationId xmlns:a16="http://schemas.microsoft.com/office/drawing/2014/main" id="{0EB26B13-71FF-4845-A62E-9DC91D933DB2}"/>
+                <a16:creationId xmlns:a16="http://schemas.microsoft.com/office/drawing/2014/main" id="{AE15CD59-62C7-44A6-BBFC-910385AA6953}"/>
               </a:ext>
             </a:extLst>
           </p:cNvPr>
@@ -20135,7 +20135,7 @@
           <p:cNvPr id="16" name="Shape 14">
             <a:extLst xmlns:a="http://schemas.openxmlformats.org/drawingml/2006/main">
               <a:ext uri="{FF2B5EF4-FFF2-40B4-BE49-F238E27FC236}">
-                <a16:creationId xmlns:a16="http://schemas.microsoft.com/office/drawing/2014/main" id="{E6B540D0-3FEF-4D00-AC03-94E8A6E9ABFC}"/>
+                <a16:creationId xmlns:a16="http://schemas.microsoft.com/office/drawing/2014/main" id="{B9DE1956-F3E0-442C-98ED-5D41CBBF398A}"/>
               </a:ext>
             </a:extLst>
           </p:cNvPr>
@@ -20172,7 +20172,7 @@
           <p:cNvPr id="17" name="Text 15">
             <a:extLst xmlns:a="http://schemas.openxmlformats.org/drawingml/2006/main">
               <a:ext uri="{FF2B5EF4-FFF2-40B4-BE49-F238E27FC236}">
-                <a16:creationId xmlns:a16="http://schemas.microsoft.com/office/drawing/2014/main" id="{32BC6376-42B2-47F1-817B-3A0745A2B7FC}"/>
+                <a16:creationId xmlns:a16="http://schemas.microsoft.com/office/drawing/2014/main" id="{BC823AF2-343A-4901-A5B1-D36766FC355A}"/>
               </a:ext>
             </a:extLst>
           </p:cNvPr>
@@ -20220,7 +20220,7 @@
           <p:cNvPr id="18" name="Shape 16">
             <a:extLst xmlns:a="http://schemas.openxmlformats.org/drawingml/2006/main">
               <a:ext uri="{FF2B5EF4-FFF2-40B4-BE49-F238E27FC236}">
-                <a16:creationId xmlns:a16="http://schemas.microsoft.com/office/drawing/2014/main" id="{D7D53D93-FF09-4C11-98F3-1A090044AF71}"/>
+                <a16:creationId xmlns:a16="http://schemas.microsoft.com/office/drawing/2014/main" id="{4EDF4EB5-B436-467B-B633-81067FDB1DDD}"/>
               </a:ext>
             </a:extLst>
           </p:cNvPr>
@@ -20253,7 +20253,7 @@
           <p:cNvPr id="19" name="Text 17">
             <a:extLst xmlns:a="http://schemas.openxmlformats.org/drawingml/2006/main">
               <a:ext uri="{FF2B5EF4-FFF2-40B4-BE49-F238E27FC236}">
-                <a16:creationId xmlns:a16="http://schemas.microsoft.com/office/drawing/2014/main" id="{96E5851D-6A28-4DCD-8AAA-B59DA46F513C}"/>
+                <a16:creationId xmlns:a16="http://schemas.microsoft.com/office/drawing/2014/main" id="{2F54D688-2F30-47CF-BAD7-93CF02638C3E}"/>
               </a:ext>
             </a:extLst>
           </p:cNvPr>
@@ -20301,7 +20301,7 @@
           <p:cNvPr id="20" name="Shape 18">
             <a:extLst xmlns:a="http://schemas.openxmlformats.org/drawingml/2006/main">
               <a:ext uri="{FF2B5EF4-FFF2-40B4-BE49-F238E27FC236}">
-                <a16:creationId xmlns:a16="http://schemas.microsoft.com/office/drawing/2014/main" id="{05E306D6-BF0C-41E2-937E-8DC8687FDE72}"/>
+                <a16:creationId xmlns:a16="http://schemas.microsoft.com/office/drawing/2014/main" id="{EF4E97F5-1763-430E-AACB-F9ED82E96077}"/>
               </a:ext>
             </a:extLst>
           </p:cNvPr>
@@ -20334,7 +20334,7 @@
           <p:cNvPr id="21" name="Text 19">
             <a:extLst xmlns:a="http://schemas.openxmlformats.org/drawingml/2006/main">
               <a:ext uri="{FF2B5EF4-FFF2-40B4-BE49-F238E27FC236}">
-                <a16:creationId xmlns:a16="http://schemas.microsoft.com/office/drawing/2014/main" id="{771292BD-15AA-4F39-8269-3C3415C3A555}"/>
+                <a16:creationId xmlns:a16="http://schemas.microsoft.com/office/drawing/2014/main" id="{3BA86B17-BAF7-4F4D-B76A-8B4592580DF3}"/>
               </a:ext>
             </a:extLst>
           </p:cNvPr>
@@ -20382,7 +20382,7 @@
           <p:cNvPr id="22" name="Shape 20">
             <a:extLst xmlns:a="http://schemas.openxmlformats.org/drawingml/2006/main">
               <a:ext uri="{FF2B5EF4-FFF2-40B4-BE49-F238E27FC236}">
-                <a16:creationId xmlns:a16="http://schemas.microsoft.com/office/drawing/2014/main" id="{4D6855EF-ACB0-4EFF-B310-8D7E85112470}"/>
+                <a16:creationId xmlns:a16="http://schemas.microsoft.com/office/drawing/2014/main" id="{407C5FEE-8DEA-4604-9435-9B508AC7809C}"/>
               </a:ext>
             </a:extLst>
           </p:cNvPr>
@@ -20415,7 +20415,7 @@
           <p:cNvPr id="23" name="Text 21">
             <a:extLst xmlns:a="http://schemas.openxmlformats.org/drawingml/2006/main">
               <a:ext uri="{FF2B5EF4-FFF2-40B4-BE49-F238E27FC236}">
-                <a16:creationId xmlns:a16="http://schemas.microsoft.com/office/drawing/2014/main" id="{7F969D55-912D-4EDD-A330-921E49E3E9AA}"/>
+                <a16:creationId xmlns:a16="http://schemas.microsoft.com/office/drawing/2014/main" id="{F7CD29A4-7E68-47E0-8CFD-2AC29266B99D}"/>
               </a:ext>
             </a:extLst>
           </p:cNvPr>
@@ -20463,7 +20463,7 @@
           <p:cNvPr id="24" name="Shape 22">
             <a:extLst xmlns:a="http://schemas.openxmlformats.org/drawingml/2006/main">
               <a:ext uri="{FF2B5EF4-FFF2-40B4-BE49-F238E27FC236}">
-                <a16:creationId xmlns:a16="http://schemas.microsoft.com/office/drawing/2014/main" id="{756191E5-C451-451F-8392-6620461601E0}"/>
+                <a16:creationId xmlns:a16="http://schemas.microsoft.com/office/drawing/2014/main" id="{22CF07EF-9851-4B96-9C27-52A403132041}"/>
               </a:ext>
             </a:extLst>
           </p:cNvPr>
@@ -20496,7 +20496,7 @@
           <p:cNvPr id="25" name="Text 23">
             <a:extLst xmlns:a="http://schemas.openxmlformats.org/drawingml/2006/main">
               <a:ext uri="{FF2B5EF4-FFF2-40B4-BE49-F238E27FC236}">
-                <a16:creationId xmlns:a16="http://schemas.microsoft.com/office/drawing/2014/main" id="{3AC706B0-BFF2-40EE-859E-0C7E4B09E60E}"/>
+                <a16:creationId xmlns:a16="http://schemas.microsoft.com/office/drawing/2014/main" id="{31727360-11F0-41D9-A30C-BBEFC0F1F0F3}"/>
               </a:ext>
             </a:extLst>
           </p:cNvPr>
@@ -20544,7 +20544,7 @@
           <p:cNvPr id="26" name="Shape 24">
             <a:extLst xmlns:a="http://schemas.openxmlformats.org/drawingml/2006/main">
               <a:ext uri="{FF2B5EF4-FFF2-40B4-BE49-F238E27FC236}">
-                <a16:creationId xmlns:a16="http://schemas.microsoft.com/office/drawing/2014/main" id="{CE225B42-B715-4E6C-8749-EF4E70F6296E}"/>
+                <a16:creationId xmlns:a16="http://schemas.microsoft.com/office/drawing/2014/main" id="{BD77D2CD-CE49-4DA7-BCA4-49CC24C22DA0}"/>
               </a:ext>
             </a:extLst>
           </p:cNvPr>
@@ -20577,7 +20577,7 @@
           <p:cNvPr id="27" name="Text 25">
             <a:extLst xmlns:a="http://schemas.openxmlformats.org/drawingml/2006/main">
               <a:ext uri="{FF2B5EF4-FFF2-40B4-BE49-F238E27FC236}">
-                <a16:creationId xmlns:a16="http://schemas.microsoft.com/office/drawing/2014/main" id="{B307EABF-625E-47ED-9F1A-AA0DEF6CE52A}"/>
+                <a16:creationId xmlns:a16="http://schemas.microsoft.com/office/drawing/2014/main" id="{9A23DBEC-7572-4686-BADA-779D64DE73B4}"/>
               </a:ext>
             </a:extLst>
           </p:cNvPr>
@@ -20625,7 +20625,7 @@
           <p:cNvPr id="28" name="Shape 26">
             <a:extLst xmlns:a="http://schemas.openxmlformats.org/drawingml/2006/main">
               <a:ext uri="{FF2B5EF4-FFF2-40B4-BE49-F238E27FC236}">
-                <a16:creationId xmlns:a16="http://schemas.microsoft.com/office/drawing/2014/main" id="{36D31271-2A51-4A32-8756-966BAAEAFE77}"/>
+                <a16:creationId xmlns:a16="http://schemas.microsoft.com/office/drawing/2014/main" id="{92752FDE-8678-4B45-8D98-4CF5837E3AC6}"/>
               </a:ext>
             </a:extLst>
           </p:cNvPr>
@@ -20658,7 +20658,7 @@
           <p:cNvPr id="29" name="Text 27">
             <a:extLst xmlns:a="http://schemas.openxmlformats.org/drawingml/2006/main">
               <a:ext uri="{FF2B5EF4-FFF2-40B4-BE49-F238E27FC236}">
-                <a16:creationId xmlns:a16="http://schemas.microsoft.com/office/drawing/2014/main" id="{AF446B06-CAB6-4C63-B6FB-170BAE8E824D}"/>
+                <a16:creationId xmlns:a16="http://schemas.microsoft.com/office/drawing/2014/main" id="{89AD8A6B-702A-457F-8328-4A0016C12102}"/>
               </a:ext>
             </a:extLst>
           </p:cNvPr>
@@ -20706,7 +20706,7 @@
           <p:cNvPr id="30" name="Shape 28">
             <a:extLst xmlns:a="http://schemas.openxmlformats.org/drawingml/2006/main">
               <a:ext uri="{FF2B5EF4-FFF2-40B4-BE49-F238E27FC236}">
-                <a16:creationId xmlns:a16="http://schemas.microsoft.com/office/drawing/2014/main" id="{07D40193-CC6B-4438-9464-A7769CBEA2FC}"/>
+                <a16:creationId xmlns:a16="http://schemas.microsoft.com/office/drawing/2014/main" id="{D72D1248-51C3-4941-A6A6-02708B9EE266}"/>
               </a:ext>
             </a:extLst>
           </p:cNvPr>
@@ -20739,7 +20739,7 @@
           <p:cNvPr id="31" name="Text 29">
             <a:extLst xmlns:a="http://schemas.openxmlformats.org/drawingml/2006/main">
               <a:ext uri="{FF2B5EF4-FFF2-40B4-BE49-F238E27FC236}">
-                <a16:creationId xmlns:a16="http://schemas.microsoft.com/office/drawing/2014/main" id="{8E3437C5-96F6-49B3-A8FB-DB6BC48115F8}"/>
+                <a16:creationId xmlns:a16="http://schemas.microsoft.com/office/drawing/2014/main" id="{16BD3675-73B1-4384-A1DC-FCEBC11AB5CD}"/>
               </a:ext>
             </a:extLst>
           </p:cNvPr>
@@ -20787,7 +20787,7 @@
           <p:cNvPr id="32" name="Shape 30">
             <a:extLst xmlns:a="http://schemas.openxmlformats.org/drawingml/2006/main">
               <a:ext uri="{FF2B5EF4-FFF2-40B4-BE49-F238E27FC236}">
-                <a16:creationId xmlns:a16="http://schemas.microsoft.com/office/drawing/2014/main" id="{51B4587F-013A-4340-8251-D2AB4FCBBB9C}"/>
+                <a16:creationId xmlns:a16="http://schemas.microsoft.com/office/drawing/2014/main" id="{3AED9E4D-F7F3-45A8-80E7-23EB7A92F1ED}"/>
               </a:ext>
             </a:extLst>
           </p:cNvPr>
@@ -20820,7 +20820,7 @@
           <p:cNvPr id="33" name="Text 31">
             <a:extLst xmlns:a="http://schemas.openxmlformats.org/drawingml/2006/main">
               <a:ext uri="{FF2B5EF4-FFF2-40B4-BE49-F238E27FC236}">
-                <a16:creationId xmlns:a16="http://schemas.microsoft.com/office/drawing/2014/main" id="{BD209E5E-7983-4383-BC45-FC8E77EEAB1A}"/>
+                <a16:creationId xmlns:a16="http://schemas.microsoft.com/office/drawing/2014/main" id="{45E4C484-7B0D-47F5-B655-AD0857A9BA13}"/>
               </a:ext>
             </a:extLst>
           </p:cNvPr>
@@ -20868,7 +20868,7 @@
           <p:cNvPr id="34" name="Shape 32">
             <a:extLst xmlns:a="http://schemas.openxmlformats.org/drawingml/2006/main">
               <a:ext uri="{FF2B5EF4-FFF2-40B4-BE49-F238E27FC236}">
-                <a16:creationId xmlns:a16="http://schemas.microsoft.com/office/drawing/2014/main" id="{11D59DA4-9F0C-4875-BF58-2C88EFA64479}"/>
+                <a16:creationId xmlns:a16="http://schemas.microsoft.com/office/drawing/2014/main" id="{05CCE566-600A-4C6E-B8ED-9D17686BEB96}"/>
               </a:ext>
             </a:extLst>
           </p:cNvPr>
@@ -20901,7 +20901,7 @@
           <p:cNvPr id="35" name="Text 33">
             <a:extLst xmlns:a="http://schemas.openxmlformats.org/drawingml/2006/main">
               <a:ext uri="{FF2B5EF4-FFF2-40B4-BE49-F238E27FC236}">
-                <a16:creationId xmlns:a16="http://schemas.microsoft.com/office/drawing/2014/main" id="{AC6C0D79-9C81-4E29-85C5-C7FA2CDD3D0C}"/>
+                <a16:creationId xmlns:a16="http://schemas.microsoft.com/office/drawing/2014/main" id="{B18781AE-5C3C-4F9B-8637-821D10E659EF}"/>
               </a:ext>
             </a:extLst>
           </p:cNvPr>
@@ -20949,7 +20949,7 @@
           <p:cNvPr id="36" name="Shape 34">
             <a:extLst xmlns:a="http://schemas.openxmlformats.org/drawingml/2006/main">
               <a:ext uri="{FF2B5EF4-FFF2-40B4-BE49-F238E27FC236}">
-                <a16:creationId xmlns:a16="http://schemas.microsoft.com/office/drawing/2014/main" id="{266F7771-1345-47CC-A4F8-885723FD7D16}"/>
+                <a16:creationId xmlns:a16="http://schemas.microsoft.com/office/drawing/2014/main" id="{C0BEFFFA-19DF-47E8-8889-52150D23BF84}"/>
               </a:ext>
             </a:extLst>
           </p:cNvPr>
@@ -20982,7 +20982,7 @@
           <p:cNvPr id="37" name="Text 35">
             <a:extLst xmlns:a="http://schemas.openxmlformats.org/drawingml/2006/main">
               <a:ext uri="{FF2B5EF4-FFF2-40B4-BE49-F238E27FC236}">
-                <a16:creationId xmlns:a16="http://schemas.microsoft.com/office/drawing/2014/main" id="{D2AA6D50-CF02-461A-BDA2-C7347D6DAA6A}"/>
+                <a16:creationId xmlns:a16="http://schemas.microsoft.com/office/drawing/2014/main" id="{EBA1479E-BB44-498C-BB95-6B6DA86298F8}"/>
               </a:ext>
             </a:extLst>
           </p:cNvPr>
@@ -21030,7 +21030,7 @@
           <p:cNvPr id="38" name="Shape 36">
             <a:extLst xmlns:a="http://schemas.openxmlformats.org/drawingml/2006/main">
               <a:ext uri="{FF2B5EF4-FFF2-40B4-BE49-F238E27FC236}">
-                <a16:creationId xmlns:a16="http://schemas.microsoft.com/office/drawing/2014/main" id="{D52CAA3A-8B5C-4B31-AD33-53A57A504AD8}"/>
+                <a16:creationId xmlns:a16="http://schemas.microsoft.com/office/drawing/2014/main" id="{685B54DD-A4F5-4C80-A7F1-8FF84D130027}"/>
               </a:ext>
             </a:extLst>
           </p:cNvPr>
@@ -21063,7 +21063,7 @@
           <p:cNvPr id="39" name="Text 37">
             <a:extLst xmlns:a="http://schemas.openxmlformats.org/drawingml/2006/main">
               <a:ext uri="{FF2B5EF4-FFF2-40B4-BE49-F238E27FC236}">
-                <a16:creationId xmlns:a16="http://schemas.microsoft.com/office/drawing/2014/main" id="{859E51DA-A080-4562-814A-6EADA433DA49}"/>
+                <a16:creationId xmlns:a16="http://schemas.microsoft.com/office/drawing/2014/main" id="{06C24E35-DE0E-4FE5-8CB2-0FEC8DB7596E}"/>
               </a:ext>
             </a:extLst>
           </p:cNvPr>
@@ -21111,7 +21111,7 @@
           <p:cNvPr id="40" name="Shape 38">
             <a:extLst xmlns:a="http://schemas.openxmlformats.org/drawingml/2006/main">
               <a:ext uri="{FF2B5EF4-FFF2-40B4-BE49-F238E27FC236}">
-                <a16:creationId xmlns:a16="http://schemas.microsoft.com/office/drawing/2014/main" id="{9A2C2186-0539-4554-AD83-13F1D62B7300}"/>
+                <a16:creationId xmlns:a16="http://schemas.microsoft.com/office/drawing/2014/main" id="{244B93F1-0C68-49F8-85D8-AFA6238A176F}"/>
               </a:ext>
             </a:extLst>
           </p:cNvPr>
@@ -21144,7 +21144,7 @@
           <p:cNvPr id="41" name="Text 39">
             <a:extLst xmlns:a="http://schemas.openxmlformats.org/drawingml/2006/main">
               <a:ext uri="{FF2B5EF4-FFF2-40B4-BE49-F238E27FC236}">
-                <a16:creationId xmlns:a16="http://schemas.microsoft.com/office/drawing/2014/main" id="{C47FAAFB-708E-4B10-9A9A-26E4C258149D}"/>
+                <a16:creationId xmlns:a16="http://schemas.microsoft.com/office/drawing/2014/main" id="{853B36FA-F7E3-46C9-B3E4-62DA880C3B8E}"/>
               </a:ext>
             </a:extLst>
           </p:cNvPr>
@@ -21192,7 +21192,7 @@
           <p:cNvPr id="42" name="Shape 40">
             <a:extLst xmlns:a="http://schemas.openxmlformats.org/drawingml/2006/main">
               <a:ext uri="{FF2B5EF4-FFF2-40B4-BE49-F238E27FC236}">
-                <a16:creationId xmlns:a16="http://schemas.microsoft.com/office/drawing/2014/main" id="{D9316F61-5972-49E5-BE7A-B4B971C952D3}"/>
+                <a16:creationId xmlns:a16="http://schemas.microsoft.com/office/drawing/2014/main" id="{BF60549F-02F5-4BD1-8953-3568389C3F57}"/>
               </a:ext>
             </a:extLst>
           </p:cNvPr>
@@ -21225,7 +21225,7 @@
           <p:cNvPr id="43" name="Text 41">
             <a:extLst xmlns:a="http://schemas.openxmlformats.org/drawingml/2006/main">
               <a:ext uri="{FF2B5EF4-FFF2-40B4-BE49-F238E27FC236}">
-                <a16:creationId xmlns:a16="http://schemas.microsoft.com/office/drawing/2014/main" id="{50177CFB-F5D8-4F2D-B074-B9A218BDD2FF}"/>
+                <a16:creationId xmlns:a16="http://schemas.microsoft.com/office/drawing/2014/main" id="{133E72A0-3060-4D08-8428-18EDD54EDCAA}"/>
               </a:ext>
             </a:extLst>
           </p:cNvPr>
@@ -21273,7 +21273,7 @@
           <p:cNvPr id="44" name="Shape 42">
             <a:extLst xmlns:a="http://schemas.openxmlformats.org/drawingml/2006/main">
               <a:ext uri="{FF2B5EF4-FFF2-40B4-BE49-F238E27FC236}">
-                <a16:creationId xmlns:a16="http://schemas.microsoft.com/office/drawing/2014/main" id="{437D5B72-9716-4A82-A6CA-555E5944DB55}"/>
+                <a16:creationId xmlns:a16="http://schemas.microsoft.com/office/drawing/2014/main" id="{6CAECA36-AB98-4B10-B247-314E5170354C}"/>
               </a:ext>
             </a:extLst>
           </p:cNvPr>
@@ -21306,7 +21306,7 @@
           <p:cNvPr id="45" name="Text 43">
             <a:extLst xmlns:a="http://schemas.openxmlformats.org/drawingml/2006/main">
               <a:ext uri="{FF2B5EF4-FFF2-40B4-BE49-F238E27FC236}">
-                <a16:creationId xmlns:a16="http://schemas.microsoft.com/office/drawing/2014/main" id="{998E8AFC-1CC6-404C-92A3-4B39A3D1BB8E}"/>
+                <a16:creationId xmlns:a16="http://schemas.microsoft.com/office/drawing/2014/main" id="{B2A2660D-C488-4162-A835-30F6E1C42162}"/>
               </a:ext>
             </a:extLst>
           </p:cNvPr>
@@ -21354,7 +21354,7 @@
           <p:cNvPr id="46" name="Shape 44">
             <a:extLst xmlns:a="http://schemas.openxmlformats.org/drawingml/2006/main">
               <a:ext uri="{FF2B5EF4-FFF2-40B4-BE49-F238E27FC236}">
-                <a16:creationId xmlns:a16="http://schemas.microsoft.com/office/drawing/2014/main" id="{88D5A68B-E376-4EA1-8AC1-303C07CDE32C}"/>
+                <a16:creationId xmlns:a16="http://schemas.microsoft.com/office/drawing/2014/main" id="{D07C1BA6-04A9-49E4-BA19-1A0015121F35}"/>
               </a:ext>
             </a:extLst>
           </p:cNvPr>
@@ -21387,7 +21387,7 @@
           <p:cNvPr id="47" name="Text 45">
             <a:extLst xmlns:a="http://schemas.openxmlformats.org/drawingml/2006/main">
               <a:ext uri="{FF2B5EF4-FFF2-40B4-BE49-F238E27FC236}">
-                <a16:creationId xmlns:a16="http://schemas.microsoft.com/office/drawing/2014/main" id="{E6F03C8F-4479-4029-ABB4-C9BB682FDEF9}"/>
+                <a16:creationId xmlns:a16="http://schemas.microsoft.com/office/drawing/2014/main" id="{0E855497-BF88-4EF6-A987-88A6AF2712F2}"/>
               </a:ext>
             </a:extLst>
           </p:cNvPr>
@@ -21435,7 +21435,7 @@
           <p:cNvPr id="48" name="Shape 46">
             <a:extLst xmlns:a="http://schemas.openxmlformats.org/drawingml/2006/main">
               <a:ext uri="{FF2B5EF4-FFF2-40B4-BE49-F238E27FC236}">
-                <a16:creationId xmlns:a16="http://schemas.microsoft.com/office/drawing/2014/main" id="{A298C16B-9973-44C8-9EFE-693F70780130}"/>
+                <a16:creationId xmlns:a16="http://schemas.microsoft.com/office/drawing/2014/main" id="{6F4EB709-9587-486D-B24A-4D0B48D8205A}"/>
               </a:ext>
             </a:extLst>
           </p:cNvPr>
@@ -21468,7 +21468,7 @@
           <p:cNvPr id="49" name="Text 47">
             <a:extLst xmlns:a="http://schemas.openxmlformats.org/drawingml/2006/main">
               <a:ext uri="{FF2B5EF4-FFF2-40B4-BE49-F238E27FC236}">
-                <a16:creationId xmlns:a16="http://schemas.microsoft.com/office/drawing/2014/main" id="{EAF86221-49F3-4423-B5D0-B77A2F1B1B0C}"/>
+                <a16:creationId xmlns:a16="http://schemas.microsoft.com/office/drawing/2014/main" id="{FBADBC03-A94C-4C42-BA60-2E59A830F96F}"/>
               </a:ext>
             </a:extLst>
           </p:cNvPr>
@@ -21516,7 +21516,7 @@
           <p:cNvPr id="50" name="Shape 48">
             <a:extLst xmlns:a="http://schemas.openxmlformats.org/drawingml/2006/main">
               <a:ext uri="{FF2B5EF4-FFF2-40B4-BE49-F238E27FC236}">
-                <a16:creationId xmlns:a16="http://schemas.microsoft.com/office/drawing/2014/main" id="{85B9ED44-36D5-45BC-92ED-0EC1308F3871}"/>
+                <a16:creationId xmlns:a16="http://schemas.microsoft.com/office/drawing/2014/main" id="{B46F1D3E-4D38-46A8-982A-7869F0D94849}"/>
               </a:ext>
             </a:extLst>
           </p:cNvPr>
@@ -21549,7 +21549,7 @@
           <p:cNvPr id="51" name="Text 49">
             <a:extLst xmlns:a="http://schemas.openxmlformats.org/drawingml/2006/main">
               <a:ext uri="{FF2B5EF4-FFF2-40B4-BE49-F238E27FC236}">
-                <a16:creationId xmlns:a16="http://schemas.microsoft.com/office/drawing/2014/main" id="{7B770D59-D75F-4CE5-86F7-2C32298D87BC}"/>
+                <a16:creationId xmlns:a16="http://schemas.microsoft.com/office/drawing/2014/main" id="{6DA64ABA-29D0-4A8D-BCE6-F4863DF60118}"/>
               </a:ext>
             </a:extLst>
           </p:cNvPr>
@@ -21597,7 +21597,7 @@
           <p:cNvPr id="52" name="Shape 50">
             <a:extLst xmlns:a="http://schemas.openxmlformats.org/drawingml/2006/main">
               <a:ext uri="{FF2B5EF4-FFF2-40B4-BE49-F238E27FC236}">
-                <a16:creationId xmlns:a16="http://schemas.microsoft.com/office/drawing/2014/main" id="{96D527AE-1C6E-4375-9FF3-42DC17518C5C}"/>
+                <a16:creationId xmlns:a16="http://schemas.microsoft.com/office/drawing/2014/main" id="{14599B91-15C0-4548-8DC7-59D3D25A0939}"/>
               </a:ext>
             </a:extLst>
           </p:cNvPr>
@@ -21630,7 +21630,7 @@
           <p:cNvPr id="53" name="Text 51">
             <a:extLst xmlns:a="http://schemas.openxmlformats.org/drawingml/2006/main">
               <a:ext uri="{FF2B5EF4-FFF2-40B4-BE49-F238E27FC236}">
-                <a16:creationId xmlns:a16="http://schemas.microsoft.com/office/drawing/2014/main" id="{A3B618F9-6162-42A0-B8AC-D211F5223F9D}"/>
+                <a16:creationId xmlns:a16="http://schemas.microsoft.com/office/drawing/2014/main" id="{2504BB6C-F552-4CD6-8EFD-F925BCF8B354}"/>
               </a:ext>
             </a:extLst>
           </p:cNvPr>
@@ -21678,7 +21678,7 @@
           <p:cNvPr id="54" name="Shape 52">
             <a:extLst xmlns:a="http://schemas.openxmlformats.org/drawingml/2006/main">
               <a:ext uri="{FF2B5EF4-FFF2-40B4-BE49-F238E27FC236}">
-                <a16:creationId xmlns:a16="http://schemas.microsoft.com/office/drawing/2014/main" id="{71060E00-6BA1-4170-804C-60CA0265E1E3}"/>
+                <a16:creationId xmlns:a16="http://schemas.microsoft.com/office/drawing/2014/main" id="{332C032B-EFE5-4EA1-9BAA-C9C1D1D39E9E}"/>
               </a:ext>
             </a:extLst>
           </p:cNvPr>
@@ -21711,7 +21711,7 @@
           <p:cNvPr id="55" name="Text 53">
             <a:extLst xmlns:a="http://schemas.openxmlformats.org/drawingml/2006/main">
               <a:ext uri="{FF2B5EF4-FFF2-40B4-BE49-F238E27FC236}">
-                <a16:creationId xmlns:a16="http://schemas.microsoft.com/office/drawing/2014/main" id="{B6172837-52F1-43AF-AD4F-A23795B5A379}"/>
+                <a16:creationId xmlns:a16="http://schemas.microsoft.com/office/drawing/2014/main" id="{7BBFC7BC-5F69-4013-B8DB-549BAB66FCA5}"/>
               </a:ext>
             </a:extLst>
           </p:cNvPr>
@@ -21759,7 +21759,7 @@
           <p:cNvPr id="56" name="Shape 54">
             <a:extLst xmlns:a="http://schemas.openxmlformats.org/drawingml/2006/main">
               <a:ext uri="{FF2B5EF4-FFF2-40B4-BE49-F238E27FC236}">
-                <a16:creationId xmlns:a16="http://schemas.microsoft.com/office/drawing/2014/main" id="{21A20241-75C8-4B8C-9337-76C031A3CE76}"/>
+                <a16:creationId xmlns:a16="http://schemas.microsoft.com/office/drawing/2014/main" id="{71DE3049-13D0-415D-B75A-B955D987CA53}"/>
               </a:ext>
             </a:extLst>
           </p:cNvPr>
@@ -21792,7 +21792,7 @@
           <p:cNvPr id="57" name="Text 55">
             <a:extLst xmlns:a="http://schemas.openxmlformats.org/drawingml/2006/main">
               <a:ext uri="{FF2B5EF4-FFF2-40B4-BE49-F238E27FC236}">
-                <a16:creationId xmlns:a16="http://schemas.microsoft.com/office/drawing/2014/main" id="{625FC292-0514-49E5-954F-4CE0FA83132A}"/>
+                <a16:creationId xmlns:a16="http://schemas.microsoft.com/office/drawing/2014/main" id="{6AE9293C-389E-4726-B654-4F9419FF6B75}"/>
               </a:ext>
             </a:extLst>
           </p:cNvPr>
@@ -21840,7 +21840,7 @@
           <p:cNvPr id="58" name="Shape 56">
             <a:extLst xmlns:a="http://schemas.openxmlformats.org/drawingml/2006/main">
               <a:ext uri="{FF2B5EF4-FFF2-40B4-BE49-F238E27FC236}">
-                <a16:creationId xmlns:a16="http://schemas.microsoft.com/office/drawing/2014/main" id="{A2717F6E-64FB-4FF6-867F-66B8B55E6416}"/>
+                <a16:creationId xmlns:a16="http://schemas.microsoft.com/office/drawing/2014/main" id="{BC934C9C-EB43-4F6F-800B-F34AD70E6806}"/>
               </a:ext>
             </a:extLst>
           </p:cNvPr>
@@ -21873,7 +21873,7 @@
           <p:cNvPr id="59" name="Text 57">
             <a:extLst xmlns:a="http://schemas.openxmlformats.org/drawingml/2006/main">
               <a:ext uri="{FF2B5EF4-FFF2-40B4-BE49-F238E27FC236}">
-                <a16:creationId xmlns:a16="http://schemas.microsoft.com/office/drawing/2014/main" id="{BF4387C2-874B-4C9D-99D5-A21AA32F7A9D}"/>
+                <a16:creationId xmlns:a16="http://schemas.microsoft.com/office/drawing/2014/main" id="{0A28FC78-B310-4302-B269-A780E70129F7}"/>
               </a:ext>
             </a:extLst>
           </p:cNvPr>
@@ -21921,7 +21921,7 @@
           <p:cNvPr id="60" name="Shape 58">
             <a:extLst xmlns:a="http://schemas.openxmlformats.org/drawingml/2006/main">
               <a:ext uri="{FF2B5EF4-FFF2-40B4-BE49-F238E27FC236}">
-                <a16:creationId xmlns:a16="http://schemas.microsoft.com/office/drawing/2014/main" id="{2C1F54B2-E3DB-47C2-A0CD-EB7EA4DFA8EA}"/>
+                <a16:creationId xmlns:a16="http://schemas.microsoft.com/office/drawing/2014/main" id="{74AD0A2D-8DC8-4A44-9048-6E4842214804}"/>
               </a:ext>
             </a:extLst>
           </p:cNvPr>
@@ -21954,7 +21954,7 @@
           <p:cNvPr id="61" name="Text 59">
             <a:extLst xmlns:a="http://schemas.openxmlformats.org/drawingml/2006/main">
               <a:ext uri="{FF2B5EF4-FFF2-40B4-BE49-F238E27FC236}">
-                <a16:creationId xmlns:a16="http://schemas.microsoft.com/office/drawing/2014/main" id="{224EA375-5C7B-404E-8690-E45A029BA8DA}"/>
+                <a16:creationId xmlns:a16="http://schemas.microsoft.com/office/drawing/2014/main" id="{DC5D933E-83FF-4FC2-9A4B-64AABE73CD23}"/>
               </a:ext>
             </a:extLst>
           </p:cNvPr>
@@ -22002,7 +22002,7 @@
           <p:cNvPr id="62" name="Shape 60">
             <a:extLst xmlns:a="http://schemas.openxmlformats.org/drawingml/2006/main">
               <a:ext uri="{FF2B5EF4-FFF2-40B4-BE49-F238E27FC236}">
-                <a16:creationId xmlns:a16="http://schemas.microsoft.com/office/drawing/2014/main" id="{C42DD851-49C7-4667-9634-D761901568AD}"/>
+                <a16:creationId xmlns:a16="http://schemas.microsoft.com/office/drawing/2014/main" id="{F461B200-2C6D-4A74-B2E5-0B32AA9DF3A4}"/>
               </a:ext>
             </a:extLst>
           </p:cNvPr>
@@ -22035,7 +22035,7 @@
           <p:cNvPr id="63" name="Text 61">
             <a:extLst xmlns:a="http://schemas.openxmlformats.org/drawingml/2006/main">
               <a:ext uri="{FF2B5EF4-FFF2-40B4-BE49-F238E27FC236}">
-                <a16:creationId xmlns:a16="http://schemas.microsoft.com/office/drawing/2014/main" id="{6ACBD10A-4B25-4B1D-B153-95B5AB718434}"/>
+                <a16:creationId xmlns:a16="http://schemas.microsoft.com/office/drawing/2014/main" id="{E5836F90-EB47-4444-AD46-FB491FE2D4D8}"/>
               </a:ext>
             </a:extLst>
           </p:cNvPr>
@@ -22083,7 +22083,7 @@
           <p:cNvPr id="64" name="Shape 62">
             <a:extLst xmlns:a="http://schemas.openxmlformats.org/drawingml/2006/main">
               <a:ext uri="{FF2B5EF4-FFF2-40B4-BE49-F238E27FC236}">
-                <a16:creationId xmlns:a16="http://schemas.microsoft.com/office/drawing/2014/main" id="{3BBFC307-41CD-49DA-914D-3F445AEF9253}"/>
+                <a16:creationId xmlns:a16="http://schemas.microsoft.com/office/drawing/2014/main" id="{85C98A9C-3DCC-4E4D-BBB0-7C3943FB83B6}"/>
               </a:ext>
             </a:extLst>
           </p:cNvPr>
@@ -22116,7 +22116,7 @@
           <p:cNvPr id="65" name="Text 63">
             <a:extLst xmlns:a="http://schemas.openxmlformats.org/drawingml/2006/main">
               <a:ext uri="{FF2B5EF4-FFF2-40B4-BE49-F238E27FC236}">
-                <a16:creationId xmlns:a16="http://schemas.microsoft.com/office/drawing/2014/main" id="{A797E190-827A-4727-84A9-36801F9444B9}"/>
+                <a16:creationId xmlns:a16="http://schemas.microsoft.com/office/drawing/2014/main" id="{0E47CC3F-2173-44A2-873D-C3388DCF1291}"/>
               </a:ext>
             </a:extLst>
           </p:cNvPr>
@@ -22164,7 +22164,7 @@
           <p:cNvPr id="66" name="Shape 64">
             <a:extLst xmlns:a="http://schemas.openxmlformats.org/drawingml/2006/main">
               <a:ext uri="{FF2B5EF4-FFF2-40B4-BE49-F238E27FC236}">
-                <a16:creationId xmlns:a16="http://schemas.microsoft.com/office/drawing/2014/main" id="{40D0E06D-AEBC-4F36-A3B6-75D78B7AED7C}"/>
+                <a16:creationId xmlns:a16="http://schemas.microsoft.com/office/drawing/2014/main" id="{8145F821-26A2-4AFA-AF96-97F2B6C330B6}"/>
               </a:ext>
             </a:extLst>
           </p:cNvPr>
@@ -22197,7 +22197,7 @@
           <p:cNvPr id="67" name="Text 65">
             <a:extLst xmlns:a="http://schemas.openxmlformats.org/drawingml/2006/main">
               <a:ext uri="{FF2B5EF4-FFF2-40B4-BE49-F238E27FC236}">
-                <a16:creationId xmlns:a16="http://schemas.microsoft.com/office/drawing/2014/main" id="{DFFD302D-1923-4496-8F46-C40CD6162526}"/>
+                <a16:creationId xmlns:a16="http://schemas.microsoft.com/office/drawing/2014/main" id="{AA394785-52EA-45F0-B482-9EA3CDE86E02}"/>
               </a:ext>
             </a:extLst>
           </p:cNvPr>
@@ -22245,7 +22245,7 @@
           <p:cNvPr id="68" name="Text 66">
             <a:extLst xmlns:a="http://schemas.openxmlformats.org/drawingml/2006/main">
               <a:ext uri="{FF2B5EF4-FFF2-40B4-BE49-F238E27FC236}">
-                <a16:creationId xmlns:a16="http://schemas.microsoft.com/office/drawing/2014/main" id="{F3CCE907-1B0F-476F-A606-AC018217F9C6}"/>
+                <a16:creationId xmlns:a16="http://schemas.microsoft.com/office/drawing/2014/main" id="{8DD483C3-0F83-4B61-8549-DD818BCDA793}"/>
               </a:ext>
             </a:extLst>
           </p:cNvPr>
@@ -22293,7 +22293,7 @@
           <p:cNvPr id="69" name="Text 67">
             <a:extLst xmlns:a="http://schemas.openxmlformats.org/drawingml/2006/main">
               <a:ext uri="{FF2B5EF4-FFF2-40B4-BE49-F238E27FC236}">
-                <a16:creationId xmlns:a16="http://schemas.microsoft.com/office/drawing/2014/main" id="{B57F784E-C59D-4E44-B9EB-5770CADFB843}"/>
+                <a16:creationId xmlns:a16="http://schemas.microsoft.com/office/drawing/2014/main" id="{4FA7C6BB-CE1B-4B5F-B75E-8A77CDA6C42B}"/>
               </a:ext>
             </a:extLst>
           </p:cNvPr>
@@ -22330,7 +22330,7 @@
                 <a:ea typeface="Microsoft YaHei"/>
                 <a:cs typeface="Microsoft YaHei"/>
               </a:rPr>
-              <a:t>智能云储 · DOEF | 补充实验与方法说明</a:t>
+              <a:t>智储云控 · DOEF | 补充实验与方法说明</a:t>
             </a:r>
             <a:endParaRPr sz="750"/>
           </a:p>
@@ -22341,7 +22341,7 @@
           <p:cNvPr id="70" name="Slide Number Placeholder 0">
             <a:extLst xmlns:a="http://schemas.openxmlformats.org/drawingml/2006/main">
               <a:ext uri="{FF2B5EF4-FFF2-40B4-BE49-F238E27FC236}">
-                <a16:creationId xmlns:a16="http://schemas.microsoft.com/office/drawing/2014/main" id="{5051F648-BA0B-4A17-8005-2C1934E6363A}"/>
+                <a16:creationId xmlns:a16="http://schemas.microsoft.com/office/drawing/2014/main" id="{97B9080B-011F-46CE-A292-DFCE461151E3}"/>
               </a:ext>
             </a:extLst>
           </p:cNvPr>
@@ -22391,7 +22391,7 @@
     </p:spTree>
     <p:extLst>
       <p:ext uri="{BB962C8B-B14F-4D97-AF65-F5344CB8AC3E}">
-        <p14:creationId xmlns:p14="http://schemas.microsoft.com/office/powerpoint/2010/main" val="269422893"/>
+        <p14:creationId xmlns:p14="http://schemas.microsoft.com/office/powerpoint/2010/main" val="861358576"/>
       </p:ext>
     </p:extLst>
   </p:cSld>
@@ -22415,7 +22415,7 @@
           <p:cNvPr id="2" name="Text 0">
             <a:extLst xmlns:a="http://schemas.openxmlformats.org/drawingml/2006/main">
               <a:ext uri="{FF2B5EF4-FFF2-40B4-BE49-F238E27FC236}">
-                <a16:creationId xmlns:a16="http://schemas.microsoft.com/office/drawing/2014/main" id="{5CB5D570-AC10-44D3-8AD3-8B843863F617}"/>
+                <a16:creationId xmlns:a16="http://schemas.microsoft.com/office/drawing/2014/main" id="{377F4A3C-45D6-439E-8B8D-ADC2E543C0C8}"/>
               </a:ext>
             </a:extLst>
           </p:cNvPr>
@@ -22461,7 +22461,7 @@
           <p:cNvPr id="3" name="Text 1">
             <a:extLst xmlns:a="http://schemas.openxmlformats.org/drawingml/2006/main">
               <a:ext uri="{FF2B5EF4-FFF2-40B4-BE49-F238E27FC236}">
-                <a16:creationId xmlns:a16="http://schemas.microsoft.com/office/drawing/2014/main" id="{69ACB429-A785-4D72-A308-F2ED35AD62D0}"/>
+                <a16:creationId xmlns:a16="http://schemas.microsoft.com/office/drawing/2014/main" id="{2739303B-9043-42DA-AC2A-E1C3BB641A2C}"/>
               </a:ext>
             </a:extLst>
           </p:cNvPr>
@@ -22507,7 +22507,7 @@
           <p:cNvPr id="4" name="Shape 2">
             <a:extLst xmlns:a="http://schemas.openxmlformats.org/drawingml/2006/main">
               <a:ext uri="{FF2B5EF4-FFF2-40B4-BE49-F238E27FC236}">
-                <a16:creationId xmlns:a16="http://schemas.microsoft.com/office/drawing/2014/main" id="{C4B5F7D4-0CDC-4826-991F-BB98F24610B3}"/>
+                <a16:creationId xmlns:a16="http://schemas.microsoft.com/office/drawing/2014/main" id="{60497819-49F4-4C32-86D5-9C55D39BA006}"/>
               </a:ext>
             </a:extLst>
           </p:cNvPr>
@@ -22544,7 +22544,7 @@
           <p:cNvPr id="5" name="Text 3">
             <a:extLst xmlns:a="http://schemas.openxmlformats.org/drawingml/2006/main">
               <a:ext uri="{FF2B5EF4-FFF2-40B4-BE49-F238E27FC236}">
-                <a16:creationId xmlns:a16="http://schemas.microsoft.com/office/drawing/2014/main" id="{65D26EFC-CAC8-4D30-B8B8-CE9D77855045}"/>
+                <a16:creationId xmlns:a16="http://schemas.microsoft.com/office/drawing/2014/main" id="{AB653CBC-A7EA-43CE-B34C-35E94F92FF55}"/>
               </a:ext>
             </a:extLst>
           </p:cNvPr>
@@ -22592,7 +22592,7 @@
           <p:cNvPr id="6" name="Text 4">
             <a:extLst xmlns:a="http://schemas.openxmlformats.org/drawingml/2006/main">
               <a:ext uri="{FF2B5EF4-FFF2-40B4-BE49-F238E27FC236}">
-                <a16:creationId xmlns:a16="http://schemas.microsoft.com/office/drawing/2014/main" id="{7B45C5A2-B762-4CA9-A5EF-B19960C8559E}"/>
+                <a16:creationId xmlns:a16="http://schemas.microsoft.com/office/drawing/2014/main" id="{BC09CA99-A9CA-4719-BB3B-A0AE49586FDC}"/>
               </a:ext>
             </a:extLst>
           </p:cNvPr>
@@ -22640,7 +22640,7 @@
           <p:cNvPr id="7" name="Text 5">
             <a:extLst xmlns:a="http://schemas.openxmlformats.org/drawingml/2006/main">
               <a:ext uri="{FF2B5EF4-FFF2-40B4-BE49-F238E27FC236}">
-                <a16:creationId xmlns:a16="http://schemas.microsoft.com/office/drawing/2014/main" id="{B89BF46E-CF52-4799-8262-5863A117FA75}"/>
+                <a16:creationId xmlns:a16="http://schemas.microsoft.com/office/drawing/2014/main" id="{DAE5DD37-3272-4C84-B1E0-F4BD51F798DB}"/>
               </a:ext>
             </a:extLst>
           </p:cNvPr>
@@ -22688,7 +22688,7 @@
           <p:cNvPr id="8" name="Shape 6">
             <a:extLst xmlns:a="http://schemas.openxmlformats.org/drawingml/2006/main">
               <a:ext uri="{FF2B5EF4-FFF2-40B4-BE49-F238E27FC236}">
-                <a16:creationId xmlns:a16="http://schemas.microsoft.com/office/drawing/2014/main" id="{83ED78EE-4580-4C38-BEE6-B5A44825157B}"/>
+                <a16:creationId xmlns:a16="http://schemas.microsoft.com/office/drawing/2014/main" id="{1127F2AC-093F-4B9E-8377-16FB457401C4}"/>
               </a:ext>
             </a:extLst>
           </p:cNvPr>
@@ -22734,7 +22734,7 @@
           <p:nvPr/>
         </p:nvPicPr>
         <p:blipFill>
-          <a:blip xmlns:r="http://schemas.openxmlformats.org/officeDocument/2006/relationships" xmlns:a="http://schemas.openxmlformats.org/drawingml/2006/main" r:embed="Re4772a95e5d94a49"/>
+          <a:blip xmlns:r="http://schemas.openxmlformats.org/officeDocument/2006/relationships" xmlns:a="http://schemas.openxmlformats.org/drawingml/2006/main" r:embed="R4f64fcdfb46b4c44"/>
           <a:stretch xmlns:a="http://schemas.openxmlformats.org/drawingml/2006/main">
             <a:fillRect l="0" t="0" r="0" b="0"/>
           </a:stretch>
@@ -22754,7 +22754,7 @@
           <p:cNvPr id="10" name="Shape 7">
             <a:extLst xmlns:a="http://schemas.openxmlformats.org/drawingml/2006/main">
               <a:ext uri="{FF2B5EF4-FFF2-40B4-BE49-F238E27FC236}">
-                <a16:creationId xmlns:a16="http://schemas.microsoft.com/office/drawing/2014/main" id="{6537A889-94A9-4ACA-8577-71B4AEE50392}"/>
+                <a16:creationId xmlns:a16="http://schemas.microsoft.com/office/drawing/2014/main" id="{15C5C837-BFAC-4C1A-B8E8-EBE8663F45B1}"/>
               </a:ext>
             </a:extLst>
           </p:cNvPr>
@@ -22789,7 +22789,7 @@
           <p:cNvPr id="11" name="Text 8">
             <a:extLst xmlns:a="http://schemas.openxmlformats.org/drawingml/2006/main">
               <a:ext uri="{FF2B5EF4-FFF2-40B4-BE49-F238E27FC236}">
-                <a16:creationId xmlns:a16="http://schemas.microsoft.com/office/drawing/2014/main" id="{0F38DF33-593E-46D2-BC50-603453F65ABC}"/>
+                <a16:creationId xmlns:a16="http://schemas.microsoft.com/office/drawing/2014/main" id="{96F1C67A-ADF4-4A11-9345-0DA6BD1A59FF}"/>
               </a:ext>
             </a:extLst>
           </p:cNvPr>
@@ -22835,7 +22835,7 @@
           <p:cNvPr id="12" name="Shape 9">
             <a:extLst xmlns:a="http://schemas.openxmlformats.org/drawingml/2006/main">
               <a:ext uri="{FF2B5EF4-FFF2-40B4-BE49-F238E27FC236}">
-                <a16:creationId xmlns:a16="http://schemas.microsoft.com/office/drawing/2014/main" id="{A526A3D7-77C2-4606-ADF7-42DF120E87DA}"/>
+                <a16:creationId xmlns:a16="http://schemas.microsoft.com/office/drawing/2014/main" id="{A7A03A47-A352-4ECD-A7C2-50C4870A7099}"/>
               </a:ext>
             </a:extLst>
           </p:cNvPr>
@@ -22870,7 +22870,7 @@
           <p:cNvPr id="13" name="Shape 10">
             <a:extLst xmlns:a="http://schemas.openxmlformats.org/drawingml/2006/main">
               <a:ext uri="{FF2B5EF4-FFF2-40B4-BE49-F238E27FC236}">
-                <a16:creationId xmlns:a16="http://schemas.microsoft.com/office/drawing/2014/main" id="{69D9FE26-BECB-447C-B121-9B0E66FC6001}"/>
+                <a16:creationId xmlns:a16="http://schemas.microsoft.com/office/drawing/2014/main" id="{1E9A8647-399C-4ECF-97A7-56CD68581191}"/>
               </a:ext>
             </a:extLst>
           </p:cNvPr>
@@ -22907,7 +22907,7 @@
           <p:cNvPr id="14" name="Text 11">
             <a:extLst xmlns:a="http://schemas.openxmlformats.org/drawingml/2006/main">
               <a:ext uri="{FF2B5EF4-FFF2-40B4-BE49-F238E27FC236}">
-                <a16:creationId xmlns:a16="http://schemas.microsoft.com/office/drawing/2014/main" id="{220F05F2-F865-4052-84A7-2566D6F7C94B}"/>
+                <a16:creationId xmlns:a16="http://schemas.microsoft.com/office/drawing/2014/main" id="{6F351565-BD08-46F1-954D-39EA0A043F6B}"/>
               </a:ext>
             </a:extLst>
           </p:cNvPr>
@@ -22955,7 +22955,7 @@
           <p:cNvPr id="15" name="Text 12">
             <a:extLst xmlns:a="http://schemas.openxmlformats.org/drawingml/2006/main">
               <a:ext uri="{FF2B5EF4-FFF2-40B4-BE49-F238E27FC236}">
-                <a16:creationId xmlns:a16="http://schemas.microsoft.com/office/drawing/2014/main" id="{B64253DE-7843-4FDF-B282-EF4DA575120C}"/>
+                <a16:creationId xmlns:a16="http://schemas.microsoft.com/office/drawing/2014/main" id="{BC149F28-93AC-4288-90D7-91D94BEF8190}"/>
               </a:ext>
             </a:extLst>
           </p:cNvPr>
@@ -23001,7 +23001,7 @@
           <p:cNvPr id="16" name="Text 13">
             <a:extLst xmlns:a="http://schemas.openxmlformats.org/drawingml/2006/main">
               <a:ext uri="{FF2B5EF4-FFF2-40B4-BE49-F238E27FC236}">
-                <a16:creationId xmlns:a16="http://schemas.microsoft.com/office/drawing/2014/main" id="{0A9A9E57-1726-49EB-AFDA-BB1A09D78CFC}"/>
+                <a16:creationId xmlns:a16="http://schemas.microsoft.com/office/drawing/2014/main" id="{2E74C2A0-AE5B-4A4F-AE4E-D0BE2354D015}"/>
               </a:ext>
             </a:extLst>
           </p:cNvPr>
@@ -23047,7 +23047,7 @@
           <p:cNvPr id="17" name="Text 14">
             <a:extLst xmlns:a="http://schemas.openxmlformats.org/drawingml/2006/main">
               <a:ext uri="{FF2B5EF4-FFF2-40B4-BE49-F238E27FC236}">
-                <a16:creationId xmlns:a16="http://schemas.microsoft.com/office/drawing/2014/main" id="{F60302AB-8688-43E9-843C-A8AE6DE27A4B}"/>
+                <a16:creationId xmlns:a16="http://schemas.microsoft.com/office/drawing/2014/main" id="{258F79B0-85D2-4085-BD60-BBF72F5C537B}"/>
               </a:ext>
             </a:extLst>
           </p:cNvPr>
@@ -23093,7 +23093,7 @@
           <p:cNvPr id="18" name="Text 15">
             <a:extLst xmlns:a="http://schemas.openxmlformats.org/drawingml/2006/main">
               <a:ext uri="{FF2B5EF4-FFF2-40B4-BE49-F238E27FC236}">
-                <a16:creationId xmlns:a16="http://schemas.microsoft.com/office/drawing/2014/main" id="{3661A016-5EE4-44E2-A5FF-F32F4F9C81FF}"/>
+                <a16:creationId xmlns:a16="http://schemas.microsoft.com/office/drawing/2014/main" id="{84497BB6-F1CC-45A3-8D48-C3902E4F578F}"/>
               </a:ext>
             </a:extLst>
           </p:cNvPr>
@@ -23139,7 +23139,7 @@
           <p:cNvPr id="19" name="Text 16">
             <a:extLst xmlns:a="http://schemas.openxmlformats.org/drawingml/2006/main">
               <a:ext uri="{FF2B5EF4-FFF2-40B4-BE49-F238E27FC236}">
-                <a16:creationId xmlns:a16="http://schemas.microsoft.com/office/drawing/2014/main" id="{F0616DBD-8935-4143-915E-358005411CB7}"/>
+                <a16:creationId xmlns:a16="http://schemas.microsoft.com/office/drawing/2014/main" id="{23FF9A1D-1A82-40CA-A9AB-C6EF68B288A2}"/>
               </a:ext>
             </a:extLst>
           </p:cNvPr>
@@ -23185,7 +23185,7 @@
           <p:cNvPr id="20" name="Text 17">
             <a:extLst xmlns:a="http://schemas.openxmlformats.org/drawingml/2006/main">
               <a:ext uri="{FF2B5EF4-FFF2-40B4-BE49-F238E27FC236}">
-                <a16:creationId xmlns:a16="http://schemas.microsoft.com/office/drawing/2014/main" id="{F86864A2-0F0A-45E3-86D3-0967D0A896E8}"/>
+                <a16:creationId xmlns:a16="http://schemas.microsoft.com/office/drawing/2014/main" id="{DB7AF496-5B32-4FB5-AC84-6B229C8B62DB}"/>
               </a:ext>
             </a:extLst>
           </p:cNvPr>
@@ -23233,7 +23233,7 @@
           <p:cNvPr id="21" name="Text 18">
             <a:extLst xmlns:a="http://schemas.openxmlformats.org/drawingml/2006/main">
               <a:ext uri="{FF2B5EF4-FFF2-40B4-BE49-F238E27FC236}">
-                <a16:creationId xmlns:a16="http://schemas.microsoft.com/office/drawing/2014/main" id="{CD350002-F308-40BB-A7C9-CF9E765029E6}"/>
+                <a16:creationId xmlns:a16="http://schemas.microsoft.com/office/drawing/2014/main" id="{E51E8E63-B762-4D7F-81BF-6096DE88B8AC}"/>
               </a:ext>
             </a:extLst>
           </p:cNvPr>
@@ -23270,7 +23270,7 @@
                 <a:ea typeface="Microsoft YaHei"/>
                 <a:cs typeface="Microsoft YaHei"/>
               </a:rPr>
-              <a:t>智能云储 · DOEF | 补充实验与方法说明</a:t>
+              <a:t>智储云控 · DOEF | 补充实验与方法说明</a:t>
             </a:r>
             <a:endParaRPr sz="750"/>
           </a:p>
@@ -23281,7 +23281,7 @@
           <p:cNvPr id="25" name="Slide Number Placeholder 0">
             <a:extLst xmlns:a="http://schemas.openxmlformats.org/drawingml/2006/main">
               <a:ext uri="{FF2B5EF4-FFF2-40B4-BE49-F238E27FC236}">
-                <a16:creationId xmlns:a16="http://schemas.microsoft.com/office/drawing/2014/main" id="{A87419E5-F766-4F2B-A1BE-F005D1FA9BA8}"/>
+                <a16:creationId xmlns:a16="http://schemas.microsoft.com/office/drawing/2014/main" id="{438323F5-8EFC-4A55-B020-E665120A8BA4}"/>
               </a:ext>
             </a:extLst>
           </p:cNvPr>
@@ -23333,7 +23333,7 @@
           <p:cNvPr id="27" name="">
             <a:extLst xmlns:a="http://schemas.openxmlformats.org/drawingml/2006/main">
               <a:ext uri="{FF2B5EF4-FFF2-40B4-BE49-F238E27FC236}">
-                <a16:creationId xmlns:a16="http://schemas.microsoft.com/office/drawing/2014/main" id="{EAD44B14-FD43-4E6B-B786-4D645FB1F8BB}"/>
+                <a16:creationId xmlns:a16="http://schemas.microsoft.com/office/drawing/2014/main" id="{C0F04CE1-34CF-4D0C-AB0E-E2BD96B3F0FF}"/>
               </a:ext>
             </a:extLst>
           </p:cNvPr>
@@ -23392,7 +23392,7 @@
           <p:cNvPr id="28" name="">
             <a:extLst xmlns:a="http://schemas.openxmlformats.org/drawingml/2006/main">
               <a:ext uri="{FF2B5EF4-FFF2-40B4-BE49-F238E27FC236}">
-                <a16:creationId xmlns:a16="http://schemas.microsoft.com/office/drawing/2014/main" id="{C7684C44-FFDF-4E09-88C9-B5294A36AF58}"/>
+                <a16:creationId xmlns:a16="http://schemas.microsoft.com/office/drawing/2014/main" id="{4E9DA88D-4442-47A4-ADE8-BA32C4D047D7}"/>
               </a:ext>
             </a:extLst>
           </p:cNvPr>
@@ -23451,7 +23451,7 @@
           <p:cNvPr id="29" name="">
             <a:extLst xmlns:a="http://schemas.openxmlformats.org/drawingml/2006/main">
               <a:ext uri="{FF2B5EF4-FFF2-40B4-BE49-F238E27FC236}">
-                <a16:creationId xmlns:a16="http://schemas.microsoft.com/office/drawing/2014/main" id="{F2226BC1-4C6D-43BE-B8A8-27E83795271B}"/>
+                <a16:creationId xmlns:a16="http://schemas.microsoft.com/office/drawing/2014/main" id="{AACDA3CC-4192-4DC9-BFE4-BC86D988A389}"/>
               </a:ext>
             </a:extLst>
           </p:cNvPr>
@@ -23510,7 +23510,7 @@
           <p:cNvPr id="30" name="">
             <a:extLst xmlns:a="http://schemas.openxmlformats.org/drawingml/2006/main">
               <a:ext uri="{FF2B5EF4-FFF2-40B4-BE49-F238E27FC236}">
-                <a16:creationId xmlns:a16="http://schemas.microsoft.com/office/drawing/2014/main" id="{7C7694B9-BDC7-400E-83A1-7FF7ADECD3EF}"/>
+                <a16:creationId xmlns:a16="http://schemas.microsoft.com/office/drawing/2014/main" id="{FDC490F3-2E52-4290-8658-1261CDE01A17}"/>
               </a:ext>
             </a:extLst>
           </p:cNvPr>
@@ -23567,7 +23567,7 @@
     </p:spTree>
     <p:extLst>
       <p:ext uri="{BB962C8B-B14F-4D97-AF65-F5344CB8AC3E}">
-        <p14:creationId xmlns:p14="http://schemas.microsoft.com/office/powerpoint/2010/main" val="1446598686"/>
+        <p14:creationId xmlns:p14="http://schemas.microsoft.com/office/powerpoint/2010/main" val="1958154812"/>
       </p:ext>
     </p:extLst>
   </p:cSld>
@@ -23591,7 +23591,7 @@
           <p:cNvPr id="2" name="Text 0">
             <a:extLst xmlns:a="http://schemas.openxmlformats.org/drawingml/2006/main">
               <a:ext uri="{FF2B5EF4-FFF2-40B4-BE49-F238E27FC236}">
-                <a16:creationId xmlns:a16="http://schemas.microsoft.com/office/drawing/2014/main" id="{875C44E7-9B84-4AB1-BE84-AA73791024A6}"/>
+                <a16:creationId xmlns:a16="http://schemas.microsoft.com/office/drawing/2014/main" id="{EAD76BCF-1380-4459-A3DA-1C940F388EB2}"/>
               </a:ext>
             </a:extLst>
           </p:cNvPr>
@@ -23637,7 +23637,7 @@
           <p:cNvPr id="3" name="Text 1">
             <a:extLst xmlns:a="http://schemas.openxmlformats.org/drawingml/2006/main">
               <a:ext uri="{FF2B5EF4-FFF2-40B4-BE49-F238E27FC236}">
-                <a16:creationId xmlns:a16="http://schemas.microsoft.com/office/drawing/2014/main" id="{1276BCF3-3C69-4773-9A8C-DE9E144B2FBC}"/>
+                <a16:creationId xmlns:a16="http://schemas.microsoft.com/office/drawing/2014/main" id="{4821BF9E-C673-41A8-B9F8-60A32657F854}"/>
               </a:ext>
             </a:extLst>
           </p:cNvPr>
@@ -23683,7 +23683,7 @@
           <p:cNvPr id="4" name="Text 2">
             <a:extLst xmlns:a="http://schemas.openxmlformats.org/drawingml/2006/main">
               <a:ext uri="{FF2B5EF4-FFF2-40B4-BE49-F238E27FC236}">
-                <a16:creationId xmlns:a16="http://schemas.microsoft.com/office/drawing/2014/main" id="{6DBDA656-B10D-418A-8F2E-10DA79084BF0}"/>
+                <a16:creationId xmlns:a16="http://schemas.microsoft.com/office/drawing/2014/main" id="{1A2D69FB-CFA9-42BF-A625-28228BCC87F5}"/>
               </a:ext>
             </a:extLst>
           </p:cNvPr>
@@ -23731,7 +23731,7 @@
           <p:cNvPr id="5" name="Text 3">
             <a:extLst xmlns:a="http://schemas.openxmlformats.org/drawingml/2006/main">
               <a:ext uri="{FF2B5EF4-FFF2-40B4-BE49-F238E27FC236}">
-                <a16:creationId xmlns:a16="http://schemas.microsoft.com/office/drawing/2014/main" id="{F07A2C19-9DCB-4901-B20E-E55324A157F8}"/>
+                <a16:creationId xmlns:a16="http://schemas.microsoft.com/office/drawing/2014/main" id="{9D815A10-B990-4078-82EC-27EA3ABF2968}"/>
               </a:ext>
             </a:extLst>
           </p:cNvPr>
@@ -23779,7 +23779,7 @@
           <p:cNvPr id="6" name="Shape 4">
             <a:extLst xmlns:a="http://schemas.openxmlformats.org/drawingml/2006/main">
               <a:ext uri="{FF2B5EF4-FFF2-40B4-BE49-F238E27FC236}">
-                <a16:creationId xmlns:a16="http://schemas.microsoft.com/office/drawing/2014/main" id="{8D92BCC1-9AF3-45CF-85D1-61412565CCC0}"/>
+                <a16:creationId xmlns:a16="http://schemas.microsoft.com/office/drawing/2014/main" id="{92E432F1-8EB4-4317-9DE4-399E3EB0DC5B}"/>
               </a:ext>
             </a:extLst>
           </p:cNvPr>
@@ -23825,7 +23825,7 @@
           <p:nvPr/>
         </p:nvPicPr>
         <p:blipFill>
-          <a:blip xmlns:r="http://schemas.openxmlformats.org/officeDocument/2006/relationships" xmlns:a="http://schemas.openxmlformats.org/drawingml/2006/main" r:embed="R70f8439b5b624b53"/>
+          <a:blip xmlns:r="http://schemas.openxmlformats.org/officeDocument/2006/relationships" xmlns:a="http://schemas.openxmlformats.org/drawingml/2006/main" r:embed="R4a79b6b07a4d4ee6"/>
           <a:stretch xmlns:a="http://schemas.openxmlformats.org/drawingml/2006/main">
             <a:fillRect l="0" t="0" r="0" b="0"/>
           </a:stretch>
@@ -23845,7 +23845,7 @@
           <p:cNvPr id="8" name="Shape 5">
             <a:extLst xmlns:a="http://schemas.openxmlformats.org/drawingml/2006/main">
               <a:ext uri="{FF2B5EF4-FFF2-40B4-BE49-F238E27FC236}">
-                <a16:creationId xmlns:a16="http://schemas.microsoft.com/office/drawing/2014/main" id="{A31A77C4-4BDD-486B-A085-A65B0CB6470C}"/>
+                <a16:creationId xmlns:a16="http://schemas.microsoft.com/office/drawing/2014/main" id="{9D0BBF1F-72D7-4417-BE5A-2A50E1E95FBC}"/>
               </a:ext>
             </a:extLst>
           </p:cNvPr>
@@ -23880,7 +23880,7 @@
           <p:cNvPr id="9" name="Text 6">
             <a:extLst xmlns:a="http://schemas.openxmlformats.org/drawingml/2006/main">
               <a:ext uri="{FF2B5EF4-FFF2-40B4-BE49-F238E27FC236}">
-                <a16:creationId xmlns:a16="http://schemas.microsoft.com/office/drawing/2014/main" id="{972BA7C2-2D2F-4D63-B880-B55E71C06618}"/>
+                <a16:creationId xmlns:a16="http://schemas.microsoft.com/office/drawing/2014/main" id="{82611904-BCD9-45DF-A9B1-26179D695957}"/>
               </a:ext>
             </a:extLst>
           </p:cNvPr>
@@ -23926,7 +23926,7 @@
           <p:cNvPr id="10" name="Text 7">
             <a:extLst xmlns:a="http://schemas.openxmlformats.org/drawingml/2006/main">
               <a:ext uri="{FF2B5EF4-FFF2-40B4-BE49-F238E27FC236}">
-                <a16:creationId xmlns:a16="http://schemas.microsoft.com/office/drawing/2014/main" id="{BA679139-477A-434F-A501-411929FBE309}"/>
+                <a16:creationId xmlns:a16="http://schemas.microsoft.com/office/drawing/2014/main" id="{DBBEF064-86BD-4467-AE19-887C56627317}"/>
               </a:ext>
             </a:extLst>
           </p:cNvPr>
@@ -23972,7 +23972,7 @@
           <p:cNvPr id="11" name="Text 8">
             <a:extLst xmlns:a="http://schemas.openxmlformats.org/drawingml/2006/main">
               <a:ext uri="{FF2B5EF4-FFF2-40B4-BE49-F238E27FC236}">
-                <a16:creationId xmlns:a16="http://schemas.microsoft.com/office/drawing/2014/main" id="{C651F638-5C7F-4A70-91EF-55CC1F712E5F}"/>
+                <a16:creationId xmlns:a16="http://schemas.microsoft.com/office/drawing/2014/main" id="{A99DC7C2-5646-427D-AB48-1107BCA03941}"/>
               </a:ext>
             </a:extLst>
           </p:cNvPr>
@@ -24035,7 +24035,7 @@
           <p:cNvPr id="12" name="Text 9">
             <a:extLst xmlns:a="http://schemas.openxmlformats.org/drawingml/2006/main">
               <a:ext uri="{FF2B5EF4-FFF2-40B4-BE49-F238E27FC236}">
-                <a16:creationId xmlns:a16="http://schemas.microsoft.com/office/drawing/2014/main" id="{10D4A3E1-4A7F-47D3-A658-97A4EC59B698}"/>
+                <a16:creationId xmlns:a16="http://schemas.microsoft.com/office/drawing/2014/main" id="{13438435-7E88-4D72-94F1-F50017EE1A7E}"/>
               </a:ext>
             </a:extLst>
           </p:cNvPr>
@@ -24081,7 +24081,7 @@
           <p:cNvPr id="13" name="Text 10">
             <a:extLst xmlns:a="http://schemas.openxmlformats.org/drawingml/2006/main">
               <a:ext uri="{FF2B5EF4-FFF2-40B4-BE49-F238E27FC236}">
-                <a16:creationId xmlns:a16="http://schemas.microsoft.com/office/drawing/2014/main" id="{FF0CF291-7FED-4431-BAB2-AF57A87B34CB}"/>
+                <a16:creationId xmlns:a16="http://schemas.microsoft.com/office/drawing/2014/main" id="{CF0A1839-54AF-44BA-A9F0-105ED022CBE5}"/>
               </a:ext>
             </a:extLst>
           </p:cNvPr>
@@ -24144,7 +24144,7 @@
           <p:cNvPr id="14" name="Shape 11">
             <a:extLst xmlns:a="http://schemas.openxmlformats.org/drawingml/2006/main">
               <a:ext uri="{FF2B5EF4-FFF2-40B4-BE49-F238E27FC236}">
-                <a16:creationId xmlns:a16="http://schemas.microsoft.com/office/drawing/2014/main" id="{2AADB345-6310-4B75-B9C7-E602D3C923C4}"/>
+                <a16:creationId xmlns:a16="http://schemas.microsoft.com/office/drawing/2014/main" id="{4EC689D6-5206-40A8-8772-25469AF7380B}"/>
               </a:ext>
             </a:extLst>
           </p:cNvPr>
@@ -24175,7 +24175,7 @@
           <p:cNvPr id="15" name="Text 12">
             <a:extLst xmlns:a="http://schemas.openxmlformats.org/drawingml/2006/main">
               <a:ext uri="{FF2B5EF4-FFF2-40B4-BE49-F238E27FC236}">
-                <a16:creationId xmlns:a16="http://schemas.microsoft.com/office/drawing/2014/main" id="{B91E4DD3-74FC-4F1E-A04C-31314E003E99}"/>
+                <a16:creationId xmlns:a16="http://schemas.microsoft.com/office/drawing/2014/main" id="{C5CEAB92-BD3A-41E7-A5D8-9E71ED6067B6}"/>
               </a:ext>
             </a:extLst>
           </p:cNvPr>
@@ -24240,7 +24240,7 @@
           <p:cNvPr id="16" name="Shape 13">
             <a:extLst xmlns:a="http://schemas.openxmlformats.org/drawingml/2006/main">
               <a:ext uri="{FF2B5EF4-FFF2-40B4-BE49-F238E27FC236}">
-                <a16:creationId xmlns:a16="http://schemas.microsoft.com/office/drawing/2014/main" id="{1731D418-4B85-4373-80D3-0EF4FADF7611}"/>
+                <a16:creationId xmlns:a16="http://schemas.microsoft.com/office/drawing/2014/main" id="{055B9A4E-9214-4B72-8CAD-B995D2F6DDCD}"/>
               </a:ext>
             </a:extLst>
           </p:cNvPr>
@@ -24277,7 +24277,7 @@
           <p:cNvPr id="17" name="Text 14">
             <a:extLst xmlns:a="http://schemas.openxmlformats.org/drawingml/2006/main">
               <a:ext uri="{FF2B5EF4-FFF2-40B4-BE49-F238E27FC236}">
-                <a16:creationId xmlns:a16="http://schemas.microsoft.com/office/drawing/2014/main" id="{43F2A13A-F98B-4635-AD97-A51AD6A24867}"/>
+                <a16:creationId xmlns:a16="http://schemas.microsoft.com/office/drawing/2014/main" id="{4BA50B9B-6377-43BC-A23A-2BE0C237252E}"/>
               </a:ext>
             </a:extLst>
           </p:cNvPr>
@@ -24325,7 +24325,7 @@
           <p:cNvPr id="18" name="Text 15">
             <a:extLst xmlns:a="http://schemas.openxmlformats.org/drawingml/2006/main">
               <a:ext uri="{FF2B5EF4-FFF2-40B4-BE49-F238E27FC236}">
-                <a16:creationId xmlns:a16="http://schemas.microsoft.com/office/drawing/2014/main" id="{7C81DCD3-0480-4177-B80A-4A406E0DA3AE}"/>
+                <a16:creationId xmlns:a16="http://schemas.microsoft.com/office/drawing/2014/main" id="{B5A78F2C-852A-43F1-9708-F30B575CC5B7}"/>
               </a:ext>
             </a:extLst>
           </p:cNvPr>
@@ -24373,7 +24373,7 @@
           <p:cNvPr id="19" name="Text 16">
             <a:extLst xmlns:a="http://schemas.openxmlformats.org/drawingml/2006/main">
               <a:ext uri="{FF2B5EF4-FFF2-40B4-BE49-F238E27FC236}">
-                <a16:creationId xmlns:a16="http://schemas.microsoft.com/office/drawing/2014/main" id="{B6F30275-FA79-487E-B55A-F53909A0F9B4}"/>
+                <a16:creationId xmlns:a16="http://schemas.microsoft.com/office/drawing/2014/main" id="{9F040AA5-EDE8-408A-BF13-622F5FFE3FB9}"/>
               </a:ext>
             </a:extLst>
           </p:cNvPr>
@@ -24410,7 +24410,7 @@
                 <a:ea typeface="Microsoft YaHei"/>
                 <a:cs typeface="Microsoft YaHei"/>
               </a:rPr>
-              <a:t>智能云储 · DOEF | 8 栋办公建筑仿真实验</a:t>
+              <a:t>智储云控 · DOEF | 8 栋办公建筑仿真实验</a:t>
             </a:r>
             <a:endParaRPr sz="750"/>
           </a:p>
@@ -24421,7 +24421,7 @@
           <p:cNvPr id="25" name="Slide Number Placeholder 0">
             <a:extLst xmlns:a="http://schemas.openxmlformats.org/drawingml/2006/main">
               <a:ext uri="{FF2B5EF4-FFF2-40B4-BE49-F238E27FC236}">
-                <a16:creationId xmlns:a16="http://schemas.microsoft.com/office/drawing/2014/main" id="{F4BBB0CD-794D-43CF-9688-F4399B0E70A7}"/>
+                <a16:creationId xmlns:a16="http://schemas.microsoft.com/office/drawing/2014/main" id="{892DBF4F-7B00-42C2-9586-E5FFE483AAD1}"/>
               </a:ext>
             </a:extLst>
           </p:cNvPr>
@@ -24471,7 +24471,7 @@
     </p:spTree>
     <p:extLst>
       <p:ext uri="{BB962C8B-B14F-4D97-AF65-F5344CB8AC3E}">
-        <p14:creationId xmlns:p14="http://schemas.microsoft.com/office/powerpoint/2010/main" val="444521079"/>
+        <p14:creationId xmlns:p14="http://schemas.microsoft.com/office/powerpoint/2010/main" val="240551832"/>
       </p:ext>
     </p:extLst>
   </p:cSld>
@@ -24495,7 +24495,7 @@
           <p:cNvPr id="2" name="Text 0">
             <a:extLst xmlns:a="http://schemas.openxmlformats.org/drawingml/2006/main">
               <a:ext uri="{FF2B5EF4-FFF2-40B4-BE49-F238E27FC236}">
-                <a16:creationId xmlns:a16="http://schemas.microsoft.com/office/drawing/2014/main" id="{5BCDF7F6-FD01-4C46-A08C-8A56BFA0BDBC}"/>
+                <a16:creationId xmlns:a16="http://schemas.microsoft.com/office/drawing/2014/main" id="{78CAE75D-5DA4-4AC9-A5D2-E27FDF10913A}"/>
               </a:ext>
             </a:extLst>
           </p:cNvPr>
@@ -24541,7 +24541,7 @@
           <p:cNvPr id="3" name="Text 1">
             <a:extLst xmlns:a="http://schemas.openxmlformats.org/drawingml/2006/main">
               <a:ext uri="{FF2B5EF4-FFF2-40B4-BE49-F238E27FC236}">
-                <a16:creationId xmlns:a16="http://schemas.microsoft.com/office/drawing/2014/main" id="{54E82DFA-B2C1-453F-B725-221A91C800E1}"/>
+                <a16:creationId xmlns:a16="http://schemas.microsoft.com/office/drawing/2014/main" id="{064F6754-EC1A-4F1B-8EEC-47D5324561D9}"/>
               </a:ext>
             </a:extLst>
           </p:cNvPr>
@@ -24587,7 +24587,7 @@
           <p:cNvPr id="4" name="Shape 2">
             <a:extLst xmlns:a="http://schemas.openxmlformats.org/drawingml/2006/main">
               <a:ext uri="{FF2B5EF4-FFF2-40B4-BE49-F238E27FC236}">
-                <a16:creationId xmlns:a16="http://schemas.microsoft.com/office/drawing/2014/main" id="{ECC43CF5-1885-4612-8C87-2544B93855B4}"/>
+                <a16:creationId xmlns:a16="http://schemas.microsoft.com/office/drawing/2014/main" id="{FF9B5D05-170D-40F7-A2F4-204CF9777525}"/>
               </a:ext>
             </a:extLst>
           </p:cNvPr>
@@ -24624,7 +24624,7 @@
           <p:cNvPr id="5" name="Text 3">
             <a:extLst xmlns:a="http://schemas.openxmlformats.org/drawingml/2006/main">
               <a:ext uri="{FF2B5EF4-FFF2-40B4-BE49-F238E27FC236}">
-                <a16:creationId xmlns:a16="http://schemas.microsoft.com/office/drawing/2014/main" id="{EBD52552-9039-4D34-9B45-8DEEBB0C15A5}"/>
+                <a16:creationId xmlns:a16="http://schemas.microsoft.com/office/drawing/2014/main" id="{6CEC5E41-67D8-4CE5-9F54-6C8838BCCA2B}"/>
               </a:ext>
             </a:extLst>
           </p:cNvPr>
@@ -24672,7 +24672,7 @@
           <p:cNvPr id="6" name="Text 4">
             <a:extLst xmlns:a="http://schemas.openxmlformats.org/drawingml/2006/main">
               <a:ext uri="{FF2B5EF4-FFF2-40B4-BE49-F238E27FC236}">
-                <a16:creationId xmlns:a16="http://schemas.microsoft.com/office/drawing/2014/main" id="{2E565009-0BA7-4BA4-8CEE-1E32C67897B3}"/>
+                <a16:creationId xmlns:a16="http://schemas.microsoft.com/office/drawing/2014/main" id="{03976ADB-DB8B-4EE2-8E38-F1C59A4F560A}"/>
               </a:ext>
             </a:extLst>
           </p:cNvPr>
@@ -24720,7 +24720,7 @@
           <p:cNvPr id="7" name="Text 5">
             <a:extLst xmlns:a="http://schemas.openxmlformats.org/drawingml/2006/main">
               <a:ext uri="{FF2B5EF4-FFF2-40B4-BE49-F238E27FC236}">
-                <a16:creationId xmlns:a16="http://schemas.microsoft.com/office/drawing/2014/main" id="{89DAB231-2BBB-4A93-88FE-6BA8126C83C0}"/>
+                <a16:creationId xmlns:a16="http://schemas.microsoft.com/office/drawing/2014/main" id="{CDEF01F2-AE0D-4C42-BB3F-D402F5126F68}"/>
               </a:ext>
             </a:extLst>
           </p:cNvPr>
@@ -24768,7 +24768,7 @@
           <p:cNvPr id="8" name="Shape 6">
             <a:extLst xmlns:a="http://schemas.openxmlformats.org/drawingml/2006/main">
               <a:ext uri="{FF2B5EF4-FFF2-40B4-BE49-F238E27FC236}">
-                <a16:creationId xmlns:a16="http://schemas.microsoft.com/office/drawing/2014/main" id="{09738CE3-5C75-4F46-BF92-CC483AE0880C}"/>
+                <a16:creationId xmlns:a16="http://schemas.microsoft.com/office/drawing/2014/main" id="{AB8A3B3F-72D7-4EAA-B465-81BC6C3D31C2}"/>
               </a:ext>
             </a:extLst>
           </p:cNvPr>
@@ -24814,7 +24814,7 @@
           <p:nvPr/>
         </p:nvPicPr>
         <p:blipFill>
-          <a:blip xmlns:r="http://schemas.openxmlformats.org/officeDocument/2006/relationships" xmlns:a="http://schemas.openxmlformats.org/drawingml/2006/main" r:embed="Rad389d1992e146f7"/>
+          <a:blip xmlns:r="http://schemas.openxmlformats.org/officeDocument/2006/relationships" xmlns:a="http://schemas.openxmlformats.org/drawingml/2006/main" r:embed="Rbc21cb6860d64077"/>
           <a:stretch xmlns:a="http://schemas.openxmlformats.org/drawingml/2006/main">
             <a:fillRect l="0" t="0" r="0" b="0"/>
           </a:stretch>
@@ -24834,7 +24834,7 @@
           <p:cNvPr id="10" name="Shape 7">
             <a:extLst xmlns:a="http://schemas.openxmlformats.org/drawingml/2006/main">
               <a:ext uri="{FF2B5EF4-FFF2-40B4-BE49-F238E27FC236}">
-                <a16:creationId xmlns:a16="http://schemas.microsoft.com/office/drawing/2014/main" id="{202DE25F-24AE-401E-8104-DC714190C5D4}"/>
+                <a16:creationId xmlns:a16="http://schemas.microsoft.com/office/drawing/2014/main" id="{D3DBA26C-5112-451B-8C0B-DCF8A0E1B858}"/>
               </a:ext>
             </a:extLst>
           </p:cNvPr>
@@ -24867,7 +24867,7 @@
           <p:cNvPr id="11" name="Text 8">
             <a:extLst xmlns:a="http://schemas.openxmlformats.org/drawingml/2006/main">
               <a:ext uri="{FF2B5EF4-FFF2-40B4-BE49-F238E27FC236}">
-                <a16:creationId xmlns:a16="http://schemas.microsoft.com/office/drawing/2014/main" id="{E11F5CB2-E0AB-406B-9B16-230D93B74130}"/>
+                <a16:creationId xmlns:a16="http://schemas.microsoft.com/office/drawing/2014/main" id="{4C49D582-72EC-4AE7-A195-891E2DA0A335}"/>
               </a:ext>
             </a:extLst>
           </p:cNvPr>
@@ -24915,7 +24915,7 @@
           <p:cNvPr id="12" name="Shape 9">
             <a:extLst xmlns:a="http://schemas.openxmlformats.org/drawingml/2006/main">
               <a:ext uri="{FF2B5EF4-FFF2-40B4-BE49-F238E27FC236}">
-                <a16:creationId xmlns:a16="http://schemas.microsoft.com/office/drawing/2014/main" id="{BE1F0B9E-5E5C-4908-8AC0-D1A48B1A1820}"/>
+                <a16:creationId xmlns:a16="http://schemas.microsoft.com/office/drawing/2014/main" id="{81B1FE98-6643-4163-A9E4-EC49BA6E9DBB}"/>
               </a:ext>
             </a:extLst>
           </p:cNvPr>
@@ -24948,7 +24948,7 @@
           <p:cNvPr id="13" name="Text 10">
             <a:extLst xmlns:a="http://schemas.openxmlformats.org/drawingml/2006/main">
               <a:ext uri="{FF2B5EF4-FFF2-40B4-BE49-F238E27FC236}">
-                <a16:creationId xmlns:a16="http://schemas.microsoft.com/office/drawing/2014/main" id="{56913BC8-53FA-40B6-9245-7E9293268285}"/>
+                <a16:creationId xmlns:a16="http://schemas.microsoft.com/office/drawing/2014/main" id="{11920C95-140A-466D-87AB-2EAC430AC557}"/>
               </a:ext>
             </a:extLst>
           </p:cNvPr>
@@ -24996,7 +24996,7 @@
           <p:cNvPr id="14" name="Shape 11">
             <a:extLst xmlns:a="http://schemas.openxmlformats.org/drawingml/2006/main">
               <a:ext uri="{FF2B5EF4-FFF2-40B4-BE49-F238E27FC236}">
-                <a16:creationId xmlns:a16="http://schemas.microsoft.com/office/drawing/2014/main" id="{AFC7F1E3-D7A1-49A7-91E3-318277E98320}"/>
+                <a16:creationId xmlns:a16="http://schemas.microsoft.com/office/drawing/2014/main" id="{3E6445AC-5C99-4149-90C8-23C553F04E92}"/>
               </a:ext>
             </a:extLst>
           </p:cNvPr>
@@ -25029,7 +25029,7 @@
           <p:cNvPr id="15" name="Text 12">
             <a:extLst xmlns:a="http://schemas.openxmlformats.org/drawingml/2006/main">
               <a:ext uri="{FF2B5EF4-FFF2-40B4-BE49-F238E27FC236}">
-                <a16:creationId xmlns:a16="http://schemas.microsoft.com/office/drawing/2014/main" id="{F0E495A0-C168-4838-B72E-353963BC29FC}"/>
+                <a16:creationId xmlns:a16="http://schemas.microsoft.com/office/drawing/2014/main" id="{F89B7C3A-9DC9-4400-A00F-B3BB0F3A00F4}"/>
               </a:ext>
             </a:extLst>
           </p:cNvPr>
@@ -25077,7 +25077,7 @@
           <p:cNvPr id="16" name="Shape 13">
             <a:extLst xmlns:a="http://schemas.openxmlformats.org/drawingml/2006/main">
               <a:ext uri="{FF2B5EF4-FFF2-40B4-BE49-F238E27FC236}">
-                <a16:creationId xmlns:a16="http://schemas.microsoft.com/office/drawing/2014/main" id="{831B0BEE-9285-4C0F-B4C9-C996FB2B97C6}"/>
+                <a16:creationId xmlns:a16="http://schemas.microsoft.com/office/drawing/2014/main" id="{1CC9F5B8-EF21-457C-B3DC-29037D239B67}"/>
               </a:ext>
             </a:extLst>
           </p:cNvPr>
@@ -25110,7 +25110,7 @@
           <p:cNvPr id="17" name="Text 14">
             <a:extLst xmlns:a="http://schemas.openxmlformats.org/drawingml/2006/main">
               <a:ext uri="{FF2B5EF4-FFF2-40B4-BE49-F238E27FC236}">
-                <a16:creationId xmlns:a16="http://schemas.microsoft.com/office/drawing/2014/main" id="{6715D560-2181-425D-A234-980CBE7B6235}"/>
+                <a16:creationId xmlns:a16="http://schemas.microsoft.com/office/drawing/2014/main" id="{5B3A3BEF-2B72-4F01-A44C-2463518C9DCD}"/>
               </a:ext>
             </a:extLst>
           </p:cNvPr>
@@ -25156,7 +25156,7 @@
           <p:cNvPr id="18" name="Shape 15">
             <a:extLst xmlns:a="http://schemas.openxmlformats.org/drawingml/2006/main">
               <a:ext uri="{FF2B5EF4-FFF2-40B4-BE49-F238E27FC236}">
-                <a16:creationId xmlns:a16="http://schemas.microsoft.com/office/drawing/2014/main" id="{F54A9C46-2461-437B-B428-FF969CA0629F}"/>
+                <a16:creationId xmlns:a16="http://schemas.microsoft.com/office/drawing/2014/main" id="{39E89591-4878-43F9-8C9A-56C171FFAFEA}"/>
               </a:ext>
             </a:extLst>
           </p:cNvPr>
@@ -25189,7 +25189,7 @@
           <p:cNvPr id="19" name="Text 16">
             <a:extLst xmlns:a="http://schemas.openxmlformats.org/drawingml/2006/main">
               <a:ext uri="{FF2B5EF4-FFF2-40B4-BE49-F238E27FC236}">
-                <a16:creationId xmlns:a16="http://schemas.microsoft.com/office/drawing/2014/main" id="{85261E68-F8A7-45AD-9014-FC3F5A5A2EB1}"/>
+                <a16:creationId xmlns:a16="http://schemas.microsoft.com/office/drawing/2014/main" id="{7E756951-8D5E-4FCF-8CD5-5C4CF8D73306}"/>
               </a:ext>
             </a:extLst>
           </p:cNvPr>
@@ -25235,7 +25235,7 @@
           <p:cNvPr id="20" name="Shape 17">
             <a:extLst xmlns:a="http://schemas.openxmlformats.org/drawingml/2006/main">
               <a:ext uri="{FF2B5EF4-FFF2-40B4-BE49-F238E27FC236}">
-                <a16:creationId xmlns:a16="http://schemas.microsoft.com/office/drawing/2014/main" id="{AF95D05F-1C18-421B-BD35-D8931AC7D600}"/>
+                <a16:creationId xmlns:a16="http://schemas.microsoft.com/office/drawing/2014/main" id="{BBFCC10F-AD38-41E0-ACA5-2041D7049158}"/>
               </a:ext>
             </a:extLst>
           </p:cNvPr>
@@ -25268,7 +25268,7 @@
           <p:cNvPr id="21" name="Text 18">
             <a:extLst xmlns:a="http://schemas.openxmlformats.org/drawingml/2006/main">
               <a:ext uri="{FF2B5EF4-FFF2-40B4-BE49-F238E27FC236}">
-                <a16:creationId xmlns:a16="http://schemas.microsoft.com/office/drawing/2014/main" id="{3084C8D4-5BAB-4855-A939-1CCA3616904E}"/>
+                <a16:creationId xmlns:a16="http://schemas.microsoft.com/office/drawing/2014/main" id="{22318AEB-0559-41B4-B4DE-DA09708DD0AF}"/>
               </a:ext>
             </a:extLst>
           </p:cNvPr>
@@ -25314,7 +25314,7 @@
           <p:cNvPr id="22" name="Shape 19">
             <a:extLst xmlns:a="http://schemas.openxmlformats.org/drawingml/2006/main">
               <a:ext uri="{FF2B5EF4-FFF2-40B4-BE49-F238E27FC236}">
-                <a16:creationId xmlns:a16="http://schemas.microsoft.com/office/drawing/2014/main" id="{6C55FFC3-E46B-4D5E-80F3-04E2C1E12671}"/>
+                <a16:creationId xmlns:a16="http://schemas.microsoft.com/office/drawing/2014/main" id="{A31B17B8-48D5-44DC-883B-7034639BE213}"/>
               </a:ext>
             </a:extLst>
           </p:cNvPr>
@@ -25347,7 +25347,7 @@
           <p:cNvPr id="23" name="Text 20">
             <a:extLst xmlns:a="http://schemas.openxmlformats.org/drawingml/2006/main">
               <a:ext uri="{FF2B5EF4-FFF2-40B4-BE49-F238E27FC236}">
-                <a16:creationId xmlns:a16="http://schemas.microsoft.com/office/drawing/2014/main" id="{BA346C11-467F-4D7E-BAAC-2351A09BE2C4}"/>
+                <a16:creationId xmlns:a16="http://schemas.microsoft.com/office/drawing/2014/main" id="{B25283BA-452F-4E49-B621-0B501DDAB0DD}"/>
               </a:ext>
             </a:extLst>
           </p:cNvPr>
@@ -25393,7 +25393,7 @@
           <p:cNvPr id="24" name="Shape 21">
             <a:extLst xmlns:a="http://schemas.openxmlformats.org/drawingml/2006/main">
               <a:ext uri="{FF2B5EF4-FFF2-40B4-BE49-F238E27FC236}">
-                <a16:creationId xmlns:a16="http://schemas.microsoft.com/office/drawing/2014/main" id="{4DE36093-29DD-4EB6-9DC8-2F09DBBAA977}"/>
+                <a16:creationId xmlns:a16="http://schemas.microsoft.com/office/drawing/2014/main" id="{D2A5F869-58C8-4AC7-9EF5-AA00C0FCFE21}"/>
               </a:ext>
             </a:extLst>
           </p:cNvPr>
@@ -25426,7 +25426,7 @@
           <p:cNvPr id="25" name="Text 22">
             <a:extLst xmlns:a="http://schemas.openxmlformats.org/drawingml/2006/main">
               <a:ext uri="{FF2B5EF4-FFF2-40B4-BE49-F238E27FC236}">
-                <a16:creationId xmlns:a16="http://schemas.microsoft.com/office/drawing/2014/main" id="{8C79D357-81C7-48C6-A666-0183B1DD1E53}"/>
+                <a16:creationId xmlns:a16="http://schemas.microsoft.com/office/drawing/2014/main" id="{7E718086-03E9-4DAD-9AFC-2BFA11475869}"/>
               </a:ext>
             </a:extLst>
           </p:cNvPr>
@@ -25472,7 +25472,7 @@
           <p:cNvPr id="26" name="Shape 23">
             <a:extLst xmlns:a="http://schemas.openxmlformats.org/drawingml/2006/main">
               <a:ext uri="{FF2B5EF4-FFF2-40B4-BE49-F238E27FC236}">
-                <a16:creationId xmlns:a16="http://schemas.microsoft.com/office/drawing/2014/main" id="{837E7DAE-1622-4CF8-B9D4-2B4ABBCB3557}"/>
+                <a16:creationId xmlns:a16="http://schemas.microsoft.com/office/drawing/2014/main" id="{F896EA80-08AF-4D97-889B-F72F47AD6695}"/>
               </a:ext>
             </a:extLst>
           </p:cNvPr>
@@ -25505,7 +25505,7 @@
           <p:cNvPr id="27" name="Text 24">
             <a:extLst xmlns:a="http://schemas.openxmlformats.org/drawingml/2006/main">
               <a:ext uri="{FF2B5EF4-FFF2-40B4-BE49-F238E27FC236}">
-                <a16:creationId xmlns:a16="http://schemas.microsoft.com/office/drawing/2014/main" id="{04D2CE1F-61AB-4537-81A0-54428F5F5775}"/>
+                <a16:creationId xmlns:a16="http://schemas.microsoft.com/office/drawing/2014/main" id="{C16B09D9-F182-46F3-AB78-921F7E2155C9}"/>
               </a:ext>
             </a:extLst>
           </p:cNvPr>
@@ -25551,7 +25551,7 @@
           <p:cNvPr id="28" name="Shape 25">
             <a:extLst xmlns:a="http://schemas.openxmlformats.org/drawingml/2006/main">
               <a:ext uri="{FF2B5EF4-FFF2-40B4-BE49-F238E27FC236}">
-                <a16:creationId xmlns:a16="http://schemas.microsoft.com/office/drawing/2014/main" id="{1F8BCD72-2DEA-4AAC-B734-B7864F82B7DF}"/>
+                <a16:creationId xmlns:a16="http://schemas.microsoft.com/office/drawing/2014/main" id="{727F0C1B-ACAA-4237-A816-F4BE6020BBAD}"/>
               </a:ext>
             </a:extLst>
           </p:cNvPr>
@@ -25584,7 +25584,7 @@
           <p:cNvPr id="29" name="Text 26">
             <a:extLst xmlns:a="http://schemas.openxmlformats.org/drawingml/2006/main">
               <a:ext uri="{FF2B5EF4-FFF2-40B4-BE49-F238E27FC236}">
-                <a16:creationId xmlns:a16="http://schemas.microsoft.com/office/drawing/2014/main" id="{0DB30CF8-521E-44C0-8C19-5BDBE8C1F2A9}"/>
+                <a16:creationId xmlns:a16="http://schemas.microsoft.com/office/drawing/2014/main" id="{B26B97D1-B568-4307-8A30-FA3E7F28B2DB}"/>
               </a:ext>
             </a:extLst>
           </p:cNvPr>
@@ -25630,7 +25630,7 @@
           <p:cNvPr id="30" name="Shape 27">
             <a:extLst xmlns:a="http://schemas.openxmlformats.org/drawingml/2006/main">
               <a:ext uri="{FF2B5EF4-FFF2-40B4-BE49-F238E27FC236}">
-                <a16:creationId xmlns:a16="http://schemas.microsoft.com/office/drawing/2014/main" id="{7240EA9F-C2FA-4085-B3BE-0BF24EB1A164}"/>
+                <a16:creationId xmlns:a16="http://schemas.microsoft.com/office/drawing/2014/main" id="{D3AB5814-BBC4-4687-B221-A6CFA002A9AE}"/>
               </a:ext>
             </a:extLst>
           </p:cNvPr>
@@ -25663,7 +25663,7 @@
           <p:cNvPr id="31" name="Text 28">
             <a:extLst xmlns:a="http://schemas.openxmlformats.org/drawingml/2006/main">
               <a:ext uri="{FF2B5EF4-FFF2-40B4-BE49-F238E27FC236}">
-                <a16:creationId xmlns:a16="http://schemas.microsoft.com/office/drawing/2014/main" id="{8631EBC9-A46F-4134-8FD6-8E87D845666F}"/>
+                <a16:creationId xmlns:a16="http://schemas.microsoft.com/office/drawing/2014/main" id="{24DD2301-0410-4DC6-8972-AFB3535D3CE7}"/>
               </a:ext>
             </a:extLst>
           </p:cNvPr>
@@ -25709,7 +25709,7 @@
           <p:cNvPr id="32" name="Shape 29">
             <a:extLst xmlns:a="http://schemas.openxmlformats.org/drawingml/2006/main">
               <a:ext uri="{FF2B5EF4-FFF2-40B4-BE49-F238E27FC236}">
-                <a16:creationId xmlns:a16="http://schemas.microsoft.com/office/drawing/2014/main" id="{6D03376D-F059-48B5-8777-71EDE8C3B712}"/>
+                <a16:creationId xmlns:a16="http://schemas.microsoft.com/office/drawing/2014/main" id="{3EE14C6A-1C1F-419D-99CF-A2EAA11771BA}"/>
               </a:ext>
             </a:extLst>
           </p:cNvPr>
@@ -25742,7 +25742,7 @@
           <p:cNvPr id="33" name="Text 30">
             <a:extLst xmlns:a="http://schemas.openxmlformats.org/drawingml/2006/main">
               <a:ext uri="{FF2B5EF4-FFF2-40B4-BE49-F238E27FC236}">
-                <a16:creationId xmlns:a16="http://schemas.microsoft.com/office/drawing/2014/main" id="{8DFB5685-CDA1-48C0-9A11-00911C4FD2F0}"/>
+                <a16:creationId xmlns:a16="http://schemas.microsoft.com/office/drawing/2014/main" id="{D47F726F-638E-4F1E-AE7F-3ECAA55EA92F}"/>
               </a:ext>
             </a:extLst>
           </p:cNvPr>
@@ -25788,7 +25788,7 @@
           <p:cNvPr id="34" name="Shape 31">
             <a:extLst xmlns:a="http://schemas.openxmlformats.org/drawingml/2006/main">
               <a:ext uri="{FF2B5EF4-FFF2-40B4-BE49-F238E27FC236}">
-                <a16:creationId xmlns:a16="http://schemas.microsoft.com/office/drawing/2014/main" id="{4DB44715-96A8-401E-93A5-98B3FF5C6358}"/>
+                <a16:creationId xmlns:a16="http://schemas.microsoft.com/office/drawing/2014/main" id="{38271F10-340A-484B-ABF4-9ECC5E827AEF}"/>
               </a:ext>
             </a:extLst>
           </p:cNvPr>
@@ -25821,7 +25821,7 @@
           <p:cNvPr id="35" name="Text 32">
             <a:extLst xmlns:a="http://schemas.openxmlformats.org/drawingml/2006/main">
               <a:ext uri="{FF2B5EF4-FFF2-40B4-BE49-F238E27FC236}">
-                <a16:creationId xmlns:a16="http://schemas.microsoft.com/office/drawing/2014/main" id="{F6474A71-41E0-4E93-B177-AED05CDE4AF2}"/>
+                <a16:creationId xmlns:a16="http://schemas.microsoft.com/office/drawing/2014/main" id="{47BA83B9-3423-4850-8C1E-90D3AB614C8F}"/>
               </a:ext>
             </a:extLst>
           </p:cNvPr>
@@ -25867,7 +25867,7 @@
           <p:cNvPr id="36" name="Shape 33">
             <a:extLst xmlns:a="http://schemas.openxmlformats.org/drawingml/2006/main">
               <a:ext uri="{FF2B5EF4-FFF2-40B4-BE49-F238E27FC236}">
-                <a16:creationId xmlns:a16="http://schemas.microsoft.com/office/drawing/2014/main" id="{9C067AB7-2E84-473F-AB5E-98B6B5392E0C}"/>
+                <a16:creationId xmlns:a16="http://schemas.microsoft.com/office/drawing/2014/main" id="{AD7821D9-72A1-47FA-A408-3E7457D6B9F3}"/>
               </a:ext>
             </a:extLst>
           </p:cNvPr>
@@ -25900,7 +25900,7 @@
           <p:cNvPr id="37" name="Text 34">
             <a:extLst xmlns:a="http://schemas.openxmlformats.org/drawingml/2006/main">
               <a:ext uri="{FF2B5EF4-FFF2-40B4-BE49-F238E27FC236}">
-                <a16:creationId xmlns:a16="http://schemas.microsoft.com/office/drawing/2014/main" id="{4635FDBC-F184-4452-814F-51C51A4F8FD2}"/>
+                <a16:creationId xmlns:a16="http://schemas.microsoft.com/office/drawing/2014/main" id="{A0C8005C-FA3E-41D5-9F9F-765A0F197BEC}"/>
               </a:ext>
             </a:extLst>
           </p:cNvPr>
@@ -25946,7 +25946,7 @@
           <p:cNvPr id="38" name="Shape 35">
             <a:extLst xmlns:a="http://schemas.openxmlformats.org/drawingml/2006/main">
               <a:ext uri="{FF2B5EF4-FFF2-40B4-BE49-F238E27FC236}">
-                <a16:creationId xmlns:a16="http://schemas.microsoft.com/office/drawing/2014/main" id="{1D41194E-A7D5-4940-81FA-49947A1DB524}"/>
+                <a16:creationId xmlns:a16="http://schemas.microsoft.com/office/drawing/2014/main" id="{879DE88B-4625-4C1E-A249-3FEBAEA5131A}"/>
               </a:ext>
             </a:extLst>
           </p:cNvPr>
@@ -25979,7 +25979,7 @@
           <p:cNvPr id="39" name="Text 36">
             <a:extLst xmlns:a="http://schemas.openxmlformats.org/drawingml/2006/main">
               <a:ext uri="{FF2B5EF4-FFF2-40B4-BE49-F238E27FC236}">
-                <a16:creationId xmlns:a16="http://schemas.microsoft.com/office/drawing/2014/main" id="{956DF5A5-9BA9-4F62-9668-391F1CAACC00}"/>
+                <a16:creationId xmlns:a16="http://schemas.microsoft.com/office/drawing/2014/main" id="{08A42FC4-36B1-4942-A78E-249837315E49}"/>
               </a:ext>
             </a:extLst>
           </p:cNvPr>
@@ -26025,7 +26025,7 @@
           <p:cNvPr id="40" name="Shape 37">
             <a:extLst xmlns:a="http://schemas.openxmlformats.org/drawingml/2006/main">
               <a:ext uri="{FF2B5EF4-FFF2-40B4-BE49-F238E27FC236}">
-                <a16:creationId xmlns:a16="http://schemas.microsoft.com/office/drawing/2014/main" id="{71841BCA-F60E-49D3-971B-EF97F46F821C}"/>
+                <a16:creationId xmlns:a16="http://schemas.microsoft.com/office/drawing/2014/main" id="{04867948-ED0D-4299-B921-F47E18855715}"/>
               </a:ext>
             </a:extLst>
           </p:cNvPr>
@@ -26058,7 +26058,7 @@
           <p:cNvPr id="41" name="Text 38">
             <a:extLst xmlns:a="http://schemas.openxmlformats.org/drawingml/2006/main">
               <a:ext uri="{FF2B5EF4-FFF2-40B4-BE49-F238E27FC236}">
-                <a16:creationId xmlns:a16="http://schemas.microsoft.com/office/drawing/2014/main" id="{309A771E-02FE-4801-92CF-F71823249D69}"/>
+                <a16:creationId xmlns:a16="http://schemas.microsoft.com/office/drawing/2014/main" id="{0B17C2AC-BBBB-4F01-A8A4-AD7DA288C53A}"/>
               </a:ext>
             </a:extLst>
           </p:cNvPr>
@@ -26104,7 +26104,7 @@
           <p:cNvPr id="42" name="Shape 39">
             <a:extLst xmlns:a="http://schemas.openxmlformats.org/drawingml/2006/main">
               <a:ext uri="{FF2B5EF4-FFF2-40B4-BE49-F238E27FC236}">
-                <a16:creationId xmlns:a16="http://schemas.microsoft.com/office/drawing/2014/main" id="{486DB832-DC98-41B8-9AA1-7BB301A1A336}"/>
+                <a16:creationId xmlns:a16="http://schemas.microsoft.com/office/drawing/2014/main" id="{13C00ECF-B8CF-44A4-B365-231E78EE60AB}"/>
               </a:ext>
             </a:extLst>
           </p:cNvPr>
@@ -26137,7 +26137,7 @@
           <p:cNvPr id="43" name="Text 40">
             <a:extLst xmlns:a="http://schemas.openxmlformats.org/drawingml/2006/main">
               <a:ext uri="{FF2B5EF4-FFF2-40B4-BE49-F238E27FC236}">
-                <a16:creationId xmlns:a16="http://schemas.microsoft.com/office/drawing/2014/main" id="{1286CEB2-0D54-4807-8611-B52CC3A6264A}"/>
+                <a16:creationId xmlns:a16="http://schemas.microsoft.com/office/drawing/2014/main" id="{E79A6A4C-8796-4C1C-A21B-C38132D1ECE2}"/>
               </a:ext>
             </a:extLst>
           </p:cNvPr>
@@ -26183,7 +26183,7 @@
           <p:cNvPr id="44" name="Shape 41">
             <a:extLst xmlns:a="http://schemas.openxmlformats.org/drawingml/2006/main">
               <a:ext uri="{FF2B5EF4-FFF2-40B4-BE49-F238E27FC236}">
-                <a16:creationId xmlns:a16="http://schemas.microsoft.com/office/drawing/2014/main" id="{13AA0000-7B19-4547-9D83-2CE0A9F946BE}"/>
+                <a16:creationId xmlns:a16="http://schemas.microsoft.com/office/drawing/2014/main" id="{3A2A879A-CB99-47D9-B74F-731F01FE8B9E}"/>
               </a:ext>
             </a:extLst>
           </p:cNvPr>
@@ -26216,7 +26216,7 @@
           <p:cNvPr id="45" name="Text 42">
             <a:extLst xmlns:a="http://schemas.openxmlformats.org/drawingml/2006/main">
               <a:ext uri="{FF2B5EF4-FFF2-40B4-BE49-F238E27FC236}">
-                <a16:creationId xmlns:a16="http://schemas.microsoft.com/office/drawing/2014/main" id="{EE94A2AF-1DA4-45CE-A745-DA907F5AEAD0}"/>
+                <a16:creationId xmlns:a16="http://schemas.microsoft.com/office/drawing/2014/main" id="{126E13B8-C66D-4AE9-B18E-6A3FC19B7726}"/>
               </a:ext>
             </a:extLst>
           </p:cNvPr>
@@ -26262,7 +26262,7 @@
           <p:cNvPr id="46" name="Shape 43">
             <a:extLst xmlns:a="http://schemas.openxmlformats.org/drawingml/2006/main">
               <a:ext uri="{FF2B5EF4-FFF2-40B4-BE49-F238E27FC236}">
-                <a16:creationId xmlns:a16="http://schemas.microsoft.com/office/drawing/2014/main" id="{ED5CC2FC-746F-45F7-A152-21730351B8D2}"/>
+                <a16:creationId xmlns:a16="http://schemas.microsoft.com/office/drawing/2014/main" id="{98C179EF-09C9-4577-A279-A904BFCA58A9}"/>
               </a:ext>
             </a:extLst>
           </p:cNvPr>
@@ -26295,7 +26295,7 @@
           <p:cNvPr id="47" name="Text 44">
             <a:extLst xmlns:a="http://schemas.openxmlformats.org/drawingml/2006/main">
               <a:ext uri="{FF2B5EF4-FFF2-40B4-BE49-F238E27FC236}">
-                <a16:creationId xmlns:a16="http://schemas.microsoft.com/office/drawing/2014/main" id="{EC411D38-725C-4B1C-87BF-348D4563A841}"/>
+                <a16:creationId xmlns:a16="http://schemas.microsoft.com/office/drawing/2014/main" id="{B0B8D687-1F42-4681-A066-F862DDA2DD54}"/>
               </a:ext>
             </a:extLst>
           </p:cNvPr>
@@ -26341,7 +26341,7 @@
           <p:cNvPr id="48" name="Shape 45">
             <a:extLst xmlns:a="http://schemas.openxmlformats.org/drawingml/2006/main">
               <a:ext uri="{FF2B5EF4-FFF2-40B4-BE49-F238E27FC236}">
-                <a16:creationId xmlns:a16="http://schemas.microsoft.com/office/drawing/2014/main" id="{856CB36C-A192-40F5-9061-71A5A6C3F710}"/>
+                <a16:creationId xmlns:a16="http://schemas.microsoft.com/office/drawing/2014/main" id="{609AFC05-19B7-4D56-8DD2-D7E1849D6D3D}"/>
               </a:ext>
             </a:extLst>
           </p:cNvPr>
@@ -26374,7 +26374,7 @@
           <p:cNvPr id="49" name="Text 46">
             <a:extLst xmlns:a="http://schemas.openxmlformats.org/drawingml/2006/main">
               <a:ext uri="{FF2B5EF4-FFF2-40B4-BE49-F238E27FC236}">
-                <a16:creationId xmlns:a16="http://schemas.microsoft.com/office/drawing/2014/main" id="{D5E1DF2E-A7CF-4FC4-BF4F-3D7957DB45F9}"/>
+                <a16:creationId xmlns:a16="http://schemas.microsoft.com/office/drawing/2014/main" id="{1660EE55-7F3D-418D-9832-7641855C02AB}"/>
               </a:ext>
             </a:extLst>
           </p:cNvPr>
@@ -26420,7 +26420,7 @@
           <p:cNvPr id="50" name="Shape 47">
             <a:extLst xmlns:a="http://schemas.openxmlformats.org/drawingml/2006/main">
               <a:ext uri="{FF2B5EF4-FFF2-40B4-BE49-F238E27FC236}">
-                <a16:creationId xmlns:a16="http://schemas.microsoft.com/office/drawing/2014/main" id="{B6F1E0E1-574E-4B8C-A64A-F2D1FA17BBF4}"/>
+                <a16:creationId xmlns:a16="http://schemas.microsoft.com/office/drawing/2014/main" id="{E471A565-6B03-4F11-AA23-E3472F600029}"/>
               </a:ext>
             </a:extLst>
           </p:cNvPr>
@@ -26453,7 +26453,7 @@
           <p:cNvPr id="51" name="Text 48">
             <a:extLst xmlns:a="http://schemas.openxmlformats.org/drawingml/2006/main">
               <a:ext uri="{FF2B5EF4-FFF2-40B4-BE49-F238E27FC236}">
-                <a16:creationId xmlns:a16="http://schemas.microsoft.com/office/drawing/2014/main" id="{7A790378-1A45-422D-9E2A-A149BD584599}"/>
+                <a16:creationId xmlns:a16="http://schemas.microsoft.com/office/drawing/2014/main" id="{E06D57D3-3759-42CF-9441-EFBD4F8F3755}"/>
               </a:ext>
             </a:extLst>
           </p:cNvPr>
@@ -26499,7 +26499,7 @@
           <p:cNvPr id="52" name="Shape 49">
             <a:extLst xmlns:a="http://schemas.openxmlformats.org/drawingml/2006/main">
               <a:ext uri="{FF2B5EF4-FFF2-40B4-BE49-F238E27FC236}">
-                <a16:creationId xmlns:a16="http://schemas.microsoft.com/office/drawing/2014/main" id="{14EEDD05-D65A-4A58-B1F7-AA11A3AE79FD}"/>
+                <a16:creationId xmlns:a16="http://schemas.microsoft.com/office/drawing/2014/main" id="{CA505A4B-769D-4E39-8DDF-008ED01F4605}"/>
               </a:ext>
             </a:extLst>
           </p:cNvPr>
@@ -26532,7 +26532,7 @@
           <p:cNvPr id="53" name="Text 50">
             <a:extLst xmlns:a="http://schemas.openxmlformats.org/drawingml/2006/main">
               <a:ext uri="{FF2B5EF4-FFF2-40B4-BE49-F238E27FC236}">
-                <a16:creationId xmlns:a16="http://schemas.microsoft.com/office/drawing/2014/main" id="{11A3469D-19D6-4DF5-AB5B-660E266C4CDB}"/>
+                <a16:creationId xmlns:a16="http://schemas.microsoft.com/office/drawing/2014/main" id="{BE69FAC9-6CEC-4032-900E-971F1523AE44}"/>
               </a:ext>
             </a:extLst>
           </p:cNvPr>
@@ -26578,7 +26578,7 @@
           <p:cNvPr id="54" name="Shape 51">
             <a:extLst xmlns:a="http://schemas.openxmlformats.org/drawingml/2006/main">
               <a:ext uri="{FF2B5EF4-FFF2-40B4-BE49-F238E27FC236}">
-                <a16:creationId xmlns:a16="http://schemas.microsoft.com/office/drawing/2014/main" id="{CEA7A899-3AC5-49D7-AF50-7F10528236E8}"/>
+                <a16:creationId xmlns:a16="http://schemas.microsoft.com/office/drawing/2014/main" id="{4857920A-3CD6-477E-933D-91D02D214255}"/>
               </a:ext>
             </a:extLst>
           </p:cNvPr>
@@ -26611,7 +26611,7 @@
           <p:cNvPr id="55" name="Text 52">
             <a:extLst xmlns:a="http://schemas.openxmlformats.org/drawingml/2006/main">
               <a:ext uri="{FF2B5EF4-FFF2-40B4-BE49-F238E27FC236}">
-                <a16:creationId xmlns:a16="http://schemas.microsoft.com/office/drawing/2014/main" id="{DB48FCE5-E37A-4E80-8D1C-1B833E6356DE}"/>
+                <a16:creationId xmlns:a16="http://schemas.microsoft.com/office/drawing/2014/main" id="{D52E7061-21BE-4C14-9751-BB16338FEA7E}"/>
               </a:ext>
             </a:extLst>
           </p:cNvPr>
@@ -26657,7 +26657,7 @@
           <p:cNvPr id="56" name="Shape 53">
             <a:extLst xmlns:a="http://schemas.openxmlformats.org/drawingml/2006/main">
               <a:ext uri="{FF2B5EF4-FFF2-40B4-BE49-F238E27FC236}">
-                <a16:creationId xmlns:a16="http://schemas.microsoft.com/office/drawing/2014/main" id="{B80451E5-9FB7-4336-876E-29958F54FDC4}"/>
+                <a16:creationId xmlns:a16="http://schemas.microsoft.com/office/drawing/2014/main" id="{ACEB84A9-A969-456F-AA45-714A170502EA}"/>
               </a:ext>
             </a:extLst>
           </p:cNvPr>
@@ -26690,7 +26690,7 @@
           <p:cNvPr id="57" name="Text 54">
             <a:extLst xmlns:a="http://schemas.openxmlformats.org/drawingml/2006/main">
               <a:ext uri="{FF2B5EF4-FFF2-40B4-BE49-F238E27FC236}">
-                <a16:creationId xmlns:a16="http://schemas.microsoft.com/office/drawing/2014/main" id="{773A6D5D-B275-4018-B546-38720FB70C20}"/>
+                <a16:creationId xmlns:a16="http://schemas.microsoft.com/office/drawing/2014/main" id="{0BA13CC5-53C7-4677-9A22-634C244D8D68}"/>
               </a:ext>
             </a:extLst>
           </p:cNvPr>
@@ -26736,7 +26736,7 @@
           <p:cNvPr id="58" name="Shape 55">
             <a:extLst xmlns:a="http://schemas.openxmlformats.org/drawingml/2006/main">
               <a:ext uri="{FF2B5EF4-FFF2-40B4-BE49-F238E27FC236}">
-                <a16:creationId xmlns:a16="http://schemas.microsoft.com/office/drawing/2014/main" id="{76BE58DF-CF59-412A-891C-A61EB46DC161}"/>
+                <a16:creationId xmlns:a16="http://schemas.microsoft.com/office/drawing/2014/main" id="{228D9A63-796C-4C77-AEE5-3E41E778017A}"/>
               </a:ext>
             </a:extLst>
           </p:cNvPr>
@@ -26769,7 +26769,7 @@
           <p:cNvPr id="59" name="Text 56">
             <a:extLst xmlns:a="http://schemas.openxmlformats.org/drawingml/2006/main">
               <a:ext uri="{FF2B5EF4-FFF2-40B4-BE49-F238E27FC236}">
-                <a16:creationId xmlns:a16="http://schemas.microsoft.com/office/drawing/2014/main" id="{E532A26D-BA33-49E6-960D-0945615F6EC7}"/>
+                <a16:creationId xmlns:a16="http://schemas.microsoft.com/office/drawing/2014/main" id="{5AC83160-D4AB-4C14-9423-11FCAC14C473}"/>
               </a:ext>
             </a:extLst>
           </p:cNvPr>
@@ -26815,7 +26815,7 @@
           <p:cNvPr id="60" name="Shape 57">
             <a:extLst xmlns:a="http://schemas.openxmlformats.org/drawingml/2006/main">
               <a:ext uri="{FF2B5EF4-FFF2-40B4-BE49-F238E27FC236}">
-                <a16:creationId xmlns:a16="http://schemas.microsoft.com/office/drawing/2014/main" id="{C68075DF-EDFE-4A5B-8CF3-9F9888E499A7}"/>
+                <a16:creationId xmlns:a16="http://schemas.microsoft.com/office/drawing/2014/main" id="{786FB2A3-5FC7-4AB4-8F27-65F5718C3E39}"/>
               </a:ext>
             </a:extLst>
           </p:cNvPr>
@@ -26848,7 +26848,7 @@
           <p:cNvPr id="61" name="Text 58">
             <a:extLst xmlns:a="http://schemas.openxmlformats.org/drawingml/2006/main">
               <a:ext uri="{FF2B5EF4-FFF2-40B4-BE49-F238E27FC236}">
-                <a16:creationId xmlns:a16="http://schemas.microsoft.com/office/drawing/2014/main" id="{242A5757-0BFB-4F34-824E-50ECFDF9ACDF}"/>
+                <a16:creationId xmlns:a16="http://schemas.microsoft.com/office/drawing/2014/main" id="{E26EC465-9207-4E28-B7E2-7015429BEEFB}"/>
               </a:ext>
             </a:extLst>
           </p:cNvPr>
@@ -26894,7 +26894,7 @@
           <p:cNvPr id="62" name="Shape 59">
             <a:extLst xmlns:a="http://schemas.openxmlformats.org/drawingml/2006/main">
               <a:ext uri="{FF2B5EF4-FFF2-40B4-BE49-F238E27FC236}">
-                <a16:creationId xmlns:a16="http://schemas.microsoft.com/office/drawing/2014/main" id="{6EB2693A-0DBF-4189-BE6C-F1754553F2C1}"/>
+                <a16:creationId xmlns:a16="http://schemas.microsoft.com/office/drawing/2014/main" id="{02FF4137-127E-4542-A005-D571E36E04B7}"/>
               </a:ext>
             </a:extLst>
           </p:cNvPr>
@@ -26927,7 +26927,7 @@
           <p:cNvPr id="63" name="Text 60">
             <a:extLst xmlns:a="http://schemas.openxmlformats.org/drawingml/2006/main">
               <a:ext uri="{FF2B5EF4-FFF2-40B4-BE49-F238E27FC236}">
-                <a16:creationId xmlns:a16="http://schemas.microsoft.com/office/drawing/2014/main" id="{F6C893B0-EBCF-4BBB-B44F-1554FD44EC3F}"/>
+                <a16:creationId xmlns:a16="http://schemas.microsoft.com/office/drawing/2014/main" id="{3D8EA0EA-73D8-4EB1-8066-D921B78FD352}"/>
               </a:ext>
             </a:extLst>
           </p:cNvPr>
@@ -26973,7 +26973,7 @@
           <p:cNvPr id="64" name="Shape 61">
             <a:extLst xmlns:a="http://schemas.openxmlformats.org/drawingml/2006/main">
               <a:ext uri="{FF2B5EF4-FFF2-40B4-BE49-F238E27FC236}">
-                <a16:creationId xmlns:a16="http://schemas.microsoft.com/office/drawing/2014/main" id="{FDC762F3-5698-4CD5-951C-BDE8F3C7A7A2}"/>
+                <a16:creationId xmlns:a16="http://schemas.microsoft.com/office/drawing/2014/main" id="{99D6355E-D3A9-4E3B-BC1A-A4535F07A8C0}"/>
               </a:ext>
             </a:extLst>
           </p:cNvPr>
@@ -27010,7 +27010,7 @@
           <p:cNvPr id="65" name="Text 62">
             <a:extLst xmlns:a="http://schemas.openxmlformats.org/drawingml/2006/main">
               <a:ext uri="{FF2B5EF4-FFF2-40B4-BE49-F238E27FC236}">
-                <a16:creationId xmlns:a16="http://schemas.microsoft.com/office/drawing/2014/main" id="{9CDB981A-92F4-40D4-9C1C-820945D994BD}"/>
+                <a16:creationId xmlns:a16="http://schemas.microsoft.com/office/drawing/2014/main" id="{15E21171-07CF-44F5-9845-3580B2ABEFA0}"/>
               </a:ext>
             </a:extLst>
           </p:cNvPr>
@@ -27058,7 +27058,7 @@
           <p:cNvPr id="66" name="Text 63">
             <a:extLst xmlns:a="http://schemas.openxmlformats.org/drawingml/2006/main">
               <a:ext uri="{FF2B5EF4-FFF2-40B4-BE49-F238E27FC236}">
-                <a16:creationId xmlns:a16="http://schemas.microsoft.com/office/drawing/2014/main" id="{EC24AC08-FC3A-45B0-8B98-0DE88633AC88}"/>
+                <a16:creationId xmlns:a16="http://schemas.microsoft.com/office/drawing/2014/main" id="{C2DF8F9F-E85F-4DFA-BABE-65D5C3F16873}"/>
               </a:ext>
             </a:extLst>
           </p:cNvPr>
@@ -27106,7 +27106,7 @@
           <p:cNvPr id="67" name="Text 64">
             <a:extLst xmlns:a="http://schemas.openxmlformats.org/drawingml/2006/main">
               <a:ext uri="{FF2B5EF4-FFF2-40B4-BE49-F238E27FC236}">
-                <a16:creationId xmlns:a16="http://schemas.microsoft.com/office/drawing/2014/main" id="{B09A63D4-4F99-4C4B-8BC4-00B08F0004BB}"/>
+                <a16:creationId xmlns:a16="http://schemas.microsoft.com/office/drawing/2014/main" id="{FF67D409-DF05-4015-8006-F2FA1A819B0C}"/>
               </a:ext>
             </a:extLst>
           </p:cNvPr>
@@ -27143,7 +27143,7 @@
                 <a:ea typeface="Microsoft YaHei"/>
                 <a:cs typeface="Microsoft YaHei"/>
               </a:rPr>
-              <a:t>智能云储 · DOEF | 补充实验与方法说明</a:t>
+              <a:t>智储云控 · DOEF | 补充实验与方法说明</a:t>
             </a:r>
             <a:endParaRPr sz="750"/>
           </a:p>
@@ -27154,7 +27154,7 @@
           <p:cNvPr id="69" name="Slide Number Placeholder 0">
             <a:extLst xmlns:a="http://schemas.openxmlformats.org/drawingml/2006/main">
               <a:ext uri="{FF2B5EF4-FFF2-40B4-BE49-F238E27FC236}">
-                <a16:creationId xmlns:a16="http://schemas.microsoft.com/office/drawing/2014/main" id="{AAD6E9C7-A6BA-4A9B-9E05-C901700AB64A}"/>
+                <a16:creationId xmlns:a16="http://schemas.microsoft.com/office/drawing/2014/main" id="{2A09E27E-138B-4C39-B066-AB558D4797BE}"/>
               </a:ext>
             </a:extLst>
           </p:cNvPr>
@@ -27204,7 +27204,7 @@
     </p:spTree>
     <p:extLst>
       <p:ext uri="{BB962C8B-B14F-4D97-AF65-F5344CB8AC3E}">
-        <p14:creationId xmlns:p14="http://schemas.microsoft.com/office/powerpoint/2010/main" val="580854985"/>
+        <p14:creationId xmlns:p14="http://schemas.microsoft.com/office/powerpoint/2010/main" val="400961183"/>
       </p:ext>
     </p:extLst>
   </p:cSld>
@@ -27228,7 +27228,7 @@
           <p:cNvPr id="2" name="Text 0">
             <a:extLst xmlns:a="http://schemas.openxmlformats.org/drawingml/2006/main">
               <a:ext uri="{FF2B5EF4-FFF2-40B4-BE49-F238E27FC236}">
-                <a16:creationId xmlns:a16="http://schemas.microsoft.com/office/drawing/2014/main" id="{4CC9A912-801C-4491-A747-9CE5DAC24154}"/>
+                <a16:creationId xmlns:a16="http://schemas.microsoft.com/office/drawing/2014/main" id="{9D815628-1F7F-412C-B0EB-AA060A7AD57C}"/>
               </a:ext>
             </a:extLst>
           </p:cNvPr>
@@ -27274,7 +27274,7 @@
           <p:cNvPr id="3" name="Text 1">
             <a:extLst xmlns:a="http://schemas.openxmlformats.org/drawingml/2006/main">
               <a:ext uri="{FF2B5EF4-FFF2-40B4-BE49-F238E27FC236}">
-                <a16:creationId xmlns:a16="http://schemas.microsoft.com/office/drawing/2014/main" id="{E5A7FD2B-47F8-4EC2-9A5B-9613FFD9746B}"/>
+                <a16:creationId xmlns:a16="http://schemas.microsoft.com/office/drawing/2014/main" id="{31E0A53B-6BCD-402E-BBCB-B4FD3FECA01B}"/>
               </a:ext>
             </a:extLst>
           </p:cNvPr>
@@ -27320,7 +27320,7 @@
           <p:cNvPr id="4" name="Shape 2">
             <a:extLst xmlns:a="http://schemas.openxmlformats.org/drawingml/2006/main">
               <a:ext uri="{FF2B5EF4-FFF2-40B4-BE49-F238E27FC236}">
-                <a16:creationId xmlns:a16="http://schemas.microsoft.com/office/drawing/2014/main" id="{3BB58B40-2ACB-4B83-99BF-0173A41AF35B}"/>
+                <a16:creationId xmlns:a16="http://schemas.microsoft.com/office/drawing/2014/main" id="{223E1687-CE76-4B81-92EC-27E10BE53F69}"/>
               </a:ext>
             </a:extLst>
           </p:cNvPr>
@@ -27357,7 +27357,7 @@
           <p:cNvPr id="5" name="Text 3">
             <a:extLst xmlns:a="http://schemas.openxmlformats.org/drawingml/2006/main">
               <a:ext uri="{FF2B5EF4-FFF2-40B4-BE49-F238E27FC236}">
-                <a16:creationId xmlns:a16="http://schemas.microsoft.com/office/drawing/2014/main" id="{72C1E1D2-F733-44FD-831F-BBB1136E4067}"/>
+                <a16:creationId xmlns:a16="http://schemas.microsoft.com/office/drawing/2014/main" id="{42CB08C0-E861-4ED6-9071-CD3ECF61BE16}"/>
               </a:ext>
             </a:extLst>
           </p:cNvPr>
@@ -27405,7 +27405,7 @@
           <p:cNvPr id="6" name="Text 4">
             <a:extLst xmlns:a="http://schemas.openxmlformats.org/drawingml/2006/main">
               <a:ext uri="{FF2B5EF4-FFF2-40B4-BE49-F238E27FC236}">
-                <a16:creationId xmlns:a16="http://schemas.microsoft.com/office/drawing/2014/main" id="{38707B27-41AA-4646-A9C8-20118D3ADDD0}"/>
+                <a16:creationId xmlns:a16="http://schemas.microsoft.com/office/drawing/2014/main" id="{2C748F42-DA40-48AE-AD74-14CC8F288977}"/>
               </a:ext>
             </a:extLst>
           </p:cNvPr>
@@ -27453,7 +27453,7 @@
           <p:cNvPr id="7" name="Text 5">
             <a:extLst xmlns:a="http://schemas.openxmlformats.org/drawingml/2006/main">
               <a:ext uri="{FF2B5EF4-FFF2-40B4-BE49-F238E27FC236}">
-                <a16:creationId xmlns:a16="http://schemas.microsoft.com/office/drawing/2014/main" id="{AACA7C25-ABC0-4006-AC0E-3E3D21E09ECE}"/>
+                <a16:creationId xmlns:a16="http://schemas.microsoft.com/office/drawing/2014/main" id="{2A5B3430-AA89-483A-9B64-9B81222CEDA7}"/>
               </a:ext>
             </a:extLst>
           </p:cNvPr>
@@ -27501,7 +27501,7 @@
           <p:cNvPr id="8" name="Shape 6">
             <a:extLst xmlns:a="http://schemas.openxmlformats.org/drawingml/2006/main">
               <a:ext uri="{FF2B5EF4-FFF2-40B4-BE49-F238E27FC236}">
-                <a16:creationId xmlns:a16="http://schemas.microsoft.com/office/drawing/2014/main" id="{EBD42D65-807B-4186-B799-A24D84124D38}"/>
+                <a16:creationId xmlns:a16="http://schemas.microsoft.com/office/drawing/2014/main" id="{F5DD19C9-D9FC-4ED4-AD92-A47124541875}"/>
               </a:ext>
             </a:extLst>
           </p:cNvPr>
@@ -27543,7 +27543,7 @@
           <p:cNvPr id="9" name="Shape 7">
             <a:extLst xmlns:a="http://schemas.openxmlformats.org/drawingml/2006/main">
               <a:ext uri="{FF2B5EF4-FFF2-40B4-BE49-F238E27FC236}">
-                <a16:creationId xmlns:a16="http://schemas.microsoft.com/office/drawing/2014/main" id="{8DB4C97F-4506-43C7-A8A7-8B213F21CB8A}"/>
+                <a16:creationId xmlns:a16="http://schemas.microsoft.com/office/drawing/2014/main" id="{1423E438-4B7B-4337-AF86-B418C4374C57}"/>
               </a:ext>
             </a:extLst>
           </p:cNvPr>
@@ -27574,7 +27574,7 @@
           <p:cNvPr id="10" name="Shape 8">
             <a:extLst xmlns:a="http://schemas.openxmlformats.org/drawingml/2006/main">
               <a:ext uri="{FF2B5EF4-FFF2-40B4-BE49-F238E27FC236}">
-                <a16:creationId xmlns:a16="http://schemas.microsoft.com/office/drawing/2014/main" id="{5B8456E2-12A5-4C40-B9B3-3008C2553E6A}"/>
+                <a16:creationId xmlns:a16="http://schemas.microsoft.com/office/drawing/2014/main" id="{F5B02A6A-CDC5-4254-BF25-E0E648D13CDD}"/>
               </a:ext>
             </a:extLst>
           </p:cNvPr>
@@ -27605,7 +27605,7 @@
           <p:cNvPr id="11" name="Text 9">
             <a:extLst xmlns:a="http://schemas.openxmlformats.org/drawingml/2006/main">
               <a:ext uri="{FF2B5EF4-FFF2-40B4-BE49-F238E27FC236}">
-                <a16:creationId xmlns:a16="http://schemas.microsoft.com/office/drawing/2014/main" id="{FB55B6FD-8FFA-4D31-B913-6EAC56B68D1A}"/>
+                <a16:creationId xmlns:a16="http://schemas.microsoft.com/office/drawing/2014/main" id="{61F98B95-4F48-4C20-8244-62D12CCE9D3C}"/>
               </a:ext>
             </a:extLst>
           </p:cNvPr>
@@ -27651,7 +27651,7 @@
           <p:cNvPr id="12" name="Shape 10">
             <a:extLst xmlns:a="http://schemas.openxmlformats.org/drawingml/2006/main">
               <a:ext uri="{FF2B5EF4-FFF2-40B4-BE49-F238E27FC236}">
-                <a16:creationId xmlns:a16="http://schemas.microsoft.com/office/drawing/2014/main" id="{1F84F5F2-0D7D-41A6-9F27-048ED026D940}"/>
+                <a16:creationId xmlns:a16="http://schemas.microsoft.com/office/drawing/2014/main" id="{1001C7C7-8C60-4FD3-BF5E-CEE7C9680803}"/>
               </a:ext>
             </a:extLst>
           </p:cNvPr>
@@ -27684,7 +27684,7 @@
           <p:cNvPr id="13" name="Shape 11">
             <a:extLst xmlns:a="http://schemas.openxmlformats.org/drawingml/2006/main">
               <a:ext uri="{FF2B5EF4-FFF2-40B4-BE49-F238E27FC236}">
-                <a16:creationId xmlns:a16="http://schemas.microsoft.com/office/drawing/2014/main" id="{EEE6B32F-72F6-4FCF-A0E0-0568AF7F70BF}"/>
+                <a16:creationId xmlns:a16="http://schemas.microsoft.com/office/drawing/2014/main" id="{ECC992A6-403A-4982-BAD2-6BB72CCFA08E}"/>
               </a:ext>
             </a:extLst>
           </p:cNvPr>
@@ -27717,7 +27717,7 @@
           <p:cNvPr id="14" name="Text 12">
             <a:extLst xmlns:a="http://schemas.openxmlformats.org/drawingml/2006/main">
               <a:ext uri="{FF2B5EF4-FFF2-40B4-BE49-F238E27FC236}">
-                <a16:creationId xmlns:a16="http://schemas.microsoft.com/office/drawing/2014/main" id="{4EB56784-2AB0-4E85-8F1D-7D3EC06776A4}"/>
+                <a16:creationId xmlns:a16="http://schemas.microsoft.com/office/drawing/2014/main" id="{9C1235AE-DC1D-457F-8DFF-E0E3F1DC2E3C}"/>
               </a:ext>
             </a:extLst>
           </p:cNvPr>
@@ -27763,7 +27763,7 @@
           <p:cNvPr id="15" name="Text 13">
             <a:extLst xmlns:a="http://schemas.openxmlformats.org/drawingml/2006/main">
               <a:ext uri="{FF2B5EF4-FFF2-40B4-BE49-F238E27FC236}">
-                <a16:creationId xmlns:a16="http://schemas.microsoft.com/office/drawing/2014/main" id="{38C60398-3373-489E-B6E2-C5337DB939D8}"/>
+                <a16:creationId xmlns:a16="http://schemas.microsoft.com/office/drawing/2014/main" id="{617CBFA8-5575-4194-9909-0F6492DB497F}"/>
               </a:ext>
             </a:extLst>
           </p:cNvPr>
@@ -27809,7 +27809,7 @@
           <p:cNvPr id="16" name="Text 14">
             <a:extLst xmlns:a="http://schemas.openxmlformats.org/drawingml/2006/main">
               <a:ext uri="{FF2B5EF4-FFF2-40B4-BE49-F238E27FC236}">
-                <a16:creationId xmlns:a16="http://schemas.microsoft.com/office/drawing/2014/main" id="{A14ABF80-717C-48EB-90EA-77D9A9649EB4}"/>
+                <a16:creationId xmlns:a16="http://schemas.microsoft.com/office/drawing/2014/main" id="{50465950-4423-4890-BD60-13AF39A73881}"/>
               </a:ext>
             </a:extLst>
           </p:cNvPr>
@@ -27855,7 +27855,7 @@
           <p:cNvPr id="17" name="Shape 15">
             <a:extLst xmlns:a="http://schemas.openxmlformats.org/drawingml/2006/main">
               <a:ext uri="{FF2B5EF4-FFF2-40B4-BE49-F238E27FC236}">
-                <a16:creationId xmlns:a16="http://schemas.microsoft.com/office/drawing/2014/main" id="{E755B063-52F9-4DE0-8B7D-362570D891DE}"/>
+                <a16:creationId xmlns:a16="http://schemas.microsoft.com/office/drawing/2014/main" id="{441570D3-BA70-409E-980D-5263D8498FEE}"/>
               </a:ext>
             </a:extLst>
           </p:cNvPr>
@@ -27890,7 +27890,7 @@
           <p:cNvPr id="18" name="Text 16">
             <a:extLst xmlns:a="http://schemas.openxmlformats.org/drawingml/2006/main">
               <a:ext uri="{FF2B5EF4-FFF2-40B4-BE49-F238E27FC236}">
-                <a16:creationId xmlns:a16="http://schemas.microsoft.com/office/drawing/2014/main" id="{6D5011C7-76AF-4AD0-A997-47203129E582}"/>
+                <a16:creationId xmlns:a16="http://schemas.microsoft.com/office/drawing/2014/main" id="{024394A5-BDCC-4FA8-A63C-5EC4E18251BB}"/>
               </a:ext>
             </a:extLst>
           </p:cNvPr>
@@ -27938,7 +27938,7 @@
           <p:cNvPr id="19" name="Text 17">
             <a:extLst xmlns:a="http://schemas.openxmlformats.org/drawingml/2006/main">
               <a:ext uri="{FF2B5EF4-FFF2-40B4-BE49-F238E27FC236}">
-                <a16:creationId xmlns:a16="http://schemas.microsoft.com/office/drawing/2014/main" id="{D37E5DAD-57A5-4D2A-B519-F375BD3E6203}"/>
+                <a16:creationId xmlns:a16="http://schemas.microsoft.com/office/drawing/2014/main" id="{EA0AB35C-C5BF-4737-BABC-2BAE532024BD}"/>
               </a:ext>
             </a:extLst>
           </p:cNvPr>
@@ -27986,7 +27986,7 @@
           <p:cNvPr id="20" name="Text 18">
             <a:extLst xmlns:a="http://schemas.openxmlformats.org/drawingml/2006/main">
               <a:ext uri="{FF2B5EF4-FFF2-40B4-BE49-F238E27FC236}">
-                <a16:creationId xmlns:a16="http://schemas.microsoft.com/office/drawing/2014/main" id="{F4A36588-0DAF-43F7-8013-8BF80C334FB1}"/>
+                <a16:creationId xmlns:a16="http://schemas.microsoft.com/office/drawing/2014/main" id="{EF5E39FD-5FE2-4F20-B685-1C39FC7DAC49}"/>
               </a:ext>
             </a:extLst>
           </p:cNvPr>
@@ -28034,7 +28034,7 @@
           <p:cNvPr id="21" name="Text 19">
             <a:extLst xmlns:a="http://schemas.openxmlformats.org/drawingml/2006/main">
               <a:ext uri="{FF2B5EF4-FFF2-40B4-BE49-F238E27FC236}">
-                <a16:creationId xmlns:a16="http://schemas.microsoft.com/office/drawing/2014/main" id="{23F089C0-B262-496D-BF03-30919F5DF718}"/>
+                <a16:creationId xmlns:a16="http://schemas.microsoft.com/office/drawing/2014/main" id="{32FD9EA4-85C6-4AC4-89F4-E28DA8310D52}"/>
               </a:ext>
             </a:extLst>
           </p:cNvPr>
@@ -28082,7 +28082,7 @@
           <p:cNvPr id="22" name="Text 20">
             <a:extLst xmlns:a="http://schemas.openxmlformats.org/drawingml/2006/main">
               <a:ext uri="{FF2B5EF4-FFF2-40B4-BE49-F238E27FC236}">
-                <a16:creationId xmlns:a16="http://schemas.microsoft.com/office/drawing/2014/main" id="{36A5AC47-6B00-4591-9F20-A94D942AF78E}"/>
+                <a16:creationId xmlns:a16="http://schemas.microsoft.com/office/drawing/2014/main" id="{FA59E1FB-51D3-459E-A0D0-325249412473}"/>
               </a:ext>
             </a:extLst>
           </p:cNvPr>
@@ -28128,7 +28128,7 @@
           <p:cNvPr id="23" name="Text 21">
             <a:extLst xmlns:a="http://schemas.openxmlformats.org/drawingml/2006/main">
               <a:ext uri="{FF2B5EF4-FFF2-40B4-BE49-F238E27FC236}">
-                <a16:creationId xmlns:a16="http://schemas.microsoft.com/office/drawing/2014/main" id="{B4529EC7-4ED7-4146-B1FF-17E9E333F7A4}"/>
+                <a16:creationId xmlns:a16="http://schemas.microsoft.com/office/drawing/2014/main" id="{A42BD61C-BD4D-4231-BCC4-FFD3DB0D5816}"/>
               </a:ext>
             </a:extLst>
           </p:cNvPr>
@@ -28174,7 +28174,7 @@
           <p:cNvPr id="24" name="Shape 22">
             <a:extLst xmlns:a="http://schemas.openxmlformats.org/drawingml/2006/main">
               <a:ext uri="{FF2B5EF4-FFF2-40B4-BE49-F238E27FC236}">
-                <a16:creationId xmlns:a16="http://schemas.microsoft.com/office/drawing/2014/main" id="{3AD1F3EA-0B60-4031-A232-8C6DA02ECC87}"/>
+                <a16:creationId xmlns:a16="http://schemas.microsoft.com/office/drawing/2014/main" id="{58D19461-67D9-402E-B934-6ACEE26F01C9}"/>
               </a:ext>
             </a:extLst>
           </p:cNvPr>
@@ -28211,7 +28211,7 @@
           <p:cNvPr id="25" name="Text 23">
             <a:extLst xmlns:a="http://schemas.openxmlformats.org/drawingml/2006/main">
               <a:ext uri="{FF2B5EF4-FFF2-40B4-BE49-F238E27FC236}">
-                <a16:creationId xmlns:a16="http://schemas.microsoft.com/office/drawing/2014/main" id="{B3176129-7BCB-4196-969A-43C863E7BC6E}"/>
+                <a16:creationId xmlns:a16="http://schemas.microsoft.com/office/drawing/2014/main" id="{A33318ED-E6F4-4B14-8E43-0A933A8AA23C}"/>
               </a:ext>
             </a:extLst>
           </p:cNvPr>
@@ -28259,7 +28259,7 @@
           <p:cNvPr id="26" name="Text 24">
             <a:extLst xmlns:a="http://schemas.openxmlformats.org/drawingml/2006/main">
               <a:ext uri="{FF2B5EF4-FFF2-40B4-BE49-F238E27FC236}">
-                <a16:creationId xmlns:a16="http://schemas.microsoft.com/office/drawing/2014/main" id="{8C3781A7-34B6-45DC-A641-F42FD607226E}"/>
+                <a16:creationId xmlns:a16="http://schemas.microsoft.com/office/drawing/2014/main" id="{34B5BE5E-9C2F-4C2C-9C1B-C254500F031A}"/>
               </a:ext>
             </a:extLst>
           </p:cNvPr>
@@ -28307,7 +28307,7 @@
           <p:cNvPr id="27" name="Text 25">
             <a:extLst xmlns:a="http://schemas.openxmlformats.org/drawingml/2006/main">
               <a:ext uri="{FF2B5EF4-FFF2-40B4-BE49-F238E27FC236}">
-                <a16:creationId xmlns:a16="http://schemas.microsoft.com/office/drawing/2014/main" id="{123743E0-876C-43CE-AC37-36C692B4A1AE}"/>
+                <a16:creationId xmlns:a16="http://schemas.microsoft.com/office/drawing/2014/main" id="{B1BA0B1C-CF1F-4855-A1A7-7BA1A743ACBF}"/>
               </a:ext>
             </a:extLst>
           </p:cNvPr>
@@ -28344,7 +28344,7 @@
                 <a:ea typeface="Microsoft YaHei"/>
                 <a:cs typeface="Microsoft YaHei"/>
               </a:rPr>
-              <a:t>智能云储 · DOEF | 补充实验与方法说明</a:t>
+              <a:t>智储云控 · DOEF | 补充实验与方法说明</a:t>
             </a:r>
             <a:endParaRPr sz="750"/>
           </a:p>
@@ -28355,7 +28355,7 @@
           <p:cNvPr id="28" name="Slide Number Placeholder 0">
             <a:extLst xmlns:a="http://schemas.openxmlformats.org/drawingml/2006/main">
               <a:ext uri="{FF2B5EF4-FFF2-40B4-BE49-F238E27FC236}">
-                <a16:creationId xmlns:a16="http://schemas.microsoft.com/office/drawing/2014/main" id="{E36CB5CD-5423-4299-8C1E-929636635CB0}"/>
+                <a16:creationId xmlns:a16="http://schemas.microsoft.com/office/drawing/2014/main" id="{F56C4AB6-808A-4A64-86F3-BE3CB93D89DE}"/>
               </a:ext>
             </a:extLst>
           </p:cNvPr>
@@ -28405,7 +28405,7 @@
     </p:spTree>
     <p:extLst>
       <p:ext uri="{BB962C8B-B14F-4D97-AF65-F5344CB8AC3E}">
-        <p14:creationId xmlns:p14="http://schemas.microsoft.com/office/powerpoint/2010/main" val="220484850"/>
+        <p14:creationId xmlns:p14="http://schemas.microsoft.com/office/powerpoint/2010/main" val="1881868838"/>
       </p:ext>
     </p:extLst>
   </p:cSld>
@@ -28429,7 +28429,7 @@
           <p:cNvPr id="2" name="Text 0">
             <a:extLst xmlns:a="http://schemas.openxmlformats.org/drawingml/2006/main">
               <a:ext uri="{FF2B5EF4-FFF2-40B4-BE49-F238E27FC236}">
-                <a16:creationId xmlns:a16="http://schemas.microsoft.com/office/drawing/2014/main" id="{198F3F46-4EE8-485F-B109-CF7B8DB28F73}"/>
+                <a16:creationId xmlns:a16="http://schemas.microsoft.com/office/drawing/2014/main" id="{9B1E5CCD-8DC8-4AA5-83FF-F9CA7C07D4C0}"/>
               </a:ext>
             </a:extLst>
           </p:cNvPr>
@@ -28475,7 +28475,7 @@
           <p:cNvPr id="3" name="Text 1">
             <a:extLst xmlns:a="http://schemas.openxmlformats.org/drawingml/2006/main">
               <a:ext uri="{FF2B5EF4-FFF2-40B4-BE49-F238E27FC236}">
-                <a16:creationId xmlns:a16="http://schemas.microsoft.com/office/drawing/2014/main" id="{95C17DCB-2F01-4DF9-8234-752AA04806AA}"/>
+                <a16:creationId xmlns:a16="http://schemas.microsoft.com/office/drawing/2014/main" id="{826B3D7A-C18F-4176-9499-289A4AB0F1D0}"/>
               </a:ext>
             </a:extLst>
           </p:cNvPr>
@@ -28521,7 +28521,7 @@
           <p:cNvPr id="4" name="Shape 2">
             <a:extLst xmlns:a="http://schemas.openxmlformats.org/drawingml/2006/main">
               <a:ext uri="{FF2B5EF4-FFF2-40B4-BE49-F238E27FC236}">
-                <a16:creationId xmlns:a16="http://schemas.microsoft.com/office/drawing/2014/main" id="{21173191-E41C-433B-812B-18A2F39467FF}"/>
+                <a16:creationId xmlns:a16="http://schemas.microsoft.com/office/drawing/2014/main" id="{110DF975-7D9F-486B-ACBF-D368E91F2CF3}"/>
               </a:ext>
             </a:extLst>
           </p:cNvPr>
@@ -28558,7 +28558,7 @@
           <p:cNvPr id="5" name="Text 3">
             <a:extLst xmlns:a="http://schemas.openxmlformats.org/drawingml/2006/main">
               <a:ext uri="{FF2B5EF4-FFF2-40B4-BE49-F238E27FC236}">
-                <a16:creationId xmlns:a16="http://schemas.microsoft.com/office/drawing/2014/main" id="{DDD19DD7-6BD7-4F2E-BE1F-C7BC109A829F}"/>
+                <a16:creationId xmlns:a16="http://schemas.microsoft.com/office/drawing/2014/main" id="{0A71A080-4088-4562-8CF7-288ADAC3E7DE}"/>
               </a:ext>
             </a:extLst>
           </p:cNvPr>
@@ -28606,7 +28606,7 @@
           <p:cNvPr id="6" name="Text 4">
             <a:extLst xmlns:a="http://schemas.openxmlformats.org/drawingml/2006/main">
               <a:ext uri="{FF2B5EF4-FFF2-40B4-BE49-F238E27FC236}">
-                <a16:creationId xmlns:a16="http://schemas.microsoft.com/office/drawing/2014/main" id="{78AC4997-C5F9-4481-8493-2C92CA008AD1}"/>
+                <a16:creationId xmlns:a16="http://schemas.microsoft.com/office/drawing/2014/main" id="{554082DD-7927-4F4B-8ECA-DE7467174D79}"/>
               </a:ext>
             </a:extLst>
           </p:cNvPr>
@@ -28654,7 +28654,7 @@
           <p:cNvPr id="7" name="Text 5">
             <a:extLst xmlns:a="http://schemas.openxmlformats.org/drawingml/2006/main">
               <a:ext uri="{FF2B5EF4-FFF2-40B4-BE49-F238E27FC236}">
-                <a16:creationId xmlns:a16="http://schemas.microsoft.com/office/drawing/2014/main" id="{46C8141D-5882-4DBB-A5F2-224991E27EB7}"/>
+                <a16:creationId xmlns:a16="http://schemas.microsoft.com/office/drawing/2014/main" id="{F9CBF3A4-41EE-4209-B149-D310CB8750EC}"/>
               </a:ext>
             </a:extLst>
           </p:cNvPr>
@@ -28702,7 +28702,7 @@
           <p:cNvPr id="8" name="Shape 6">
             <a:extLst xmlns:a="http://schemas.openxmlformats.org/drawingml/2006/main">
               <a:ext uri="{FF2B5EF4-FFF2-40B4-BE49-F238E27FC236}">
-                <a16:creationId xmlns:a16="http://schemas.microsoft.com/office/drawing/2014/main" id="{246362AC-6465-48B4-B980-7660CA26396D}"/>
+                <a16:creationId xmlns:a16="http://schemas.microsoft.com/office/drawing/2014/main" id="{C5942B9C-4AEE-4872-A94B-237F843A0E66}"/>
               </a:ext>
             </a:extLst>
           </p:cNvPr>
@@ -28737,7 +28737,7 @@
           <p:cNvPr id="9" name="Text 7">
             <a:extLst xmlns:a="http://schemas.openxmlformats.org/drawingml/2006/main">
               <a:ext uri="{FF2B5EF4-FFF2-40B4-BE49-F238E27FC236}">
-                <a16:creationId xmlns:a16="http://schemas.microsoft.com/office/drawing/2014/main" id="{C94EE043-1D49-4CD1-8420-0EBC040C723C}"/>
+                <a16:creationId xmlns:a16="http://schemas.microsoft.com/office/drawing/2014/main" id="{C6FC1C71-BDDF-4989-8EBB-7FBC8BCF2144}"/>
               </a:ext>
             </a:extLst>
           </p:cNvPr>
@@ -28785,7 +28785,7 @@
           <p:cNvPr id="10" name="Text 8">
             <a:extLst xmlns:a="http://schemas.openxmlformats.org/drawingml/2006/main">
               <a:ext uri="{FF2B5EF4-FFF2-40B4-BE49-F238E27FC236}">
-                <a16:creationId xmlns:a16="http://schemas.microsoft.com/office/drawing/2014/main" id="{CCFF2844-7253-4458-B279-4060C42FAD03}"/>
+                <a16:creationId xmlns:a16="http://schemas.microsoft.com/office/drawing/2014/main" id="{5F3D2C44-737A-4FE9-BDFA-240E80C52864}"/>
               </a:ext>
             </a:extLst>
           </p:cNvPr>
@@ -28831,7 +28831,7 @@
           <p:cNvPr id="11" name="Text 9">
             <a:extLst xmlns:a="http://schemas.openxmlformats.org/drawingml/2006/main">
               <a:ext uri="{FF2B5EF4-FFF2-40B4-BE49-F238E27FC236}">
-                <a16:creationId xmlns:a16="http://schemas.microsoft.com/office/drawing/2014/main" id="{1C485731-89BC-4EB4-9AF6-9C031FB77909}"/>
+                <a16:creationId xmlns:a16="http://schemas.microsoft.com/office/drawing/2014/main" id="{31203EC1-7CDA-4DA7-81FB-56FF2A1F811F}"/>
               </a:ext>
             </a:extLst>
           </p:cNvPr>
@@ -28894,7 +28894,7 @@
           <p:cNvPr id="12" name="Shape 10">
             <a:extLst xmlns:a="http://schemas.openxmlformats.org/drawingml/2006/main">
               <a:ext uri="{FF2B5EF4-FFF2-40B4-BE49-F238E27FC236}">
-                <a16:creationId xmlns:a16="http://schemas.microsoft.com/office/drawing/2014/main" id="{E7F1C1F3-92DB-4AB6-90F5-62396AAE2310}"/>
+                <a16:creationId xmlns:a16="http://schemas.microsoft.com/office/drawing/2014/main" id="{ED0002AB-F30A-419B-A000-9D94420B1F88}"/>
               </a:ext>
             </a:extLst>
           </p:cNvPr>
@@ -28931,7 +28931,7 @@
           <p:cNvPr id="13" name="Text 11">
             <a:extLst xmlns:a="http://schemas.openxmlformats.org/drawingml/2006/main">
               <a:ext uri="{FF2B5EF4-FFF2-40B4-BE49-F238E27FC236}">
-                <a16:creationId xmlns:a16="http://schemas.microsoft.com/office/drawing/2014/main" id="{EAD2FB62-C3C4-40AE-8F3C-794531575BC9}"/>
+                <a16:creationId xmlns:a16="http://schemas.microsoft.com/office/drawing/2014/main" id="{4450DB3E-A23B-4E09-A5E5-CC054BE82095}"/>
               </a:ext>
             </a:extLst>
           </p:cNvPr>
@@ -28979,7 +28979,7 @@
           <p:cNvPr id="14" name="Shape 12">
             <a:extLst xmlns:a="http://schemas.openxmlformats.org/drawingml/2006/main">
               <a:ext uri="{FF2B5EF4-FFF2-40B4-BE49-F238E27FC236}">
-                <a16:creationId xmlns:a16="http://schemas.microsoft.com/office/drawing/2014/main" id="{9F82ADFB-93C3-4913-880E-230313104B0B}"/>
+                <a16:creationId xmlns:a16="http://schemas.microsoft.com/office/drawing/2014/main" id="{0F040810-0E45-4AD1-93CA-CC552CA9708E}"/>
               </a:ext>
             </a:extLst>
           </p:cNvPr>
@@ -29021,7 +29021,7 @@
           <p:cNvPr id="15" name="Text 13">
             <a:extLst xmlns:a="http://schemas.openxmlformats.org/drawingml/2006/main">
               <a:ext uri="{FF2B5EF4-FFF2-40B4-BE49-F238E27FC236}">
-                <a16:creationId xmlns:a16="http://schemas.microsoft.com/office/drawing/2014/main" id="{888A1E3A-D1A0-4292-8558-A6CF038AD410}"/>
+                <a16:creationId xmlns:a16="http://schemas.microsoft.com/office/drawing/2014/main" id="{8F2E4EA2-0FB0-40F6-94C9-926E634E4DC1}"/>
               </a:ext>
             </a:extLst>
           </p:cNvPr>
@@ -29069,7 +29069,7 @@
           <p:cNvPr id="16" name="Text 14">
             <a:extLst xmlns:a="http://schemas.openxmlformats.org/drawingml/2006/main">
               <a:ext uri="{FF2B5EF4-FFF2-40B4-BE49-F238E27FC236}">
-                <a16:creationId xmlns:a16="http://schemas.microsoft.com/office/drawing/2014/main" id="{B2FF9637-E449-4DBC-B974-4664DBBDF4D8}"/>
+                <a16:creationId xmlns:a16="http://schemas.microsoft.com/office/drawing/2014/main" id="{2806502D-DE20-446B-A658-7FED561E5E27}"/>
               </a:ext>
             </a:extLst>
           </p:cNvPr>
@@ -29117,7 +29117,7 @@
           <p:cNvPr id="17" name="Text 15">
             <a:extLst xmlns:a="http://schemas.openxmlformats.org/drawingml/2006/main">
               <a:ext uri="{FF2B5EF4-FFF2-40B4-BE49-F238E27FC236}">
-                <a16:creationId xmlns:a16="http://schemas.microsoft.com/office/drawing/2014/main" id="{75F6AE28-18D6-49BD-93D6-43A485AAAB33}"/>
+                <a16:creationId xmlns:a16="http://schemas.microsoft.com/office/drawing/2014/main" id="{E2C26D72-5E7B-4148-92EC-CCF90CC6C50D}"/>
               </a:ext>
             </a:extLst>
           </p:cNvPr>
@@ -29165,7 +29165,7 @@
           <p:cNvPr id="18" name="Text 16">
             <a:extLst xmlns:a="http://schemas.openxmlformats.org/drawingml/2006/main">
               <a:ext uri="{FF2B5EF4-FFF2-40B4-BE49-F238E27FC236}">
-                <a16:creationId xmlns:a16="http://schemas.microsoft.com/office/drawing/2014/main" id="{C3E613D6-3F9D-4B1D-B093-6124E69D2D04}"/>
+                <a16:creationId xmlns:a16="http://schemas.microsoft.com/office/drawing/2014/main" id="{49A10CE8-FA49-496D-BF61-954D64A3B613}"/>
               </a:ext>
             </a:extLst>
           </p:cNvPr>
@@ -29213,7 +29213,7 @@
           <p:cNvPr id="19" name="Shape 17">
             <a:extLst xmlns:a="http://schemas.openxmlformats.org/drawingml/2006/main">
               <a:ext uri="{FF2B5EF4-FFF2-40B4-BE49-F238E27FC236}">
-                <a16:creationId xmlns:a16="http://schemas.microsoft.com/office/drawing/2014/main" id="{9FCC9EBD-AFC3-4631-BA5D-F07004882E27}"/>
+                <a16:creationId xmlns:a16="http://schemas.microsoft.com/office/drawing/2014/main" id="{F6E75B85-7252-4E99-96B0-53BED80F39D9}"/>
               </a:ext>
             </a:extLst>
           </p:cNvPr>
@@ -29244,7 +29244,7 @@
           <p:cNvPr id="20" name="Text 18">
             <a:extLst xmlns:a="http://schemas.openxmlformats.org/drawingml/2006/main">
               <a:ext uri="{FF2B5EF4-FFF2-40B4-BE49-F238E27FC236}">
-                <a16:creationId xmlns:a16="http://schemas.microsoft.com/office/drawing/2014/main" id="{AF076A8D-9ACD-48B4-822E-AC60821383CF}"/>
+                <a16:creationId xmlns:a16="http://schemas.microsoft.com/office/drawing/2014/main" id="{AA827809-7A74-4D69-85CC-BD9BB49118E1}"/>
               </a:ext>
             </a:extLst>
           </p:cNvPr>
@@ -29290,7 +29290,7 @@
           <p:cNvPr id="21" name="Text 19">
             <a:extLst xmlns:a="http://schemas.openxmlformats.org/drawingml/2006/main">
               <a:ext uri="{FF2B5EF4-FFF2-40B4-BE49-F238E27FC236}">
-                <a16:creationId xmlns:a16="http://schemas.microsoft.com/office/drawing/2014/main" id="{4BC28462-8D53-4858-ADDC-A561EFC2DC2E}"/>
+                <a16:creationId xmlns:a16="http://schemas.microsoft.com/office/drawing/2014/main" id="{D39F3E21-64EA-4A25-8C5A-03B334A3102B}"/>
               </a:ext>
             </a:extLst>
           </p:cNvPr>
@@ -29353,7 +29353,7 @@
           <p:cNvPr id="22" name="Text 20">
             <a:extLst xmlns:a="http://schemas.openxmlformats.org/drawingml/2006/main">
               <a:ext uri="{FF2B5EF4-FFF2-40B4-BE49-F238E27FC236}">
-                <a16:creationId xmlns:a16="http://schemas.microsoft.com/office/drawing/2014/main" id="{4D59EF24-F541-4EC6-94CE-5E8145E33B39}"/>
+                <a16:creationId xmlns:a16="http://schemas.microsoft.com/office/drawing/2014/main" id="{959ED351-466A-4066-AA8E-75B997A7EA5B}"/>
               </a:ext>
             </a:extLst>
           </p:cNvPr>
@@ -29401,7 +29401,7 @@
           <p:cNvPr id="23" name="Text 21">
             <a:extLst xmlns:a="http://schemas.openxmlformats.org/drawingml/2006/main">
               <a:ext uri="{FF2B5EF4-FFF2-40B4-BE49-F238E27FC236}">
-                <a16:creationId xmlns:a16="http://schemas.microsoft.com/office/drawing/2014/main" id="{DD99D34B-1B95-4C20-B439-29B6D8298C4E}"/>
+                <a16:creationId xmlns:a16="http://schemas.microsoft.com/office/drawing/2014/main" id="{7C867D5D-7F0A-4AEE-A219-D6D920F5EFE8}"/>
               </a:ext>
             </a:extLst>
           </p:cNvPr>
@@ -29438,7 +29438,7 @@
                 <a:ea typeface="Microsoft YaHei"/>
                 <a:cs typeface="Microsoft YaHei"/>
               </a:rPr>
-              <a:t>智能云储 · DOEF | 补充实验与方法说明</a:t>
+              <a:t>智储云控 · DOEF | 补充实验与方法说明</a:t>
             </a:r>
             <a:endParaRPr sz="750"/>
           </a:p>
@@ -29449,7 +29449,7 @@
           <p:cNvPr id="25" name="Slide Number Placeholder 0">
             <a:extLst xmlns:a="http://schemas.openxmlformats.org/drawingml/2006/main">
               <a:ext uri="{FF2B5EF4-FFF2-40B4-BE49-F238E27FC236}">
-                <a16:creationId xmlns:a16="http://schemas.microsoft.com/office/drawing/2014/main" id="{F3FD03E3-89B7-4DCD-BFE4-08E7C1B7F7C2}"/>
+                <a16:creationId xmlns:a16="http://schemas.microsoft.com/office/drawing/2014/main" id="{EF9A6CA9-72D3-469C-986A-1FDDB714589F}"/>
               </a:ext>
             </a:extLst>
           </p:cNvPr>
@@ -29499,7 +29499,7 @@
     </p:spTree>
     <p:extLst>
       <p:ext uri="{BB962C8B-B14F-4D97-AF65-F5344CB8AC3E}">
-        <p14:creationId xmlns:p14="http://schemas.microsoft.com/office/powerpoint/2010/main" val="1128458457"/>
+        <p14:creationId xmlns:p14="http://schemas.microsoft.com/office/powerpoint/2010/main" val="1061648560"/>
       </p:ext>
     </p:extLst>
   </p:cSld>
@@ -29523,7 +29523,7 @@
           <p:cNvPr id="2" name="Text 0">
             <a:extLst xmlns:a="http://schemas.openxmlformats.org/drawingml/2006/main">
               <a:ext uri="{FF2B5EF4-FFF2-40B4-BE49-F238E27FC236}">
-                <a16:creationId xmlns:a16="http://schemas.microsoft.com/office/drawing/2014/main" id="{87AE87FF-6A2D-404E-A9F5-9683E0CF087E}"/>
+                <a16:creationId xmlns:a16="http://schemas.microsoft.com/office/drawing/2014/main" id="{B0AA5CB3-1D42-4DED-BC4F-35136E2A2E30}"/>
               </a:ext>
             </a:extLst>
           </p:cNvPr>
@@ -29569,7 +29569,7 @@
           <p:cNvPr id="3" name="Text 1">
             <a:extLst xmlns:a="http://schemas.openxmlformats.org/drawingml/2006/main">
               <a:ext uri="{FF2B5EF4-FFF2-40B4-BE49-F238E27FC236}">
-                <a16:creationId xmlns:a16="http://schemas.microsoft.com/office/drawing/2014/main" id="{FAEEF979-6315-4485-A371-03A5DC8AC026}"/>
+                <a16:creationId xmlns:a16="http://schemas.microsoft.com/office/drawing/2014/main" id="{8FC9AF4E-0A63-451A-AF94-42399E7D37F2}"/>
               </a:ext>
             </a:extLst>
           </p:cNvPr>
@@ -29615,7 +29615,7 @@
           <p:cNvPr id="4" name="Shape 2">
             <a:extLst xmlns:a="http://schemas.openxmlformats.org/drawingml/2006/main">
               <a:ext uri="{FF2B5EF4-FFF2-40B4-BE49-F238E27FC236}">
-                <a16:creationId xmlns:a16="http://schemas.microsoft.com/office/drawing/2014/main" id="{C56B21F2-6681-4AE7-8299-25AB0FB17525}"/>
+                <a16:creationId xmlns:a16="http://schemas.microsoft.com/office/drawing/2014/main" id="{4F677DE7-DA43-4822-AB78-D6B6C9032775}"/>
               </a:ext>
             </a:extLst>
           </p:cNvPr>
@@ -29652,7 +29652,7 @@
           <p:cNvPr id="5" name="Text 3">
             <a:extLst xmlns:a="http://schemas.openxmlformats.org/drawingml/2006/main">
               <a:ext uri="{FF2B5EF4-FFF2-40B4-BE49-F238E27FC236}">
-                <a16:creationId xmlns:a16="http://schemas.microsoft.com/office/drawing/2014/main" id="{F51DB7FB-E36F-4E5D-839A-40EED66E7C25}"/>
+                <a16:creationId xmlns:a16="http://schemas.microsoft.com/office/drawing/2014/main" id="{040DBF02-2927-49A8-9D85-2A57C6332301}"/>
               </a:ext>
             </a:extLst>
           </p:cNvPr>
@@ -29700,7 +29700,7 @@
           <p:cNvPr id="6" name="Text 4">
             <a:extLst xmlns:a="http://schemas.openxmlformats.org/drawingml/2006/main">
               <a:ext uri="{FF2B5EF4-FFF2-40B4-BE49-F238E27FC236}">
-                <a16:creationId xmlns:a16="http://schemas.microsoft.com/office/drawing/2014/main" id="{DCA03E7A-887D-4A4C-9596-1BFA50A5EC91}"/>
+                <a16:creationId xmlns:a16="http://schemas.microsoft.com/office/drawing/2014/main" id="{06D4790D-841F-4C47-8988-4C29C7AA6FC0}"/>
               </a:ext>
             </a:extLst>
           </p:cNvPr>
@@ -29748,7 +29748,7 @@
           <p:cNvPr id="7" name="Text 5">
             <a:extLst xmlns:a="http://schemas.openxmlformats.org/drawingml/2006/main">
               <a:ext uri="{FF2B5EF4-FFF2-40B4-BE49-F238E27FC236}">
-                <a16:creationId xmlns:a16="http://schemas.microsoft.com/office/drawing/2014/main" id="{FF72437A-ED76-4EEE-AB94-8CB2B6714FD4}"/>
+                <a16:creationId xmlns:a16="http://schemas.microsoft.com/office/drawing/2014/main" id="{E2BE83A7-1C82-4C52-83B3-D2D2ED8F5984}"/>
               </a:ext>
             </a:extLst>
           </p:cNvPr>
@@ -29796,7 +29796,7 @@
           <p:cNvPr id="8" name="Shape 6">
             <a:extLst xmlns:a="http://schemas.openxmlformats.org/drawingml/2006/main">
               <a:ext uri="{FF2B5EF4-FFF2-40B4-BE49-F238E27FC236}">
-                <a16:creationId xmlns:a16="http://schemas.microsoft.com/office/drawing/2014/main" id="{5E3C32FE-5A39-4855-B6AE-C9F93FEFA9A6}"/>
+                <a16:creationId xmlns:a16="http://schemas.microsoft.com/office/drawing/2014/main" id="{F675CA80-A3D0-43D5-B48A-185F76BC98A9}"/>
               </a:ext>
             </a:extLst>
           </p:cNvPr>
@@ -29838,7 +29838,7 @@
           <p:cNvPr id="9" name="Text 7">
             <a:extLst xmlns:a="http://schemas.openxmlformats.org/drawingml/2006/main">
               <a:ext uri="{FF2B5EF4-FFF2-40B4-BE49-F238E27FC236}">
-                <a16:creationId xmlns:a16="http://schemas.microsoft.com/office/drawing/2014/main" id="{80084689-3180-4BC1-8108-37492AA8FCDB}"/>
+                <a16:creationId xmlns:a16="http://schemas.microsoft.com/office/drawing/2014/main" id="{9D1C7E0E-28D4-4320-B672-7DF238861C62}"/>
               </a:ext>
             </a:extLst>
           </p:cNvPr>
@@ -29884,7 +29884,7 @@
           <p:cNvPr id="10" name="Text 8">
             <a:extLst xmlns:a="http://schemas.openxmlformats.org/drawingml/2006/main">
               <a:ext uri="{FF2B5EF4-FFF2-40B4-BE49-F238E27FC236}">
-                <a16:creationId xmlns:a16="http://schemas.microsoft.com/office/drawing/2014/main" id="{053A94DB-25D5-4B83-90D3-A4CEA246CE4B}"/>
+                <a16:creationId xmlns:a16="http://schemas.microsoft.com/office/drawing/2014/main" id="{537408EA-CA29-4D93-8677-659037B528FC}"/>
               </a:ext>
             </a:extLst>
           </p:cNvPr>
@@ -29930,7 +29930,7 @@
           <p:cNvPr id="11" name="Text 9">
             <a:extLst xmlns:a="http://schemas.openxmlformats.org/drawingml/2006/main">
               <a:ext uri="{FF2B5EF4-FFF2-40B4-BE49-F238E27FC236}">
-                <a16:creationId xmlns:a16="http://schemas.microsoft.com/office/drawing/2014/main" id="{5A364206-1DE0-4931-B63D-DBB1D41A68DF}"/>
+                <a16:creationId xmlns:a16="http://schemas.microsoft.com/office/drawing/2014/main" id="{1B100A2C-605E-4569-8DFD-5A733956D889}"/>
               </a:ext>
             </a:extLst>
           </p:cNvPr>
@@ -29978,7 +29978,7 @@
           <p:cNvPr id="12" name="Shape 10">
             <a:extLst xmlns:a="http://schemas.openxmlformats.org/drawingml/2006/main">
               <a:ext uri="{FF2B5EF4-FFF2-40B4-BE49-F238E27FC236}">
-                <a16:creationId xmlns:a16="http://schemas.microsoft.com/office/drawing/2014/main" id="{C1605CCE-218D-4E9A-A510-EC2116CE8BB6}"/>
+                <a16:creationId xmlns:a16="http://schemas.microsoft.com/office/drawing/2014/main" id="{0B077063-5301-4E4E-8613-6B1806B3FD16}"/>
               </a:ext>
             </a:extLst>
           </p:cNvPr>
@@ -30015,7 +30015,7 @@
           <p:cNvPr id="13" name="Text 11">
             <a:extLst xmlns:a="http://schemas.openxmlformats.org/drawingml/2006/main">
               <a:ext uri="{FF2B5EF4-FFF2-40B4-BE49-F238E27FC236}">
-                <a16:creationId xmlns:a16="http://schemas.microsoft.com/office/drawing/2014/main" id="{8C541C8A-8E34-4675-AA9C-0C2C16E9D540}"/>
+                <a16:creationId xmlns:a16="http://schemas.microsoft.com/office/drawing/2014/main" id="{72545459-9CDA-4619-8DF1-3DF8437422BB}"/>
               </a:ext>
             </a:extLst>
           </p:cNvPr>
@@ -30063,7 +30063,7 @@
           <p:cNvPr id="14" name="Shape 12">
             <a:extLst xmlns:a="http://schemas.openxmlformats.org/drawingml/2006/main">
               <a:ext uri="{FF2B5EF4-FFF2-40B4-BE49-F238E27FC236}">
-                <a16:creationId xmlns:a16="http://schemas.microsoft.com/office/drawing/2014/main" id="{685D8E4C-AE14-4079-80D4-C76996E0E3AA}"/>
+                <a16:creationId xmlns:a16="http://schemas.microsoft.com/office/drawing/2014/main" id="{5BF50196-B1E6-44D6-90C3-43FBB1974401}"/>
               </a:ext>
             </a:extLst>
           </p:cNvPr>
@@ -30098,7 +30098,7 @@
           <p:cNvPr id="15" name="Text 13">
             <a:extLst xmlns:a="http://schemas.openxmlformats.org/drawingml/2006/main">
               <a:ext uri="{FF2B5EF4-FFF2-40B4-BE49-F238E27FC236}">
-                <a16:creationId xmlns:a16="http://schemas.microsoft.com/office/drawing/2014/main" id="{1FD0235A-1165-45EE-981A-E30752369CE8}"/>
+                <a16:creationId xmlns:a16="http://schemas.microsoft.com/office/drawing/2014/main" id="{21FC2301-C412-4950-AA9A-0B55E926F79A}"/>
               </a:ext>
             </a:extLst>
           </p:cNvPr>
@@ -30144,7 +30144,7 @@
           <p:cNvPr id="16" name="Text 14">
             <a:extLst xmlns:a="http://schemas.openxmlformats.org/drawingml/2006/main">
               <a:ext uri="{FF2B5EF4-FFF2-40B4-BE49-F238E27FC236}">
-                <a16:creationId xmlns:a16="http://schemas.microsoft.com/office/drawing/2014/main" id="{C9D3F3D6-8CA4-4C4C-AC29-560F34495F33}"/>
+                <a16:creationId xmlns:a16="http://schemas.microsoft.com/office/drawing/2014/main" id="{6F405040-6C29-4F61-ADCB-353CDD2139E7}"/>
               </a:ext>
             </a:extLst>
           </p:cNvPr>
@@ -30192,7 +30192,7 @@
           <p:cNvPr id="17" name="Text 15">
             <a:extLst xmlns:a="http://schemas.openxmlformats.org/drawingml/2006/main">
               <a:ext uri="{FF2B5EF4-FFF2-40B4-BE49-F238E27FC236}">
-                <a16:creationId xmlns:a16="http://schemas.microsoft.com/office/drawing/2014/main" id="{32A1C6E7-FCD9-4424-A517-A0DA8069D4A7}"/>
+                <a16:creationId xmlns:a16="http://schemas.microsoft.com/office/drawing/2014/main" id="{0C9157B3-25A6-4760-8ABB-1C5CBCBCB443}"/>
               </a:ext>
             </a:extLst>
           </p:cNvPr>
@@ -30240,7 +30240,7 @@
           <p:cNvPr id="18" name="Text 16">
             <a:extLst xmlns:a="http://schemas.openxmlformats.org/drawingml/2006/main">
               <a:ext uri="{FF2B5EF4-FFF2-40B4-BE49-F238E27FC236}">
-                <a16:creationId xmlns:a16="http://schemas.microsoft.com/office/drawing/2014/main" id="{AD8C3CEE-6AD7-4923-A687-2CE161089C52}"/>
+                <a16:creationId xmlns:a16="http://schemas.microsoft.com/office/drawing/2014/main" id="{02555696-DB78-4F0F-BA90-D3F64EC0B0A6}"/>
               </a:ext>
             </a:extLst>
           </p:cNvPr>
@@ -30288,7 +30288,7 @@
           <p:cNvPr id="19" name="Text 17">
             <a:extLst xmlns:a="http://schemas.openxmlformats.org/drawingml/2006/main">
               <a:ext uri="{FF2B5EF4-FFF2-40B4-BE49-F238E27FC236}">
-                <a16:creationId xmlns:a16="http://schemas.microsoft.com/office/drawing/2014/main" id="{108E1882-2BBF-444C-AFCB-BDED64075D70}"/>
+                <a16:creationId xmlns:a16="http://schemas.microsoft.com/office/drawing/2014/main" id="{F89495AE-62CE-4C59-B368-8E0AA86D80F7}"/>
               </a:ext>
             </a:extLst>
           </p:cNvPr>
@@ -30336,7 +30336,7 @@
           <p:cNvPr id="20" name="Shape 18">
             <a:extLst xmlns:a="http://schemas.openxmlformats.org/drawingml/2006/main">
               <a:ext uri="{FF2B5EF4-FFF2-40B4-BE49-F238E27FC236}">
-                <a16:creationId xmlns:a16="http://schemas.microsoft.com/office/drawing/2014/main" id="{232515AF-BB06-4BD4-B00E-135BBB62CBB6}"/>
+                <a16:creationId xmlns:a16="http://schemas.microsoft.com/office/drawing/2014/main" id="{B68A7E55-0B56-4780-90BF-AE38C0F855B7}"/>
               </a:ext>
             </a:extLst>
           </p:cNvPr>
@@ -30367,7 +30367,7 @@
           <p:cNvPr id="21" name="Text 19">
             <a:extLst xmlns:a="http://schemas.openxmlformats.org/drawingml/2006/main">
               <a:ext uri="{FF2B5EF4-FFF2-40B4-BE49-F238E27FC236}">
-                <a16:creationId xmlns:a16="http://schemas.microsoft.com/office/drawing/2014/main" id="{EE0F7A86-3137-425B-AA7C-11A899E0B238}"/>
+                <a16:creationId xmlns:a16="http://schemas.microsoft.com/office/drawing/2014/main" id="{1548EB83-B34F-4469-8225-5E6133C64981}"/>
               </a:ext>
             </a:extLst>
           </p:cNvPr>
@@ -30432,7 +30432,7 @@
           <p:cNvPr id="22" name="Shape 20">
             <a:extLst xmlns:a="http://schemas.openxmlformats.org/drawingml/2006/main">
               <a:ext uri="{FF2B5EF4-FFF2-40B4-BE49-F238E27FC236}">
-                <a16:creationId xmlns:a16="http://schemas.microsoft.com/office/drawing/2014/main" id="{C8691730-276B-4979-B338-CB6B5630358B}"/>
+                <a16:creationId xmlns:a16="http://schemas.microsoft.com/office/drawing/2014/main" id="{2FA198EC-E68F-49E7-BFFC-20BA70862E46}"/>
               </a:ext>
             </a:extLst>
           </p:cNvPr>
@@ -30469,7 +30469,7 @@
           <p:cNvPr id="23" name="Text 21">
             <a:extLst xmlns:a="http://schemas.openxmlformats.org/drawingml/2006/main">
               <a:ext uri="{FF2B5EF4-FFF2-40B4-BE49-F238E27FC236}">
-                <a16:creationId xmlns:a16="http://schemas.microsoft.com/office/drawing/2014/main" id="{099D63FB-8EA0-4C2C-8377-633DFF537148}"/>
+                <a16:creationId xmlns:a16="http://schemas.microsoft.com/office/drawing/2014/main" id="{06FE1FFC-0991-4153-AEF0-7EFC602E79B8}"/>
               </a:ext>
             </a:extLst>
           </p:cNvPr>
@@ -30517,7 +30517,7 @@
           <p:cNvPr id="24" name="Text 22">
             <a:extLst xmlns:a="http://schemas.openxmlformats.org/drawingml/2006/main">
               <a:ext uri="{FF2B5EF4-FFF2-40B4-BE49-F238E27FC236}">
-                <a16:creationId xmlns:a16="http://schemas.microsoft.com/office/drawing/2014/main" id="{85AEBCD7-1D99-48F1-91C1-376352FFF080}"/>
+                <a16:creationId xmlns:a16="http://schemas.microsoft.com/office/drawing/2014/main" id="{6EE705A0-ECB9-4861-BE09-EB0E979A5690}"/>
               </a:ext>
             </a:extLst>
           </p:cNvPr>
@@ -30565,7 +30565,7 @@
           <p:cNvPr id="25" name="Text 23">
             <a:extLst xmlns:a="http://schemas.openxmlformats.org/drawingml/2006/main">
               <a:ext uri="{FF2B5EF4-FFF2-40B4-BE49-F238E27FC236}">
-                <a16:creationId xmlns:a16="http://schemas.microsoft.com/office/drawing/2014/main" id="{DDD6A901-6C6F-4618-A6E1-921776C9ED56}"/>
+                <a16:creationId xmlns:a16="http://schemas.microsoft.com/office/drawing/2014/main" id="{9672B96F-546E-4E06-8D89-38AF08DE4337}"/>
               </a:ext>
             </a:extLst>
           </p:cNvPr>
@@ -30602,7 +30602,7 @@
                 <a:ea typeface="Microsoft YaHei"/>
                 <a:cs typeface="Microsoft YaHei"/>
               </a:rPr>
-              <a:t>智能云储 · DOEF | 补充实验与方法说明</a:t>
+              <a:t>智储云控 · DOEF | 补充实验与方法说明</a:t>
             </a:r>
             <a:endParaRPr sz="750"/>
           </a:p>
@@ -30613,7 +30613,7 @@
           <p:cNvPr id="26" name="Slide Number Placeholder 0">
             <a:extLst xmlns:a="http://schemas.openxmlformats.org/drawingml/2006/main">
               <a:ext uri="{FF2B5EF4-FFF2-40B4-BE49-F238E27FC236}">
-                <a16:creationId xmlns:a16="http://schemas.microsoft.com/office/drawing/2014/main" id="{16E7D6D4-05DB-4F7E-9D4B-4FC75BA493F2}"/>
+                <a16:creationId xmlns:a16="http://schemas.microsoft.com/office/drawing/2014/main" id="{32DCA88A-9813-41FC-8C61-5BDC8662051D}"/>
               </a:ext>
             </a:extLst>
           </p:cNvPr>
@@ -30663,7 +30663,7 @@
     </p:spTree>
     <p:extLst>
       <p:ext uri="{BB962C8B-B14F-4D97-AF65-F5344CB8AC3E}">
-        <p14:creationId xmlns:p14="http://schemas.microsoft.com/office/powerpoint/2010/main" val="1261238537"/>
+        <p14:creationId xmlns:p14="http://schemas.microsoft.com/office/powerpoint/2010/main" val="2107054436"/>
       </p:ext>
     </p:extLst>
   </p:cSld>
@@ -30671,641 +30671,1814 @@
 </file>
 
 <file path=ppt/slides/slide3.xml><?xml version="1.0" encoding="utf-8"?>
-<p:sld xmlns:p="http://schemas.openxmlformats.org/presentationml/2006/main">
-  <p:cSld>
-    <p:spTree>
-      <p:nvGrpSpPr>
-        <p:cNvPr id="1" name=""/>
-        <p:cNvGrpSpPr/>
-        <p:nvPr/>
-      </p:nvGrpSpPr>
-      <p:grpSpPr>
-        <a:xfrm xmlns:a="http://schemas.openxmlformats.org/drawingml/2006/main"/>
-      </p:grpSpPr>
-      <p:sp>
-        <p:nvSpPr>
-          <p:cNvPr id="2" name="Text 0">
-            <a:extLst xmlns:a="http://schemas.openxmlformats.org/drawingml/2006/main">
-              <a:ext uri="{FF2B5EF4-FFF2-40B4-BE49-F238E27FC236}">
-                <a16:creationId xmlns:a16="http://schemas.microsoft.com/office/drawing/2014/main" id="{4A0C8918-4664-4CF6-9F99-C8967C9E06A1}"/>
-              </a:ext>
-            </a:extLst>
-          </p:cNvPr>
-          <p:cNvSpPr>
-            <a:spLocks xmlns:a="http://schemas.openxmlformats.org/drawingml/2006/main" noGrp="1"/>
-          </p:cNvSpPr>
-          <p:nvPr/>
-        </p:nvSpPr>
-        <p:spPr>
-          <a:xfrm xmlns:a="http://schemas.openxmlformats.org/drawingml/2006/main">
-            <a:off x="438912" y="192024"/>
-            <a:ext cx="658368" cy="201168"/>
-          </a:xfrm>
-          <a:prstGeom xmlns:a="http://schemas.openxmlformats.org/drawingml/2006/main" prst="rect">
-            <a:avLst/>
-          </a:prstGeom>
-          <a:noFill xmlns:a="http://schemas.openxmlformats.org/drawingml/2006/main"/>
-        </p:spPr>
-        <p:txBody>
-          <a:bodyPr xmlns:a="http://schemas.openxmlformats.org/drawingml/2006/main" wrap="square" lIns="0" tIns="0" rIns="0" bIns="0" anchor="ctr"/>
-          <a:lstStyle xmlns:a="http://schemas.openxmlformats.org/drawingml/2006/main"/>
-          <a:p xmlns:a="http://schemas.openxmlformats.org/drawingml/2006/main">
-            <a:pPr marL="0" indent="0">
-              <a:buNone/>
-            </a:pPr>
-            <a:r>
-              <a:rPr sz="850" b="1" spc="130">
-                <a:solidFill>
-                  <a:srgbClr val="24C7FF"/>
-                </a:solidFill>
-                <a:latin typeface="Arial"/>
-                <a:ea typeface="Arial"/>
-                <a:cs typeface="Arial"/>
-              </a:rPr>
-              <a:t>DOEF</a:t>
-            </a:r>
-            <a:endParaRPr sz="850"/>
-          </a:p>
-        </p:txBody>
-      </p:sp>
-      <p:sp>
-        <p:nvSpPr>
-          <p:cNvPr id="3" name="Text 1">
-            <a:extLst xmlns:a="http://schemas.openxmlformats.org/drawingml/2006/main">
-              <a:ext uri="{FF2B5EF4-FFF2-40B4-BE49-F238E27FC236}">
-                <a16:creationId xmlns:a16="http://schemas.microsoft.com/office/drawing/2014/main" id="{60A52511-82A9-46B9-83A9-5D1EB48451A7}"/>
-              </a:ext>
-            </a:extLst>
-          </p:cNvPr>
-          <p:cNvSpPr>
-            <a:spLocks xmlns:a="http://schemas.openxmlformats.org/drawingml/2006/main" noGrp="1"/>
-          </p:cNvSpPr>
-          <p:nvPr/>
-        </p:nvSpPr>
-        <p:spPr>
-          <a:xfrm xmlns:a="http://schemas.openxmlformats.org/drawingml/2006/main">
-            <a:off x="1143000" y="192024"/>
-            <a:ext cx="2926080" cy="201168"/>
-          </a:xfrm>
-          <a:prstGeom xmlns:a="http://schemas.openxmlformats.org/drawingml/2006/main" prst="rect">
-            <a:avLst/>
-          </a:prstGeom>
-          <a:noFill xmlns:a="http://schemas.openxmlformats.org/drawingml/2006/main"/>
-        </p:spPr>
-        <p:txBody>
-          <a:bodyPr xmlns:a="http://schemas.openxmlformats.org/drawingml/2006/main" wrap="square" lIns="0" tIns="0" rIns="0" bIns="0" anchor="ctr"/>
-          <a:lstStyle xmlns:a="http://schemas.openxmlformats.org/drawingml/2006/main"/>
-          <a:p xmlns:a="http://schemas.openxmlformats.org/drawingml/2006/main">
-            <a:pPr marL="0" indent="0">
-              <a:buNone/>
-            </a:pPr>
-            <a:r>
-              <a:rPr sz="830" b="1" spc="100">
-                <a:solidFill>
-                  <a:srgbClr val="7890A7"/>
-                </a:solidFill>
-                <a:latin typeface="Arial"/>
-                <a:ea typeface="Arial"/>
-                <a:cs typeface="Arial"/>
-              </a:rPr>
-              <a:t>技术路线</a:t>
-            </a:r>
-            <a:endParaRPr sz="830"/>
-          </a:p>
-        </p:txBody>
-      </p:sp>
-      <p:sp>
-        <p:nvSpPr>
-          <p:cNvPr id="4" name="Text 2">
-            <a:extLst xmlns:a="http://schemas.openxmlformats.org/drawingml/2006/main">
-              <a:ext uri="{FF2B5EF4-FFF2-40B4-BE49-F238E27FC236}">
-                <a16:creationId xmlns:a16="http://schemas.microsoft.com/office/drawing/2014/main" id="{8ABD61BB-1F59-494A-A04D-9BD304563B9D}"/>
-              </a:ext>
-            </a:extLst>
-          </p:cNvPr>
-          <p:cNvSpPr>
-            <a:spLocks xmlns:a="http://schemas.openxmlformats.org/drawingml/2006/main" noGrp="1"/>
-          </p:cNvSpPr>
-          <p:nvPr/>
-        </p:nvSpPr>
-        <p:spPr>
-          <a:xfrm xmlns:a="http://schemas.openxmlformats.org/drawingml/2006/main">
-            <a:off x="566928" y="475488"/>
-            <a:ext cx="11064240" cy="566928"/>
-          </a:xfrm>
-          <a:prstGeom xmlns:a="http://schemas.openxmlformats.org/drawingml/2006/main" prst="rect">
-            <a:avLst/>
-          </a:prstGeom>
-          <a:noFill xmlns:a="http://schemas.openxmlformats.org/drawingml/2006/main"/>
-        </p:spPr>
-        <p:txBody>
-          <a:bodyPr xmlns:a="http://schemas.openxmlformats.org/drawingml/2006/main" wrap="square" lIns="0" tIns="0" rIns="0" bIns="0" anchor="ctr">
-            <a:normAutofit fontScale="100000"/>
-          </a:bodyPr>
-          <a:lstStyle xmlns:a="http://schemas.openxmlformats.org/drawingml/2006/main"/>
-          <a:p xmlns:a="http://schemas.openxmlformats.org/drawingml/2006/main">
-            <a:pPr marL="0" indent="0">
-              <a:buNone/>
-            </a:pPr>
-            <a:r>
-              <a:rPr sz="2600" b="1">
-                <a:solidFill>
-                  <a:srgbClr val="F8FBFF"/>
-                </a:solidFill>
-                <a:latin typeface="Microsoft YaHei"/>
-                <a:ea typeface="Microsoft YaHei"/>
-                <a:cs typeface="Microsoft YaHei"/>
-              </a:rPr>
-              <a:t>负荷预测驱动储能调度</a:t>
-            </a:r>
-            <a:endParaRPr sz="2600"/>
-          </a:p>
-        </p:txBody>
-      </p:sp>
-      <p:sp>
-        <p:nvSpPr>
-          <p:cNvPr id="5" name="Text 3">
-            <a:extLst xmlns:a="http://schemas.openxmlformats.org/drawingml/2006/main">
-              <a:ext uri="{FF2B5EF4-FFF2-40B4-BE49-F238E27FC236}">
-                <a16:creationId xmlns:a16="http://schemas.microsoft.com/office/drawing/2014/main" id="{C1FE0914-94A4-43BA-8A10-F55866A23075}"/>
-              </a:ext>
-            </a:extLst>
-          </p:cNvPr>
-          <p:cNvSpPr>
-            <a:spLocks xmlns:a="http://schemas.openxmlformats.org/drawingml/2006/main" noGrp="1"/>
-          </p:cNvSpPr>
-          <p:nvPr/>
-        </p:nvSpPr>
-        <p:spPr>
-          <a:xfrm xmlns:a="http://schemas.openxmlformats.org/drawingml/2006/main">
-            <a:off x="585216" y="1078992"/>
-            <a:ext cx="10698480" cy="365760"/>
-          </a:xfrm>
-          <a:prstGeom xmlns:a="http://schemas.openxmlformats.org/drawingml/2006/main" prst="rect">
-            <a:avLst/>
-          </a:prstGeom>
-          <a:noFill xmlns:a="http://schemas.openxmlformats.org/drawingml/2006/main"/>
-        </p:spPr>
-        <p:txBody>
-          <a:bodyPr xmlns:a="http://schemas.openxmlformats.org/drawingml/2006/main" wrap="square" lIns="0" tIns="0" rIns="0" bIns="0" anchor="ctr">
-            <a:normAutofit fontScale="100000"/>
-          </a:bodyPr>
-          <a:lstStyle xmlns:a="http://schemas.openxmlformats.org/drawingml/2006/main"/>
-          <a:p xmlns:a="http://schemas.openxmlformats.org/drawingml/2006/main">
-            <a:pPr marL="0" indent="0">
-              <a:buNone/>
-            </a:pPr>
-            <a:r>
-              <a:rPr sz="1240">
-                <a:solidFill>
-                  <a:srgbClr val="9DB0C2"/>
-                </a:solidFill>
-                <a:latin typeface="Microsoft YaHei"/>
-                <a:ea typeface="Microsoft YaHei"/>
-                <a:cs typeface="Microsoft YaHei"/>
-              </a:rPr>
-              <a:t>预测生成充放电计划，再用实际负荷计算调度后的取电峰值。</a:t>
-            </a:r>
-            <a:endParaRPr sz="1240"/>
-          </a:p>
-        </p:txBody>
-      </p:sp>
-      <p:sp>
-        <p:nvSpPr>
-          <p:cNvPr id="6" name="Shape 4">
-            <a:extLst xmlns:a="http://schemas.openxmlformats.org/drawingml/2006/main">
-              <a:ext uri="{FF2B5EF4-FFF2-40B4-BE49-F238E27FC236}">
-                <a16:creationId xmlns:a16="http://schemas.microsoft.com/office/drawing/2014/main" id="{AD5E7E2C-49DA-4872-8ECE-D407B873C3E4}"/>
-              </a:ext>
-            </a:extLst>
-          </p:cNvPr>
-          <p:cNvSpPr>
-            <a:spLocks xmlns:a="http://schemas.openxmlformats.org/drawingml/2006/main" noGrp="1"/>
-          </p:cNvSpPr>
-          <p:nvPr/>
-        </p:nvSpPr>
-        <p:spPr>
-          <a:xfrm xmlns:a="http://schemas.openxmlformats.org/drawingml/2006/main">
-            <a:off x="694944" y="1545336"/>
-            <a:ext cx="10808208" cy="3968496"/>
-          </a:xfrm>
-          <a:prstGeom xmlns:a="http://schemas.openxmlformats.org/drawingml/2006/main" prst="roundRect">
-            <a:avLst>
-              <a:gd name="adj" fmla="val 2074"/>
-            </a:avLst>
-          </a:prstGeom>
-          <a:solidFill xmlns:a="http://schemas.openxmlformats.org/drawingml/2006/main">
-            <a:srgbClr val="FFFFFF"/>
-          </a:solidFill>
-          <a:ln xmlns:a="http://schemas.openxmlformats.org/drawingml/2006/main" w="10160">
-            <a:solidFill>
-              <a:srgbClr val="E2E8F0"/>
-            </a:solidFill>
-            <a:prstDash val="solid"/>
-          </a:ln>
-          <a:effectLst xmlns:a="http://schemas.openxmlformats.org/drawingml/2006/main">
-            <a:outerShdw blurRad="19050" dist="50800" dir="2700000" sx="100000" sy="100000" kx="0" ky="0" algn="bl" rotWithShape="0">
-              <a:srgbClr val="000000">
-                <a:alpha val="16000"/>
-              </a:srgbClr>
-            </a:outerShdw>
-          </a:effectLst>
-        </p:spPr>
-      </p:sp>
-      <p:pic>
-        <p:nvPicPr>
-          <p:cNvPr id="32" name="Image 0"/>
-          <p:cNvPicPr>
-            <a:picLocks xmlns:a="http://schemas.openxmlformats.org/drawingml/2006/main" noChangeAspect="1"/>
-          </p:cNvPicPr>
-          <p:nvPr/>
-        </p:nvPicPr>
-        <p:blipFill>
-          <a:blip xmlns:r="http://schemas.openxmlformats.org/officeDocument/2006/relationships" xmlns:a="http://schemas.openxmlformats.org/drawingml/2006/main" r:embed="Rc2ba4c1ceb3242ae"/>
-          <a:stretch xmlns:a="http://schemas.openxmlformats.org/drawingml/2006/main">
-            <a:fillRect l="0" t="0" r="0" b="0"/>
-          </a:stretch>
-        </p:blipFill>
-        <p:spPr>
-          <a:xfrm xmlns:a="http://schemas.openxmlformats.org/drawingml/2006/main">
-            <a:off x="2669032" y="1600200"/>
-            <a:ext cx="6860032" cy="3858768"/>
-          </a:xfrm>
-          <a:prstGeom xmlns:a="http://schemas.openxmlformats.org/drawingml/2006/main" prst="rect">
-            <a:avLst/>
-          </a:prstGeom>
-        </p:spPr>
-      </p:pic>
-      <p:sp>
-        <p:nvSpPr>
-          <p:cNvPr id="8" name="Shape 5">
-            <a:extLst xmlns:a="http://schemas.openxmlformats.org/drawingml/2006/main">
-              <a:ext uri="{FF2B5EF4-FFF2-40B4-BE49-F238E27FC236}">
-                <a16:creationId xmlns:a16="http://schemas.microsoft.com/office/drawing/2014/main" id="{43901A8A-B0FD-4A53-82A2-D13A5044896B}"/>
-              </a:ext>
-            </a:extLst>
-          </p:cNvPr>
-          <p:cNvSpPr>
-            <a:spLocks xmlns:a="http://schemas.openxmlformats.org/drawingml/2006/main" noGrp="1"/>
-          </p:cNvSpPr>
-          <p:nvPr/>
-        </p:nvSpPr>
-        <p:spPr>
-          <a:xfrm xmlns:a="http://schemas.openxmlformats.org/drawingml/2006/main">
-            <a:off x="2834640" y="1691640"/>
-            <a:ext cx="6537960" cy="393192"/>
-          </a:xfrm>
-          <a:prstGeom xmlns:a="http://schemas.openxmlformats.org/drawingml/2006/main" prst="rect">
-            <a:avLst/>
-          </a:prstGeom>
-          <a:solidFill xmlns:a="http://schemas.openxmlformats.org/drawingml/2006/main">
-            <a:srgbClr val="FFFFFF"/>
-          </a:solidFill>
-          <a:ln xmlns:a="http://schemas.openxmlformats.org/drawingml/2006/main" w="12700">
-            <a:solidFill>
-              <a:srgbClr val="FFFFFF">
-                <a:alpha val="0"/>
-              </a:srgbClr>
-            </a:solidFill>
-            <a:prstDash val="solid"/>
-          </a:ln>
-        </p:spPr>
-      </p:sp>
-      <p:sp>
-        <p:nvSpPr>
-          <p:cNvPr id="9" name="Text 6">
-            <a:extLst xmlns:a="http://schemas.openxmlformats.org/drawingml/2006/main">
-              <a:ext uri="{FF2B5EF4-FFF2-40B4-BE49-F238E27FC236}">
-                <a16:creationId xmlns:a16="http://schemas.microsoft.com/office/drawing/2014/main" id="{5122F301-B061-4A81-89A8-812540F08EA4}"/>
-              </a:ext>
-            </a:extLst>
-          </p:cNvPr>
-          <p:cNvSpPr>
-            <a:spLocks xmlns:a="http://schemas.openxmlformats.org/drawingml/2006/main" noGrp="1"/>
-          </p:cNvSpPr>
-          <p:nvPr/>
-        </p:nvSpPr>
-        <p:spPr>
-          <a:xfrm xmlns:a="http://schemas.openxmlformats.org/drawingml/2006/main">
-            <a:off x="2834640" y="1773936"/>
-            <a:ext cx="6537960" cy="219456"/>
-          </a:xfrm>
-          <a:prstGeom xmlns:a="http://schemas.openxmlformats.org/drawingml/2006/main" prst="rect">
-            <a:avLst/>
-          </a:prstGeom>
-          <a:noFill xmlns:a="http://schemas.openxmlformats.org/drawingml/2006/main"/>
-        </p:spPr>
-        <p:txBody>
-          <a:bodyPr xmlns:a="http://schemas.openxmlformats.org/drawingml/2006/main" wrap="square" lIns="0" tIns="0" rIns="0" bIns="0" anchor="ctr"/>
-          <a:lstStyle xmlns:a="http://schemas.openxmlformats.org/drawingml/2006/main"/>
-          <a:p xmlns:a="http://schemas.openxmlformats.org/drawingml/2006/main">
-            <a:pPr marL="0" indent="0" algn="ctr">
-              <a:buNone/>
-            </a:pPr>
-            <a:r>
-              <a:rPr sz="1300" b="1">
-                <a:solidFill>
-                  <a:srgbClr val="18212B"/>
-                </a:solidFill>
-                <a:latin typeface="Arial"/>
-                <a:ea typeface="Arial"/>
-                <a:cs typeface="Arial"/>
-              </a:rPr>
-              <a:t>从负荷预测到储能决策评价</a:t>
-            </a:r>
-            <a:endParaRPr sz="1300"/>
-          </a:p>
-        </p:txBody>
-      </p:sp>
-      <p:sp>
-        <p:nvSpPr>
-          <p:cNvPr id="10" name="Shape 7">
-            <a:extLst xmlns:a="http://schemas.openxmlformats.org/drawingml/2006/main">
-              <a:ext uri="{FF2B5EF4-FFF2-40B4-BE49-F238E27FC236}">
-                <a16:creationId xmlns:a16="http://schemas.microsoft.com/office/drawing/2014/main" id="{CAC4024B-5959-40A2-B8DC-EEE3E9CAF627}"/>
-              </a:ext>
-            </a:extLst>
-          </p:cNvPr>
-          <p:cNvSpPr>
-            <a:spLocks xmlns:a="http://schemas.openxmlformats.org/drawingml/2006/main" noGrp="1"/>
-          </p:cNvSpPr>
-          <p:nvPr/>
-        </p:nvSpPr>
-        <p:spPr>
-          <a:xfrm xmlns:a="http://schemas.openxmlformats.org/drawingml/2006/main">
-            <a:off x="868680" y="5596128"/>
-            <a:ext cx="2212848" cy="292608"/>
-          </a:xfrm>
-          <a:prstGeom xmlns:a="http://schemas.openxmlformats.org/drawingml/2006/main" prst="roundRect">
-            <a:avLst>
-              <a:gd name="adj" fmla="val 18750"/>
-            </a:avLst>
-          </a:prstGeom>
-          <a:solidFill xmlns:a="http://schemas.openxmlformats.org/drawingml/2006/main">
-            <a:srgbClr val="173A54"/>
-          </a:solidFill>
-          <a:ln xmlns:a="http://schemas.openxmlformats.org/drawingml/2006/main" w="12700">
-            <a:solidFill>
-              <a:srgbClr val="173A54">
-                <a:alpha val="0"/>
-              </a:srgbClr>
-            </a:solidFill>
-            <a:prstDash val="solid"/>
-          </a:ln>
-        </p:spPr>
-      </p:sp>
-      <p:sp>
-        <p:nvSpPr>
-          <p:cNvPr id="11" name="Text 8">
-            <a:extLst xmlns:a="http://schemas.openxmlformats.org/drawingml/2006/main">
-              <a:ext uri="{FF2B5EF4-FFF2-40B4-BE49-F238E27FC236}">
-                <a16:creationId xmlns:a16="http://schemas.microsoft.com/office/drawing/2014/main" id="{B767F1F2-CB54-4ACF-9E94-244698D3837A}"/>
-              </a:ext>
-            </a:extLst>
-          </p:cNvPr>
-          <p:cNvSpPr>
-            <a:spLocks xmlns:a="http://schemas.openxmlformats.org/drawingml/2006/main" noGrp="1"/>
-          </p:cNvSpPr>
-          <p:nvPr/>
-        </p:nvSpPr>
-        <p:spPr>
-          <a:xfrm xmlns:a="http://schemas.openxmlformats.org/drawingml/2006/main">
-            <a:off x="941832" y="5637276"/>
-            <a:ext cx="2066544" cy="182880"/>
-          </a:xfrm>
-          <a:prstGeom xmlns:a="http://schemas.openxmlformats.org/drawingml/2006/main" prst="rect">
-            <a:avLst/>
-          </a:prstGeom>
-          <a:noFill xmlns:a="http://schemas.openxmlformats.org/drawingml/2006/main"/>
-        </p:spPr>
-        <p:txBody>
-          <a:bodyPr xmlns:a="http://schemas.openxmlformats.org/drawingml/2006/main" wrap="square" lIns="0" tIns="0" rIns="0" bIns="0" anchor="ctr">
-            <a:normAutofit fontScale="100000"/>
-          </a:bodyPr>
-          <a:lstStyle xmlns:a="http://schemas.openxmlformats.org/drawingml/2006/main"/>
-          <a:p xmlns:a="http://schemas.openxmlformats.org/drawingml/2006/main">
-            <a:pPr marL="0" indent="0" algn="ctr">
-              <a:buNone/>
-            </a:pPr>
-            <a:r>
-              <a:rPr sz="850" b="1">
-                <a:solidFill>
-                  <a:srgbClr val="24C7FF"/>
-                </a:solidFill>
-                <a:latin typeface="Microsoft YaHei"/>
-                <a:ea typeface="Microsoft YaHei"/>
-                <a:cs typeface="Microsoft YaHei"/>
-              </a:rPr>
-              <a:t>流程示意</a:t>
-            </a:r>
-            <a:endParaRPr sz="850"/>
-          </a:p>
-        </p:txBody>
-      </p:sp>
-      <p:sp>
-        <p:nvSpPr>
-          <p:cNvPr id="12" name="Text 9">
-            <a:extLst xmlns:a="http://schemas.openxmlformats.org/drawingml/2006/main">
-              <a:ext uri="{FF2B5EF4-FFF2-40B4-BE49-F238E27FC236}">
-                <a16:creationId xmlns:a16="http://schemas.microsoft.com/office/drawing/2014/main" id="{6E1AC7E1-B7AB-49FB-A095-25C0931C892E}"/>
-              </a:ext>
-            </a:extLst>
-          </p:cNvPr>
-          <p:cNvSpPr>
-            <a:spLocks xmlns:a="http://schemas.openxmlformats.org/drawingml/2006/main" noGrp="1"/>
-          </p:cNvSpPr>
-          <p:nvPr/>
-        </p:nvSpPr>
-        <p:spPr>
-          <a:xfrm xmlns:a="http://schemas.openxmlformats.org/drawingml/2006/main">
-            <a:off x="3273552" y="5605272"/>
-            <a:ext cx="7726680" cy="292608"/>
-          </a:xfrm>
-          <a:prstGeom xmlns:a="http://schemas.openxmlformats.org/drawingml/2006/main" prst="rect">
-            <a:avLst/>
-          </a:prstGeom>
-          <a:noFill xmlns:a="http://schemas.openxmlformats.org/drawingml/2006/main"/>
-        </p:spPr>
-        <p:txBody>
-          <a:bodyPr xmlns:a="http://schemas.openxmlformats.org/drawingml/2006/main" wrap="square" lIns="0" tIns="0" rIns="0" bIns="0" anchor="ctr">
-            <a:normAutofit fontScale="100000"/>
-          </a:bodyPr>
-          <a:lstStyle xmlns:a="http://schemas.openxmlformats.org/drawingml/2006/main"/>
-          <a:p xmlns:a="http://schemas.openxmlformats.org/drawingml/2006/main">
-            <a:pPr marL="0" indent="0">
-              <a:buNone/>
-            </a:pPr>
-            <a:r>
-              <a:rPr sz="1080">
-                <a:solidFill>
-                  <a:srgbClr val="A9B9C8"/>
-                </a:solidFill>
-                <a:latin typeface="Microsoft YaHei"/>
-                <a:ea typeface="Microsoft YaHei"/>
-                <a:cs typeface="Microsoft YaHei"/>
-              </a:rPr>
-              <a:t>各预测方法共享电池约束和优化器，比较预测输入对调度结果的影响。</a:t>
-            </a:r>
-            <a:endParaRPr sz="1080"/>
-          </a:p>
-        </p:txBody>
-      </p:sp>
-      <p:sp>
-        <p:nvSpPr>
-          <p:cNvPr id="13" name="Text 10">
-            <a:extLst xmlns:a="http://schemas.openxmlformats.org/drawingml/2006/main">
-              <a:ext uri="{FF2B5EF4-FFF2-40B4-BE49-F238E27FC236}">
-                <a16:creationId xmlns:a16="http://schemas.microsoft.com/office/drawing/2014/main" id="{A96A42A5-B68C-4FBA-8F04-3A1183CAE0B6}"/>
-              </a:ext>
-            </a:extLst>
-          </p:cNvPr>
-          <p:cNvSpPr>
-            <a:spLocks xmlns:a="http://schemas.openxmlformats.org/drawingml/2006/main" noGrp="1"/>
-          </p:cNvSpPr>
-          <p:nvPr/>
-        </p:nvSpPr>
-        <p:spPr>
-          <a:xfrm xmlns:a="http://schemas.openxmlformats.org/drawingml/2006/main">
-            <a:off x="566928" y="6153912"/>
-            <a:ext cx="10744200" cy="146304"/>
-          </a:xfrm>
-          <a:prstGeom xmlns:a="http://schemas.openxmlformats.org/drawingml/2006/main" prst="rect">
-            <a:avLst/>
-          </a:prstGeom>
-          <a:noFill xmlns:a="http://schemas.openxmlformats.org/drawingml/2006/main"/>
-        </p:spPr>
-        <p:txBody>
-          <a:bodyPr xmlns:a="http://schemas.openxmlformats.org/drawingml/2006/main" wrap="square" lIns="0" tIns="0" rIns="0" bIns="0" anchor="ctr">
-            <a:normAutofit fontScale="100000"/>
-          </a:bodyPr>
-          <a:lstStyle xmlns:a="http://schemas.openxmlformats.org/drawingml/2006/main"/>
-          <a:p xmlns:a="http://schemas.openxmlformats.org/drawingml/2006/main">
-            <a:pPr marL="0" indent="0">
-              <a:buNone/>
-            </a:pPr>
-            <a:r>
-              <a:rPr sz="670">
-                <a:solidFill>
-                  <a:srgbClr val="597087"/>
-                </a:solidFill>
-                <a:latin typeface="Arial"/>
-                <a:ea typeface="Arial"/>
-                <a:cs typeface="Arial"/>
-              </a:rPr>
-              <a:t>概念示意：预测作为调度输入；图中不包含实验数值</a:t>
-            </a:r>
-            <a:endParaRPr sz="670"/>
-          </a:p>
-        </p:txBody>
-      </p:sp>
-      <p:sp>
-        <p:nvSpPr>
-          <p:cNvPr id="14" name="Text 11">
-            <a:extLst xmlns:a="http://schemas.openxmlformats.org/drawingml/2006/main">
-              <a:ext uri="{FF2B5EF4-FFF2-40B4-BE49-F238E27FC236}">
-                <a16:creationId xmlns:a16="http://schemas.microsoft.com/office/drawing/2014/main" id="{F53074AB-B7F2-4951-9114-1BCA4F3CE9A9}"/>
-              </a:ext>
-            </a:extLst>
-          </p:cNvPr>
-          <p:cNvSpPr>
-            <a:spLocks xmlns:a="http://schemas.openxmlformats.org/drawingml/2006/main" noGrp="1"/>
-          </p:cNvSpPr>
-          <p:nvPr/>
-        </p:nvSpPr>
-        <p:spPr>
-          <a:xfrm xmlns:a="http://schemas.openxmlformats.org/drawingml/2006/main">
-            <a:off x="566928" y="6437376"/>
-            <a:ext cx="10332720" cy="164592"/>
-          </a:xfrm>
-          <a:prstGeom xmlns:a="http://schemas.openxmlformats.org/drawingml/2006/main" prst="rect">
-            <a:avLst/>
-          </a:prstGeom>
-          <a:noFill xmlns:a="http://schemas.openxmlformats.org/drawingml/2006/main"/>
-        </p:spPr>
-        <p:txBody>
-          <a:bodyPr xmlns:a="http://schemas.openxmlformats.org/drawingml/2006/main" wrap="square" lIns="0" tIns="0" rIns="0" bIns="0" anchor="ctr">
-            <a:normAutofit fontScale="100000"/>
-          </a:bodyPr>
-          <a:lstStyle xmlns:a="http://schemas.openxmlformats.org/drawingml/2006/main"/>
-          <a:p xmlns:a="http://schemas.openxmlformats.org/drawingml/2006/main">
-            <a:pPr marL="0" indent="0">
-              <a:buNone/>
-            </a:pPr>
-            <a:r>
-              <a:rPr sz="750">
-                <a:solidFill>
-                  <a:srgbClr val="6F8295"/>
-                </a:solidFill>
-                <a:latin typeface="Microsoft YaHei"/>
-                <a:ea typeface="Microsoft YaHei"/>
-                <a:cs typeface="Microsoft YaHei"/>
-              </a:rPr>
-              <a:t>智能云储 · DOEF | 8 栋办公建筑仿真实验</a:t>
-            </a:r>
-            <a:endParaRPr sz="750"/>
-          </a:p>
-        </p:txBody>
-      </p:sp>
-      <p:sp>
-        <p:nvSpPr>
-          <p:cNvPr id="25" name="Slide Number Placeholder 0">
-            <a:extLst xmlns:a="http://schemas.openxmlformats.org/drawingml/2006/main">
-              <a:ext uri="{FF2B5EF4-FFF2-40B4-BE49-F238E27FC236}">
-                <a16:creationId xmlns:a16="http://schemas.microsoft.com/office/drawing/2014/main" id="{195F55DE-8300-41C2-B2C9-B903EB3C12B8}"/>
-              </a:ext>
-            </a:extLst>
-          </p:cNvPr>
-          <p:cNvSpPr>
-            <a:spLocks xmlns:a="http://schemas.openxmlformats.org/drawingml/2006/main" noGrp="1"/>
-          </p:cNvSpPr>
-          <p:nvPr>
-            <p:ph type="sldNum" idx="4294967295"/>
-          </p:nvPr>
-        </p:nvSpPr>
-        <p:spPr>
-          <a:xfrm xmlns:a="http://schemas.openxmlformats.org/drawingml/2006/main">
-            <a:off x="11475720" y="6446520"/>
-            <a:ext cx="411480" cy="164592"/>
-          </a:xfrm>
-          <a:prstGeom xmlns:a="http://schemas.openxmlformats.org/drawingml/2006/main" prst="rect">
-            <a:avLst/>
-          </a:prstGeom>
-        </p:spPr>
-        <p:txBody>
-          <a:bodyPr xmlns:a="http://schemas.openxmlformats.org/drawingml/2006/main"/>
-          <a:lstStyle xmlns:a="http://schemas.openxmlformats.org/drawingml/2006/main">
-            <a:lvl1pPr>
-              <a:buNone/>
-              <a:defRPr sz="800">
-                <a:solidFill>
-                  <a:srgbClr val="6F8295"/>
-                </a:solidFill>
-                <a:latin typeface="Arial"/>
-                <a:ea typeface="Arial"/>
-                <a:cs typeface="Arial"/>
-              </a:defRPr>
-            </a:lvl1pPr>
-          </a:lstStyle>
-          <a:p xmlns:a="http://schemas.openxmlformats.org/drawingml/2006/main">
-            <a:pPr algn="r">
-              <a:buNone/>
-            </a:pPr>
-            <a:fld id="{F7021451-1387-4CA6-816F-3879F97B5CBC}" type="slidenum">
-              <a:rPr b="0"/>
-              <a:t>3</a:t>
-            </a:fld>
-            <a:endParaRPr/>
-          </a:p>
-        </p:txBody>
-      </p:sp>
-    </p:spTree>
-    <p:extLst>
-      <p:ext uri="{BB962C8B-B14F-4D97-AF65-F5344CB8AC3E}">
-        <p14:creationId xmlns:p14="http://schemas.microsoft.com/office/powerpoint/2010/main" val="646833333"/>
-      </p:ext>
-    </p:extLst>
-  </p:cSld>
-</p:sld>
+<ns0:sld xmlns:ns0="http://schemas.openxmlformats.org/presentationml/2006/main" xmlns:ns1="http://schemas.openxmlformats.org/drawingml/2006/main" xmlns:ns2="http://schemas.microsoft.com/office/drawing/2014/main" xmlns:ns3="http://schemas.microsoft.com/office/powerpoint/2010/main">
+  <ns0:cSld>
+    <ns0:spTree>
+      <ns0:nvGrpSpPr>
+        <ns0:cNvPr id="1" name=""/>
+        <ns0:cNvGrpSpPr/>
+        <ns0:nvPr/>
+      </ns0:nvGrpSpPr>
+      <ns0:grpSpPr>
+        <ns1:xfrm/>
+      </ns0:grpSpPr>
+      <ns0:sp>
+        <ns0:nvSpPr>
+          <ns0:cNvPr id="2" name="Text 0">
+            <ns1:extLst>
+              <ns1:ext uri="{FF2B5EF4-FFF2-40B4-BE49-F238E27FC236}">
+                <ns2:creationId id="{4DEB39F2-BE86-40D9-94A3-96F0B68FECCE}"/>
+              </ns1:ext>
+            </ns1:extLst>
+          </ns0:cNvPr>
+          <ns0:cNvSpPr>
+            <ns1:spLocks noGrp="1"/>
+          </ns0:cNvSpPr>
+          <ns0:nvPr/>
+        </ns0:nvSpPr>
+        <ns0:spPr>
+          <ns1:xfrm>
+            <ns1:off x="438912" y="192024"/>
+            <ns1:ext cx="658368" cy="201168"/>
+          </ns1:xfrm>
+          <ns1:prstGeom prst="rect">
+            <ns1:avLst/>
+          </ns1:prstGeom>
+          <ns1:noFill/>
+        </ns0:spPr>
+        <ns0:txBody>
+          <ns1:bodyPr wrap="square" lIns="0" tIns="0" rIns="0" bIns="0" anchor="ctr"/>
+          <ns1:lstStyle/>
+          <ns1:p>
+            <ns1:pPr marL="0" indent="0">
+              <ns1:buNone/>
+            </ns1:pPr>
+            <ns1:r>
+              <ns1:rPr sz="850" b="1" spc="130">
+                <ns1:solidFill>
+                  <ns1:srgbClr val="24C7FF"/>
+                </ns1:solidFill>
+                <ns1:latin typeface="Arial"/>
+                <ns1:ea typeface="Arial"/>
+                <ns1:cs typeface="Arial"/>
+              </ns1:rPr>
+              <ns1:t>DOEF</ns1:t>
+            </ns1:r>
+            <ns1:endParaRPr sz="850"/>
+          </ns1:p>
+        </ns0:txBody>
+      </ns0:sp>
+      <ns0:sp>
+        <ns0:nvSpPr>
+          <ns0:cNvPr id="3" name="Text 1">
+            <ns1:extLst>
+              <ns1:ext uri="{FF2B5EF4-FFF2-40B4-BE49-F238E27FC236}">
+                <ns2:creationId id="{B708DAC6-A962-473E-B73A-E73D52F89BBF}"/>
+              </ns1:ext>
+            </ns1:extLst>
+          </ns0:cNvPr>
+          <ns0:cNvSpPr>
+            <ns1:spLocks noGrp="1"/>
+          </ns0:cNvSpPr>
+          <ns0:nvPr/>
+        </ns0:nvSpPr>
+        <ns0:spPr>
+          <ns1:xfrm>
+            <ns1:off x="1143000" y="192024"/>
+            <ns1:ext cx="2926080" cy="201168"/>
+          </ns1:xfrm>
+          <ns1:prstGeom prst="rect">
+            <ns1:avLst/>
+          </ns1:prstGeom>
+          <ns1:noFill/>
+        </ns0:spPr>
+        <ns0:txBody>
+          <ns1:bodyPr wrap="square" lIns="0" tIns="0" rIns="0" bIns="0" anchor="ctr"/>
+          <ns1:lstStyle/>
+          <ns1:p>
+            <ns1:pPr marL="0" indent="0">
+              <ns1:buNone/>
+            </ns1:pPr>
+            <ns1:r>
+              <ns1:rPr sz="830" b="1" spc="100">
+                <ns1:solidFill>
+                  <ns1:srgbClr val="7890A7"/>
+                </ns1:solidFill>
+                <ns1:latin typeface="Arial"/>
+                <ns1:ea typeface="Arial"/>
+                <ns1:cs typeface="Arial"/>
+              </ns1:rPr>
+              <ns1:t>办公楼应用</ns1:t>
+            </ns1:r>
+            <ns1:endParaRPr sz="830"/>
+          </ns1:p>
+        </ns0:txBody>
+      </ns0:sp>
+      <ns0:sp>
+        <ns0:nvSpPr>
+          <ns0:cNvPr id="4" name="Text 2">
+            <ns1:extLst>
+              <ns1:ext uri="{FF2B5EF4-FFF2-40B4-BE49-F238E27FC236}">
+                <ns2:creationId id="{D5285C5B-CD9B-4A80-81C3-6545C456F0CF}"/>
+              </ns1:ext>
+            </ns1:extLst>
+          </ns0:cNvPr>
+          <ns0:cNvSpPr>
+            <ns1:spLocks noGrp="1"/>
+          </ns0:cNvSpPr>
+          <ns0:nvPr/>
+        </ns0:nvSpPr>
+        <ns0:spPr>
+          <ns1:xfrm>
+            <ns1:off x="566928" y="475488"/>
+            <ns1:ext cx="11064240" cy="566928"/>
+          </ns1:xfrm>
+          <ns1:prstGeom prst="rect">
+            <ns1:avLst/>
+          </ns1:prstGeom>
+          <ns1:noFill/>
+        </ns0:spPr>
+        <ns0:txBody>
+          <ns1:bodyPr wrap="square" lIns="0" tIns="0" rIns="0" bIns="0" anchor="ctr">
+            <ns1:normAutofit fontScale="100000"/>
+          </ns1:bodyPr>
+          <ns1:lstStyle/>
+          <ns1:p>
+            <ns1:pPr marL="0" indent="0">
+              <ns1:buNone/>
+            </ns1:pPr>
+            <ns1:r>
+              <ns1:rPr sz="2600" b="1">
+                <ns1:solidFill>
+                  <ns1:srgbClr val="F8FBFF"/>
+                </ns1:solidFill>
+                <ns1:latin typeface="Microsoft YaHei"/>
+                <ns1:ea typeface="Microsoft YaHei"/>
+                <ns1:cs typeface="Microsoft YaHei"/>
+              </ns1:rPr>
+              <ns1:t>智储云控如何服务一栋办公楼？</ns1:t>
+            </ns1:r>
+            <ns1:endParaRPr sz="2600"/>
+          </ns1:p>
+        </ns0:txBody>
+      </ns0:sp>
+      <ns0:sp>
+        <ns0:nvSpPr>
+          <ns0:cNvPr id="5" name="Text 3">
+            <ns1:extLst>
+              <ns1:ext uri="{FF2B5EF4-FFF2-40B4-BE49-F238E27FC236}">
+                <ns2:creationId id="{D36B021D-783F-4A04-AC90-9D9DA3E352B5}"/>
+              </ns1:ext>
+            </ns1:extLst>
+          </ns0:cNvPr>
+          <ns0:cNvSpPr>
+            <ns1:spLocks noGrp="1"/>
+          </ns0:cNvSpPr>
+          <ns0:nvPr/>
+        </ns0:nvSpPr>
+        <ns0:spPr>
+          <ns1:xfrm>
+            <ns1:off x="585216" y="1078992"/>
+            <ns1:ext cx="10698480" cy="365760"/>
+          </ns1:xfrm>
+          <ns1:prstGeom prst="rect">
+            <ns1:avLst/>
+          </ns1:prstGeom>
+          <ns1:noFill/>
+        </ns0:spPr>
+        <ns0:txBody>
+          <ns1:bodyPr wrap="square" lIns="0" tIns="0" rIns="0" bIns="0" anchor="ctr">
+            <ns1:normAutofit fontScale="100000"/>
+          </ns1:bodyPr>
+          <ns1:lstStyle/>
+          <ns1:p>
+            <ns1:pPr marL="0" indent="0">
+              <ns1:buNone/>
+            </ns1:pPr>
+            <ns1:r>
+              <ns1:rPr sz="1240">
+                <ns1:solidFill>
+                  <ns1:srgbClr val="9DB0C2"/>
+                </ns1:solidFill>
+                <ns1:latin typeface="Microsoft YaHei"/>
+                <ns1:ea typeface="Microsoft YaHei"/>
+                <ns1:cs typeface="Microsoft YaHei"/>
+              </ns1:rPr>
+              <ns1:t>使用者：楼宇能源管理人员与储能方案评估人员</ns1:t>
+            </ns1:r>
+            <ns1:endParaRPr sz="1240"/>
+          </ns1:p>
+        </ns0:txBody>
+      </ns0:sp>
+      <ns0:sp>
+        <ns0:nvSpPr>
+          <ns0:cNvPr id="6" name="Shape 4">
+            <ns1:extLst>
+              <ns1:ext uri="{FF2B5EF4-FFF2-40B4-BE49-F238E27FC236}">
+                <ns2:creationId id="{ABF7048D-0C41-4AA6-BC0B-22AB650C3CDF}"/>
+              </ns1:ext>
+            </ns1:extLst>
+          </ns0:cNvPr>
+          <ns0:cNvSpPr>
+            <ns1:spLocks noGrp="1"/>
+          </ns0:cNvSpPr>
+          <ns0:nvPr/>
+        </ns0:nvSpPr>
+        <ns0:spPr>
+          <ns1:xfrm>
+            <ns1:off x="694944" y="1545336"/>
+            <ns1:ext cx="10808208" cy="3968496"/>
+          </ns1:xfrm>
+          <ns1:prstGeom prst="roundRect">
+            <ns1:avLst>
+              <ns1:gd name="adj" fmla="val 2074"/>
+            </ns1:avLst>
+          </ns1:prstGeom>
+          <ns1:solidFill>
+            <ns1:srgbClr val="FFFFFF"/>
+          </ns1:solidFill>
+          <ns1:ln w="10160">
+            <ns1:solidFill>
+              <ns1:srgbClr val="E2E8F0"/>
+            </ns1:solidFill>
+            <ns1:prstDash val="solid"/>
+          </ns1:ln>
+          <ns1:effectLst>
+            <ns1:outerShdw blurRad="19050" dist="50800" dir="2700000" sx="100000" sy="100000" kx="0" ky="0" algn="bl" rotWithShape="0">
+              <ns1:srgbClr val="000000">
+                <ns1:alpha val="16000"/>
+              </ns1:srgbClr>
+            </ns1:outerShdw>
+          </ns1:effectLst>
+        </ns0:spPr>
+      </ns0:sp>
+      <ns0:sp>
+        <ns0:nvSpPr>
+          <ns0:cNvPr id="8" name="Shape 5">
+            <ns1:extLst>
+              <ns1:ext uri="{FF2B5EF4-FFF2-40B4-BE49-F238E27FC236}">
+                <ns2:creationId id="{B3BA0DA8-9EBE-4305-ABF2-5701B9A52BB6}"/>
+              </ns1:ext>
+            </ns1:extLst>
+          </ns0:cNvPr>
+          <ns0:cNvSpPr>
+            <ns1:spLocks noGrp="1"/>
+          </ns0:cNvSpPr>
+          <ns0:nvPr/>
+        </ns0:nvSpPr>
+        <ns0:spPr>
+          <ns1:xfrm>
+            <ns1:off x="2834640" y="1691640"/>
+            <ns1:ext cx="6537960" cy="393192"/>
+          </ns1:xfrm>
+          <ns1:prstGeom prst="rect">
+            <ns1:avLst/>
+          </ns1:prstGeom>
+          <ns1:solidFill>
+            <ns1:srgbClr val="FFFFFF"/>
+          </ns1:solidFill>
+          <ns1:ln w="12700">
+            <ns1:solidFill>
+              <ns1:srgbClr val="FFFFFF">
+                <ns1:alpha val="0"/>
+              </ns1:srgbClr>
+            </ns1:solidFill>
+            <ns1:prstDash val="solid"/>
+          </ns1:ln>
+        </ns0:spPr>
+      </ns0:sp>
+      <ns0:sp>
+        <ns0:nvSpPr>
+          <ns0:cNvPr id="9" name="Text 6">
+            <ns1:extLst>
+              <ns1:ext uri="{FF2B5EF4-FFF2-40B4-BE49-F238E27FC236}">
+                <ns2:creationId id="{1B0C4640-88FF-4AE0-9BBD-23183E8159EE}"/>
+              </ns1:ext>
+            </ns1:extLst>
+          </ns0:cNvPr>
+          <ns0:cNvSpPr>
+            <ns1:spLocks noGrp="1"/>
+          </ns0:cNvSpPr>
+          <ns0:nvPr/>
+        </ns0:nvSpPr>
+        <ns0:spPr>
+          <ns1:xfrm>
+            <ns1:off x="2834640" y="1773936"/>
+            <ns1:ext cx="6537960" cy="219456"/>
+          </ns1:xfrm>
+          <ns1:prstGeom prst="rect">
+            <ns1:avLst/>
+          </ns1:prstGeom>
+          <ns1:noFill/>
+        </ns0:spPr>
+        <ns0:txBody>
+          <ns1:bodyPr wrap="square" lIns="0" tIns="0" rIns="0" bIns="0" anchor="ctr"/>
+          <ns1:lstStyle/>
+          <ns1:p>
+            <ns1:pPr marL="0" indent="0" algn="ctr">
+              <ns1:buNone/>
+            </ns1:pPr>
+            <ns1:r>
+              <ns1:rPr sz="1300" b="1">
+                <ns1:solidFill>
+                  <ns1:srgbClr val="18212B"/>
+                </ns1:solidFill>
+                <ns1:latin typeface="Arial"/>
+                <ns1:ea typeface="Arial"/>
+                <ns1:cs typeface="Arial"/>
+              </ns1:rPr>
+              <ns1:t>办公楼储能削峰的使用闭环</ns1:t>
+            </ns1:r>
+            <ns1:endParaRPr sz="1300"/>
+          </ns1:p>
+        </ns0:txBody>
+      </ns0:sp>
+      <ns0:sp>
+        <ns0:nvSpPr>
+          <ns0:cNvPr id="10" name="Shape 7">
+            <ns1:extLst>
+              <ns1:ext uri="{FF2B5EF4-FFF2-40B4-BE49-F238E27FC236}">
+                <ns2:creationId id="{5AD10904-A4CC-4EA8-BF7B-120E06CEFB43}"/>
+              </ns1:ext>
+            </ns1:extLst>
+          </ns0:cNvPr>
+          <ns0:cNvSpPr>
+            <ns1:spLocks noGrp="1"/>
+          </ns0:cNvSpPr>
+          <ns0:nvPr/>
+        </ns0:nvSpPr>
+        <ns0:spPr>
+          <ns1:xfrm>
+            <ns1:off x="868680" y="5596128"/>
+            <ns1:ext cx="2212848" cy="292608"/>
+          </ns1:xfrm>
+          <ns1:prstGeom prst="roundRect">
+            <ns1:avLst>
+              <ns1:gd name="adj" fmla="val 18750"/>
+            </ns1:avLst>
+          </ns1:prstGeom>
+          <ns1:solidFill>
+            <ns1:srgbClr val="173A54"/>
+          </ns1:solidFill>
+          <ns1:ln w="12700">
+            <ns1:solidFill>
+              <ns1:srgbClr val="173A54">
+                <ns1:alpha val="0"/>
+              </ns1:srgbClr>
+            </ns1:solidFill>
+            <ns1:prstDash val="solid"/>
+          </ns1:ln>
+        </ns0:spPr>
+      </ns0:sp>
+      <ns0:sp>
+        <ns0:nvSpPr>
+          <ns0:cNvPr id="11" name="Text 8">
+            <ns1:extLst>
+              <ns1:ext uri="{FF2B5EF4-FFF2-40B4-BE49-F238E27FC236}">
+                <ns2:creationId id="{8417B8FF-EF17-43EB-AC31-0797B8DC7230}"/>
+              </ns1:ext>
+            </ns1:extLst>
+          </ns0:cNvPr>
+          <ns0:cNvSpPr>
+            <ns1:spLocks noGrp="1"/>
+          </ns0:cNvSpPr>
+          <ns0:nvPr/>
+        </ns0:nvSpPr>
+        <ns0:spPr>
+          <ns1:xfrm>
+            <ns1:off x="941832" y="5637276"/>
+            <ns1:ext cx="2066544" cy="182880"/>
+          </ns1:xfrm>
+          <ns1:prstGeom prst="rect">
+            <ns1:avLst/>
+          </ns1:prstGeom>
+          <ns1:noFill/>
+        </ns0:spPr>
+        <ns0:txBody>
+          <ns1:bodyPr wrap="square" lIns="0" tIns="0" rIns="0" bIns="0" anchor="ctr">
+            <ns1:normAutofit fontScale="100000"/>
+          </ns1:bodyPr>
+          <ns1:lstStyle/>
+          <ns1:p>
+            <ns1:pPr marL="0" indent="0" algn="ctr">
+              <ns1:buNone/>
+            </ns1:pPr>
+            <ns1:r>
+              <ns1:rPr sz="850" b="1">
+                <ns1:solidFill>
+                  <ns1:srgbClr val="24C7FF"/>
+                </ns1:solidFill>
+                <ns1:latin typeface="Microsoft YaHei"/>
+                <ns1:ea typeface="Microsoft YaHei"/>
+                <ns1:cs typeface="Microsoft YaHei"/>
+              </ns1:rPr>
+              <ns1:t>流程示意</ns1:t>
+            </ns1:r>
+            <ns1:endParaRPr sz="850"/>
+          </ns1:p>
+        </ns0:txBody>
+      </ns0:sp>
+      <ns0:sp>
+        <ns0:nvSpPr>
+          <ns0:cNvPr id="12" name="Text 9">
+            <ns1:extLst>
+              <ns1:ext uri="{FF2B5EF4-FFF2-40B4-BE49-F238E27FC236}">
+                <ns2:creationId id="{DD6D5970-464C-4E55-AEE6-086E0C394666}"/>
+              </ns1:ext>
+            </ns1:extLst>
+          </ns0:cNvPr>
+          <ns0:cNvSpPr>
+            <ns1:spLocks noGrp="1"/>
+          </ns0:cNvSpPr>
+          <ns0:nvPr/>
+        </ns0:nvSpPr>
+        <ns0:spPr>
+          <ns1:xfrm>
+            <ns1:off x="3273552" y="5605272"/>
+            <ns1:ext cx="7726680" cy="292608"/>
+          </ns1:xfrm>
+          <ns1:prstGeom prst="rect">
+            <ns1:avLst/>
+          </ns1:prstGeom>
+          <ns1:noFill/>
+        </ns0:spPr>
+        <ns0:txBody>
+          <ns1:bodyPr wrap="square" lIns="0" tIns="0" rIns="0" bIns="0" anchor="ctr">
+            <ns1:normAutofit fontScale="100000"/>
+          </ns1:bodyPr>
+          <ns1:lstStyle/>
+          <ns1:p>
+            <ns1:pPr marL="0" indent="0">
+              <ns1:buNone/>
+            </ns1:pPr>
+            <ns1:r>
+              <ns1:rPr sz="1080">
+                <ns1:solidFill>
+                  <ns1:srgbClr val="A9B9C8"/>
+                </ns1:solidFill>
+                <ns1:latin typeface="Microsoft YaHei"/>
+                <ns1:ea typeface="Microsoft YaHei"/>
+                <ns1:cs typeface="Microsoft YaHei"/>
+              </ns1:rPr>
+              <ns1:t>关键问题：有限的电池电量，是否留给了真正的峰值时段？</ns1:t>
+            </ns1:r>
+            <ns1:endParaRPr sz="1080"/>
+          </ns1:p>
+        </ns0:txBody>
+      </ns0:sp>
+      <ns0:sp>
+        <ns0:nvSpPr>
+          <ns0:cNvPr id="13" name="Text 10">
+            <ns1:extLst>
+              <ns1:ext uri="{FF2B5EF4-FFF2-40B4-BE49-F238E27FC236}">
+                <ns2:creationId id="{7BBD1FF8-E503-450B-A9B1-742C636E2E69}"/>
+              </ns1:ext>
+            </ns1:extLst>
+          </ns0:cNvPr>
+          <ns0:cNvSpPr>
+            <ns1:spLocks noGrp="1"/>
+          </ns0:cNvSpPr>
+          <ns0:nvPr/>
+        </ns0:nvSpPr>
+        <ns0:spPr>
+          <ns1:xfrm>
+            <ns1:off x="566928" y="6153912"/>
+            <ns1:ext cx="10744200" cy="146304"/>
+          </ns1:xfrm>
+          <ns1:prstGeom prst="rect">
+            <ns1:avLst/>
+          </ns1:prstGeom>
+          <ns1:noFill/>
+        </ns0:spPr>
+        <ns0:txBody>
+          <ns1:bodyPr wrap="square" lIns="0" tIns="0" rIns="0" bIns="0" anchor="ctr">
+            <ns1:normAutofit fontScale="100000"/>
+          </ns1:bodyPr>
+          <ns1:lstStyle/>
+          <ns1:p>
+            <ns1:pPr marL="0" indent="0">
+              <ns1:buNone/>
+            </ns1:pPr>
+            <ns1:r>
+              <ns1:rPr sz="670">
+                <ns1:solidFill>
+                  <ns1:srgbClr val="597087"/>
+                </ns1:solidFill>
+                <ns1:latin typeface="Arial"/>
+                <ns1:ea typeface="Arial"/>
+                <ns1:cs typeface="Arial"/>
+              </ns1:rPr>
+              <ns1:t>应用设计示意；电表接入与设备执行尚未实现</ns1:t>
+            </ns1:r>
+            <ns1:endParaRPr sz="670"/>
+          </ns1:p>
+        </ns0:txBody>
+      </ns0:sp>
+      <ns0:sp>
+        <ns0:nvSpPr>
+          <ns0:cNvPr id="14" name="Text 11">
+            <ns1:extLst>
+              <ns1:ext uri="{FF2B5EF4-FFF2-40B4-BE49-F238E27FC236}">
+                <ns2:creationId id="{F5FB8004-7847-461D-82EF-4C43880FC965}"/>
+              </ns1:ext>
+            </ns1:extLst>
+          </ns0:cNvPr>
+          <ns0:cNvSpPr>
+            <ns1:spLocks noGrp="1"/>
+          </ns0:cNvSpPr>
+          <ns0:nvPr/>
+        </ns0:nvSpPr>
+        <ns0:spPr>
+          <ns1:xfrm>
+            <ns1:off x="566928" y="6437376"/>
+            <ns1:ext cx="10332720" cy="164592"/>
+          </ns1:xfrm>
+          <ns1:prstGeom prst="rect">
+            <ns1:avLst/>
+          </ns1:prstGeom>
+          <ns1:noFill/>
+        </ns0:spPr>
+        <ns0:txBody>
+          <ns1:bodyPr wrap="square" lIns="0" tIns="0" rIns="0" bIns="0" anchor="ctr">
+            <ns1:normAutofit fontScale="100000"/>
+          </ns1:bodyPr>
+          <ns1:lstStyle/>
+          <ns1:p>
+            <ns1:pPr marL="0" indent="0">
+              <ns1:buNone/>
+            </ns1:pPr>
+            <ns1:r>
+              <ns1:rPr sz="750">
+                <ns1:solidFill>
+                  <ns1:srgbClr val="6F8295"/>
+                </ns1:solidFill>
+                <ns1:latin typeface="Microsoft YaHei"/>
+                <ns1:ea typeface="Microsoft YaHei"/>
+                <ns1:cs typeface="Microsoft YaHei"/>
+              </ns1:rPr>
+              <ns1:t>智储云控 · DOEF | 8 栋办公建筑仿真实验</ns1:t>
+            </ns1:r>
+            <ns1:endParaRPr sz="750"/>
+          </ns1:p>
+        </ns0:txBody>
+      </ns0:sp>
+      <ns0:sp>
+        <ns0:nvSpPr>
+          <ns0:cNvPr id="25" name="Slide Number Placeholder 0">
+            <ns1:extLst>
+              <ns1:ext uri="{FF2B5EF4-FFF2-40B4-BE49-F238E27FC236}">
+                <ns2:creationId id="{F55361AA-503C-4F79-B931-C15DB3DCC0CD}"/>
+              </ns1:ext>
+            </ns1:extLst>
+          </ns0:cNvPr>
+          <ns0:cNvSpPr>
+            <ns1:spLocks noGrp="1"/>
+          </ns0:cNvSpPr>
+          <ns0:nvPr>
+            <ns0:ph type="sldNum" idx="4294967295"/>
+          </ns0:nvPr>
+        </ns0:nvSpPr>
+        <ns0:spPr>
+          <ns1:xfrm>
+            <ns1:off x="11475720" y="6446520"/>
+            <ns1:ext cx="411480" cy="164592"/>
+          </ns1:xfrm>
+          <ns1:prstGeom prst="rect">
+            <ns1:avLst/>
+          </ns1:prstGeom>
+        </ns0:spPr>
+        <ns0:txBody>
+          <ns1:bodyPr/>
+          <ns1:lstStyle>
+            <ns1:lvl1pPr>
+              <ns1:buNone/>
+              <ns1:defRPr sz="800">
+                <ns1:solidFill>
+                  <ns1:srgbClr val="6F8295"/>
+                </ns1:solidFill>
+                <ns1:latin typeface="Arial"/>
+                <ns1:ea typeface="Arial"/>
+                <ns1:cs typeface="Arial"/>
+              </ns1:defRPr>
+            </ns1:lvl1pPr>
+          </ns1:lstStyle>
+          <ns1:p>
+            <ns1:pPr algn="r">
+              <ns1:buNone/>
+            </ns1:pPr>
+            <ns1:fld id="{F7021451-1387-4CA6-816F-3879F97B5CBC}" type="slidenum">
+              <ns1:rPr b="0"/>
+              <ns1:t>3</ns1:t>
+            </ns1:fld>
+            <ns1:endParaRPr/>
+          </ns1:p>
+        </ns0:txBody>
+      </ns0:sp>
+      <ns0:sp>
+        <ns0:nvSpPr>
+          <ns0:cNvPr id="27" name="">
+            <ns1:extLst>
+              <ns1:ext uri="{FF2B5EF4-FFF2-40B4-BE49-F238E27FC236}">
+                <ns2:creationId id="{992A3A8E-8BD9-41F6-B39D-F0877E1C1FA0}"/>
+              </ns1:ext>
+            </ns1:extLst>
+          </ns0:cNvPr>
+          <ns0:cNvSpPr>
+            <ns1:spLocks noGrp="1"/>
+          </ns0:cNvSpPr>
+          <ns0:nvPr/>
+        </ns0:nvSpPr>
+        <ns0:spPr>
+          <ns1:xfrm>
+            <ns1:off x="1028700" y="2647950"/>
+            <ns1:ext cx="1790700" cy="419100"/>
+          </ns1:xfrm>
+          <ns1:prstGeom prst="rect">
+            <ns1:avLst/>
+          </ns1:prstGeom>
+          <ns1:noFill/>
+          <ns1:ln w="0">
+            <ns1:noFill/>
+          </ns1:ln>
+        </ns0:spPr>
+        <ns0:txBody>
+          <ns1:bodyPr lIns="28575" tIns="19050" rIns="28575" bIns="19050" anchor="ctr">
+            <ns1:noAutofit/>
+          </ns1:bodyPr>
+          <ns1:lstStyle/>
+          <ns1:p>
+            <ns1:pPr algn="ctr">
+              <ns1:defRPr sz="1725">
+                <ns1:solidFill>
+                  <ns1:srgbClr val="18212B"/>
+                </ns1:solidFill>
+                <ns1:latin typeface="Microsoft YaHei"/>
+                <ns1:ea typeface="Microsoft YaHei"/>
+                <ns1:cs typeface="Microsoft YaHei"/>
+              </ns1:defRPr>
+            </ns1:pPr>
+            <ns1:r>
+              <ns1:rPr sz="1725">
+                <ns1:solidFill>
+                  <ns1:srgbClr val="18212B"/>
+                </ns1:solidFill>
+                <ns1:latin typeface="Microsoft YaHei"/>
+                <ns1:ea typeface="Microsoft YaHei"/>
+                <ns1:cs typeface="Microsoft YaHei"/>
+              </ns1:rPr>
+              <ns1:t>智能电表 / EMS</ns1:t>
+            </ns1:r>
+          </ns1:p>
+        </ns0:txBody>
+      </ns0:sp>
+      <ns0:sp>
+        <ns0:nvSpPr>
+          <ns0:cNvPr id="28" name="">
+            <ns1:extLst>
+              <ns1:ext uri="{FF2B5EF4-FFF2-40B4-BE49-F238E27FC236}">
+                <ns2:creationId id="{0BEDDCEA-29F0-4502-A7AE-AC15936B6F2F}"/>
+              </ns1:ext>
+            </ns1:extLst>
+          </ns0:cNvPr>
+          <ns0:cNvSpPr>
+            <ns1:spLocks noGrp="1"/>
+          </ns0:cNvSpPr>
+          <ns0:nvPr/>
+        </ns0:nvSpPr>
+        <ns0:spPr>
+          <ns1:xfrm>
+            <ns1:off x="1028700" y="3105150"/>
+            <ns1:ext cx="1790700" cy="438150"/>
+          </ns1:xfrm>
+          <ns1:prstGeom prst="rect">
+            <ns1:avLst/>
+          </ns1:prstGeom>
+          <ns1:noFill/>
+          <ns1:ln w="0">
+            <ns1:noFill/>
+          </ns1:ln>
+        </ns0:spPr>
+        <ns0:txBody>
+          <ns1:bodyPr lIns="28575" tIns="19050" rIns="28575" bIns="19050" anchor="ctr">
+            <ns1:noAutofit/>
+          </ns1:bodyPr>
+          <ns1:lstStyle/>
+          <ns1:p>
+            <ns1:pPr algn="ctr">
+              <ns1:defRPr sz="1350">
+                <ns1:solidFill>
+                  <ns1:srgbClr val="18212B"/>
+                </ns1:solidFill>
+                <ns1:latin typeface="Microsoft YaHei"/>
+                <ns1:ea typeface="Microsoft YaHei"/>
+                <ns1:cs typeface="Microsoft YaHei"/>
+              </ns1:defRPr>
+            </ns1:pPr>
+            <ns1:r>
+              <ns1:rPr sz="1350">
+                <ns1:solidFill>
+                  <ns1:srgbClr val="18212B"/>
+                </ns1:solidFill>
+                <ns1:latin typeface="Microsoft YaHei"/>
+                <ns1:ea typeface="Microsoft YaHei"/>
+                <ns1:cs typeface="Microsoft YaHei"/>
+              </ns1:rPr>
+              <ns1:t>历史小时级负荷</ns1:t>
+            </ns1:r>
+          </ns1:p>
+        </ns0:txBody>
+      </ns0:sp>
+      <ns0:sp>
+        <ns0:nvSpPr>
+          <ns0:cNvPr id="29" name="">
+            <ns1:extLst>
+              <ns1:ext uri="{FF2B5EF4-FFF2-40B4-BE49-F238E27FC236}">
+                <ns2:creationId id="{0C326CC9-E186-492D-952E-3743646B3A9F}"/>
+              </ns1:ext>
+            </ns1:extLst>
+          </ns0:cNvPr>
+          <ns0:cNvSpPr>
+            <ns1:spLocks noGrp="1"/>
+          </ns0:cNvSpPr>
+          <ns0:nvPr/>
+        </ns0:nvSpPr>
+        <ns0:spPr>
+          <ns1:xfrm>
+            <ns1:off x="1028700" y="3638550"/>
+            <ns1:ext cx="1790700" cy="323850"/>
+          </ns1:xfrm>
+          <ns1:prstGeom prst="rect">
+            <ns1:avLst/>
+          </ns1:prstGeom>
+          <ns1:noFill/>
+          <ns1:ln w="0">
+            <ns1:noFill/>
+          </ns1:ln>
+        </ns0:spPr>
+        <ns0:txBody>
+          <ns1:bodyPr lIns="28575" tIns="19050" rIns="28575" bIns="19050" anchor="ctr">
+            <ns1:noAutofit/>
+          </ns1:bodyPr>
+          <ns1:lstStyle/>
+          <ns1:p>
+            <ns1:pPr algn="ctr">
+              <ns1:defRPr sz="1200">
+                <ns1:solidFill>
+                  <ns1:srgbClr val="A65E10"/>
+                </ns1:solidFill>
+                <ns1:latin typeface="Microsoft YaHei"/>
+                <ns1:ea typeface="Microsoft YaHei"/>
+                <ns1:cs typeface="Microsoft YaHei"/>
+              </ns1:defRPr>
+            </ns1:pPr>
+            <ns1:r>
+              <ns1:rPr sz="1200">
+                <ns1:solidFill>
+                  <ns1:srgbClr val="A65E10"/>
+                </ns1:solidFill>
+                <ns1:latin typeface="Microsoft YaHei"/>
+                <ns1:ea typeface="Microsoft YaHei"/>
+                <ns1:cs typeface="Microsoft YaHei"/>
+              </ns1:rPr>
+              <ns1:t>现场接入待实现</ns1:t>
+            </ns1:r>
+          </ns1:p>
+        </ns0:txBody>
+      </ns0:sp>
+      <ns0:sp>
+        <ns0:nvSpPr>
+          <ns0:cNvPr id="30" name="">
+            <ns1:extLst>
+              <ns1:ext uri="{FF2B5EF4-FFF2-40B4-BE49-F238E27FC236}">
+                <ns2:creationId id="{C7375BBE-D37B-492F-B578-89E5EF0ADBE2}"/>
+              </ns1:ext>
+            </ns1:extLst>
+          </ns0:cNvPr>
+          <ns0:cNvSpPr>
+            <ns1:spLocks noGrp="1"/>
+          </ns0:cNvSpPr>
+          <ns0:nvPr/>
+        </ns0:nvSpPr>
+        <ns0:spPr>
+          <ns1:xfrm>
+            <ns1:off x="2819400" y="3009900"/>
+            <ns1:ext cx="266700" cy="381000"/>
+          </ns1:xfrm>
+          <ns1:prstGeom prst="rect">
+            <ns1:avLst/>
+          </ns1:prstGeom>
+          <ns1:noFill/>
+          <ns1:ln w="0">
+            <ns1:noFill/>
+          </ns1:ln>
+        </ns0:spPr>
+        <ns0:txBody>
+          <ns1:bodyPr lIns="28575" tIns="19050" rIns="28575" bIns="19050" anchor="ctr">
+            <ns1:noAutofit/>
+          </ns1:bodyPr>
+          <ns1:lstStyle/>
+          <ns1:p>
+            <ns1:pPr algn="ctr">
+              <ns1:defRPr sz="1800">
+                <ns1:solidFill>
+                  <ns1:srgbClr val="18212B"/>
+                </ns1:solidFill>
+                <ns1:latin typeface="Microsoft YaHei"/>
+                <ns1:ea typeface="Microsoft YaHei"/>
+                <ns1:cs typeface="Microsoft YaHei"/>
+              </ns1:defRPr>
+            </ns1:pPr>
+            <ns1:r>
+              <ns1:rPr sz="1800">
+                <ns1:solidFill>
+                  <ns1:srgbClr val="18212B"/>
+                </ns1:solidFill>
+                <ns1:latin typeface="Microsoft YaHei"/>
+                <ns1:ea typeface="Microsoft YaHei"/>
+                <ns1:cs typeface="Microsoft YaHei"/>
+              </ns1:rPr>
+              <ns1:t>→</ns1:t>
+            </ns1:r>
+          </ns1:p>
+        </ns0:txBody>
+      </ns0:sp>
+      <ns0:sp>
+        <ns0:nvSpPr>
+          <ns0:cNvPr id="31" name="">
+            <ns1:extLst>
+              <ns1:ext uri="{FF2B5EF4-FFF2-40B4-BE49-F238E27FC236}">
+                <ns2:creationId id="{477B5872-23B5-43B9-B031-11CE075A0E6E}"/>
+              </ns1:ext>
+            </ns1:extLst>
+          </ns0:cNvPr>
+          <ns0:cNvSpPr>
+            <ns1:spLocks noGrp="1"/>
+          </ns0:cNvSpPr>
+          <ns0:nvPr/>
+        </ns0:nvSpPr>
+        <ns0:spPr>
+          <ns1:xfrm>
+            <ns1:off x="3086100" y="2647950"/>
+            <ns1:ext cx="1790700" cy="419100"/>
+          </ns1:xfrm>
+          <ns1:prstGeom prst="rect">
+            <ns1:avLst/>
+          </ns1:prstGeom>
+          <ns1:noFill/>
+          <ns1:ln w="0">
+            <ns1:noFill/>
+          </ns1:ln>
+        </ns0:spPr>
+        <ns0:txBody>
+          <ns1:bodyPr lIns="28575" tIns="19050" rIns="28575" bIns="19050" anchor="ctr">
+            <ns1:noAutofit/>
+          </ns1:bodyPr>
+          <ns1:lstStyle/>
+          <ns1:p>
+            <ns1:pPr algn="ctr">
+              <ns1:defRPr sz="1725">
+                <ns1:solidFill>
+                  <ns1:srgbClr val="18212B"/>
+                </ns1:solidFill>
+                <ns1:latin typeface="Microsoft YaHei"/>
+                <ns1:ea typeface="Microsoft YaHei"/>
+                <ns1:cs typeface="Microsoft YaHei"/>
+              </ns1:defRPr>
+            </ns1:pPr>
+            <ns1:r>
+              <ns1:rPr sz="1725">
+                <ns1:solidFill>
+                  <ns1:srgbClr val="18212B"/>
+                </ns1:solidFill>
+                <ns1:latin typeface="Microsoft YaHei"/>
+                <ns1:ea typeface="Microsoft YaHei"/>
+                <ns1:cs typeface="Microsoft YaHei"/>
+              </ns1:rPr>
+              <ns1:t>智储云控</ns1:t>
+            </ns1:r>
+          </ns1:p>
+        </ns0:txBody>
+      </ns0:sp>
+      <ns0:sp>
+        <ns0:nvSpPr>
+          <ns0:cNvPr id="32" name="">
+            <ns1:extLst>
+              <ns1:ext uri="{FF2B5EF4-FFF2-40B4-BE49-F238E27FC236}">
+                <ns2:creationId id="{99E2FB3B-73C1-41C0-9F9D-A78B2BC324D0}"/>
+              </ns1:ext>
+            </ns1:extLst>
+          </ns0:cNvPr>
+          <ns0:cNvSpPr>
+            <ns1:spLocks noGrp="1"/>
+          </ns0:cNvSpPr>
+          <ns0:nvPr/>
+        </ns0:nvSpPr>
+        <ns0:spPr>
+          <ns1:xfrm>
+            <ns1:off x="3086100" y="3105150"/>
+            <ns1:ext cx="1790700" cy="438150"/>
+          </ns1:xfrm>
+          <ns1:prstGeom prst="rect">
+            <ns1:avLst/>
+          </ns1:prstGeom>
+          <ns1:noFill/>
+          <ns1:ln w="0">
+            <ns1:noFill/>
+          </ns1:ln>
+        </ns0:spPr>
+        <ns0:txBody>
+          <ns1:bodyPr lIns="28575" tIns="19050" rIns="28575" bIns="19050" anchor="ctr">
+            <ns1:noAutofit/>
+          </ns1:bodyPr>
+          <ns1:lstStyle/>
+          <ns1:p>
+            <ns1:pPr algn="ctr">
+              <ns1:defRPr sz="1350">
+                <ns1:solidFill>
+                  <ns1:srgbClr val="18212B"/>
+                </ns1:solidFill>
+                <ns1:latin typeface="Microsoft YaHei"/>
+                <ns1:ea typeface="Microsoft YaHei"/>
+                <ns1:cs typeface="Microsoft YaHei"/>
+              </ns1:defRPr>
+            </ns1:pPr>
+            <ns1:r>
+              <ns1:rPr sz="1350">
+                <ns1:solidFill>
+                  <ns1:srgbClr val="18212B"/>
+                </ns1:solidFill>
+                <ns1:latin typeface="Microsoft YaHei"/>
+                <ns1:ea typeface="Microsoft YaHei"/>
+                <ns1:cs typeface="Microsoft YaHei"/>
+              </ns1:rPr>
+              <ns1:t>DOEF 负荷预测</ns1:t>
+            </ns1:r>
+          </ns1:p>
+        </ns0:txBody>
+      </ns0:sp>
+      <ns0:sp>
+        <ns0:nvSpPr>
+          <ns0:cNvPr id="33" name="">
+            <ns1:extLst>
+              <ns1:ext uri="{FF2B5EF4-FFF2-40B4-BE49-F238E27FC236}">
+                <ns2:creationId id="{2CD6C537-E45E-4CB4-8F9C-E00BFEB770C9}"/>
+              </ns1:ext>
+            </ns1:extLst>
+          </ns0:cNvPr>
+          <ns0:cNvSpPr>
+            <ns1:spLocks noGrp="1"/>
+          </ns0:cNvSpPr>
+          <ns0:nvPr/>
+        </ns0:nvSpPr>
+        <ns0:spPr>
+          <ns1:xfrm>
+            <ns1:off x="3086100" y="3638550"/>
+            <ns1:ext cx="1790700" cy="323850"/>
+          </ns1:xfrm>
+          <ns1:prstGeom prst="rect">
+            <ns1:avLst/>
+          </ns1:prstGeom>
+          <ns1:noFill/>
+          <ns1:ln w="0">
+            <ns1:noFill/>
+          </ns1:ln>
+        </ns0:spPr>
+        <ns0:txBody>
+          <ns1:bodyPr lIns="28575" tIns="19050" rIns="28575" bIns="19050" anchor="ctr">
+            <ns1:noAutofit/>
+          </ns1:bodyPr>
+          <ns1:lstStyle/>
+          <ns1:p>
+            <ns1:pPr algn="ctr">
+              <ns1:defRPr sz="1200">
+                <ns1:solidFill>
+                  <ns1:srgbClr val="087BA5"/>
+                </ns1:solidFill>
+                <ns1:latin typeface="Microsoft YaHei"/>
+                <ns1:ea typeface="Microsoft YaHei"/>
+                <ns1:cs typeface="Microsoft YaHei"/>
+              </ns1:defRPr>
+            </ns1:pPr>
+            <ns1:r>
+              <ns1:rPr sz="1200">
+                <ns1:solidFill>
+                  <ns1:srgbClr val="087BA5"/>
+                </ns1:solidFill>
+                <ns1:latin typeface="Microsoft YaHei"/>
+                <ns1:ea typeface="Microsoft YaHei"/>
+                <ns1:cs typeface="Microsoft YaHei"/>
+              </ns1:rPr>
+              <ns1:t>离线预测已实现</ns1:t>
+            </ns1:r>
+          </ns1:p>
+        </ns0:txBody>
+      </ns0:sp>
+      <ns0:sp>
+        <ns0:nvSpPr>
+          <ns0:cNvPr id="34" name="">
+            <ns1:extLst>
+              <ns1:ext uri="{FF2B5EF4-FFF2-40B4-BE49-F238E27FC236}">
+                <ns2:creationId id="{6EE32FAA-FE0F-48CB-BA29-F65402CC156A}"/>
+              </ns1:ext>
+            </ns1:extLst>
+          </ns0:cNvPr>
+          <ns0:cNvSpPr>
+            <ns1:spLocks noGrp="1"/>
+          </ns0:cNvSpPr>
+          <ns0:nvPr/>
+        </ns0:nvSpPr>
+        <ns0:spPr>
+          <ns1:xfrm>
+            <ns1:off x="4876800" y="3009900"/>
+            <ns1:ext cx="266700" cy="381000"/>
+          </ns1:xfrm>
+          <ns1:prstGeom prst="rect">
+            <ns1:avLst/>
+          </ns1:prstGeom>
+          <ns1:noFill/>
+          <ns1:ln w="0">
+            <ns1:noFill/>
+          </ns1:ln>
+        </ns0:spPr>
+        <ns0:txBody>
+          <ns1:bodyPr lIns="28575" tIns="19050" rIns="28575" bIns="19050" anchor="ctr">
+            <ns1:noAutofit/>
+          </ns1:bodyPr>
+          <ns1:lstStyle/>
+          <ns1:p>
+            <ns1:pPr algn="ctr">
+              <ns1:defRPr sz="1800">
+                <ns1:solidFill>
+                  <ns1:srgbClr val="18212B"/>
+                </ns1:solidFill>
+                <ns1:latin typeface="Microsoft YaHei"/>
+                <ns1:ea typeface="Microsoft YaHei"/>
+                <ns1:cs typeface="Microsoft YaHei"/>
+              </ns1:defRPr>
+            </ns1:pPr>
+            <ns1:r>
+              <ns1:rPr sz="1800">
+                <ns1:solidFill>
+                  <ns1:srgbClr val="18212B"/>
+                </ns1:solidFill>
+                <ns1:latin typeface="Microsoft YaHei"/>
+                <ns1:ea typeface="Microsoft YaHei"/>
+                <ns1:cs typeface="Microsoft YaHei"/>
+              </ns1:rPr>
+              <ns1:t>→</ns1:t>
+            </ns1:r>
+          </ns1:p>
+        </ns0:txBody>
+      </ns0:sp>
+      <ns0:sp>
+        <ns0:nvSpPr>
+          <ns0:cNvPr id="35" name="">
+            <ns1:extLst>
+              <ns1:ext uri="{FF2B5EF4-FFF2-40B4-BE49-F238E27FC236}">
+                <ns2:creationId id="{71BC1AC2-272F-4100-B575-A84B5271809A}"/>
+              </ns1:ext>
+            </ns1:extLst>
+          </ns0:cNvPr>
+          <ns0:cNvSpPr>
+            <ns1:spLocks noGrp="1"/>
+          </ns0:cNvSpPr>
+          <ns0:nvPr/>
+        </ns0:nvSpPr>
+        <ns0:spPr>
+          <ns1:xfrm>
+            <ns1:off x="5143500" y="2647950"/>
+            <ns1:ext cx="1790700" cy="419100"/>
+          </ns1:xfrm>
+          <ns1:prstGeom prst="rect">
+            <ns1:avLst/>
+          </ns1:prstGeom>
+          <ns1:noFill/>
+          <ns1:ln w="0">
+            <ns1:noFill/>
+          </ns1:ln>
+        </ns0:spPr>
+        <ns0:txBody>
+          <ns1:bodyPr lIns="28575" tIns="19050" rIns="28575" bIns="19050" anchor="ctr">
+            <ns1:noAutofit/>
+          </ns1:bodyPr>
+          <ns1:lstStyle/>
+          <ns1:p>
+            <ns1:pPr algn="ctr">
+              <ns1:defRPr sz="1725">
+                <ns1:solidFill>
+                  <ns1:srgbClr val="18212B"/>
+                </ns1:solidFill>
+                <ns1:latin typeface="Microsoft YaHei"/>
+                <ns1:ea typeface="Microsoft YaHei"/>
+                <ns1:cs typeface="Microsoft YaHei"/>
+              </ns1:defRPr>
+            </ns1:pPr>
+            <ns1:r>
+              <ns1:rPr sz="1725">
+                <ns1:solidFill>
+                  <ns1:srgbClr val="18212B"/>
+                </ns1:solidFill>
+                <ns1:latin typeface="Microsoft YaHei"/>
+                <ns1:ea typeface="Microsoft YaHei"/>
+                <ns1:cs typeface="Microsoft YaHei"/>
+              </ns1:rPr>
+              <ns1:t>储能优化</ns1:t>
+            </ns1:r>
+          </ns1:p>
+        </ns0:txBody>
+      </ns0:sp>
+      <ns0:sp>
+        <ns0:nvSpPr>
+          <ns0:cNvPr id="36" name="">
+            <ns1:extLst>
+              <ns1:ext uri="{FF2B5EF4-FFF2-40B4-BE49-F238E27FC236}">
+                <ns2:creationId id="{5779A976-9BD8-4105-9DED-5F8071A834E1}"/>
+              </ns1:ext>
+            </ns1:extLst>
+          </ns0:cNvPr>
+          <ns0:cNvSpPr>
+            <ns1:spLocks noGrp="1"/>
+          </ns0:cNvSpPr>
+          <ns0:nvPr/>
+        </ns0:nvSpPr>
+        <ns0:spPr>
+          <ns1:xfrm>
+            <ns1:off x="5143500" y="3105150"/>
+            <ns1:ext cx="1790700" cy="438150"/>
+          </ns1:xfrm>
+          <ns1:prstGeom prst="rect">
+            <ns1:avLst/>
+          </ns1:prstGeom>
+          <ns1:noFill/>
+          <ns1:ln w="0">
+            <ns1:noFill/>
+          </ns1:ln>
+        </ns0:spPr>
+        <ns0:txBody>
+          <ns1:bodyPr lIns="28575" tIns="19050" rIns="28575" bIns="19050" anchor="ctr">
+            <ns1:noAutofit/>
+          </ns1:bodyPr>
+          <ns1:lstStyle/>
+          <ns1:p>
+            <ns1:pPr algn="ctr">
+              <ns1:defRPr sz="1350">
+                <ns1:solidFill>
+                  <ns1:srgbClr val="18212B"/>
+                </ns1:solidFill>
+                <ns1:latin typeface="Microsoft YaHei"/>
+                <ns1:ea typeface="Microsoft YaHei"/>
+                <ns1:cs typeface="Microsoft YaHei"/>
+              </ns1:defRPr>
+            </ns1:pPr>
+            <ns1:r>
+              <ns1:rPr sz="1350">
+                <ns1:solidFill>
+                  <ns1:srgbClr val="18212B"/>
+                </ns1:solidFill>
+                <ns1:latin typeface="Microsoft YaHei"/>
+                <ns1:ea typeface="Microsoft YaHei"/>
+                <ns1:cs typeface="Microsoft YaHei"/>
+              </ns1:rPr>
+              <ns1:t>24 h 充放电计划</ns1:t>
+            </ns1:r>
+          </ns1:p>
+        </ns0:txBody>
+      </ns0:sp>
+      <ns0:sp>
+        <ns0:nvSpPr>
+          <ns0:cNvPr id="37" name="">
+            <ns1:extLst>
+              <ns1:ext uri="{FF2B5EF4-FFF2-40B4-BE49-F238E27FC236}">
+                <ns2:creationId id="{B44819D6-E091-4FCD-A626-74127EF7E319}"/>
+              </ns1:ext>
+            </ns1:extLst>
+          </ns0:cNvPr>
+          <ns0:cNvSpPr>
+            <ns1:spLocks noGrp="1"/>
+          </ns0:cNvSpPr>
+          <ns0:nvPr/>
+        </ns0:nvSpPr>
+        <ns0:spPr>
+          <ns1:xfrm>
+            <ns1:off x="5143500" y="3638550"/>
+            <ns1:ext cx="1790700" cy="323850"/>
+          </ns1:xfrm>
+          <ns1:prstGeom prst="rect">
+            <ns1:avLst/>
+          </ns1:prstGeom>
+          <ns1:noFill/>
+          <ns1:ln w="0">
+            <ns1:noFill/>
+          </ns1:ln>
+        </ns0:spPr>
+        <ns0:txBody>
+          <ns1:bodyPr lIns="28575" tIns="19050" rIns="28575" bIns="19050" anchor="ctr">
+            <ns1:noAutofit/>
+          </ns1:bodyPr>
+          <ns1:lstStyle/>
+          <ns1:p>
+            <ns1:pPr algn="ctr">
+              <ns1:defRPr sz="1200">
+                <ns1:solidFill>
+                  <ns1:srgbClr val="087BA5"/>
+                </ns1:solidFill>
+                <ns1:latin typeface="Microsoft YaHei"/>
+                <ns1:ea typeface="Microsoft YaHei"/>
+                <ns1:cs typeface="Microsoft YaHei"/>
+              </ns1:defRPr>
+            </ns1:pPr>
+            <ns1:r>
+              <ns1:rPr sz="1200">
+                <ns1:solidFill>
+                  <ns1:srgbClr val="087BA5"/>
+                </ns1:solidFill>
+                <ns1:latin typeface="Microsoft YaHei"/>
+                <ns1:ea typeface="Microsoft YaHei"/>
+                <ns1:cs typeface="Microsoft YaHei"/>
+              </ns1:rPr>
+              <ns1:t>约束求解已实现</ns1:t>
+            </ns1:r>
+          </ns1:p>
+        </ns0:txBody>
+      </ns0:sp>
+      <ns0:sp>
+        <ns0:nvSpPr>
+          <ns0:cNvPr id="38" name="">
+            <ns1:extLst>
+              <ns1:ext uri="{FF2B5EF4-FFF2-40B4-BE49-F238E27FC236}">
+                <ns2:creationId id="{3A3AF439-AEF7-4C10-AD07-CDD7CBE4E25B}"/>
+              </ns1:ext>
+            </ns1:extLst>
+          </ns0:cNvPr>
+          <ns0:cNvSpPr>
+            <ns1:spLocks noGrp="1"/>
+          </ns0:cNvSpPr>
+          <ns0:nvPr/>
+        </ns0:nvSpPr>
+        <ns0:spPr>
+          <ns1:xfrm>
+            <ns1:off x="6934200" y="3009900"/>
+            <ns1:ext cx="266700" cy="381000"/>
+          </ns1:xfrm>
+          <ns1:prstGeom prst="rect">
+            <ns1:avLst/>
+          </ns1:prstGeom>
+          <ns1:noFill/>
+          <ns1:ln w="0">
+            <ns1:noFill/>
+          </ns1:ln>
+        </ns0:spPr>
+        <ns0:txBody>
+          <ns1:bodyPr lIns="28575" tIns="19050" rIns="28575" bIns="19050" anchor="ctr">
+            <ns1:noAutofit/>
+          </ns1:bodyPr>
+          <ns1:lstStyle/>
+          <ns1:p>
+            <ns1:pPr algn="ctr">
+              <ns1:defRPr sz="1800">
+                <ns1:solidFill>
+                  <ns1:srgbClr val="18212B"/>
+                </ns1:solidFill>
+                <ns1:latin typeface="Microsoft YaHei"/>
+                <ns1:ea typeface="Microsoft YaHei"/>
+                <ns1:cs typeface="Microsoft YaHei"/>
+              </ns1:defRPr>
+            </ns1:pPr>
+            <ns1:r>
+              <ns1:rPr sz="1800">
+                <ns1:solidFill>
+                  <ns1:srgbClr val="18212B"/>
+                </ns1:solidFill>
+                <ns1:latin typeface="Microsoft YaHei"/>
+                <ns1:ea typeface="Microsoft YaHei"/>
+                <ns1:cs typeface="Microsoft YaHei"/>
+              </ns1:rPr>
+              <ns1:t>→</ns1:t>
+            </ns1:r>
+          </ns1:p>
+        </ns0:txBody>
+      </ns0:sp>
+      <ns0:sp>
+        <ns0:nvSpPr>
+          <ns0:cNvPr id="39" name="">
+            <ns1:extLst>
+              <ns1:ext uri="{FF2B5EF4-FFF2-40B4-BE49-F238E27FC236}">
+                <ns2:creationId id="{C8136A3D-BA67-4D37-8E5A-42FC42AFF0CB}"/>
+              </ns1:ext>
+            </ns1:extLst>
+          </ns0:cNvPr>
+          <ns0:cNvSpPr>
+            <ns1:spLocks noGrp="1"/>
+          </ns0:cNvSpPr>
+          <ns0:nvPr/>
+        </ns0:nvSpPr>
+        <ns0:spPr>
+          <ns1:xfrm>
+            <ns1:off x="7200900" y="2647950"/>
+            <ns1:ext cx="1790700" cy="419100"/>
+          </ns1:xfrm>
+          <ns1:prstGeom prst="rect">
+            <ns1:avLst/>
+          </ns1:prstGeom>
+          <ns1:noFill/>
+          <ns1:ln w="0">
+            <ns1:noFill/>
+          </ns1:ln>
+        </ns0:spPr>
+        <ns0:txBody>
+          <ns1:bodyPr lIns="28575" tIns="19050" rIns="28575" bIns="19050" anchor="ctr">
+            <ns1:noAutofit/>
+          </ns1:bodyPr>
+          <ns1:lstStyle/>
+          <ns1:p>
+            <ns1:pPr algn="ctr">
+              <ns1:defRPr sz="1725">
+                <ns1:solidFill>
+                  <ns1:srgbClr val="18212B"/>
+                </ns1:solidFill>
+                <ns1:latin typeface="Microsoft YaHei"/>
+                <ns1:ea typeface="Microsoft YaHei"/>
+                <ns1:cs typeface="Microsoft YaHei"/>
+              </ns1:defRPr>
+            </ns1:pPr>
+            <ns1:r>
+              <ns1:rPr sz="1725">
+                <ns1:solidFill>
+                  <ns1:srgbClr val="18212B"/>
+                </ns1:solidFill>
+                <ns1:latin typeface="Microsoft YaHei"/>
+                <ns1:ea typeface="Microsoft YaHei"/>
+                <ns1:cs typeface="Microsoft YaHei"/>
+              </ns1:rPr>
+              <ns1:t>储能系统</ns1:t>
+            </ns1:r>
+          </ns1:p>
+        </ns0:txBody>
+      </ns0:sp>
+      <ns0:sp>
+        <ns0:nvSpPr>
+          <ns0:cNvPr id="40" name="">
+            <ns1:extLst>
+              <ns1:ext uri="{FF2B5EF4-FFF2-40B4-BE49-F238E27FC236}">
+                <ns2:creationId id="{063C9149-B697-4D25-AF6B-151650BE7D24}"/>
+              </ns1:ext>
+            </ns1:extLst>
+          </ns0:cNvPr>
+          <ns0:cNvSpPr>
+            <ns1:spLocks noGrp="1"/>
+          </ns0:cNvSpPr>
+          <ns0:nvPr/>
+        </ns0:nvSpPr>
+        <ns0:spPr>
+          <ns1:xfrm>
+            <ns1:off x="7200900" y="3105150"/>
+            <ns1:ext cx="1790700" cy="438150"/>
+          </ns1:xfrm>
+          <ns1:prstGeom prst="rect">
+            <ns1:avLst/>
+          </ns1:prstGeom>
+          <ns1:noFill/>
+          <ns1:ln w="0">
+            <ns1:noFill/>
+          </ns1:ln>
+        </ns0:spPr>
+        <ns0:txBody>
+          <ns1:bodyPr lIns="28575" tIns="19050" rIns="28575" bIns="19050" anchor="ctr">
+            <ns1:noAutofit/>
+          </ns1:bodyPr>
+          <ns1:lstStyle/>
+          <ns1:p>
+            <ns1:pPr algn="ctr">
+              <ns1:defRPr sz="1350">
+                <ns1:solidFill>
+                  <ns1:srgbClr val="18212B"/>
+                </ns1:solidFill>
+                <ns1:latin typeface="Microsoft YaHei"/>
+                <ns1:ea typeface="Microsoft YaHei"/>
+                <ns1:cs typeface="Microsoft YaHei"/>
+              </ns1:defRPr>
+            </ns1:pPr>
+            <ns1:r>
+              <ns1:rPr sz="1350">
+                <ns1:solidFill>
+                  <ns1:srgbClr val="18212B"/>
+                </ns1:solidFill>
+                <ns1:latin typeface="Microsoft YaHei"/>
+                <ns1:ea typeface="Microsoft YaHei"/>
+                <ns1:cs typeface="Microsoft YaHei"/>
+              </ns1:rPr>
+              <ns1:t>充电 / 放电</ns1:t>
+            </ns1:r>
+          </ns1:p>
+        </ns0:txBody>
+      </ns0:sp>
+      <ns0:sp>
+        <ns0:nvSpPr>
+          <ns0:cNvPr id="41" name="">
+            <ns1:extLst>
+              <ns1:ext uri="{FF2B5EF4-FFF2-40B4-BE49-F238E27FC236}">
+                <ns2:creationId id="{5E406E77-ED9B-4932-A485-AE802BDA65C0}"/>
+              </ns1:ext>
+            </ns1:extLst>
+          </ns0:cNvPr>
+          <ns0:cNvSpPr>
+            <ns1:spLocks noGrp="1"/>
+          </ns0:cNvSpPr>
+          <ns0:nvPr/>
+        </ns0:nvSpPr>
+        <ns0:spPr>
+          <ns1:xfrm>
+            <ns1:off x="7200900" y="3638550"/>
+            <ns1:ext cx="1790700" cy="323850"/>
+          </ns1:xfrm>
+          <ns1:prstGeom prst="rect">
+            <ns1:avLst/>
+          </ns1:prstGeom>
+          <ns1:noFill/>
+          <ns1:ln w="0">
+            <ns1:noFill/>
+          </ns1:ln>
+        </ns0:spPr>
+        <ns0:txBody>
+          <ns1:bodyPr lIns="28575" tIns="19050" rIns="28575" bIns="19050" anchor="ctr">
+            <ns1:noAutofit/>
+          </ns1:bodyPr>
+          <ns1:lstStyle/>
+          <ns1:p>
+            <ns1:pPr algn="ctr">
+              <ns1:defRPr sz="1200">
+                <ns1:solidFill>
+                  <ns1:srgbClr val="A65E10"/>
+                </ns1:solidFill>
+                <ns1:latin typeface="Microsoft YaHei"/>
+                <ns1:ea typeface="Microsoft YaHei"/>
+                <ns1:cs typeface="Microsoft YaHei"/>
+              </ns1:defRPr>
+            </ns1:pPr>
+            <ns1:r>
+              <ns1:rPr sz="1200">
+                <ns1:solidFill>
+                  <ns1:srgbClr val="A65E10"/>
+                </ns1:solidFill>
+                <ns1:latin typeface="Microsoft YaHei"/>
+                <ns1:ea typeface="Microsoft YaHei"/>
+                <ns1:cs typeface="Microsoft YaHei"/>
+              </ns1:rPr>
+              <ns1:t>设备执行待实现</ns1:t>
+            </ns1:r>
+          </ns1:p>
+        </ns0:txBody>
+      </ns0:sp>
+      <ns0:sp>
+        <ns0:nvSpPr>
+          <ns0:cNvPr id="42" name="">
+            <ns1:extLst>
+              <ns1:ext uri="{FF2B5EF4-FFF2-40B4-BE49-F238E27FC236}">
+                <ns2:creationId id="{15086434-C9BB-4958-AAB6-6EE7549A8660}"/>
+              </ns1:ext>
+            </ns1:extLst>
+          </ns0:cNvPr>
+          <ns0:cNvSpPr>
+            <ns1:spLocks noGrp="1"/>
+          </ns0:cNvSpPr>
+          <ns0:nvPr/>
+        </ns0:nvSpPr>
+        <ns0:spPr>
+          <ns1:xfrm>
+            <ns1:off x="8991600" y="3009900"/>
+            <ns1:ext cx="266700" cy="381000"/>
+          </ns1:xfrm>
+          <ns1:prstGeom prst="rect">
+            <ns1:avLst/>
+          </ns1:prstGeom>
+          <ns1:noFill/>
+          <ns1:ln w="0">
+            <ns1:noFill/>
+          </ns1:ln>
+        </ns0:spPr>
+        <ns0:txBody>
+          <ns1:bodyPr lIns="28575" tIns="19050" rIns="28575" bIns="19050" anchor="ctr">
+            <ns1:noAutofit/>
+          </ns1:bodyPr>
+          <ns1:lstStyle/>
+          <ns1:p>
+            <ns1:pPr algn="ctr">
+              <ns1:defRPr sz="1800">
+                <ns1:solidFill>
+                  <ns1:srgbClr val="18212B"/>
+                </ns1:solidFill>
+                <ns1:latin typeface="Microsoft YaHei"/>
+                <ns1:ea typeface="Microsoft YaHei"/>
+                <ns1:cs typeface="Microsoft YaHei"/>
+              </ns1:defRPr>
+            </ns1:pPr>
+            <ns1:r>
+              <ns1:rPr sz="1800">
+                <ns1:solidFill>
+                  <ns1:srgbClr val="18212B"/>
+                </ns1:solidFill>
+                <ns1:latin typeface="Microsoft YaHei"/>
+                <ns1:ea typeface="Microsoft YaHei"/>
+                <ns1:cs typeface="Microsoft YaHei"/>
+              </ns1:rPr>
+              <ns1:t>→</ns1:t>
+            </ns1:r>
+          </ns1:p>
+        </ns0:txBody>
+      </ns0:sp>
+      <ns0:sp>
+        <ns0:nvSpPr>
+          <ns0:cNvPr id="43" name="">
+            <ns1:extLst>
+              <ns1:ext uri="{FF2B5EF4-FFF2-40B4-BE49-F238E27FC236}">
+                <ns2:creationId id="{52080826-D089-4720-81FF-1ECDD6D58604}"/>
+              </ns1:ext>
+            </ns1:extLst>
+          </ns0:cNvPr>
+          <ns0:cNvSpPr>
+            <ns1:spLocks noGrp="1"/>
+          </ns0:cNvSpPr>
+          <ns0:nvPr/>
+        </ns0:nvSpPr>
+        <ns0:spPr>
+          <ns1:xfrm>
+            <ns1:off x="9258300" y="2647950"/>
+            <ns1:ext cx="1790700" cy="419100"/>
+          </ns1:xfrm>
+          <ns1:prstGeom prst="rect">
+            <ns1:avLst/>
+          </ns1:prstGeom>
+          <ns1:noFill/>
+          <ns1:ln w="0">
+            <ns1:noFill/>
+          </ns1:ln>
+        </ns0:spPr>
+        <ns0:txBody>
+          <ns1:bodyPr lIns="28575" tIns="19050" rIns="28575" bIns="19050" anchor="ctr">
+            <ns1:noAutofit/>
+          </ns1:bodyPr>
+          <ns1:lstStyle/>
+          <ns1:p>
+            <ns1:pPr algn="ctr">
+              <ns1:defRPr sz="1725">
+                <ns1:solidFill>
+                  <ns1:srgbClr val="18212B"/>
+                </ns1:solidFill>
+                <ns1:latin typeface="Microsoft YaHei"/>
+                <ns1:ea typeface="Microsoft YaHei"/>
+                <ns1:cs typeface="Microsoft YaHei"/>
+              </ns1:defRPr>
+            </ns1:pPr>
+            <ns1:r>
+              <ns1:rPr sz="1725">
+                <ns1:solidFill>
+                  <ns1:srgbClr val="18212B"/>
+                </ns1:solidFill>
+                <ns1:latin typeface="Microsoft YaHei"/>
+                <ns1:ea typeface="Microsoft YaHei"/>
+                <ns1:cs typeface="Microsoft YaHei"/>
+              </ns1:rPr>
+              <ns1:t>建筑电网侧</ns1:t>
+            </ns1:r>
+          </ns1:p>
+        </ns0:txBody>
+      </ns0:sp>
+      <ns0:sp>
+        <ns0:nvSpPr>
+          <ns0:cNvPr id="44" name="">
+            <ns1:extLst>
+              <ns1:ext uri="{FF2B5EF4-FFF2-40B4-BE49-F238E27FC236}">
+                <ns2:creationId id="{DD0CD58A-68B2-4015-A543-9DEDD97D90F0}"/>
+              </ns1:ext>
+            </ns1:extLst>
+          </ns0:cNvPr>
+          <ns0:cNvSpPr>
+            <ns1:spLocks noGrp="1"/>
+          </ns0:cNvSpPr>
+          <ns0:nvPr/>
+        </ns0:nvSpPr>
+        <ns0:spPr>
+          <ns1:xfrm>
+            <ns1:off x="9258300" y="3105150"/>
+            <ns1:ext cx="1790700" cy="438150"/>
+          </ns1:xfrm>
+          <ns1:prstGeom prst="rect">
+            <ns1:avLst/>
+          </ns1:prstGeom>
+          <ns1:noFill/>
+          <ns1:ln w="0">
+            <ns1:noFill/>
+          </ns1:ln>
+        </ns0:spPr>
+        <ns0:txBody>
+          <ns1:bodyPr lIns="28575" tIns="19050" rIns="28575" bIns="19050" anchor="ctr">
+            <ns1:noAutofit/>
+          </ns1:bodyPr>
+          <ns1:lstStyle/>
+          <ns1:p>
+            <ns1:pPr algn="ctr">
+              <ns1:defRPr sz="1350">
+                <ns1:solidFill>
+                  <ns1:srgbClr val="18212B"/>
+                </ns1:solidFill>
+                <ns1:latin typeface="Microsoft YaHei"/>
+                <ns1:ea typeface="Microsoft YaHei"/>
+                <ns1:cs typeface="Microsoft YaHei"/>
+              </ns1:defRPr>
+            </ns1:pPr>
+            <ns1:r>
+              <ns1:rPr sz="1350">
+                <ns1:solidFill>
+                  <ns1:srgbClr val="18212B"/>
+                </ns1:solidFill>
+                <ns1:latin typeface="Microsoft YaHei"/>
+                <ns1:ea typeface="Microsoft YaHei"/>
+                <ns1:cs typeface="Microsoft YaHei"/>
+              </ns1:rPr>
+              <ns1:t>评价最大取电功率</ns1:t>
+            </ns1:r>
+          </ns1:p>
+        </ns0:txBody>
+      </ns0:sp>
+      <ns0:sp>
+        <ns0:nvSpPr>
+          <ns0:cNvPr id="45" name="">
+            <ns1:extLst>
+              <ns1:ext uri="{FF2B5EF4-FFF2-40B4-BE49-F238E27FC236}">
+                <ns2:creationId id="{BDEFA43D-2C36-4695-BDA1-99A8B00BEAA2}"/>
+              </ns1:ext>
+            </ns1:extLst>
+          </ns0:cNvPr>
+          <ns0:cNvSpPr>
+            <ns1:spLocks noGrp="1"/>
+          </ns0:cNvSpPr>
+          <ns0:nvPr/>
+        </ns0:nvSpPr>
+        <ns0:spPr>
+          <ns1:xfrm>
+            <ns1:off x="9258300" y="3638550"/>
+            <ns1:ext cx="1790700" cy="323850"/>
+          </ns1:xfrm>
+          <ns1:prstGeom prst="rect">
+            <ns1:avLst/>
+          </ns1:prstGeom>
+          <ns1:noFill/>
+          <ns1:ln w="0">
+            <ns1:noFill/>
+          </ns1:ln>
+        </ns0:spPr>
+        <ns0:txBody>
+          <ns1:bodyPr lIns="28575" tIns="19050" rIns="28575" bIns="19050" anchor="ctr">
+            <ns1:noAutofit/>
+          </ns1:bodyPr>
+          <ns1:lstStyle/>
+          <ns1:p>
+            <ns1:pPr algn="ctr">
+              <ns1:defRPr sz="1200">
+                <ns1:solidFill>
+                  <ns1:srgbClr val="087BA5"/>
+                </ns1:solidFill>
+                <ns1:latin typeface="Microsoft YaHei"/>
+                <ns1:ea typeface="Microsoft YaHei"/>
+                <ns1:cs typeface="Microsoft YaHei"/>
+              </ns1:defRPr>
+            </ns1:pPr>
+            <ns1:r>
+              <ns1:rPr sz="1200">
+                <ns1:solidFill>
+                  <ns1:srgbClr val="087BA5"/>
+                </ns1:solidFill>
+                <ns1:latin typeface="Microsoft YaHei"/>
+                <ns1:ea typeface="Microsoft YaHei"/>
+                <ns1:cs typeface="Microsoft YaHei"/>
+              </ns1:rPr>
+              <ns1:t>已完成仿真评价</ns1:t>
+            </ns1:r>
+          </ns1:p>
+        </ns0:txBody>
+      </ns0:sp>
+      <ns0:sp>
+        <ns0:nvSpPr>
+          <ns0:cNvPr id="46" name="">
+            <ns1:extLst>
+              <ns1:ext uri="{FF2B5EF4-FFF2-40B4-BE49-F238E27FC236}">
+                <ns2:creationId id="{A6D637B8-5FFE-4C78-9AB9-1BE9AFEBFD83}"/>
+              </ns1:ext>
+            </ns1:extLst>
+          </ns0:cNvPr>
+          <ns0:cNvSpPr>
+            <ns1:spLocks noGrp="1"/>
+          </ns0:cNvSpPr>
+          <ns0:nvPr/>
+        </ns0:nvSpPr>
+        <ns0:spPr>
+          <ns1:xfrm>
+            <ns1:off x="1276350" y="4248150"/>
+            <ns1:ext cx="9620250" cy="400050"/>
+          </ns1:xfrm>
+          <ns1:prstGeom prst="rect">
+            <ns1:avLst/>
+          </ns1:prstGeom>
+          <ns1:noFill/>
+          <ns1:ln w="0">
+            <ns1:noFill/>
+          </ns1:ln>
+        </ns0:spPr>
+        <ns0:txBody>
+          <ns1:bodyPr lIns="28575" tIns="19050" rIns="28575" bIns="19050" anchor="ctr">
+            <ns1:noAutofit/>
+          </ns1:bodyPr>
+          <ns1:lstStyle/>
+          <ns1:p>
+            <ns1:pPr algn="ctr">
+              <ns1:defRPr sz="1575">
+                <ns1:solidFill>
+                  <ns1:srgbClr val="18212B"/>
+                </ns1:solidFill>
+                <ns1:latin typeface="Microsoft YaHei"/>
+                <ns1:ea typeface="Microsoft YaHei"/>
+                <ns1:cs typeface="Microsoft YaHei"/>
+              </ns1:defRPr>
+            </ns1:pPr>
+            <ns1:r>
+              <ns1:rPr sz="1575">
+                <ns1:solidFill>
+                  <ns1:srgbClr val="18212B"/>
+                </ns1:solidFill>
+                <ns1:latin typeface="Microsoft YaHei"/>
+                <ns1:ea typeface="Microsoft YaHei"/>
+                <ns1:cs typeface="Microsoft YaHei"/>
+              </ns1:rPr>
+              <ns1:t>评价反馈：实际负荷与执行回执 → 核对峰值、执行偏差与异常</ns1:t>
+            </ns1:r>
+          </ns1:p>
+        </ns0:txBody>
+      </ns0:sp>
+      <ns0:sp>
+        <ns0:nvSpPr>
+          <ns0:cNvPr id="47" name="">
+            <ns1:extLst>
+              <ns1:ext uri="{FF2B5EF4-FFF2-40B4-BE49-F238E27FC236}">
+                <ns2:creationId id="{0BEC5622-0099-40A1-B62D-59240A4A22FA}"/>
+              </ns1:ext>
+            </ns1:extLst>
+          </ns0:cNvPr>
+          <ns0:cNvSpPr>
+            <ns1:spLocks noGrp="1"/>
+          </ns0:cNvSpPr>
+          <ns0:nvPr/>
+        </ns0:nvSpPr>
+        <ns0:spPr>
+          <ns1:xfrm>
+            <ns1:off x="1276350" y="4743450"/>
+            <ns1:ext cx="9620250" cy="304800"/>
+          </ns1:xfrm>
+          <ns1:prstGeom prst="rect">
+            <ns1:avLst/>
+          </ns1:prstGeom>
+          <ns1:noFill/>
+          <ns1:ln w="0">
+            <ns1:noFill/>
+          </ns1:ln>
+        </ns0:spPr>
+        <ns0:txBody>
+          <ns1:bodyPr lIns="28575" tIns="19050" rIns="28575" bIns="19050" anchor="ctr">
+            <ns1:noAutofit/>
+          </ns1:bodyPr>
+          <ns1:lstStyle/>
+          <ns1:p>
+            <ns1:pPr algn="ctr">
+              <ns1:defRPr sz="1350">
+                <ns1:solidFill>
+                  <ns1:srgbClr val="526373"/>
+                </ns1:solidFill>
+                <ns1:latin typeface="Microsoft YaHei"/>
+                <ns1:ea typeface="Microsoft YaHei"/>
+                <ns1:cs typeface="Microsoft YaHei"/>
+              </ns1:defRPr>
+            </ns1:pPr>
+            <ns1:r>
+              <ns1:rPr sz="1350">
+                <ns1:solidFill>
+                  <ns1:srgbClr val="526373"/>
+                </ns1:solidFill>
+                <ns1:latin typeface="Microsoft YaHei"/>
+                <ns1:ea typeface="Microsoft YaHei"/>
+                <ns1:cs typeface="Microsoft YaHei"/>
+              </ns1:rPr>
+              <ns1:t>当前：冻结实验回放；未来：接入电表、EMS 与 PCS/BMS</ns1:t>
+            </ns1:r>
+          </ns1:p>
+        </ns0:txBody>
+      </ns0:sp>
+    </ns0:spTree>
+    <ns0:extLst>
+      <ns0:ext uri="{BB962C8B-B14F-4D97-AF65-F5344CB8AC3E}">
+        <ns3:creationId val="361802589"/>
+      </ns0:ext>
+    </ns0:extLst>
+  </ns0:cSld>
+</ns0:sld>
 </file>
 
 <file path=ppt/slides/slide4.xml><?xml version="1.0" encoding="utf-8"?>
@@ -31325,7 +32498,7 @@
           <p:cNvPr id="2" name="Text 0">
             <a:extLst xmlns:a="http://schemas.openxmlformats.org/drawingml/2006/main">
               <a:ext uri="{FF2B5EF4-FFF2-40B4-BE49-F238E27FC236}">
-                <a16:creationId xmlns:a16="http://schemas.microsoft.com/office/drawing/2014/main" id="{1D4A7A97-389F-4CEC-AC58-C9F378EEE0D6}"/>
+                <a16:creationId xmlns:a16="http://schemas.microsoft.com/office/drawing/2014/main" id="{3EA57335-B093-42A9-BD60-7A20CB364145}"/>
               </a:ext>
             </a:extLst>
           </p:cNvPr>
@@ -31371,7 +32544,7 @@
           <p:cNvPr id="3" name="Text 1">
             <a:extLst xmlns:a="http://schemas.openxmlformats.org/drawingml/2006/main">
               <a:ext uri="{FF2B5EF4-FFF2-40B4-BE49-F238E27FC236}">
-                <a16:creationId xmlns:a16="http://schemas.microsoft.com/office/drawing/2014/main" id="{0B4A1800-2965-4938-B53D-A0B8876709AC}"/>
+                <a16:creationId xmlns:a16="http://schemas.microsoft.com/office/drawing/2014/main" id="{DA9CE0D5-AC02-4FAF-B65F-CE6B97B83054}"/>
               </a:ext>
             </a:extLst>
           </p:cNvPr>
@@ -31417,7 +32590,7 @@
           <p:cNvPr id="4" name="Text 2">
             <a:extLst xmlns:a="http://schemas.openxmlformats.org/drawingml/2006/main">
               <a:ext uri="{FF2B5EF4-FFF2-40B4-BE49-F238E27FC236}">
-                <a16:creationId xmlns:a16="http://schemas.microsoft.com/office/drawing/2014/main" id="{80FC3F87-0E27-4A40-A5DE-E82C94E8E64F}"/>
+                <a16:creationId xmlns:a16="http://schemas.microsoft.com/office/drawing/2014/main" id="{11BF517C-A76C-4137-BC24-6EDC5DC11833}"/>
               </a:ext>
             </a:extLst>
           </p:cNvPr>
@@ -31465,7 +32638,7 @@
           <p:cNvPr id="5" name="Text 3">
             <a:extLst xmlns:a="http://schemas.openxmlformats.org/drawingml/2006/main">
               <a:ext uri="{FF2B5EF4-FFF2-40B4-BE49-F238E27FC236}">
-                <a16:creationId xmlns:a16="http://schemas.microsoft.com/office/drawing/2014/main" id="{A7612386-32C9-43FA-BC5E-92F3C0ACE14D}"/>
+                <a16:creationId xmlns:a16="http://schemas.microsoft.com/office/drawing/2014/main" id="{1BD83D09-10B2-4FDC-8C34-E8438130C135}"/>
               </a:ext>
             </a:extLst>
           </p:cNvPr>
@@ -31513,7 +32686,7 @@
           <p:cNvPr id="6" name="Text 4">
             <a:extLst xmlns:a="http://schemas.openxmlformats.org/drawingml/2006/main">
               <a:ext uri="{FF2B5EF4-FFF2-40B4-BE49-F238E27FC236}">
-                <a16:creationId xmlns:a16="http://schemas.microsoft.com/office/drawing/2014/main" id="{1503115C-DCD2-4381-813E-2B0CA483D3FE}"/>
+                <a16:creationId xmlns:a16="http://schemas.microsoft.com/office/drawing/2014/main" id="{C13FE7F9-A20A-4DEE-AF2D-B7D0EF3807E1}"/>
               </a:ext>
             </a:extLst>
           </p:cNvPr>
@@ -31559,7 +32732,7 @@
           <p:cNvPr id="7" name="Shape 5">
             <a:extLst xmlns:a="http://schemas.openxmlformats.org/drawingml/2006/main">
               <a:ext uri="{FF2B5EF4-FFF2-40B4-BE49-F238E27FC236}">
-                <a16:creationId xmlns:a16="http://schemas.microsoft.com/office/drawing/2014/main" id="{F7C69C32-2D46-43BC-8A75-55A85501E877}"/>
+                <a16:creationId xmlns:a16="http://schemas.microsoft.com/office/drawing/2014/main" id="{CEDEF5F2-0DD2-4D17-A92D-B7C90DAFF382}"/>
               </a:ext>
             </a:extLst>
           </p:cNvPr>
@@ -31594,7 +32767,7 @@
           <p:cNvPr id="8" name="Text 6">
             <a:extLst xmlns:a="http://schemas.openxmlformats.org/drawingml/2006/main">
               <a:ext uri="{FF2B5EF4-FFF2-40B4-BE49-F238E27FC236}">
-                <a16:creationId xmlns:a16="http://schemas.microsoft.com/office/drawing/2014/main" id="{76BC564A-744D-4B53-B1F6-281AF206418E}"/>
+                <a16:creationId xmlns:a16="http://schemas.microsoft.com/office/drawing/2014/main" id="{DAFF9F2F-B31B-4D66-B452-47D0ACB48E41}"/>
               </a:ext>
             </a:extLst>
           </p:cNvPr>
@@ -31642,7 +32815,7 @@
           <p:cNvPr id="9" name="Shape 7">
             <a:extLst xmlns:a="http://schemas.openxmlformats.org/drawingml/2006/main">
               <a:ext uri="{FF2B5EF4-FFF2-40B4-BE49-F238E27FC236}">
-                <a16:creationId xmlns:a16="http://schemas.microsoft.com/office/drawing/2014/main" id="{E3889FC9-3951-423A-8320-149820FB79E2}"/>
+                <a16:creationId xmlns:a16="http://schemas.microsoft.com/office/drawing/2014/main" id="{0C98E22B-8E0B-4F19-8665-B5FD01B05314}"/>
               </a:ext>
             </a:extLst>
           </p:cNvPr>
@@ -31675,7 +32848,7 @@
           <p:cNvPr id="10" name="Shape 8">
             <a:extLst xmlns:a="http://schemas.openxmlformats.org/drawingml/2006/main">
               <a:ext uri="{FF2B5EF4-FFF2-40B4-BE49-F238E27FC236}">
-                <a16:creationId xmlns:a16="http://schemas.microsoft.com/office/drawing/2014/main" id="{3CD928FC-544F-41A3-9822-3B70122193C3}"/>
+                <a16:creationId xmlns:a16="http://schemas.microsoft.com/office/drawing/2014/main" id="{1F4A701A-42EA-47D4-99A0-8A0BF38EDDAC}"/>
               </a:ext>
             </a:extLst>
           </p:cNvPr>
@@ -31710,7 +32883,7 @@
           <p:cNvPr id="11" name="Text 9">
             <a:extLst xmlns:a="http://schemas.openxmlformats.org/drawingml/2006/main">
               <a:ext uri="{FF2B5EF4-FFF2-40B4-BE49-F238E27FC236}">
-                <a16:creationId xmlns:a16="http://schemas.microsoft.com/office/drawing/2014/main" id="{68066599-AEB2-4C91-B645-39A004E6B5ED}"/>
+                <a16:creationId xmlns:a16="http://schemas.microsoft.com/office/drawing/2014/main" id="{1BA58F39-62D3-4AC9-AE50-3EF48C24899E}"/>
               </a:ext>
             </a:extLst>
           </p:cNvPr>
@@ -31758,7 +32931,7 @@
           <p:cNvPr id="12" name="Shape 10">
             <a:extLst xmlns:a="http://schemas.openxmlformats.org/drawingml/2006/main">
               <a:ext uri="{FF2B5EF4-FFF2-40B4-BE49-F238E27FC236}">
-                <a16:creationId xmlns:a16="http://schemas.microsoft.com/office/drawing/2014/main" id="{5DC1AE88-D31A-4C77-B3B4-74AC6632E6E6}"/>
+                <a16:creationId xmlns:a16="http://schemas.microsoft.com/office/drawing/2014/main" id="{C45B0B72-5238-4E0C-8C50-26BC9F67052B}"/>
               </a:ext>
             </a:extLst>
           </p:cNvPr>
@@ -31791,7 +32964,7 @@
           <p:cNvPr id="13" name="Shape 11">
             <a:extLst xmlns:a="http://schemas.openxmlformats.org/drawingml/2006/main">
               <a:ext uri="{FF2B5EF4-FFF2-40B4-BE49-F238E27FC236}">
-                <a16:creationId xmlns:a16="http://schemas.microsoft.com/office/drawing/2014/main" id="{617940F5-9D27-43C5-B61E-D503D73CFB3B}"/>
+                <a16:creationId xmlns:a16="http://schemas.microsoft.com/office/drawing/2014/main" id="{7F2AB76C-E00C-4C0F-B064-D64116E883B5}"/>
               </a:ext>
             </a:extLst>
           </p:cNvPr>
@@ -31826,7 +32999,7 @@
           <p:cNvPr id="14" name="Text 12">
             <a:extLst xmlns:a="http://schemas.openxmlformats.org/drawingml/2006/main">
               <a:ext uri="{FF2B5EF4-FFF2-40B4-BE49-F238E27FC236}">
-                <a16:creationId xmlns:a16="http://schemas.microsoft.com/office/drawing/2014/main" id="{221A7B1F-04BC-4A07-A03B-1836A14273BF}"/>
+                <a16:creationId xmlns:a16="http://schemas.microsoft.com/office/drawing/2014/main" id="{BCF7C045-7865-4CD3-BA53-C0C55BABFC82}"/>
               </a:ext>
             </a:extLst>
           </p:cNvPr>
@@ -31874,7 +33047,7 @@
           <p:cNvPr id="15" name="Text 13">
             <a:extLst xmlns:a="http://schemas.openxmlformats.org/drawingml/2006/main">
               <a:ext uri="{FF2B5EF4-FFF2-40B4-BE49-F238E27FC236}">
-                <a16:creationId xmlns:a16="http://schemas.microsoft.com/office/drawing/2014/main" id="{D7CC8B58-442D-4381-B866-5A6F44F02BA7}"/>
+                <a16:creationId xmlns:a16="http://schemas.microsoft.com/office/drawing/2014/main" id="{4B8942DC-96EE-426B-983D-241634358931}"/>
               </a:ext>
             </a:extLst>
           </p:cNvPr>
@@ -31920,7 +33093,7 @@
           <p:cNvPr id="16" name="Text 14">
             <a:extLst xmlns:a="http://schemas.openxmlformats.org/drawingml/2006/main">
               <a:ext uri="{FF2B5EF4-FFF2-40B4-BE49-F238E27FC236}">
-                <a16:creationId xmlns:a16="http://schemas.microsoft.com/office/drawing/2014/main" id="{C0AAC8E4-9BBA-4CEA-B4A3-FBB83F95642F}"/>
+                <a16:creationId xmlns:a16="http://schemas.microsoft.com/office/drawing/2014/main" id="{2FD023CB-8C58-445E-AECC-CAE5BFF3B3E4}"/>
               </a:ext>
             </a:extLst>
           </p:cNvPr>
@@ -31966,7 +33139,7 @@
           <p:cNvPr id="17" name="Shape 15">
             <a:extLst xmlns:a="http://schemas.openxmlformats.org/drawingml/2006/main">
               <a:ext uri="{FF2B5EF4-FFF2-40B4-BE49-F238E27FC236}">
-                <a16:creationId xmlns:a16="http://schemas.microsoft.com/office/drawing/2014/main" id="{00108B93-C64F-4B53-8853-68862690926C}"/>
+                <a16:creationId xmlns:a16="http://schemas.microsoft.com/office/drawing/2014/main" id="{1C98EC30-D0EE-44F1-954B-B54400C3A074}"/>
               </a:ext>
             </a:extLst>
           </p:cNvPr>
@@ -32001,7 +33174,7 @@
           <p:cNvPr id="18" name="Text 16">
             <a:extLst xmlns:a="http://schemas.openxmlformats.org/drawingml/2006/main">
               <a:ext uri="{FF2B5EF4-FFF2-40B4-BE49-F238E27FC236}">
-                <a16:creationId xmlns:a16="http://schemas.microsoft.com/office/drawing/2014/main" id="{BD14E977-8DAB-49DF-B0D3-E7DBC8E83251}"/>
+                <a16:creationId xmlns:a16="http://schemas.microsoft.com/office/drawing/2014/main" id="{5D07CF9E-BD29-439E-8535-7B750F6C63C4}"/>
               </a:ext>
             </a:extLst>
           </p:cNvPr>
@@ -32049,7 +33222,7 @@
           <p:cNvPr id="19" name="Shape 17">
             <a:extLst xmlns:a="http://schemas.openxmlformats.org/drawingml/2006/main">
               <a:ext uri="{FF2B5EF4-FFF2-40B4-BE49-F238E27FC236}">
-                <a16:creationId xmlns:a16="http://schemas.microsoft.com/office/drawing/2014/main" id="{A1A08119-5F66-42EF-A124-2CB95F07E2E2}"/>
+                <a16:creationId xmlns:a16="http://schemas.microsoft.com/office/drawing/2014/main" id="{F3357BA4-8A30-4F49-BA68-526B2E323488}"/>
               </a:ext>
             </a:extLst>
           </p:cNvPr>
@@ -32082,7 +33255,7 @@
           <p:cNvPr id="20" name="Shape 18">
             <a:extLst xmlns:a="http://schemas.openxmlformats.org/drawingml/2006/main">
               <a:ext uri="{FF2B5EF4-FFF2-40B4-BE49-F238E27FC236}">
-                <a16:creationId xmlns:a16="http://schemas.microsoft.com/office/drawing/2014/main" id="{822750B3-A552-41DC-B6BE-8E085E5E4E01}"/>
+                <a16:creationId xmlns:a16="http://schemas.microsoft.com/office/drawing/2014/main" id="{F20852AA-8074-445E-808B-84E3B47E296B}"/>
               </a:ext>
             </a:extLst>
           </p:cNvPr>
@@ -32117,7 +33290,7 @@
           <p:cNvPr id="21" name="Text 19">
             <a:extLst xmlns:a="http://schemas.openxmlformats.org/drawingml/2006/main">
               <a:ext uri="{FF2B5EF4-FFF2-40B4-BE49-F238E27FC236}">
-                <a16:creationId xmlns:a16="http://schemas.microsoft.com/office/drawing/2014/main" id="{347F6723-9DAD-47DF-A8D6-15DF099AACF2}"/>
+                <a16:creationId xmlns:a16="http://schemas.microsoft.com/office/drawing/2014/main" id="{E135FF98-27DF-4B94-91F5-0D0C350F0AC8}"/>
               </a:ext>
             </a:extLst>
           </p:cNvPr>
@@ -32165,7 +33338,7 @@
           <p:cNvPr id="22" name="Shape 20">
             <a:extLst xmlns:a="http://schemas.openxmlformats.org/drawingml/2006/main">
               <a:ext uri="{FF2B5EF4-FFF2-40B4-BE49-F238E27FC236}">
-                <a16:creationId xmlns:a16="http://schemas.microsoft.com/office/drawing/2014/main" id="{00BB0F8C-5132-470C-A892-7C8A7177BE96}"/>
+                <a16:creationId xmlns:a16="http://schemas.microsoft.com/office/drawing/2014/main" id="{4E2CFE43-71B8-4D8D-A10B-0435EE843404}"/>
               </a:ext>
             </a:extLst>
           </p:cNvPr>
@@ -32198,7 +33371,7 @@
           <p:cNvPr id="23" name="Shape 21">
             <a:extLst xmlns:a="http://schemas.openxmlformats.org/drawingml/2006/main">
               <a:ext uri="{FF2B5EF4-FFF2-40B4-BE49-F238E27FC236}">
-                <a16:creationId xmlns:a16="http://schemas.microsoft.com/office/drawing/2014/main" id="{06E30AED-10CF-41EE-8223-675545454B72}"/>
+                <a16:creationId xmlns:a16="http://schemas.microsoft.com/office/drawing/2014/main" id="{B94A5A24-6E05-4956-8739-4A585BB7D9C2}"/>
               </a:ext>
             </a:extLst>
           </p:cNvPr>
@@ -32233,7 +33406,7 @@
           <p:cNvPr id="24" name="Text 22">
             <a:extLst xmlns:a="http://schemas.openxmlformats.org/drawingml/2006/main">
               <a:ext uri="{FF2B5EF4-FFF2-40B4-BE49-F238E27FC236}">
-                <a16:creationId xmlns:a16="http://schemas.microsoft.com/office/drawing/2014/main" id="{F2839832-73E8-4E63-8C11-E2BF75CE19AC}"/>
+                <a16:creationId xmlns:a16="http://schemas.microsoft.com/office/drawing/2014/main" id="{2B54D8D4-DAFE-4A28-993F-F8E0FA47DA7D}"/>
               </a:ext>
             </a:extLst>
           </p:cNvPr>
@@ -32281,7 +33454,7 @@
           <p:cNvPr id="25" name="Shape 23">
             <a:extLst xmlns:a="http://schemas.openxmlformats.org/drawingml/2006/main">
               <a:ext uri="{FF2B5EF4-FFF2-40B4-BE49-F238E27FC236}">
-                <a16:creationId xmlns:a16="http://schemas.microsoft.com/office/drawing/2014/main" id="{B6FAB0F5-548A-4077-8529-6779411821E1}"/>
+                <a16:creationId xmlns:a16="http://schemas.microsoft.com/office/drawing/2014/main" id="{C9C1D5D9-248F-41EE-A542-475F23866326}"/>
               </a:ext>
             </a:extLst>
           </p:cNvPr>
@@ -32314,7 +33487,7 @@
           <p:cNvPr id="26" name="Shape 24">
             <a:extLst xmlns:a="http://schemas.openxmlformats.org/drawingml/2006/main">
               <a:ext uri="{FF2B5EF4-FFF2-40B4-BE49-F238E27FC236}">
-                <a16:creationId xmlns:a16="http://schemas.microsoft.com/office/drawing/2014/main" id="{D132E7C8-C8DE-4716-BC55-3331791B5325}"/>
+                <a16:creationId xmlns:a16="http://schemas.microsoft.com/office/drawing/2014/main" id="{C23E14A8-7168-4441-B294-470557FAE3E8}"/>
               </a:ext>
             </a:extLst>
           </p:cNvPr>
@@ -32349,7 +33522,7 @@
           <p:cNvPr id="27" name="Text 25">
             <a:extLst xmlns:a="http://schemas.openxmlformats.org/drawingml/2006/main">
               <a:ext uri="{FF2B5EF4-FFF2-40B4-BE49-F238E27FC236}">
-                <a16:creationId xmlns:a16="http://schemas.microsoft.com/office/drawing/2014/main" id="{4C1A7564-A6BB-4EFF-8AC2-30B784A3BC6C}"/>
+                <a16:creationId xmlns:a16="http://schemas.microsoft.com/office/drawing/2014/main" id="{B8947DDF-E3B2-4B79-8EEB-4267685C5596}"/>
               </a:ext>
             </a:extLst>
           </p:cNvPr>
@@ -32397,7 +33570,7 @@
           <p:cNvPr id="28" name="Text 26">
             <a:extLst xmlns:a="http://schemas.openxmlformats.org/drawingml/2006/main">
               <a:ext uri="{FF2B5EF4-FFF2-40B4-BE49-F238E27FC236}">
-                <a16:creationId xmlns:a16="http://schemas.microsoft.com/office/drawing/2014/main" id="{C5E9F702-CB32-41E8-AD77-ED453177B596}"/>
+                <a16:creationId xmlns:a16="http://schemas.microsoft.com/office/drawing/2014/main" id="{AF887174-F923-4957-89A4-5FFBAE4E35B6}"/>
               </a:ext>
             </a:extLst>
           </p:cNvPr>
@@ -32443,7 +33616,7 @@
           <p:cNvPr id="29" name="Shape 27">
             <a:extLst xmlns:a="http://schemas.openxmlformats.org/drawingml/2006/main">
               <a:ext uri="{FF2B5EF4-FFF2-40B4-BE49-F238E27FC236}">
-                <a16:creationId xmlns:a16="http://schemas.microsoft.com/office/drawing/2014/main" id="{635346E6-D749-43C2-A543-E21A8E5B2BA4}"/>
+                <a16:creationId xmlns:a16="http://schemas.microsoft.com/office/drawing/2014/main" id="{E39EEF5C-BA34-4970-BD6F-01B755E3412A}"/>
               </a:ext>
             </a:extLst>
           </p:cNvPr>
@@ -32474,7 +33647,7 @@
           <p:cNvPr id="30" name="Shape 28">
             <a:extLst xmlns:a="http://schemas.openxmlformats.org/drawingml/2006/main">
               <a:ext uri="{FF2B5EF4-FFF2-40B4-BE49-F238E27FC236}">
-                <a16:creationId xmlns:a16="http://schemas.microsoft.com/office/drawing/2014/main" id="{6168BF94-D69F-4197-8B3B-6FCA19E0E267}"/>
+                <a16:creationId xmlns:a16="http://schemas.microsoft.com/office/drawing/2014/main" id="{2911EE01-DA9F-4752-8865-644E192D02EA}"/>
               </a:ext>
             </a:extLst>
           </p:cNvPr>
@@ -32511,7 +33684,7 @@
           <p:cNvPr id="31" name="Text 29">
             <a:extLst xmlns:a="http://schemas.openxmlformats.org/drawingml/2006/main">
               <a:ext uri="{FF2B5EF4-FFF2-40B4-BE49-F238E27FC236}">
-                <a16:creationId xmlns:a16="http://schemas.microsoft.com/office/drawing/2014/main" id="{AE5DBC79-9B06-4528-BF5A-E1D5DA3EAB5F}"/>
+                <a16:creationId xmlns:a16="http://schemas.microsoft.com/office/drawing/2014/main" id="{D364B11A-54F6-4A84-A38C-78E5B11DAA35}"/>
               </a:ext>
             </a:extLst>
           </p:cNvPr>
@@ -32559,7 +33732,7 @@
           <p:cNvPr id="32" name="Text 30">
             <a:extLst xmlns:a="http://schemas.openxmlformats.org/drawingml/2006/main">
               <a:ext uri="{FF2B5EF4-FFF2-40B4-BE49-F238E27FC236}">
-                <a16:creationId xmlns:a16="http://schemas.microsoft.com/office/drawing/2014/main" id="{2D518F43-087D-4287-AAB7-33E4534ACCF8}"/>
+                <a16:creationId xmlns:a16="http://schemas.microsoft.com/office/drawing/2014/main" id="{740AD635-79D6-412F-A0DD-04F03BD537DD}"/>
               </a:ext>
             </a:extLst>
           </p:cNvPr>
@@ -32605,7 +33778,7 @@
           <p:cNvPr id="33" name="Text 31">
             <a:extLst xmlns:a="http://schemas.openxmlformats.org/drawingml/2006/main">
               <a:ext uri="{FF2B5EF4-FFF2-40B4-BE49-F238E27FC236}">
-                <a16:creationId xmlns:a16="http://schemas.microsoft.com/office/drawing/2014/main" id="{6C194170-F8C7-4655-AF42-F542ECD567AA}"/>
+                <a16:creationId xmlns:a16="http://schemas.microsoft.com/office/drawing/2014/main" id="{831CA16E-C076-41A4-8D59-38215ED9C165}"/>
               </a:ext>
             </a:extLst>
           </p:cNvPr>
@@ -32642,7 +33815,7 @@
                 <a:ea typeface="Microsoft YaHei"/>
                 <a:cs typeface="Microsoft YaHei"/>
               </a:rPr>
-              <a:t>智能云储 · DOEF | 8 栋办公建筑仿真实验</a:t>
+              <a:t>智储云控 · DOEF | 8 栋办公建筑仿真实验</a:t>
             </a:r>
             <a:endParaRPr sz="750"/>
           </a:p>
@@ -32653,7 +33826,7 @@
           <p:cNvPr id="34" name="Slide Number Placeholder 0">
             <a:extLst xmlns:a="http://schemas.openxmlformats.org/drawingml/2006/main">
               <a:ext uri="{FF2B5EF4-FFF2-40B4-BE49-F238E27FC236}">
-                <a16:creationId xmlns:a16="http://schemas.microsoft.com/office/drawing/2014/main" id="{78B16584-ABC9-42B7-8E28-755CA5502E9E}"/>
+                <a16:creationId xmlns:a16="http://schemas.microsoft.com/office/drawing/2014/main" id="{0B05E880-FFD4-4F19-958E-0C3C81ADE405}"/>
               </a:ext>
             </a:extLst>
           </p:cNvPr>
@@ -32703,7 +33876,7 @@
     </p:spTree>
     <p:extLst>
       <p:ext uri="{BB962C8B-B14F-4D97-AF65-F5344CB8AC3E}">
-        <p14:creationId xmlns:p14="http://schemas.microsoft.com/office/powerpoint/2010/main" val="153818731"/>
+        <p14:creationId xmlns:p14="http://schemas.microsoft.com/office/powerpoint/2010/main" val="186158113"/>
       </p:ext>
     </p:extLst>
   </p:cSld>
@@ -32727,7 +33900,7 @@
           <p:cNvPr id="2" name="Text 0">
             <a:extLst xmlns:a="http://schemas.openxmlformats.org/drawingml/2006/main">
               <a:ext uri="{FF2B5EF4-FFF2-40B4-BE49-F238E27FC236}">
-                <a16:creationId xmlns:a16="http://schemas.microsoft.com/office/drawing/2014/main" id="{06EBA1F3-046E-418F-B146-AD6C76AF9967}"/>
+                <a16:creationId xmlns:a16="http://schemas.microsoft.com/office/drawing/2014/main" id="{EF91466B-52D6-4360-B9EC-C32125E582D6}"/>
               </a:ext>
             </a:extLst>
           </p:cNvPr>
@@ -32773,7 +33946,7 @@
           <p:cNvPr id="3" name="Text 1">
             <a:extLst xmlns:a="http://schemas.openxmlformats.org/drawingml/2006/main">
               <a:ext uri="{FF2B5EF4-FFF2-40B4-BE49-F238E27FC236}">
-                <a16:creationId xmlns:a16="http://schemas.microsoft.com/office/drawing/2014/main" id="{0480E08B-59A9-4EF3-8077-19E87E99093D}"/>
+                <a16:creationId xmlns:a16="http://schemas.microsoft.com/office/drawing/2014/main" id="{20B17E89-EC50-45CA-9BB0-EB8754F6E60E}"/>
               </a:ext>
             </a:extLst>
           </p:cNvPr>
@@ -32819,7 +33992,7 @@
           <p:cNvPr id="4" name="Text 2">
             <a:extLst xmlns:a="http://schemas.openxmlformats.org/drawingml/2006/main">
               <a:ext uri="{FF2B5EF4-FFF2-40B4-BE49-F238E27FC236}">
-                <a16:creationId xmlns:a16="http://schemas.microsoft.com/office/drawing/2014/main" id="{0991A599-128E-4362-B412-A99F758A87F8}"/>
+                <a16:creationId xmlns:a16="http://schemas.microsoft.com/office/drawing/2014/main" id="{E43E7782-644D-4B77-9658-8A2E86904EF8}"/>
               </a:ext>
             </a:extLst>
           </p:cNvPr>
@@ -32867,7 +34040,7 @@
           <p:cNvPr id="5" name="Text 3">
             <a:extLst xmlns:a="http://schemas.openxmlformats.org/drawingml/2006/main">
               <a:ext uri="{FF2B5EF4-FFF2-40B4-BE49-F238E27FC236}">
-                <a16:creationId xmlns:a16="http://schemas.microsoft.com/office/drawing/2014/main" id="{B2B485CA-9702-4B81-B717-9120C73663E5}"/>
+                <a16:creationId xmlns:a16="http://schemas.microsoft.com/office/drawing/2014/main" id="{8B4671F8-EBC7-4E7B-8512-001048A1925B}"/>
               </a:ext>
             </a:extLst>
           </p:cNvPr>
@@ -32915,7 +34088,7 @@
           <p:cNvPr id="6" name="Shape 4">
             <a:extLst xmlns:a="http://schemas.openxmlformats.org/drawingml/2006/main">
               <a:ext uri="{FF2B5EF4-FFF2-40B4-BE49-F238E27FC236}">
-                <a16:creationId xmlns:a16="http://schemas.microsoft.com/office/drawing/2014/main" id="{1FB4DEAB-A1DF-4CB4-94D5-A1563F83FE65}"/>
+                <a16:creationId xmlns:a16="http://schemas.microsoft.com/office/drawing/2014/main" id="{A318B50D-47BE-4E73-A2F0-BA2FE785A223}"/>
               </a:ext>
             </a:extLst>
           </p:cNvPr>
@@ -32961,7 +34134,7 @@
           <p:nvPr/>
         </p:nvPicPr>
         <p:blipFill>
-          <a:blip xmlns:r="http://schemas.openxmlformats.org/officeDocument/2006/relationships" xmlns:a="http://schemas.openxmlformats.org/drawingml/2006/main" r:embed="R7f2ceb13b4de4f96"/>
+          <a:blip xmlns:r="http://schemas.openxmlformats.org/officeDocument/2006/relationships" xmlns:a="http://schemas.openxmlformats.org/drawingml/2006/main" r:embed="R2f026fe508f0462d"/>
           <a:stretch xmlns:a="http://schemas.openxmlformats.org/drawingml/2006/main">
             <a:fillRect l="0" t="0" r="0" b="0"/>
           </a:stretch>
@@ -32981,7 +34154,7 @@
           <p:cNvPr id="8" name="Text 5">
             <a:extLst xmlns:a="http://schemas.openxmlformats.org/drawingml/2006/main">
               <a:ext uri="{FF2B5EF4-FFF2-40B4-BE49-F238E27FC236}">
-                <a16:creationId xmlns:a16="http://schemas.microsoft.com/office/drawing/2014/main" id="{9358EB5D-5BD8-4481-A526-722BEA81EB57}"/>
+                <a16:creationId xmlns:a16="http://schemas.microsoft.com/office/drawing/2014/main" id="{5EC5FEAB-50BD-4EA7-A18D-46D64FF953E9}"/>
               </a:ext>
             </a:extLst>
           </p:cNvPr>
@@ -33029,7 +34202,7 @@
           <p:cNvPr id="9" name="Text 6">
             <a:extLst xmlns:a="http://schemas.openxmlformats.org/drawingml/2006/main">
               <a:ext uri="{FF2B5EF4-FFF2-40B4-BE49-F238E27FC236}">
-                <a16:creationId xmlns:a16="http://schemas.microsoft.com/office/drawing/2014/main" id="{3188A676-7522-4495-B8C5-35E369DAE8B5}"/>
+                <a16:creationId xmlns:a16="http://schemas.microsoft.com/office/drawing/2014/main" id="{8A4E4AA3-B628-4101-81AC-701ABC75189A}"/>
               </a:ext>
             </a:extLst>
           </p:cNvPr>
@@ -33066,7 +34239,7 @@
                 <a:ea typeface="Microsoft YaHei"/>
                 <a:cs typeface="Microsoft YaHei"/>
               </a:rPr>
-              <a:t>智能云储 · DOEF | 8 栋办公建筑仿真实验</a:t>
+              <a:t>智储云控 · DOEF | 8 栋办公建筑仿真实验</a:t>
             </a:r>
             <a:endParaRPr sz="750"/>
           </a:p>
@@ -33077,7 +34250,7 @@
           <p:cNvPr id="25" name="Slide Number Placeholder 0">
             <a:extLst xmlns:a="http://schemas.openxmlformats.org/drawingml/2006/main">
               <a:ext uri="{FF2B5EF4-FFF2-40B4-BE49-F238E27FC236}">
-                <a16:creationId xmlns:a16="http://schemas.microsoft.com/office/drawing/2014/main" id="{4698328C-1B79-4DB6-9968-1E4D91C1BE12}"/>
+                <a16:creationId xmlns:a16="http://schemas.microsoft.com/office/drawing/2014/main" id="{E382CBE7-EA0F-4EBE-AE14-45E4A437FD88}"/>
               </a:ext>
             </a:extLst>
           </p:cNvPr>
@@ -33127,7 +34300,7 @@
     </p:spTree>
     <p:extLst>
       <p:ext uri="{BB962C8B-B14F-4D97-AF65-F5344CB8AC3E}">
-        <p14:creationId xmlns:p14="http://schemas.microsoft.com/office/powerpoint/2010/main" val="1130292441"/>
+        <p14:creationId xmlns:p14="http://schemas.microsoft.com/office/powerpoint/2010/main" val="1390488984"/>
       </p:ext>
     </p:extLst>
   </p:cSld>
@@ -33151,7 +34324,7 @@
           <p:cNvPr id="2" name="Text 0">
             <a:extLst xmlns:a="http://schemas.openxmlformats.org/drawingml/2006/main">
               <a:ext uri="{FF2B5EF4-FFF2-40B4-BE49-F238E27FC236}">
-                <a16:creationId xmlns:a16="http://schemas.microsoft.com/office/drawing/2014/main" id="{E7C5F7FA-9B6C-4E09-ADB9-4E008E8923FE}"/>
+                <a16:creationId xmlns:a16="http://schemas.microsoft.com/office/drawing/2014/main" id="{D86C9088-763C-4472-A2F1-C0E306999C0C}"/>
               </a:ext>
             </a:extLst>
           </p:cNvPr>
@@ -33197,7 +34370,7 @@
           <p:cNvPr id="3" name="Text 1">
             <a:extLst xmlns:a="http://schemas.openxmlformats.org/drawingml/2006/main">
               <a:ext uri="{FF2B5EF4-FFF2-40B4-BE49-F238E27FC236}">
-                <a16:creationId xmlns:a16="http://schemas.microsoft.com/office/drawing/2014/main" id="{B0330F48-A48E-4760-B30F-6D6E1579BF29}"/>
+                <a16:creationId xmlns:a16="http://schemas.microsoft.com/office/drawing/2014/main" id="{5DD0C47E-3853-4AD2-8092-6F66EFA0259E}"/>
               </a:ext>
             </a:extLst>
           </p:cNvPr>
@@ -33243,7 +34416,7 @@
           <p:cNvPr id="4" name="Text 2">
             <a:extLst xmlns:a="http://schemas.openxmlformats.org/drawingml/2006/main">
               <a:ext uri="{FF2B5EF4-FFF2-40B4-BE49-F238E27FC236}">
-                <a16:creationId xmlns:a16="http://schemas.microsoft.com/office/drawing/2014/main" id="{1CDEF18F-362C-46ED-8DAA-DAB054BD90DF}"/>
+                <a16:creationId xmlns:a16="http://schemas.microsoft.com/office/drawing/2014/main" id="{7BD9A5FE-7B55-493A-AB27-61B49DB0EE05}"/>
               </a:ext>
             </a:extLst>
           </p:cNvPr>
@@ -33291,7 +34464,7 @@
           <p:cNvPr id="5" name="Text 3">
             <a:extLst xmlns:a="http://schemas.openxmlformats.org/drawingml/2006/main">
               <a:ext uri="{FF2B5EF4-FFF2-40B4-BE49-F238E27FC236}">
-                <a16:creationId xmlns:a16="http://schemas.microsoft.com/office/drawing/2014/main" id="{EEA2A9B2-6F37-4C45-8FD2-F87A0C9F70F9}"/>
+                <a16:creationId xmlns:a16="http://schemas.microsoft.com/office/drawing/2014/main" id="{F5BB2FEB-849C-4158-ABBB-6A154F1C357F}"/>
               </a:ext>
             </a:extLst>
           </p:cNvPr>
@@ -33339,7 +34512,7 @@
           <p:cNvPr id="6" name="Shape 4">
             <a:extLst xmlns:a="http://schemas.openxmlformats.org/drawingml/2006/main">
               <a:ext uri="{FF2B5EF4-FFF2-40B4-BE49-F238E27FC236}">
-                <a16:creationId xmlns:a16="http://schemas.microsoft.com/office/drawing/2014/main" id="{34558546-3F44-4DFC-8B92-72D41C851EFF}"/>
+                <a16:creationId xmlns:a16="http://schemas.microsoft.com/office/drawing/2014/main" id="{8C6E2432-6903-458D-A3D6-3596CBEFB40F}"/>
               </a:ext>
             </a:extLst>
           </p:cNvPr>
@@ -33385,7 +34558,7 @@
           <p:nvPr/>
         </p:nvPicPr>
         <p:blipFill>
-          <a:blip xmlns:r="http://schemas.openxmlformats.org/officeDocument/2006/relationships" xmlns:a="http://schemas.openxmlformats.org/drawingml/2006/main" r:embed="R3e3c59ebfdfe4cc7"/>
+          <a:blip xmlns:r="http://schemas.openxmlformats.org/officeDocument/2006/relationships" xmlns:a="http://schemas.openxmlformats.org/drawingml/2006/main" r:embed="R1edc5ae2bf3f4bad"/>
           <a:stretch xmlns:a="http://schemas.openxmlformats.org/drawingml/2006/main">
             <a:fillRect l="0" t="0" r="0" b="0"/>
           </a:stretch>
@@ -33405,7 +34578,7 @@
           <p:cNvPr id="8" name="Shape 5">
             <a:extLst xmlns:a="http://schemas.openxmlformats.org/drawingml/2006/main">
               <a:ext uri="{FF2B5EF4-FFF2-40B4-BE49-F238E27FC236}">
-                <a16:creationId xmlns:a16="http://schemas.microsoft.com/office/drawing/2014/main" id="{7D5E2589-36A4-4910-8EBE-31D0160DDC52}"/>
+                <a16:creationId xmlns:a16="http://schemas.microsoft.com/office/drawing/2014/main" id="{215F038A-048E-4FAD-9DFC-2D978B3B4558}"/>
               </a:ext>
             </a:extLst>
           </p:cNvPr>
@@ -33440,7 +34613,7 @@
           <p:cNvPr id="9" name="Text 6">
             <a:extLst xmlns:a="http://schemas.openxmlformats.org/drawingml/2006/main">
               <a:ext uri="{FF2B5EF4-FFF2-40B4-BE49-F238E27FC236}">
-                <a16:creationId xmlns:a16="http://schemas.microsoft.com/office/drawing/2014/main" id="{32625DA8-ADF0-4E73-BC59-9EE215A41CD0}"/>
+                <a16:creationId xmlns:a16="http://schemas.microsoft.com/office/drawing/2014/main" id="{040D5590-676B-4F22-8A53-87B110F0FFC4}"/>
               </a:ext>
             </a:extLst>
           </p:cNvPr>
@@ -33488,7 +34661,7 @@
           <p:cNvPr id="10" name="Text 7">
             <a:extLst xmlns:a="http://schemas.openxmlformats.org/drawingml/2006/main">
               <a:ext uri="{FF2B5EF4-FFF2-40B4-BE49-F238E27FC236}">
-                <a16:creationId xmlns:a16="http://schemas.microsoft.com/office/drawing/2014/main" id="{E937155E-FC7F-4064-8207-50E418881808}"/>
+                <a16:creationId xmlns:a16="http://schemas.microsoft.com/office/drawing/2014/main" id="{5160133D-79D1-4AFB-92D1-7AB84B9A4CD4}"/>
               </a:ext>
             </a:extLst>
           </p:cNvPr>
@@ -33536,7 +34709,7 @@
           <p:cNvPr id="11" name="Text 8">
             <a:extLst xmlns:a="http://schemas.openxmlformats.org/drawingml/2006/main">
               <a:ext uri="{FF2B5EF4-FFF2-40B4-BE49-F238E27FC236}">
-                <a16:creationId xmlns:a16="http://schemas.microsoft.com/office/drawing/2014/main" id="{F38B052D-3423-4D02-9AA5-936E8243F489}"/>
+                <a16:creationId xmlns:a16="http://schemas.microsoft.com/office/drawing/2014/main" id="{73F9896D-574A-4DB2-B018-78CCB1554FF0}"/>
               </a:ext>
             </a:extLst>
           </p:cNvPr>
@@ -33584,7 +34757,7 @@
           <p:cNvPr id="12" name="Text 9">
             <a:extLst xmlns:a="http://schemas.openxmlformats.org/drawingml/2006/main">
               <a:ext uri="{FF2B5EF4-FFF2-40B4-BE49-F238E27FC236}">
-                <a16:creationId xmlns:a16="http://schemas.microsoft.com/office/drawing/2014/main" id="{1FB47567-70D3-4ABE-BDEB-1ACF0C9CFDB9}"/>
+                <a16:creationId xmlns:a16="http://schemas.microsoft.com/office/drawing/2014/main" id="{2C056286-0BCE-4C44-8191-972D57216D13}"/>
               </a:ext>
             </a:extLst>
           </p:cNvPr>
@@ -33632,7 +34805,7 @@
           <p:cNvPr id="13" name="Text 10">
             <a:extLst xmlns:a="http://schemas.openxmlformats.org/drawingml/2006/main">
               <a:ext uri="{FF2B5EF4-FFF2-40B4-BE49-F238E27FC236}">
-                <a16:creationId xmlns:a16="http://schemas.microsoft.com/office/drawing/2014/main" id="{D7E063CE-F228-4E71-8A9B-A826211ED66E}"/>
+                <a16:creationId xmlns:a16="http://schemas.microsoft.com/office/drawing/2014/main" id="{F24910FF-6120-43FD-B021-BF25042ED868}"/>
               </a:ext>
             </a:extLst>
           </p:cNvPr>
@@ -33678,7 +34851,7 @@
           <p:cNvPr id="14" name="Text 11">
             <a:extLst xmlns:a="http://schemas.openxmlformats.org/drawingml/2006/main">
               <a:ext uri="{FF2B5EF4-FFF2-40B4-BE49-F238E27FC236}">
-                <a16:creationId xmlns:a16="http://schemas.microsoft.com/office/drawing/2014/main" id="{1E430246-759A-42A0-BAC9-6D3A566011E0}"/>
+                <a16:creationId xmlns:a16="http://schemas.microsoft.com/office/drawing/2014/main" id="{1DB66484-6C1D-4275-99A6-43BFDE592046}"/>
               </a:ext>
             </a:extLst>
           </p:cNvPr>
@@ -33724,7 +34897,7 @@
           <p:cNvPr id="15" name="Shape 12">
             <a:extLst xmlns:a="http://schemas.openxmlformats.org/drawingml/2006/main">
               <a:ext uri="{FF2B5EF4-FFF2-40B4-BE49-F238E27FC236}">
-                <a16:creationId xmlns:a16="http://schemas.microsoft.com/office/drawing/2014/main" id="{8D343625-ABFB-4D3F-A78C-7F98A5013791}"/>
+                <a16:creationId xmlns:a16="http://schemas.microsoft.com/office/drawing/2014/main" id="{0FD07900-99F2-4F31-B890-F70A75CEC9D3}"/>
               </a:ext>
             </a:extLst>
           </p:cNvPr>
@@ -33761,7 +34934,7 @@
           <p:cNvPr id="16" name="Text 13">
             <a:extLst xmlns:a="http://schemas.openxmlformats.org/drawingml/2006/main">
               <a:ext uri="{FF2B5EF4-FFF2-40B4-BE49-F238E27FC236}">
-                <a16:creationId xmlns:a16="http://schemas.microsoft.com/office/drawing/2014/main" id="{BA216831-F7A2-4A30-9718-B54309A58A14}"/>
+                <a16:creationId xmlns:a16="http://schemas.microsoft.com/office/drawing/2014/main" id="{A916DD26-7C31-4DA1-A8FD-4944EB9C0AD3}"/>
               </a:ext>
             </a:extLst>
           </p:cNvPr>
@@ -33809,7 +34982,7 @@
           <p:cNvPr id="17" name="Text 14">
             <a:extLst xmlns:a="http://schemas.openxmlformats.org/drawingml/2006/main">
               <a:ext uri="{FF2B5EF4-FFF2-40B4-BE49-F238E27FC236}">
-                <a16:creationId xmlns:a16="http://schemas.microsoft.com/office/drawing/2014/main" id="{60F8F150-B213-4838-BA0E-EFD88DAA165F}"/>
+                <a16:creationId xmlns:a16="http://schemas.microsoft.com/office/drawing/2014/main" id="{42B5E644-8B4B-416E-BBE5-B7AA66EEC143}"/>
               </a:ext>
             </a:extLst>
           </p:cNvPr>
@@ -33857,7 +35030,7 @@
           <p:cNvPr id="18" name="Text 15">
             <a:extLst xmlns:a="http://schemas.openxmlformats.org/drawingml/2006/main">
               <a:ext uri="{FF2B5EF4-FFF2-40B4-BE49-F238E27FC236}">
-                <a16:creationId xmlns:a16="http://schemas.microsoft.com/office/drawing/2014/main" id="{D457A10A-E8A9-4A3A-A6F1-4F8B14ECE9B8}"/>
+                <a16:creationId xmlns:a16="http://schemas.microsoft.com/office/drawing/2014/main" id="{C02B6CDC-D0BC-4D15-ADE0-4E837BD6FB7F}"/>
               </a:ext>
             </a:extLst>
           </p:cNvPr>
@@ -33894,7 +35067,7 @@
                 <a:ea typeface="Microsoft YaHei"/>
                 <a:cs typeface="Microsoft YaHei"/>
               </a:rPr>
-              <a:t>智能云储 · DOEF | 8 栋办公建筑仿真实验</a:t>
+              <a:t>智储云控 · DOEF | 8 栋办公建筑仿真实验</a:t>
             </a:r>
             <a:endParaRPr sz="750"/>
           </a:p>
@@ -33905,7 +35078,7 @@
           <p:cNvPr id="25" name="Slide Number Placeholder 0">
             <a:extLst xmlns:a="http://schemas.openxmlformats.org/drawingml/2006/main">
               <a:ext uri="{FF2B5EF4-FFF2-40B4-BE49-F238E27FC236}">
-                <a16:creationId xmlns:a16="http://schemas.microsoft.com/office/drawing/2014/main" id="{17A60D00-B7BB-4B3D-B3EC-28ADECC85445}"/>
+                <a16:creationId xmlns:a16="http://schemas.microsoft.com/office/drawing/2014/main" id="{DF29AB25-FCD6-4001-9652-3B04356133B7}"/>
               </a:ext>
             </a:extLst>
           </p:cNvPr>
@@ -33955,7 +35128,7 @@
     </p:spTree>
     <p:extLst>
       <p:ext uri="{BB962C8B-B14F-4D97-AF65-F5344CB8AC3E}">
-        <p14:creationId xmlns:p14="http://schemas.microsoft.com/office/powerpoint/2010/main" val="1143274012"/>
+        <p14:creationId xmlns:p14="http://schemas.microsoft.com/office/powerpoint/2010/main" val="1521406981"/>
       </p:ext>
     </p:extLst>
   </p:cSld>
@@ -33979,7 +35152,7 @@
           <p:cNvPr id="2" name="Text 0">
             <a:extLst xmlns:a="http://schemas.openxmlformats.org/drawingml/2006/main">
               <a:ext uri="{FF2B5EF4-FFF2-40B4-BE49-F238E27FC236}">
-                <a16:creationId xmlns:a16="http://schemas.microsoft.com/office/drawing/2014/main" id="{FE854AE7-3D36-4F70-B334-96CFDD779BE9}"/>
+                <a16:creationId xmlns:a16="http://schemas.microsoft.com/office/drawing/2014/main" id="{9E547820-1D2B-477A-BDCE-1E0DF46C236F}"/>
               </a:ext>
             </a:extLst>
           </p:cNvPr>
@@ -34025,7 +35198,7 @@
           <p:cNvPr id="3" name="Text 1">
             <a:extLst xmlns:a="http://schemas.openxmlformats.org/drawingml/2006/main">
               <a:ext uri="{FF2B5EF4-FFF2-40B4-BE49-F238E27FC236}">
-                <a16:creationId xmlns:a16="http://schemas.microsoft.com/office/drawing/2014/main" id="{43CB0038-0EF5-4B82-8C48-0192C50D3638}"/>
+                <a16:creationId xmlns:a16="http://schemas.microsoft.com/office/drawing/2014/main" id="{59032C31-F557-48F7-9F40-A331DB25C150}"/>
               </a:ext>
             </a:extLst>
           </p:cNvPr>
@@ -34071,7 +35244,7 @@
           <p:cNvPr id="4" name="Text 2">
             <a:extLst xmlns:a="http://schemas.openxmlformats.org/drawingml/2006/main">
               <a:ext uri="{FF2B5EF4-FFF2-40B4-BE49-F238E27FC236}">
-                <a16:creationId xmlns:a16="http://schemas.microsoft.com/office/drawing/2014/main" id="{BECF1FB6-B198-40D9-83DE-AE1777C55424}"/>
+                <a16:creationId xmlns:a16="http://schemas.microsoft.com/office/drawing/2014/main" id="{038826C5-87D6-443B-93F2-2CC276E584DF}"/>
               </a:ext>
             </a:extLst>
           </p:cNvPr>
@@ -34119,7 +35292,7 @@
           <p:cNvPr id="5" name="Text 3">
             <a:extLst xmlns:a="http://schemas.openxmlformats.org/drawingml/2006/main">
               <a:ext uri="{FF2B5EF4-FFF2-40B4-BE49-F238E27FC236}">
-                <a16:creationId xmlns:a16="http://schemas.microsoft.com/office/drawing/2014/main" id="{702FE3D3-92CA-4EDB-B730-80AFF7F2D5A5}"/>
+                <a16:creationId xmlns:a16="http://schemas.microsoft.com/office/drawing/2014/main" id="{1462CC93-059E-4D87-A6E0-F420047AD330}"/>
               </a:ext>
             </a:extLst>
           </p:cNvPr>
@@ -34167,7 +35340,7 @@
           <p:cNvPr id="6" name="Shape 4">
             <a:extLst xmlns:a="http://schemas.openxmlformats.org/drawingml/2006/main">
               <a:ext uri="{FF2B5EF4-FFF2-40B4-BE49-F238E27FC236}">
-                <a16:creationId xmlns:a16="http://schemas.microsoft.com/office/drawing/2014/main" id="{1DABF5D7-3F5B-4A0A-B9F0-8979A4EE063A}"/>
+                <a16:creationId xmlns:a16="http://schemas.microsoft.com/office/drawing/2014/main" id="{BC027C7B-D4D2-48A7-84D8-1D4206D5816A}"/>
               </a:ext>
             </a:extLst>
           </p:cNvPr>
@@ -34202,7 +35375,7 @@
           <p:cNvPr id="7" name="Shape 5">
             <a:extLst xmlns:a="http://schemas.openxmlformats.org/drawingml/2006/main">
               <a:ext uri="{FF2B5EF4-FFF2-40B4-BE49-F238E27FC236}">
-                <a16:creationId xmlns:a16="http://schemas.microsoft.com/office/drawing/2014/main" id="{C4EFBCBD-61EA-4B02-91C2-1C488B9A29FE}"/>
+                <a16:creationId xmlns:a16="http://schemas.microsoft.com/office/drawing/2014/main" id="{8F6D0D46-4EB1-4F6C-883C-AA1A98162677}"/>
               </a:ext>
             </a:extLst>
           </p:cNvPr>
@@ -34237,7 +35410,7 @@
           <p:cNvPr id="8" name="Shape 6">
             <a:extLst xmlns:a="http://schemas.openxmlformats.org/drawingml/2006/main">
               <a:ext uri="{FF2B5EF4-FFF2-40B4-BE49-F238E27FC236}">
-                <a16:creationId xmlns:a16="http://schemas.microsoft.com/office/drawing/2014/main" id="{D5140D22-BB33-4D39-B8FF-135AAFC7D72D}"/>
+                <a16:creationId xmlns:a16="http://schemas.microsoft.com/office/drawing/2014/main" id="{0B5B4A65-D50D-4ECC-9089-F9D7DBFCDC62}"/>
               </a:ext>
             </a:extLst>
           </p:cNvPr>
@@ -34274,7 +35447,7 @@
           <p:cNvPr id="9" name="Text 7">
             <a:extLst xmlns:a="http://schemas.openxmlformats.org/drawingml/2006/main">
               <a:ext uri="{FF2B5EF4-FFF2-40B4-BE49-F238E27FC236}">
-                <a16:creationId xmlns:a16="http://schemas.microsoft.com/office/drawing/2014/main" id="{C090ADE4-0D9D-4717-81E8-0B41D27D6D26}"/>
+                <a16:creationId xmlns:a16="http://schemas.microsoft.com/office/drawing/2014/main" id="{C1812745-D205-4C5B-BE52-F38673AF98AD}"/>
               </a:ext>
             </a:extLst>
           </p:cNvPr>
@@ -34322,7 +35495,7 @@
           <p:cNvPr id="10" name="Text 8">
             <a:extLst xmlns:a="http://schemas.openxmlformats.org/drawingml/2006/main">
               <a:ext uri="{FF2B5EF4-FFF2-40B4-BE49-F238E27FC236}">
-                <a16:creationId xmlns:a16="http://schemas.microsoft.com/office/drawing/2014/main" id="{C405B1D2-6FFE-47E9-AB35-6FF36D4D863C}"/>
+                <a16:creationId xmlns:a16="http://schemas.microsoft.com/office/drawing/2014/main" id="{BA9CFFA2-B353-4042-A359-FEF66CF5AD1B}"/>
               </a:ext>
             </a:extLst>
           </p:cNvPr>
@@ -34368,7 +35541,7 @@
           <p:cNvPr id="11" name="Text 9">
             <a:extLst xmlns:a="http://schemas.openxmlformats.org/drawingml/2006/main">
               <a:ext uri="{FF2B5EF4-FFF2-40B4-BE49-F238E27FC236}">
-                <a16:creationId xmlns:a16="http://schemas.microsoft.com/office/drawing/2014/main" id="{615452BB-AE10-4394-B02F-46D954E366B3}"/>
+                <a16:creationId xmlns:a16="http://schemas.microsoft.com/office/drawing/2014/main" id="{B125EDEE-1ECA-4FB5-831A-4DDB96705C84}"/>
               </a:ext>
             </a:extLst>
           </p:cNvPr>
@@ -34414,7 +35587,7 @@
           <p:cNvPr id="12" name="Text 10">
             <a:extLst xmlns:a="http://schemas.openxmlformats.org/drawingml/2006/main">
               <a:ext uri="{FF2B5EF4-FFF2-40B4-BE49-F238E27FC236}">
-                <a16:creationId xmlns:a16="http://schemas.microsoft.com/office/drawing/2014/main" id="{8B367C20-AC55-41C0-8BD0-C94B684BE62F}"/>
+                <a16:creationId xmlns:a16="http://schemas.microsoft.com/office/drawing/2014/main" id="{A2801786-752E-463B-B3CB-2E5E6F8D65EE}"/>
               </a:ext>
             </a:extLst>
           </p:cNvPr>
@@ -34479,7 +35652,7 @@
           <p:cNvPr id="13" name="Shape 11">
             <a:extLst xmlns:a="http://schemas.openxmlformats.org/drawingml/2006/main">
               <a:ext uri="{FF2B5EF4-FFF2-40B4-BE49-F238E27FC236}">
-                <a16:creationId xmlns:a16="http://schemas.microsoft.com/office/drawing/2014/main" id="{37565DC1-3431-4604-90BF-0F4657B1EE00}"/>
+                <a16:creationId xmlns:a16="http://schemas.microsoft.com/office/drawing/2014/main" id="{95B2CACB-97C7-40F0-A478-D78526D69BB8}"/>
               </a:ext>
             </a:extLst>
           </p:cNvPr>
@@ -34516,7 +35689,7 @@
           <p:cNvPr id="14" name="Text 12">
             <a:extLst xmlns:a="http://schemas.openxmlformats.org/drawingml/2006/main">
               <a:ext uri="{FF2B5EF4-FFF2-40B4-BE49-F238E27FC236}">
-                <a16:creationId xmlns:a16="http://schemas.microsoft.com/office/drawing/2014/main" id="{66162C24-C0BC-40CB-9170-02E00248FD75}"/>
+                <a16:creationId xmlns:a16="http://schemas.microsoft.com/office/drawing/2014/main" id="{B83DEFEF-9ACE-4862-844C-C31A4D99DEFA}"/>
               </a:ext>
             </a:extLst>
           </p:cNvPr>
@@ -34564,7 +35737,7 @@
           <p:cNvPr id="15" name="Text 13">
             <a:extLst xmlns:a="http://schemas.openxmlformats.org/drawingml/2006/main">
               <a:ext uri="{FF2B5EF4-FFF2-40B4-BE49-F238E27FC236}">
-                <a16:creationId xmlns:a16="http://schemas.microsoft.com/office/drawing/2014/main" id="{058FB993-6F3C-4A89-B89A-D5935575E8D2}"/>
+                <a16:creationId xmlns:a16="http://schemas.microsoft.com/office/drawing/2014/main" id="{A1B76E52-1F6E-484C-BF86-D1F113E0C720}"/>
               </a:ext>
             </a:extLst>
           </p:cNvPr>
@@ -34610,7 +35783,7 @@
           <p:cNvPr id="16" name="Text 14">
             <a:extLst xmlns:a="http://schemas.openxmlformats.org/drawingml/2006/main">
               <a:ext uri="{FF2B5EF4-FFF2-40B4-BE49-F238E27FC236}">
-                <a16:creationId xmlns:a16="http://schemas.microsoft.com/office/drawing/2014/main" id="{77244FCB-FF84-4A84-A8E1-082907832856}"/>
+                <a16:creationId xmlns:a16="http://schemas.microsoft.com/office/drawing/2014/main" id="{30280B21-F902-4463-ABCF-B99839A80BEC}"/>
               </a:ext>
             </a:extLst>
           </p:cNvPr>
@@ -34658,7 +35831,7 @@
           <p:cNvPr id="17" name="Text 15">
             <a:extLst xmlns:a="http://schemas.openxmlformats.org/drawingml/2006/main">
               <a:ext uri="{FF2B5EF4-FFF2-40B4-BE49-F238E27FC236}">
-                <a16:creationId xmlns:a16="http://schemas.microsoft.com/office/drawing/2014/main" id="{FAE16BC5-AF5A-4863-B7E0-28C8CD7981D5}"/>
+                <a16:creationId xmlns:a16="http://schemas.microsoft.com/office/drawing/2014/main" id="{422C0EFC-53B3-4B5D-9232-E50A564A107E}"/>
               </a:ext>
             </a:extLst>
           </p:cNvPr>
@@ -34723,7 +35896,7 @@
           <p:cNvPr id="18" name="Shape 16">
             <a:extLst xmlns:a="http://schemas.openxmlformats.org/drawingml/2006/main">
               <a:ext uri="{FF2B5EF4-FFF2-40B4-BE49-F238E27FC236}">
-                <a16:creationId xmlns:a16="http://schemas.microsoft.com/office/drawing/2014/main" id="{BE6E06BE-694C-408A-8E76-FDC82BCCC321}"/>
+                <a16:creationId xmlns:a16="http://schemas.microsoft.com/office/drawing/2014/main" id="{35555C4E-AD0B-4AFF-9B01-C0D5FA0B0F99}"/>
               </a:ext>
             </a:extLst>
           </p:cNvPr>
@@ -34756,7 +35929,7 @@
           <p:cNvPr id="19" name="Text 17">
             <a:extLst xmlns:a="http://schemas.openxmlformats.org/drawingml/2006/main">
               <a:ext uri="{FF2B5EF4-FFF2-40B4-BE49-F238E27FC236}">
-                <a16:creationId xmlns:a16="http://schemas.microsoft.com/office/drawing/2014/main" id="{7C722CE9-86AD-4D7C-9433-E0B4F58EAC0A}"/>
+                <a16:creationId xmlns:a16="http://schemas.microsoft.com/office/drawing/2014/main" id="{1858AAF6-74B8-4F08-AC99-E68589FAB4AF}"/>
               </a:ext>
             </a:extLst>
           </p:cNvPr>
@@ -34802,7 +35975,7 @@
           <p:cNvPr id="20" name="Shape 18">
             <a:extLst xmlns:a="http://schemas.openxmlformats.org/drawingml/2006/main">
               <a:ext uri="{FF2B5EF4-FFF2-40B4-BE49-F238E27FC236}">
-                <a16:creationId xmlns:a16="http://schemas.microsoft.com/office/drawing/2014/main" id="{CE51B8E8-BA59-4B37-851A-57A06495A8CA}"/>
+                <a16:creationId xmlns:a16="http://schemas.microsoft.com/office/drawing/2014/main" id="{9F9917E9-1F75-4990-B806-49559AD73504}"/>
               </a:ext>
             </a:extLst>
           </p:cNvPr>
@@ -34839,7 +36012,7 @@
           <p:cNvPr id="21" name="Text 19">
             <a:extLst xmlns:a="http://schemas.openxmlformats.org/drawingml/2006/main">
               <a:ext uri="{FF2B5EF4-FFF2-40B4-BE49-F238E27FC236}">
-                <a16:creationId xmlns:a16="http://schemas.microsoft.com/office/drawing/2014/main" id="{A2DC3594-AB43-4209-92BD-7F2F9B6C0195}"/>
+                <a16:creationId xmlns:a16="http://schemas.microsoft.com/office/drawing/2014/main" id="{33214A04-4C57-48B4-949C-688033AD6609}"/>
               </a:ext>
             </a:extLst>
           </p:cNvPr>
@@ -34887,7 +36060,7 @@
           <p:cNvPr id="22" name="Text 20">
             <a:extLst xmlns:a="http://schemas.openxmlformats.org/drawingml/2006/main">
               <a:ext uri="{FF2B5EF4-FFF2-40B4-BE49-F238E27FC236}">
-                <a16:creationId xmlns:a16="http://schemas.microsoft.com/office/drawing/2014/main" id="{FDB93E1B-D50D-43DA-B2E8-0063CF659E1E}"/>
+                <a16:creationId xmlns:a16="http://schemas.microsoft.com/office/drawing/2014/main" id="{5A26049B-B463-4A99-B3B4-99179A7B6D6C}"/>
               </a:ext>
             </a:extLst>
           </p:cNvPr>
@@ -34924,7 +36097,7 @@
                 <a:ea typeface="Microsoft YaHei"/>
                 <a:cs typeface="Microsoft YaHei"/>
               </a:rPr>
-              <a:t>智能云储 · DOEF | 8 栋办公建筑仿真实验</a:t>
+              <a:t>智储云控 · DOEF | 8 栋办公建筑仿真实验</a:t>
             </a:r>
             <a:endParaRPr sz="750"/>
           </a:p>
@@ -34935,7 +36108,7 @@
           <p:cNvPr id="25" name="Slide Number Placeholder 0">
             <a:extLst xmlns:a="http://schemas.openxmlformats.org/drawingml/2006/main">
               <a:ext uri="{FF2B5EF4-FFF2-40B4-BE49-F238E27FC236}">
-                <a16:creationId xmlns:a16="http://schemas.microsoft.com/office/drawing/2014/main" id="{669F3C3D-1AE5-4FAD-922F-FABBAEAF5C10}"/>
+                <a16:creationId xmlns:a16="http://schemas.microsoft.com/office/drawing/2014/main" id="{652F3014-814B-45BD-9EB7-A648FD5C4491}"/>
               </a:ext>
             </a:extLst>
           </p:cNvPr>
@@ -34985,7 +36158,7 @@
     </p:spTree>
     <p:extLst>
       <p:ext uri="{BB962C8B-B14F-4D97-AF65-F5344CB8AC3E}">
-        <p14:creationId xmlns:p14="http://schemas.microsoft.com/office/powerpoint/2010/main" val="274764846"/>
+        <p14:creationId xmlns:p14="http://schemas.microsoft.com/office/powerpoint/2010/main" val="2396176"/>
       </p:ext>
     </p:extLst>
   </p:cSld>
@@ -35009,7 +36182,7 @@
           <p:cNvPr id="2" name="Text 0">
             <a:extLst xmlns:a="http://schemas.openxmlformats.org/drawingml/2006/main">
               <a:ext uri="{FF2B5EF4-FFF2-40B4-BE49-F238E27FC236}">
-                <a16:creationId xmlns:a16="http://schemas.microsoft.com/office/drawing/2014/main" id="{22198A2A-9BA0-43D3-A1AD-9503BF825BA2}"/>
+                <a16:creationId xmlns:a16="http://schemas.microsoft.com/office/drawing/2014/main" id="{B9F1641A-382B-442C-9815-8143B0E5DCFF}"/>
               </a:ext>
             </a:extLst>
           </p:cNvPr>
@@ -35055,7 +36228,7 @@
           <p:cNvPr id="3" name="Text 1">
             <a:extLst xmlns:a="http://schemas.openxmlformats.org/drawingml/2006/main">
               <a:ext uri="{FF2B5EF4-FFF2-40B4-BE49-F238E27FC236}">
-                <a16:creationId xmlns:a16="http://schemas.microsoft.com/office/drawing/2014/main" id="{7C7D0BBC-F747-4093-A63C-3EE30B4F3C4D}"/>
+                <a16:creationId xmlns:a16="http://schemas.microsoft.com/office/drawing/2014/main" id="{73933683-C7F8-4E45-807C-A1F85BA25F1D}"/>
               </a:ext>
             </a:extLst>
           </p:cNvPr>
@@ -35101,7 +36274,7 @@
           <p:cNvPr id="4" name="Text 2">
             <a:extLst xmlns:a="http://schemas.openxmlformats.org/drawingml/2006/main">
               <a:ext uri="{FF2B5EF4-FFF2-40B4-BE49-F238E27FC236}">
-                <a16:creationId xmlns:a16="http://schemas.microsoft.com/office/drawing/2014/main" id="{2F49D0C1-7C75-4C36-9D7F-AF614C8C6BBB}"/>
+                <a16:creationId xmlns:a16="http://schemas.microsoft.com/office/drawing/2014/main" id="{D5B4A52C-A4FB-4DBF-8F86-494F3FEE326C}"/>
               </a:ext>
             </a:extLst>
           </p:cNvPr>
@@ -35149,7 +36322,7 @@
           <p:cNvPr id="5" name="Text 3">
             <a:extLst xmlns:a="http://schemas.openxmlformats.org/drawingml/2006/main">
               <a:ext uri="{FF2B5EF4-FFF2-40B4-BE49-F238E27FC236}">
-                <a16:creationId xmlns:a16="http://schemas.microsoft.com/office/drawing/2014/main" id="{C7EB722F-E93D-426B-88D2-57B3491E8AEA}"/>
+                <a16:creationId xmlns:a16="http://schemas.microsoft.com/office/drawing/2014/main" id="{70FA09BF-21BF-4D45-AB00-AF29C3E7E588}"/>
               </a:ext>
             </a:extLst>
           </p:cNvPr>
@@ -35197,7 +36370,7 @@
           <p:cNvPr id="6" name="Shape 4">
             <a:extLst xmlns:a="http://schemas.openxmlformats.org/drawingml/2006/main">
               <a:ext uri="{FF2B5EF4-FFF2-40B4-BE49-F238E27FC236}">
-                <a16:creationId xmlns:a16="http://schemas.microsoft.com/office/drawing/2014/main" id="{8D664163-BBA7-4D29-B7B2-20CF11C79D21}"/>
+                <a16:creationId xmlns:a16="http://schemas.microsoft.com/office/drawing/2014/main" id="{98D2733D-9338-447E-9CE2-CD6CCC61EF58}"/>
               </a:ext>
             </a:extLst>
           </p:cNvPr>
@@ -35243,7 +36416,7 @@
           <p:nvPr/>
         </p:nvPicPr>
         <p:blipFill>
-          <a:blip xmlns:r="http://schemas.openxmlformats.org/officeDocument/2006/relationships" xmlns:a="http://schemas.openxmlformats.org/drawingml/2006/main" r:embed="R2d3a4ffe185d4379"/>
+          <a:blip xmlns:r="http://schemas.openxmlformats.org/officeDocument/2006/relationships" xmlns:a="http://schemas.openxmlformats.org/drawingml/2006/main" r:embed="R759fe18618084fbc"/>
           <a:stretch xmlns:a="http://schemas.openxmlformats.org/drawingml/2006/main">
             <a:fillRect l="0" t="0" r="0" b="0"/>
           </a:stretch>
@@ -35263,7 +36436,7 @@
           <p:cNvPr id="8" name="Shape 5">
             <a:extLst xmlns:a="http://schemas.openxmlformats.org/drawingml/2006/main">
               <a:ext uri="{FF2B5EF4-FFF2-40B4-BE49-F238E27FC236}">
-                <a16:creationId xmlns:a16="http://schemas.microsoft.com/office/drawing/2014/main" id="{EC0F162A-ED3B-4321-9779-C127BAFC4319}"/>
+                <a16:creationId xmlns:a16="http://schemas.microsoft.com/office/drawing/2014/main" id="{04D48827-D16B-4D52-A6B9-BC7604127172}"/>
               </a:ext>
             </a:extLst>
           </p:cNvPr>
@@ -35298,7 +36471,7 @@
           <p:cNvPr id="9" name="Text 6">
             <a:extLst xmlns:a="http://schemas.openxmlformats.org/drawingml/2006/main">
               <a:ext uri="{FF2B5EF4-FFF2-40B4-BE49-F238E27FC236}">
-                <a16:creationId xmlns:a16="http://schemas.microsoft.com/office/drawing/2014/main" id="{6CCE8E07-EAD6-4DAB-882E-508A10B2ECDA}"/>
+                <a16:creationId xmlns:a16="http://schemas.microsoft.com/office/drawing/2014/main" id="{20C7CE50-E80E-49F9-9CA5-F661EE0AC304}"/>
               </a:ext>
             </a:extLst>
           </p:cNvPr>
@@ -35344,7 +36517,7 @@
           <p:cNvPr id="10" name="Text 7">
             <a:extLst xmlns:a="http://schemas.openxmlformats.org/drawingml/2006/main">
               <a:ext uri="{FF2B5EF4-FFF2-40B4-BE49-F238E27FC236}">
-                <a16:creationId xmlns:a16="http://schemas.microsoft.com/office/drawing/2014/main" id="{3CB0EF91-9F74-4403-B212-4C09E1B96758}"/>
+                <a16:creationId xmlns:a16="http://schemas.microsoft.com/office/drawing/2014/main" id="{4294A483-BC29-4338-8678-0A7844E61BE9}"/>
               </a:ext>
             </a:extLst>
           </p:cNvPr>
@@ -35390,7 +36563,7 @@
           <p:cNvPr id="11" name="Shape 8">
             <a:extLst xmlns:a="http://schemas.openxmlformats.org/drawingml/2006/main">
               <a:ext uri="{FF2B5EF4-FFF2-40B4-BE49-F238E27FC236}">
-                <a16:creationId xmlns:a16="http://schemas.microsoft.com/office/drawing/2014/main" id="{3F2BF370-A7D0-43DE-A393-EE5E07689E39}"/>
+                <a16:creationId xmlns:a16="http://schemas.microsoft.com/office/drawing/2014/main" id="{B8072165-62DD-46F0-8F7C-30B96E45A531}"/>
               </a:ext>
             </a:extLst>
           </p:cNvPr>
@@ -35421,7 +36594,7 @@
           <p:cNvPr id="12" name="Text 9">
             <a:extLst xmlns:a="http://schemas.openxmlformats.org/drawingml/2006/main">
               <a:ext uri="{FF2B5EF4-FFF2-40B4-BE49-F238E27FC236}">
-                <a16:creationId xmlns:a16="http://schemas.microsoft.com/office/drawing/2014/main" id="{CB5E1D64-94AE-4682-982B-4ED10D2E7898}"/>
+                <a16:creationId xmlns:a16="http://schemas.microsoft.com/office/drawing/2014/main" id="{6BF8F85B-A9D5-4EC2-BF83-CE67D0E97814}"/>
               </a:ext>
             </a:extLst>
           </p:cNvPr>
@@ -35467,7 +36640,7 @@
           <p:cNvPr id="13" name="Text 10">
             <a:extLst xmlns:a="http://schemas.openxmlformats.org/drawingml/2006/main">
               <a:ext uri="{FF2B5EF4-FFF2-40B4-BE49-F238E27FC236}">
-                <a16:creationId xmlns:a16="http://schemas.microsoft.com/office/drawing/2014/main" id="{8E9D270C-7F51-4209-B15C-27B3C91A3923}"/>
+                <a16:creationId xmlns:a16="http://schemas.microsoft.com/office/drawing/2014/main" id="{7CE849F0-9B7E-4551-B7C3-4E463C35E0B3}"/>
               </a:ext>
             </a:extLst>
           </p:cNvPr>
@@ -35513,7 +36686,7 @@
           <p:cNvPr id="14" name="Text 11">
             <a:extLst xmlns:a="http://schemas.openxmlformats.org/drawingml/2006/main">
               <a:ext uri="{FF2B5EF4-FFF2-40B4-BE49-F238E27FC236}">
-                <a16:creationId xmlns:a16="http://schemas.microsoft.com/office/drawing/2014/main" id="{D2889A4D-B1C7-47D1-BCE2-A516CBC05C82}"/>
+                <a16:creationId xmlns:a16="http://schemas.microsoft.com/office/drawing/2014/main" id="{7C404593-20D6-4FC7-A924-56EC7A590942}"/>
               </a:ext>
             </a:extLst>
           </p:cNvPr>
@@ -35559,7 +36732,7 @@
           <p:cNvPr id="15" name="Text 12">
             <a:extLst xmlns:a="http://schemas.openxmlformats.org/drawingml/2006/main">
               <a:ext uri="{FF2B5EF4-FFF2-40B4-BE49-F238E27FC236}">
-                <a16:creationId xmlns:a16="http://schemas.microsoft.com/office/drawing/2014/main" id="{068D4138-8D3E-4C23-B8CE-8C93E09115EA}"/>
+                <a16:creationId xmlns:a16="http://schemas.microsoft.com/office/drawing/2014/main" id="{F073BE60-BE23-406E-8E64-22897FA1D061}"/>
               </a:ext>
             </a:extLst>
           </p:cNvPr>
@@ -35605,7 +36778,7 @@
           <p:cNvPr id="16" name="Text 13">
             <a:extLst xmlns:a="http://schemas.openxmlformats.org/drawingml/2006/main">
               <a:ext uri="{FF2B5EF4-FFF2-40B4-BE49-F238E27FC236}">
-                <a16:creationId xmlns:a16="http://schemas.microsoft.com/office/drawing/2014/main" id="{96B9F42E-98B3-404B-87E2-F9C62B4D07FF}"/>
+                <a16:creationId xmlns:a16="http://schemas.microsoft.com/office/drawing/2014/main" id="{A1838FB8-A18E-4CD5-9749-48CF3B7C82F1}"/>
               </a:ext>
             </a:extLst>
           </p:cNvPr>
@@ -35651,7 +36824,7 @@
           <p:cNvPr id="17" name="Text 14">
             <a:extLst xmlns:a="http://schemas.openxmlformats.org/drawingml/2006/main">
               <a:ext uri="{FF2B5EF4-FFF2-40B4-BE49-F238E27FC236}">
-                <a16:creationId xmlns:a16="http://schemas.microsoft.com/office/drawing/2014/main" id="{12E371F5-9A0F-44F9-87C2-85D750541047}"/>
+                <a16:creationId xmlns:a16="http://schemas.microsoft.com/office/drawing/2014/main" id="{0939A2C0-A921-4C05-A1EB-AF8586F7AB3D}"/>
               </a:ext>
             </a:extLst>
           </p:cNvPr>
@@ -35697,7 +36870,7 @@
           <p:cNvPr id="18" name="Text 15">
             <a:extLst xmlns:a="http://schemas.openxmlformats.org/drawingml/2006/main">
               <a:ext uri="{FF2B5EF4-FFF2-40B4-BE49-F238E27FC236}">
-                <a16:creationId xmlns:a16="http://schemas.microsoft.com/office/drawing/2014/main" id="{64024581-BB27-49BE-BB86-BA435B5DFF24}"/>
+                <a16:creationId xmlns:a16="http://schemas.microsoft.com/office/drawing/2014/main" id="{73FC0CEB-B21D-45DF-A143-BB23F5BE8C6F}"/>
               </a:ext>
             </a:extLst>
           </p:cNvPr>
@@ -35745,7 +36918,7 @@
           <p:cNvPr id="19" name="Text 16">
             <a:extLst xmlns:a="http://schemas.openxmlformats.org/drawingml/2006/main">
               <a:ext uri="{FF2B5EF4-FFF2-40B4-BE49-F238E27FC236}">
-                <a16:creationId xmlns:a16="http://schemas.microsoft.com/office/drawing/2014/main" id="{A7D2E13B-6673-40C2-9471-785C9DEA33FB}"/>
+                <a16:creationId xmlns:a16="http://schemas.microsoft.com/office/drawing/2014/main" id="{D9B6129D-0A91-4D3C-97FD-E77BC55BD6A0}"/>
               </a:ext>
             </a:extLst>
           </p:cNvPr>
@@ -35782,7 +36955,7 @@
                 <a:ea typeface="Microsoft YaHei"/>
                 <a:cs typeface="Microsoft YaHei"/>
               </a:rPr>
-              <a:t>智能云储 · DOEF | 8 栋办公建筑仿真实验</a:t>
+              <a:t>智储云控 · DOEF | 8 栋办公建筑仿真实验</a:t>
             </a:r>
             <a:endParaRPr sz="750"/>
           </a:p>
@@ -35793,7 +36966,7 @@
           <p:cNvPr id="25" name="Slide Number Placeholder 0">
             <a:extLst xmlns:a="http://schemas.openxmlformats.org/drawingml/2006/main">
               <a:ext uri="{FF2B5EF4-FFF2-40B4-BE49-F238E27FC236}">
-                <a16:creationId xmlns:a16="http://schemas.microsoft.com/office/drawing/2014/main" id="{E6DDAC5A-B9D3-4484-B4A8-7631AC4296DF}"/>
+                <a16:creationId xmlns:a16="http://schemas.microsoft.com/office/drawing/2014/main" id="{EF7B1466-78D0-4F4E-B81D-3A311613D7FD}"/>
               </a:ext>
             </a:extLst>
           </p:cNvPr>
@@ -35843,7 +37016,7 @@
     </p:spTree>
     <p:extLst>
       <p:ext uri="{BB962C8B-B14F-4D97-AF65-F5344CB8AC3E}">
-        <p14:creationId xmlns:p14="http://schemas.microsoft.com/office/powerpoint/2010/main" val="1753364344"/>
+        <p14:creationId xmlns:p14="http://schemas.microsoft.com/office/powerpoint/2010/main" val="1857649511"/>
       </p:ext>
     </p:extLst>
   </p:cSld>
@@ -35867,7 +37040,7 @@
           <p:cNvPr id="2" name="Text 0">
             <a:extLst xmlns:a="http://schemas.openxmlformats.org/drawingml/2006/main">
               <a:ext uri="{FF2B5EF4-FFF2-40B4-BE49-F238E27FC236}">
-                <a16:creationId xmlns:a16="http://schemas.microsoft.com/office/drawing/2014/main" id="{7E524F8B-9D60-44DE-9EB5-B6D4B4F37814}"/>
+                <a16:creationId xmlns:a16="http://schemas.microsoft.com/office/drawing/2014/main" id="{9A6D4249-BDD4-4B34-8995-A1A26FB3247D}"/>
               </a:ext>
             </a:extLst>
           </p:cNvPr>
@@ -35913,7 +37086,7 @@
           <p:cNvPr id="3" name="Text 1">
             <a:extLst xmlns:a="http://schemas.openxmlformats.org/drawingml/2006/main">
               <a:ext uri="{FF2B5EF4-FFF2-40B4-BE49-F238E27FC236}">
-                <a16:creationId xmlns:a16="http://schemas.microsoft.com/office/drawing/2014/main" id="{49480448-EF69-4C3A-975C-7DC6031704A8}"/>
+                <a16:creationId xmlns:a16="http://schemas.microsoft.com/office/drawing/2014/main" id="{09236E17-AE67-4B51-804E-4C286D420EDE}"/>
               </a:ext>
             </a:extLst>
           </p:cNvPr>
@@ -35959,7 +37132,7 @@
           <p:cNvPr id="4" name="Text 2">
             <a:extLst xmlns:a="http://schemas.openxmlformats.org/drawingml/2006/main">
               <a:ext uri="{FF2B5EF4-FFF2-40B4-BE49-F238E27FC236}">
-                <a16:creationId xmlns:a16="http://schemas.microsoft.com/office/drawing/2014/main" id="{9A0C304D-60B3-41E7-AB1F-CA0C9E3F9727}"/>
+                <a16:creationId xmlns:a16="http://schemas.microsoft.com/office/drawing/2014/main" id="{5692A0AF-15DB-49AF-8555-7365C02339F6}"/>
               </a:ext>
             </a:extLst>
           </p:cNvPr>
@@ -36007,7 +37180,7 @@
           <p:cNvPr id="5" name="Text 3">
             <a:extLst xmlns:a="http://schemas.openxmlformats.org/drawingml/2006/main">
               <a:ext uri="{FF2B5EF4-FFF2-40B4-BE49-F238E27FC236}">
-                <a16:creationId xmlns:a16="http://schemas.microsoft.com/office/drawing/2014/main" id="{0BFBF91C-A351-4BAF-AEE6-D04FC68B4F9A}"/>
+                <a16:creationId xmlns:a16="http://schemas.microsoft.com/office/drawing/2014/main" id="{490C9EA5-D65F-4FFA-BE7E-BE6AE54FF52C}"/>
               </a:ext>
             </a:extLst>
           </p:cNvPr>
@@ -36055,7 +37228,7 @@
           <p:cNvPr id="6" name="Shape 4">
             <a:extLst xmlns:a="http://schemas.openxmlformats.org/drawingml/2006/main">
               <a:ext uri="{FF2B5EF4-FFF2-40B4-BE49-F238E27FC236}">
-                <a16:creationId xmlns:a16="http://schemas.microsoft.com/office/drawing/2014/main" id="{BC7E2A5D-9247-434F-89FF-0E86C9DF8CF0}"/>
+                <a16:creationId xmlns:a16="http://schemas.microsoft.com/office/drawing/2014/main" id="{6A4F321C-AA80-40D4-84AC-0CF8290ABF17}"/>
               </a:ext>
             </a:extLst>
           </p:cNvPr>
@@ -36101,7 +37274,7 @@
           <p:nvPr/>
         </p:nvPicPr>
         <p:blipFill>
-          <a:blip xmlns:r="http://schemas.openxmlformats.org/officeDocument/2006/relationships" xmlns:a="http://schemas.openxmlformats.org/drawingml/2006/main" r:embed="R429cb54824214d4d"/>
+          <a:blip xmlns:r="http://schemas.openxmlformats.org/officeDocument/2006/relationships" xmlns:a="http://schemas.openxmlformats.org/drawingml/2006/main" r:embed="Rb9b219eb747a46fe"/>
           <a:stretch xmlns:a="http://schemas.openxmlformats.org/drawingml/2006/main">
             <a:fillRect l="0" t="0" r="0" b="0"/>
           </a:stretch>
@@ -36121,7 +37294,7 @@
           <p:cNvPr id="8" name="Shape 5">
             <a:extLst xmlns:a="http://schemas.openxmlformats.org/drawingml/2006/main">
               <a:ext uri="{FF2B5EF4-FFF2-40B4-BE49-F238E27FC236}">
-                <a16:creationId xmlns:a16="http://schemas.microsoft.com/office/drawing/2014/main" id="{BF518203-A1F3-4076-970D-8E08F1F2E0CD}"/>
+                <a16:creationId xmlns:a16="http://schemas.microsoft.com/office/drawing/2014/main" id="{8F97075F-19BD-4B2B-851F-17A3D614C0F4}"/>
               </a:ext>
             </a:extLst>
           </p:cNvPr>
@@ -36156,7 +37329,7 @@
           <p:cNvPr id="9" name="Shape 6">
             <a:extLst xmlns:a="http://schemas.openxmlformats.org/drawingml/2006/main">
               <a:ext uri="{FF2B5EF4-FFF2-40B4-BE49-F238E27FC236}">
-                <a16:creationId xmlns:a16="http://schemas.microsoft.com/office/drawing/2014/main" id="{B087F524-72FE-4D65-B094-0DC253A3CF18}"/>
+                <a16:creationId xmlns:a16="http://schemas.microsoft.com/office/drawing/2014/main" id="{A36F685C-E2CE-4C5A-9A64-5D5D6D8DFD75}"/>
               </a:ext>
             </a:extLst>
           </p:cNvPr>
@@ -36193,7 +37366,7 @@
           <p:cNvPr id="10" name="Text 7">
             <a:extLst xmlns:a="http://schemas.openxmlformats.org/drawingml/2006/main">
               <a:ext uri="{FF2B5EF4-FFF2-40B4-BE49-F238E27FC236}">
-                <a16:creationId xmlns:a16="http://schemas.microsoft.com/office/drawing/2014/main" id="{080387D4-9C5F-47DE-AB2E-3893F8CED5B4}"/>
+                <a16:creationId xmlns:a16="http://schemas.microsoft.com/office/drawing/2014/main" id="{CEE2E4D7-0DEC-458C-A21A-571D2A374B3E}"/>
               </a:ext>
             </a:extLst>
           </p:cNvPr>
@@ -36241,7 +37414,7 @@
           <p:cNvPr id="11" name="Text 8">
             <a:extLst xmlns:a="http://schemas.openxmlformats.org/drawingml/2006/main">
               <a:ext uri="{FF2B5EF4-FFF2-40B4-BE49-F238E27FC236}">
-                <a16:creationId xmlns:a16="http://schemas.microsoft.com/office/drawing/2014/main" id="{C778630D-FB64-4007-99AF-AA7E4AFC77E5}"/>
+                <a16:creationId xmlns:a16="http://schemas.microsoft.com/office/drawing/2014/main" id="{58E678EF-38F3-41B4-869C-6F61AAC59F08}"/>
               </a:ext>
             </a:extLst>
           </p:cNvPr>
@@ -36287,7 +37460,7 @@
           <p:cNvPr id="12" name="Text 9">
             <a:extLst xmlns:a="http://schemas.openxmlformats.org/drawingml/2006/main">
               <a:ext uri="{FF2B5EF4-FFF2-40B4-BE49-F238E27FC236}">
-                <a16:creationId xmlns:a16="http://schemas.microsoft.com/office/drawing/2014/main" id="{4C275DB9-2F82-480F-BC54-C30AB8D2E55B}"/>
+                <a16:creationId xmlns:a16="http://schemas.microsoft.com/office/drawing/2014/main" id="{BB83E31C-F1A1-4123-8408-6A62C899B2A1}"/>
               </a:ext>
             </a:extLst>
           </p:cNvPr>
@@ -36350,7 +37523,7 @@
           <p:cNvPr id="13" name="Shape 10">
             <a:extLst xmlns:a="http://schemas.openxmlformats.org/drawingml/2006/main">
               <a:ext uri="{FF2B5EF4-FFF2-40B4-BE49-F238E27FC236}">
-                <a16:creationId xmlns:a16="http://schemas.microsoft.com/office/drawing/2014/main" id="{21F6795F-1992-4768-AF8C-94650E036FC3}"/>
+                <a16:creationId xmlns:a16="http://schemas.microsoft.com/office/drawing/2014/main" id="{530ABCED-5B61-417D-8497-9E2B5D326E6E}"/>
               </a:ext>
             </a:extLst>
           </p:cNvPr>
@@ -36383,7 +37556,7 @@
           <p:cNvPr id="14" name="Shape 11">
             <a:extLst xmlns:a="http://schemas.openxmlformats.org/drawingml/2006/main">
               <a:ext uri="{FF2B5EF4-FFF2-40B4-BE49-F238E27FC236}">
-                <a16:creationId xmlns:a16="http://schemas.microsoft.com/office/drawing/2014/main" id="{B00AA6C0-CD5E-48A1-9A8D-474840D0C196}"/>
+                <a16:creationId xmlns:a16="http://schemas.microsoft.com/office/drawing/2014/main" id="{0FF8ED39-C783-4AD0-88E2-21CAD98C056A}"/>
               </a:ext>
             </a:extLst>
           </p:cNvPr>
@@ -36420,7 +37593,7 @@
           <p:cNvPr id="15" name="Text 12">
             <a:extLst xmlns:a="http://schemas.openxmlformats.org/drawingml/2006/main">
               <a:ext uri="{FF2B5EF4-FFF2-40B4-BE49-F238E27FC236}">
-                <a16:creationId xmlns:a16="http://schemas.microsoft.com/office/drawing/2014/main" id="{E82B91B2-B261-417D-83C7-EE3023818345}"/>
+                <a16:creationId xmlns:a16="http://schemas.microsoft.com/office/drawing/2014/main" id="{BC52D7B0-25EB-4880-8FE2-391462594890}"/>
               </a:ext>
             </a:extLst>
           </p:cNvPr>
@@ -36468,7 +37641,7 @@
           <p:cNvPr id="16" name="Shape 13">
             <a:extLst xmlns:a="http://schemas.openxmlformats.org/drawingml/2006/main">
               <a:ext uri="{FF2B5EF4-FFF2-40B4-BE49-F238E27FC236}">
-                <a16:creationId xmlns:a16="http://schemas.microsoft.com/office/drawing/2014/main" id="{05388A3F-3DD0-432A-8216-13CC25520106}"/>
+                <a16:creationId xmlns:a16="http://schemas.microsoft.com/office/drawing/2014/main" id="{05F5282C-AD96-4B01-9054-1C3FEED62F91}"/>
               </a:ext>
             </a:extLst>
           </p:cNvPr>
@@ -36501,7 +37674,7 @@
           <p:cNvPr id="17" name="Text 14">
             <a:extLst xmlns:a="http://schemas.openxmlformats.org/drawingml/2006/main">
               <a:ext uri="{FF2B5EF4-FFF2-40B4-BE49-F238E27FC236}">
-                <a16:creationId xmlns:a16="http://schemas.microsoft.com/office/drawing/2014/main" id="{73830E27-F5BF-43A9-84DA-45E453F632C1}"/>
+                <a16:creationId xmlns:a16="http://schemas.microsoft.com/office/drawing/2014/main" id="{B11754FA-B3A7-4EA8-9439-56BBADA68D5C}"/>
               </a:ext>
             </a:extLst>
           </p:cNvPr>
@@ -36547,7 +37720,7 @@
           <p:cNvPr id="18" name="Text 15">
             <a:extLst xmlns:a="http://schemas.openxmlformats.org/drawingml/2006/main">
               <a:ext uri="{FF2B5EF4-FFF2-40B4-BE49-F238E27FC236}">
-                <a16:creationId xmlns:a16="http://schemas.microsoft.com/office/drawing/2014/main" id="{3557FE81-84BD-4C72-B9F5-E75B0580BE59}"/>
+                <a16:creationId xmlns:a16="http://schemas.microsoft.com/office/drawing/2014/main" id="{8C79DADF-59AB-46F9-A70C-B475F76CF476}"/>
               </a:ext>
             </a:extLst>
           </p:cNvPr>
@@ -36593,7 +37766,7 @@
           <p:cNvPr id="19" name="Text 16">
             <a:extLst xmlns:a="http://schemas.openxmlformats.org/drawingml/2006/main">
               <a:ext uri="{FF2B5EF4-FFF2-40B4-BE49-F238E27FC236}">
-                <a16:creationId xmlns:a16="http://schemas.microsoft.com/office/drawing/2014/main" id="{9E94DF8F-37F8-4993-8977-48DC4E327E55}"/>
+                <a16:creationId xmlns:a16="http://schemas.microsoft.com/office/drawing/2014/main" id="{A730955B-5143-4D4B-ABB1-344FD118C8AC}"/>
               </a:ext>
             </a:extLst>
           </p:cNvPr>
@@ -36641,7 +37814,7 @@
           <p:cNvPr id="20" name="Text 17">
             <a:extLst xmlns:a="http://schemas.openxmlformats.org/drawingml/2006/main">
               <a:ext uri="{FF2B5EF4-FFF2-40B4-BE49-F238E27FC236}">
-                <a16:creationId xmlns:a16="http://schemas.microsoft.com/office/drawing/2014/main" id="{448DA56A-CD71-40EC-BF8C-C8813FFDC806}"/>
+                <a16:creationId xmlns:a16="http://schemas.microsoft.com/office/drawing/2014/main" id="{5E280D4D-B7B3-41A6-81BF-0D726E64D213}"/>
               </a:ext>
             </a:extLst>
           </p:cNvPr>
@@ -36678,7 +37851,7 @@
                 <a:ea typeface="Microsoft YaHei"/>
                 <a:cs typeface="Microsoft YaHei"/>
               </a:rPr>
-              <a:t>智能云储 · DOEF | 8 栋办公建筑仿真实验</a:t>
+              <a:t>智储云控 · DOEF | 8 栋办公建筑仿真实验</a:t>
             </a:r>
             <a:endParaRPr sz="750"/>
           </a:p>
@@ -36689,7 +37862,7 @@
           <p:cNvPr id="25" name="Slide Number Placeholder 0">
             <a:extLst xmlns:a="http://schemas.openxmlformats.org/drawingml/2006/main">
               <a:ext uri="{FF2B5EF4-FFF2-40B4-BE49-F238E27FC236}">
-                <a16:creationId xmlns:a16="http://schemas.microsoft.com/office/drawing/2014/main" id="{5F7B92B7-3C3F-46BF-8AC5-6DB424868814}"/>
+                <a16:creationId xmlns:a16="http://schemas.microsoft.com/office/drawing/2014/main" id="{A266878F-69F4-4EC7-8EC6-F2A8B1B35BEB}"/>
               </a:ext>
             </a:extLst>
           </p:cNvPr>
@@ -36739,7 +37912,7 @@
     </p:spTree>
     <p:extLst>
       <p:ext uri="{BB962C8B-B14F-4D97-AF65-F5344CB8AC3E}">
-        <p14:creationId xmlns:p14="http://schemas.microsoft.com/office/powerpoint/2010/main" val="518876363"/>
+        <p14:creationId xmlns:p14="http://schemas.microsoft.com/office/powerpoint/2010/main" val="849045431"/>
       </p:ext>
     </p:extLst>
   </p:cSld>
